--- a/papers/unified-report/slides/safety_guard_benchmark_deck.pptx
+++ b/papers/unified-report/slides/safety_guard_benchmark_deck.pptx
@@ -643,6 +643,47 @@
               <a:t>resample bootstrap over evaluation row families and training seeds.</a:t>
             </a:r>
           </a:p>
+          <a:p/>
+          <a:p>
+            <a:r>
+              <a:t>Three terms on this slide, in plain words, in case the room is not a stats room. LCB is a</a:t>
+            </a:r>
+          </a:p>
+          <a:p>
+            <a:r>
+              <a:t>one-sided interval end: "+0.174, LCB +0.129" means the estimate is +0.174 and it stayed</a:t>
+            </a:r>
+          </a:p>
+          <a:p>
+            <a:r>
+              <a:t>above +0.129 in 97.5% of the redraws, so "LCB &gt; 0" demands that even the pessimistic end</a:t>
+            </a:r>
+          </a:p>
+          <a:p>
+            <a:r>
+              <a:t>still be a gain. A NON-INFERIORITY MARGIN is how much you agreed IN ADVANCE to lose on one</a:t>
+            </a:r>
+          </a:p>
+          <a:p>
+            <a:r>
+              <a:t>axis to win on another — here −0.02 — which is stricter than "did it get worse?", because</a:t>
+            </a:r>
+          </a:p>
+          <a:p>
+            <a:r>
+              <a:t>a noisy result fails it rather than passing by default. A BONFERRONI SPLIT means two</a:t>
+            </a:r>
+          </a:p>
+          <a:p>
+            <a:r>
+              <a:t>questions each get half the error budget (0.025 apiece), so asking two things cannot</a:t>
+            </a:r>
+          </a:p>
+          <a:p>
+            <a:r>
+              <a:t>double your chance of a lucky answer.</a:t>
+            </a:r>
+          </a:p>
         </p:txBody>
       </p:sp>
       <p:sp>
@@ -1199,17 +1240,53 @@
           </a:p>
           <a:p>
             <a:r>
-              <a:t>so we report it beside the mortgage numbers and never pool them. Note the reframe: an</a:t>
-            </a:r>
-          </a:p>
-          <a:p>
-            <a:r>
-              <a:t>earlier draft said the top two were "unresolved at this sample size." That was wrong. It</a:t>
-            </a:r>
-          </a:p>
-          <a:p>
-            <a:r>
-              <a:t>was an unrun analysis, not a sample-size limit; the paired test resolves health.</a:t>
+              <a:t>so we report it beside the mortgage numbers and never pool them.</a:t>
+            </a:r>
+          </a:p>
+          <a:p/>
+          <a:p>
+            <a:r>
+              <a:t>Be careful with the word "resolves" here; an earlier draft of this deck overclaimed it.</a:t>
+            </a:r>
+          </a:p>
+          <a:p>
+            <a:r>
+              <a:t>The pairing is a real gain — an earlier draft called the top two "unresolved at this</a:t>
+            </a:r>
+          </a:p>
+          <a:p>
+            <a:r>
+              <a:t>sample size," which was wrong, because that was an unrun analysis rather than a</a:t>
+            </a:r>
+          </a:p>
+          <a:p>
+            <a:r>
+              <a:t>sample-size limit. But the paired result is thinner than it first looks: FOUR paired</a:t>
+            </a:r>
+          </a:p>
+          <a:p>
+            <a:r>
+              <a:t>comparisons are reported (overall plus three verticals) with NO multiplicity adjustment,</a:t>
+            </a:r>
+          </a:p>
+          <a:p>
+            <a:r>
+              <a:t>and the health interval clears zero by only +0.0026 at its lower end. Under a Bonferroni</a:t>
+            </a:r>
+          </a:p>
+          <a:p>
+            <a:r>
+              <a:t>split across the three verticals it would not clear. So health is the one vertical where</a:t>
+            </a:r>
+          </a:p>
+          <a:p>
+            <a:r>
+              <a:t>the data LEAN against a tie — worth a targeted replication, not a resolved ranking. If</a:t>
+            </a:r>
+          </a:p>
+          <a:p>
+            <a:r>
+              <a:t>you are asked to rank SmolLM3 against Qwen3 on this evidence, decline.</a:t>
             </a:r>
           </a:p>
         </p:txBody>
@@ -1567,12 +1644,22 @@
           <a:p/>
           <a:p>
             <a:r>
-              <a:t>Caveat to state out loud if asked: transfer recall does rise (51.7% -&gt; 58.1%), but at</a:t>
-            </a:r>
-          </a:p>
-          <a:p>
-            <a:r>
-              <a:t>roughly double the false-alarm rate, so it is not an iso-FPR comparison.</a:t>
+              <a:t>If someone objects that transfer recall does rise (51.7% -&gt; 58.1%), that is the right</a:t>
+            </a:r>
+          </a:p>
+          <a:p>
+            <a:r>
+              <a:t>question and the answer is on slide 7: the rise is bought with alarms. Equalize the</a:t>
+            </a:r>
+          </a:p>
+          <a:p>
+            <a:r>
+              <a:t>alarm budget and it reverses to 21.7% on all four checkpoints. Do not concede the</a:t>
+            </a:r>
+          </a:p>
+          <a:p>
+            <a:r>
+              <a:t>point as a caveat — it is measured, and it is Table 4.</a:t>
             </a:r>
           </a:p>
         </p:txBody>
@@ -2037,32 +2124,105 @@
           <a:lstStyle/>
           <a:p>
             <a:r>
-              <a:t>Rethresholding each tuned guard so its transfer false-alarm rate matches its own base</a:t>
-            </a:r>
-          </a:p>
-          <a:p>
-            <a:r>
-              <a:t>reverses the sign of the recall change on three of the four checkpoints, in both</a:t>
-            </a:r>
-          </a:p>
-          <a:p>
-            <a:r>
-              <a:t>thresholding reconstructions we tried. We report that as a DIRECTION, not a locked row —</a:t>
-            </a:r>
-          </a:p>
-          <a:p>
-            <a:r>
-              <a:t>reproducing the operating point exactly requires the lock-pinned analysis environment,</a:t>
-            </a:r>
-          </a:p>
-          <a:p>
-            <a:r>
-              <a:t>and adding a matched-FPR row is a stated next step. It cuts the same way as the rest of</a:t>
-            </a:r>
-          </a:p>
-          <a:p>
-            <a:r>
-              <a:t>Act I: against the tuned guard.</a:t>
+              <a:t>The lower block of the chart is the fair comparison, and it is the one to spend time on.</a:t>
+            </a:r>
+          </a:p>
+          <a:p>
+            <a:r>
+              <a:t>Recall measured at unequal false-alarm rates is not a comparison of discriminative power,</a:t>
+            </a:r>
+          </a:p>
+          <a:p>
+            <a:r>
+              <a:t>so we rethreshold each SFT seed to its OWN base's pooled transfer false-alarm rate (the</a:t>
+            </a:r>
+          </a:p>
+          <a:p>
+            <a:r>
+              <a:t>budget column of report Table 4) and re-read the same rows. The apparent gain does not</a:t>
+            </a:r>
+          </a:p>
+          <a:p>
+            <a:r>
+              <a:t>merely shrink — it reverses, on all four checkpoints and on both instruments: transfer</a:t>
+            </a:r>
+          </a:p>
+          <a:p>
+            <a:r>
+              <a:t>recall 0.517 -&gt; 0.217, HarmBench recall 0.780 -&gt; 0.203. At an equal budget the tuned</a:t>
+            </a:r>
+          </a:p>
+          <a:p>
+            <a:r>
+              <a:t>guard catches LESS THAN HALF of what its own untuned base catches off-source.</a:t>
+            </a:r>
+          </a:p>
+          <a:p/>
+          <a:p>
+            <a:r>
+              <a:t>Two things to have ready. It needs no GPU and no pinned environment — matching false-alarm</a:t>
+            </a:r>
+          </a:p>
+          <a:p>
+            <a:r>
+              <a:t>rates is ranking arithmetic on the same committed score_raw/gold columns — so it is</a:t>
+            </a:r>
+          </a:p>
+          <a:p>
+            <a:r>
+              <a:t>regenerated and byte-checked by `make reproduce` like any other covered artifact. And the</a:t>
+            </a:r>
+          </a:p>
+          <a:p>
+            <a:r>
+              <a:t>direction is stable across the three quantile conventions we tried (panel mean -0.300 to</a:t>
+            </a:r>
+          </a:p>
+          <a:p>
+            <a:r>
+              <a:t>-0.290), so it is not an artifact of one tie-breaking rule.</a:t>
+            </a:r>
+          </a:p>
+          <a:p/>
+          <a:p>
+            <a:r>
+              <a:t>If asked why the paper reports both rows: Table 3 is what a practitioner who calibrated</a:t>
+            </a:r>
+          </a:p>
+          <a:p>
+            <a:r>
+              <a:t>each guard separately would actually deploy, and Table 4 is what the comparison means.</a:t>
+            </a:r>
+          </a:p>
+          <a:p>
+            <a:r>
+              <a:t>Earlier drafts called the matched version a "direction" that needed the pinned</a:t>
+            </a:r>
+          </a:p>
+          <a:p>
+            <a:r>
+              <a:t>environment. That was wrong on both counts, and the measured result is stronger than the</a:t>
+            </a:r>
+          </a:p>
+          <a:p>
+            <a:r>
+              <a:t>hedge it replaced.</a:t>
+            </a:r>
+          </a:p>
+          <a:p/>
+          <a:p>
+            <a:r>
+              <a:t>Note also that the HarmBench drop needs no threshold caveat at all: the tuned guard</a:t>
+            </a:r>
+          </a:p>
+          <a:p>
+            <a:r>
+              <a:t>catches less while alarming more, so it is dominated — worse on both axes at once, not</a:t>
+            </a:r>
+          </a:p>
+          <a:p>
+            <a:r>
+              <a:t>traded off.</a:t>
             </a:r>
           </a:p>
           <a:p/>
@@ -2313,6 +2473,62 @@
           <a:p>
             <a:r>
               <a:t>base. Mitigation, not restoration.</a:t>
+            </a:r>
+          </a:p>
+          <a:p/>
+          <a:p>
+            <a:r>
+              <a:t>One more thing this control accidentally bought us, and it bounds several numbers in this</a:t>
+            </a:r>
+          </a:p>
+          <a:p>
+            <a:r>
+              <a:t>deck. Because β = 0 IS the Act I recipe — same manifest, same seeds, same scorer, only a</a:t>
+            </a:r>
+          </a:p>
+          <a:p>
+            <a:r>
+              <a:t>different execution environment — this arm is effectively a REPEAT of Act I. It does not</a:t>
+            </a:r>
+          </a:p>
+          <a:p>
+            <a:r>
+              <a:t>land on the same number: transfer macro-AP differs by 0.014 / 0.009 / 0.009 / 0.029, a</a:t>
+            </a:r>
+          </a:p>
+          <a:p>
+            <a:r>
+              <a:t>mean of 0.015 and a worst case of 0.029. That is a noise floor the report now states.</a:t>
+            </a:r>
+          </a:p>
+          <a:p>
+            <a:r>
+              <a:t>Effects at or below it should be read as unresolved — composition's +0.017 edge over the</a:t>
+            </a:r>
+          </a:p>
+          <a:p>
+            <a:r>
+              <a:t>BASE, and KL β=1.0's +0.004 for SmolLM2. The big effects are safe: +0.32 represented, the</a:t>
+            </a:r>
+          </a:p>
+          <a:p>
+            <a:r>
+              <a:t>-0.300 matched-budget collapse, composition's +0.076 over SFT. The bootstrap intervals</a:t>
+            </a:r>
+          </a:p>
+          <a:p>
+            <a:r>
+              <a:t>resample rows and seeds; they do NOT capture this environment term, so they are narrower</a:t>
+            </a:r>
+          </a:p>
+          <a:p>
+            <a:r>
+              <a:t>than a full reproduction would be. Volunteer this if someone asks how repeatable the</a:t>
+            </a:r>
+          </a:p>
+          <a:p>
+            <a:r>
+              <a:t>pipeline is — it is a stronger answer than a confidence interval.</a:t>
             </a:r>
           </a:p>
         </p:txBody>
@@ -6027,7 +6243,7 @@
                 </a:solidFill>
                 <a:latin typeface="Arial"/>
               </a:rPr>
-              <a:t>github.com/rrahimi-uci/guard-ranking-fragility</a:t>
+              <a:t>github.com/rrahimi-uci/safety-guard-dynamics</a:t>
             </a:r>
           </a:p>
           <a:p>
@@ -6049,7 +6265,7 @@
                 </a:solidFill>
                 <a:latin typeface="Arial"/>
               </a:rPr>
-              <a:t>make reproduce  ·  frozen benchmark v1_hmda2022</a:t>
+              <a:t>make reproduce (covered tables)  ·  frozen benchmark v1_hmda2022</a:t>
             </a:r>
           </a:p>
         </p:txBody>
@@ -6174,7 +6390,7 @@
                 </a:solidFill>
                 <a:latin typeface="Arial"/>
               </a:rPr>
-              <a:t>github.com/rrahimi-uci/guard-ranking-fragility</a:t>
+              <a:t>github.com/rrahimi-uci/safety-guard-dynamics</a:t>
             </a:r>
           </a:p>
         </p:txBody>
@@ -6912,7 +7128,7 @@
                 </a:solidFill>
                 <a:latin typeface="Arial"/>
               </a:rPr>
-              <a:t>github.com/rrahimi-uci/guard-ranking-fragility</a:t>
+              <a:t>github.com/rrahimi-uci/safety-guard-dynamics</a:t>
             </a:r>
           </a:p>
         </p:txBody>
@@ -7603,7 +7819,7 @@
                 </a:solidFill>
                 <a:latin typeface="Arial"/>
               </a:rPr>
-              <a:t>github.com/rrahimi-uci/guard-ranking-fragility</a:t>
+              <a:t>github.com/rrahimi-uci/safety-guard-dynamics</a:t>
             </a:r>
           </a:p>
         </p:txBody>
@@ -8726,7 +8942,7 @@
                 </a:solidFill>
                 <a:latin typeface="Arial"/>
               </a:rPr>
-              <a:t>github.com/rrahimi-uci/guard-ranking-fragility</a:t>
+              <a:t>github.com/rrahimi-uci/safety-guard-dynamics</a:t>
             </a:r>
           </a:p>
         </p:txBody>
@@ -10098,7 +10314,7 @@
                 </a:solidFill>
                 <a:latin typeface="Arial"/>
               </a:rPr>
-              <a:t>github.com/rrahimi-uci/guard-ranking-fragility</a:t>
+              <a:t>github.com/rrahimi-uci/safety-guard-dynamics</a:t>
             </a:r>
           </a:p>
         </p:txBody>
@@ -11442,7 +11658,7 @@
                 </a:solidFill>
                 <a:latin typeface="Arial"/>
               </a:rPr>
-              <a:t>github.com/rrahimi-uci/guard-ranking-fragility</a:t>
+              <a:t>github.com/rrahimi-uci/safety-guard-dynamics</a:t>
             </a:r>
           </a:p>
         </p:txBody>
@@ -11704,7 +11920,7 @@
         <p:spPr>
           <a:xfrm>
             <a:off x="566928" y="4645152"/>
-            <a:ext cx="5364327" cy="1133856"/>
+            <a:ext cx="5364327" cy="1316736"/>
           </a:xfrm>
           <a:prstGeom prst="roundRect">
             <a:avLst>
@@ -11791,7 +12007,7 @@
         <p:spPr>
           <a:xfrm>
             <a:off x="566928" y="4645152"/>
-            <a:ext cx="50292" cy="1133856"/>
+            <a:ext cx="50292" cy="1316736"/>
           </a:xfrm>
           <a:prstGeom prst="rect">
             <a:avLst/>
@@ -11904,7 +12120,7 @@
         <p:spPr>
           <a:xfrm>
             <a:off x="6260439" y="4645152"/>
-            <a:ext cx="5364327" cy="1133856"/>
+            <a:ext cx="5364327" cy="1316736"/>
           </a:xfrm>
           <a:prstGeom prst="roundRect">
             <a:avLst>
@@ -11977,7 +12193,7 @@
                 </a:solidFill>
                 <a:latin typeface="Arial"/>
               </a:rPr>
-              <a:t>2,275 expert-annotated rows across finance / health / law. Ranking is not monotone in model size, and a paired test resolves what marginal CIs cannot: SmolLM3 − Qwen3 is +0.017 on health (CI excludes zero), a tie on finance and law.</a:t>
+              <a:t>2,275 expert-annotated rows across finance / health / law. Ranking is not monotone in model size. The paired test leans against a tie on health (+0.017) — but four unadjusted comparisons, clearing zero by +0.0026: a direction, not a resolved ranking. Finance and law: ties.</a:t>
             </a:r>
           </a:p>
         </p:txBody>
@@ -11991,7 +12207,7 @@
         <p:spPr>
           <a:xfrm>
             <a:off x="6260439" y="4645152"/>
-            <a:ext cx="50292" cy="1133856"/>
+            <a:ext cx="50292" cy="1316736"/>
           </a:xfrm>
           <a:prstGeom prst="rect">
             <a:avLst/>
@@ -12146,7 +12362,7 @@
                 </a:solidFill>
                 <a:latin typeface="Arial"/>
               </a:rPr>
-              <a:t>github.com/rrahimi-uci/guard-ranking-fragility</a:t>
+              <a:t>github.com/rrahimi-uci/safety-guard-dynamics</a:t>
             </a:r>
           </a:p>
         </p:txBody>
@@ -13200,7 +13416,7 @@
                 </a:solidFill>
                 <a:latin typeface="Arial"/>
               </a:rPr>
-              <a:t>github.com/rrahimi-uci/guard-ranking-fragility</a:t>
+              <a:t>github.com/rrahimi-uci/safety-guard-dynamics</a:t>
             </a:r>
           </a:p>
         </p:txBody>
@@ -14097,7 +14313,7 @@
                 </a:solidFill>
                 <a:latin typeface="Arial"/>
               </a:rPr>
-              <a:t>Always compare a tune to its own base.</a:t>
+              <a:t>Always compare a tune to its own base — at a matched false-alarm rate.</a:t>
             </a:r>
             <a:r>
               <a:rPr sz="1150" b="0" i="0">
@@ -14106,7 +14322,7 @@
                 </a:solidFill>
                 <a:latin typeface="Arial"/>
               </a:rPr>
-              <a:t>  A delta against other models hides the transfer cost.</a:t>
+              <a:t>  A delta against other models hides the transfer cost; a recall compared at unequal alarm rates hides its sign.</a:t>
             </a:r>
           </a:p>
           <a:p>
@@ -14522,7 +14738,7 @@
                 </a:solidFill>
                 <a:latin typeface="Arial"/>
               </a:rPr>
-              <a:t>github.com/rrahimi-uci/guard-ranking-fragility</a:t>
+              <a:t>github.com/rrahimi-uci/safety-guard-dynamics</a:t>
             </a:r>
           </a:p>
         </p:txBody>
@@ -15569,7 +15785,7 @@
                 </a:solidFill>
                 <a:latin typeface="Arial"/>
               </a:rPr>
-              <a:t>github.com/rrahimi-uci/guard-ranking-fragility</a:t>
+              <a:t>github.com/rrahimi-uci/safety-guard-dynamics</a:t>
             </a:r>
           </a:p>
         </p:txBody>
@@ -15769,8 +15985,8 @@
         </p:blipFill>
         <p:spPr>
           <a:xfrm>
-            <a:off x="870263" y="1591056"/>
-            <a:ext cx="10451169" cy="3218688"/>
+            <a:off x="1082200" y="1591056"/>
+            <a:ext cx="10027294" cy="3218688"/>
           </a:xfrm>
           <a:prstGeom prst="rect">
             <a:avLst/>
@@ -16105,7 +16321,7 @@
                 </a:solidFill>
                 <a:latin typeface="Arial"/>
               </a:rPr>
-              <a:t>Coded as a proxy, the fair-lending violation ranks below the benign median for all four; named outright, three of four rank it above nearly all.</a:t>
+              <a:t>Coded as a proxy, the fair-lending violation ranks below the benign median for all four; named outright, three of four rank it above nearly all — two different rows, not a controlled pair.</a:t>
             </a:r>
           </a:p>
         </p:txBody>
@@ -16275,7 +16491,7 @@
                 </a:solidFill>
                 <a:latin typeface="Arial"/>
               </a:rPr>
-              <a:t>github.com/rrahimi-uci/guard-ranking-fragility</a:t>
+              <a:t>github.com/rrahimi-uci/safety-guard-dynamics</a:t>
             </a:r>
           </a:p>
         </p:txBody>
@@ -17449,7 +17665,7 @@
                 </a:solidFill>
                 <a:latin typeface="Arial"/>
               </a:rPr>
-              <a:t>github.com/rrahimi-uci/guard-ranking-fragility</a:t>
+              <a:t>github.com/rrahimi-uci/safety-guard-dynamics</a:t>
             </a:r>
           </a:p>
         </p:txBody>
@@ -18122,7 +18338,7 @@
                 </a:solidFill>
                 <a:latin typeface="Arial"/>
               </a:rPr>
-              <a:t>github.com/rrahimi-uci/guard-ranking-fragility</a:t>
+              <a:t>github.com/rrahimi-uci/safety-guard-dynamics</a:t>
             </a:r>
           </a:p>
         </p:txBody>
@@ -19211,7 +19427,7 @@
                 </a:solidFill>
                 <a:latin typeface="Arial"/>
               </a:rPr>
-              <a:t>github.com/rrahimi-uci/guard-ranking-fragility</a:t>
+              <a:t>github.com/rrahimi-uci/safety-guard-dynamics</a:t>
             </a:r>
           </a:p>
         </p:txBody>
@@ -19391,7 +19607,7 @@
                 </a:solidFill>
                 <a:latin typeface="Arial"/>
               </a:rPr>
-              <a:t>Thresholds chosen on a separate calibration split for a 5% false-positive target, then read off the real traffic</a:t>
+              <a:t>Upper: each guard at its own 5%-FPR calibrated threshold.  Lower: the same rows re-read at an equal false-alarm budget</a:t>
             </a:r>
           </a:p>
         </p:txBody>
@@ -19456,8 +19672,8 @@
         </p:blipFill>
         <p:spPr>
           <a:xfrm>
-            <a:off x="566928" y="1664208"/>
-            <a:ext cx="7107936" cy="3877056"/>
+            <a:off x="566928" y="1699203"/>
+            <a:ext cx="7360920" cy="3807066"/>
           </a:xfrm>
           <a:prstGeom prst="rect">
             <a:avLst/>
@@ -19644,7 +19860,7 @@
                 </a:solidFill>
                 <a:latin typeface="Arial"/>
               </a:rPr>
-              <a:t>Not an iso-FPR win.</a:t>
+              <a:t>At an equal alarm budget, the gain reverses.</a:t>
             </a:r>
             <a:r>
               <a:rPr sz="1150" b="0" i="0">
@@ -19653,7 +19869,7 @@
                 </a:solidFill>
                 <a:latin typeface="Arial"/>
               </a:rPr>
-              <a:t>  Transfer recall rises +6.4 pts, but at 15.5% macro-FPR against the base's 8.1% — the tuned guard buys recall by alarming twice as often.</a:t>
+              <a:t>  The +6.4 pt rise is realized at 15.5% macro-FPR against the base's 8.1%. Match the budget and transfer recall goes 51.7% → 21.7%, HarmBench 78.0% → 20.3% — worse on all four.</a:t>
             </a:r>
           </a:p>
           <a:p>
@@ -19858,7 +20074,7 @@
                 </a:solidFill>
                 <a:latin typeface="Arial"/>
               </a:rPr>
-              <a:t>github.com/rrahimi-uci/guard-ranking-fragility</a:t>
+              <a:t>github.com/rrahimi-uci/safety-guard-dynamics</a:t>
             </a:r>
           </a:p>
         </p:txBody>
@@ -21001,7 +21217,7 @@
                 </a:solidFill>
                 <a:latin typeface="Arial"/>
               </a:rPr>
-              <a:t>github.com/rrahimi-uci/guard-ranking-fragility</a:t>
+              <a:t>github.com/rrahimi-uci/safety-guard-dynamics</a:t>
             </a:r>
           </a:p>
         </p:txBody>

--- a/papers/unified-report/slides/safety_guard_benchmark_deck.pptx
+++ b/papers/unified-report/slides/safety_guard_benchmark_deck.pptx
@@ -6176,7 +6176,7 @@
                 </a:solidFill>
                 <a:latin typeface="Georgia"/>
               </a:rPr>
-              <a:t>Reza Rahimi</a:t>
+              <a:t>Reza Rahimi, PhD</a:t>
             </a:r>
           </a:p>
           <a:p>

--- a/papers/unified-report/slides/safety_guard_benchmark_deck.pptx
+++ b/papers/unified-report/slides/safety_guard_benchmark_deck.pptx
@@ -22,6 +22,7 @@
     <p:sldId id="270" r:id="rId22"/>
     <p:sldId id="271" r:id="rId23"/>
     <p:sldId id="272" r:id="rId24"/>
+    <p:sldId id="273" r:id="rId25"/>
   </p:sldIdLst>
   <p:sldSz cx="12191695" cy="6858000" type="screen4x3"/>
   <p:notesSz cx="6858000" cy="9144000"/>
@@ -1543,6 +1544,160 @@
           <a:p>
             <a:r>
               <a:t>prospectively locked evaluation on genuinely uninspected data.</a:t>
+            </a:r>
+          </a:p>
+        </p:txBody>
+      </p:sp>
+      <p:sp>
+        <p:nvSpPr>
+          <p:cNvPr id="4" name="Slide Number Placeholder 3"/>
+          <p:cNvSpPr>
+            <a:spLocks noGrp="1"/>
+          </p:cNvSpPr>
+          <p:nvPr>
+            <p:ph type="sldNum" idx="5" sz="quarter"/>
+          </p:nvPr>
+        </p:nvSpPr>
+        <p:spPr/>
+      </p:sp>
+    </p:spTree>
+  </p:cSld>
+  <p:clrMapOvr>
+    <a:masterClrMapping/>
+  </p:clrMapOvr>
+</p:notes>
+</file>
+
+<file path=ppt/notesSlides/notesSlide18.xml><?xml version="1.0" encoding="utf-8"?>
+<p:notes xmlns:a="http://schemas.openxmlformats.org/drawingml/2006/main" xmlns:p="http://schemas.openxmlformats.org/presentationml/2006/main" xmlns:r="http://schemas.openxmlformats.org/officeDocument/2006/relationships">
+  <p:cSld>
+    <p:spTree>
+      <p:nvGrpSpPr>
+        <p:cNvPr id="1" name=""/>
+        <p:cNvGrpSpPr/>
+        <p:nvPr/>
+      </p:nvGrpSpPr>
+      <p:grpSpPr>
+        <a:xfrm>
+          <a:off x="0" y="0"/>
+          <a:ext cx="0" cy="0"/>
+          <a:chOff x="0" y="0"/>
+          <a:chExt cx="0" cy="0"/>
+        </a:xfrm>
+      </p:grpSpPr>
+      <p:sp>
+        <p:nvSpPr>
+          <p:cNvPr id="2" name="Slide Image Placeholder 1"/>
+          <p:cNvSpPr>
+            <a:spLocks noGrp="1"/>
+          </p:cNvSpPr>
+          <p:nvPr>
+            <p:ph type="sldImg" idx="2"/>
+          </p:nvPr>
+        </p:nvSpPr>
+        <p:spPr/>
+      </p:sp>
+      <p:sp>
+        <p:nvSpPr>
+          <p:cNvPr id="3" name="Notes Placeholder 2"/>
+          <p:cNvSpPr>
+            <a:spLocks noGrp="1"/>
+          </p:cNvSpPr>
+          <p:nvPr>
+            <p:ph type="body" idx="3" sz="quarter"/>
+          </p:nvPr>
+        </p:nvSpPr>
+        <p:spPr/>
+        <p:txBody>
+          <a:bodyPr/>
+          <a:lstStyle/>
+          <a:p>
+            <a:r>
+              <a:t>Close here, not on the decision guide. Two minutes, and do not read the columns aloud.</a:t>
+            </a:r>
+          </a:p>
+          <a:p/>
+          <a:p>
+            <a:r>
+              <a:t>The left column is the answer to "what did you actually do." Lead with the paired estimand,</a:t>
+            </a:r>
+          </a:p>
+          <a:p>
+            <a:r>
+              <a:t>because it is the cheap methodological point that costs a reader nothing to adopt and changes</a:t>
+            </a:r>
+          </a:p>
+          <a:p>
+            <a:r>
+              <a:t>what their own numbers mean. Then the matched-alarm-budget read: that is the result to be</a:t>
+            </a:r>
+          </a:p>
+          <a:p>
+            <a:r>
+              <a:t>remembered, and the reason to say it out loud is that it is nearly free and it reverses a</a:t>
+            </a:r>
+          </a:p>
+          <a:p>
+            <a:r>
+              <a:t>headline. If you only get one sentence, use that one.</a:t>
+            </a:r>
+          </a:p>
+          <a:p/>
+          <a:p>
+            <a:r>
+              <a:t>The third bullet is the one that earns trust in a research audience. We preregistered a</a:t>
+            </a:r>
+          </a:p>
+          <a:p>
+            <a:r>
+              <a:t>criterion and failed it. We built a fairness probe and it did not survive its own audit. We</a:t>
+            </a:r>
+          </a:p>
+          <a:p>
+            <a:r>
+              <a:t>found a reproduction noise floor by accident and then used it against our own small effects.</a:t>
+            </a:r>
+          </a:p>
+          <a:p>
+            <a:r>
+              <a:t>Say plainly that the noise floor is a tooling problem before it is a science problem.</a:t>
+            </a:r>
+          </a:p>
+          <a:p/>
+          <a:p>
+            <a:r>
+              <a:t>On the right, items 1 and 2 are the honest ceiling of this work: retrospective on an inspected</a:t>
+            </a:r>
+          </a:p>
+          <a:p>
+            <a:r>
+              <a:t>manifest, and an environment term the bootstrap intervals do not capture. Item 3 is the cheapest</a:t>
+            </a:r>
+          </a:p>
+          <a:p>
+            <a:r>
+              <a:t>real science available -- the per-source decomposition runs on committed scores at zero cost and</a:t>
+            </a:r>
+          </a:p>
+          <a:p>
+            <a:r>
+              <a:t>decides whether the next experiment should add training SOURCES or wider CONSTRUCT coverage.</a:t>
+            </a:r>
+          </a:p>
+          <a:p/>
+          <a:p>
+            <a:r>
+              <a:t>If asked "so what would you deploy": nothing here, yet. That is the correct answer and it is not</a:t>
+            </a:r>
+          </a:p>
+          <a:p>
+            <a:r>
+              <a:t>evasive -- the report measures a workflow for choosing guards, and every arm still fails at least</a:t>
+            </a:r>
+          </a:p>
+          <a:p>
+            <a:r>
+              <a:t>one gate the workflow itself defines.</a:t>
             </a:r>
           </a:p>
         </p:txBody>
@@ -14590,6 +14745,892 @@
           </a:prstGeom>
           <a:solidFill>
             <a:srgbClr val="5A6B7C"/>
+          </a:solidFill>
+          <a:ln>
+            <a:noFill/>
+          </a:ln>
+          <a:effectLst/>
+        </p:spPr>
+        <p:style>
+          <a:lnRef idx="1">
+            <a:schemeClr val="accent1"/>
+          </a:lnRef>
+          <a:fillRef idx="3">
+            <a:schemeClr val="accent1"/>
+          </a:fillRef>
+          <a:effectRef idx="2">
+            <a:schemeClr val="accent1"/>
+          </a:effectRef>
+          <a:fontRef idx="minor">
+            <a:schemeClr val="lt1"/>
+          </a:fontRef>
+        </p:style>
+        <p:txBody>
+          <a:bodyPr rtlCol="0" anchor="ctr" wrap="square"/>
+          <a:lstStyle/>
+          <a:p>
+            <a:pPr algn="ctr"/>
+          </a:p>
+        </p:txBody>
+      </p:sp>
+    </p:spTree>
+  </p:cSld>
+  <p:clrMapOvr>
+    <a:masterClrMapping/>
+  </p:clrMapOvr>
+</p:sld>
+</file>
+
+<file path=ppt/slides/slide18.xml><?xml version="1.0" encoding="utf-8"?>
+<p:sld xmlns:a="http://schemas.openxmlformats.org/drawingml/2006/main" xmlns:p="http://schemas.openxmlformats.org/presentationml/2006/main" xmlns:r="http://schemas.openxmlformats.org/officeDocument/2006/relationships">
+  <p:cSld>
+    <p:spTree>
+      <p:nvGrpSpPr>
+        <p:cNvPr id="1" name=""/>
+        <p:cNvGrpSpPr/>
+        <p:nvPr/>
+      </p:nvGrpSpPr>
+      <p:grpSpPr/>
+      <p:sp>
+        <p:nvSpPr>
+          <p:cNvPr id="2" name="Rectangle 1"/>
+          <p:cNvSpPr/>
+          <p:nvPr/>
+        </p:nvSpPr>
+        <p:spPr>
+          <a:xfrm>
+            <a:off x="0" y="0"/>
+            <a:ext cx="12191695" cy="56692"/>
+          </a:xfrm>
+          <a:prstGeom prst="rect">
+            <a:avLst/>
+          </a:prstGeom>
+          <a:solidFill>
+            <a:srgbClr val="A02128"/>
+          </a:solidFill>
+          <a:ln>
+            <a:noFill/>
+          </a:ln>
+          <a:effectLst/>
+        </p:spPr>
+        <p:style>
+          <a:lnRef idx="1">
+            <a:schemeClr val="accent1"/>
+          </a:lnRef>
+          <a:fillRef idx="3">
+            <a:schemeClr val="accent1"/>
+          </a:fillRef>
+          <a:effectRef idx="2">
+            <a:schemeClr val="accent1"/>
+          </a:effectRef>
+          <a:fontRef idx="minor">
+            <a:schemeClr val="lt1"/>
+          </a:fontRef>
+        </p:style>
+        <p:txBody>
+          <a:bodyPr rtlCol="0" anchor="ctr" wrap="square"/>
+          <a:lstStyle/>
+          <a:p>
+            <a:pPr algn="ctr"/>
+          </a:p>
+        </p:txBody>
+      </p:sp>
+      <p:sp>
+        <p:nvSpPr>
+          <p:cNvPr id="3" name="TextBox 2"/>
+          <p:cNvSpPr txBox="1"/>
+          <p:nvPr/>
+        </p:nvSpPr>
+        <p:spPr>
+          <a:xfrm>
+            <a:off x="566928" y="6382512"/>
+            <a:ext cx="8229600" cy="256032"/>
+          </a:xfrm>
+          <a:prstGeom prst="rect">
+            <a:avLst/>
+          </a:prstGeom>
+          <a:noFill/>
+        </p:spPr>
+        <p:txBody>
+          <a:bodyPr wrap="square" anchor="t" lIns="0" rIns="0" tIns="0" bIns="0">
+            <a:spAutoFit/>
+          </a:bodyPr>
+          <a:lstStyle/>
+          <a:p>
+            <a:pPr algn="l">
+              <a:lnSpc>
+                <a:spcPct val="116000"/>
+              </a:lnSpc>
+              <a:spcBef>
+                <a:spcPts val="0"/>
+              </a:spcBef>
+              <a:spcAft>
+                <a:spcPts val="0"/>
+              </a:spcAft>
+            </a:pPr>
+            <a:r>
+              <a:rPr sz="950" b="0" i="0">
+                <a:solidFill>
+                  <a:srgbClr val="8A97A5"/>
+                </a:solidFill>
+                <a:latin typeface="Arial"/>
+              </a:rPr>
+              <a:t>The Safety-Guard Benchmark Chooses the Winner</a:t>
+            </a:r>
+            <a:r>
+              <a:rPr sz="950" b="0" i="0">
+                <a:solidFill>
+                  <a:srgbClr val="D8DEE4"/>
+                </a:solidFill>
+                <a:latin typeface="Arial"/>
+              </a:rPr>
+              <a:t>     ·     </a:t>
+            </a:r>
+            <a:r>
+              <a:rPr sz="950" b="0" i="0">
+                <a:solidFill>
+                  <a:srgbClr val="8A97A5"/>
+                </a:solidFill>
+                <a:latin typeface="Arial"/>
+              </a:rPr>
+              <a:t>github.com/rrahimi-uci/safety-guard-dynamics</a:t>
+            </a:r>
+          </a:p>
+        </p:txBody>
+      </p:sp>
+      <p:sp>
+        <p:nvSpPr>
+          <p:cNvPr id="4" name="TextBox 3"/>
+          <p:cNvSpPr txBox="1"/>
+          <p:nvPr/>
+        </p:nvSpPr>
+        <p:spPr>
+          <a:xfrm>
+            <a:off x="10527487" y="6382512"/>
+            <a:ext cx="1097280" cy="256032"/>
+          </a:xfrm>
+          <a:prstGeom prst="rect">
+            <a:avLst/>
+          </a:prstGeom>
+          <a:noFill/>
+        </p:spPr>
+        <p:txBody>
+          <a:bodyPr wrap="square" anchor="t" lIns="0" rIns="0" tIns="0" bIns="0">
+            <a:spAutoFit/>
+          </a:bodyPr>
+          <a:lstStyle/>
+          <a:p>
+            <a:pPr algn="r">
+              <a:lnSpc>
+                <a:spcPct val="116000"/>
+              </a:lnSpc>
+              <a:spcBef>
+                <a:spcPts val="0"/>
+              </a:spcBef>
+              <a:spcAft>
+                <a:spcPts val="0"/>
+              </a:spcAft>
+            </a:pPr>
+            <a:r>
+              <a:rPr sz="1050" b="1" i="0" spc="60">
+                <a:solidFill>
+                  <a:srgbClr val="A02128"/>
+                </a:solidFill>
+                <a:latin typeface="Arial"/>
+              </a:rPr>
+              <a:t>17</a:t>
+            </a:r>
+          </a:p>
+        </p:txBody>
+      </p:sp>
+      <p:sp>
+        <p:nvSpPr>
+          <p:cNvPr id="5" name="TextBox 4"/>
+          <p:cNvSpPr txBox="1"/>
+          <p:nvPr/>
+        </p:nvSpPr>
+        <p:spPr>
+          <a:xfrm>
+            <a:off x="566928" y="365760"/>
+            <a:ext cx="11057839" cy="237744"/>
+          </a:xfrm>
+          <a:prstGeom prst="rect">
+            <a:avLst/>
+          </a:prstGeom>
+          <a:noFill/>
+        </p:spPr>
+        <p:txBody>
+          <a:bodyPr wrap="square" anchor="t" lIns="0" rIns="0" tIns="0" bIns="0">
+            <a:spAutoFit/>
+          </a:bodyPr>
+          <a:lstStyle/>
+          <a:p>
+            <a:pPr algn="l">
+              <a:lnSpc>
+                <a:spcPct val="116000"/>
+              </a:lnSpc>
+              <a:spcBef>
+                <a:spcPts val="0"/>
+              </a:spcBef>
+              <a:spcAft>
+                <a:spcPts val="0"/>
+              </a:spcAft>
+            </a:pPr>
+            <a:r>
+              <a:rPr sz="1050" b="1" i="0" spc="140">
+                <a:solidFill>
+                  <a:srgbClr val="A02128"/>
+                </a:solidFill>
+                <a:latin typeface="Arial"/>
+              </a:rPr>
+              <a:t>WHAT THIS CONTRIBUTES</a:t>
+            </a:r>
+          </a:p>
+        </p:txBody>
+      </p:sp>
+      <p:sp>
+        <p:nvSpPr>
+          <p:cNvPr id="6" name="TextBox 5"/>
+          <p:cNvSpPr txBox="1"/>
+          <p:nvPr/>
+        </p:nvSpPr>
+        <p:spPr>
+          <a:xfrm>
+            <a:off x="566928" y="676656"/>
+            <a:ext cx="11057839" cy="658368"/>
+          </a:xfrm>
+          <a:prstGeom prst="rect">
+            <a:avLst/>
+          </a:prstGeom>
+          <a:noFill/>
+        </p:spPr>
+        <p:txBody>
+          <a:bodyPr wrap="square" anchor="t" lIns="0" rIns="0" tIns="0" bIns="0">
+            <a:spAutoFit/>
+          </a:bodyPr>
+          <a:lstStyle/>
+          <a:p>
+            <a:pPr algn="l">
+              <a:lnSpc>
+                <a:spcPct val="100000"/>
+              </a:lnSpc>
+              <a:spcBef>
+                <a:spcPts val="0"/>
+              </a:spcBef>
+              <a:spcAft>
+                <a:spcPts val="0"/>
+              </a:spcAft>
+            </a:pPr>
+            <a:r>
+              <a:rPr sz="2700" b="1" i="0">
+                <a:solidFill>
+                  <a:srgbClr val="12263A"/>
+                </a:solidFill>
+                <a:latin typeface="Georgia"/>
+              </a:rPr>
+              <a:t>Four things we can defend, and what would make them evidence</a:t>
+            </a:r>
+          </a:p>
+        </p:txBody>
+      </p:sp>
+      <p:sp>
+        <p:nvSpPr>
+          <p:cNvPr id="7" name="Rectangle 6"/>
+          <p:cNvSpPr/>
+          <p:nvPr/>
+        </p:nvSpPr>
+        <p:spPr>
+          <a:xfrm>
+            <a:off x="566928" y="1444752"/>
+            <a:ext cx="11057839" cy="11430"/>
+          </a:xfrm>
+          <a:prstGeom prst="rect">
+            <a:avLst/>
+          </a:prstGeom>
+          <a:solidFill>
+            <a:srgbClr val="D8DEE4"/>
+          </a:solidFill>
+          <a:ln>
+            <a:noFill/>
+          </a:ln>
+          <a:effectLst/>
+        </p:spPr>
+        <p:style>
+          <a:lnRef idx="1">
+            <a:schemeClr val="accent1"/>
+          </a:lnRef>
+          <a:fillRef idx="3">
+            <a:schemeClr val="accent1"/>
+          </a:fillRef>
+          <a:effectRef idx="2">
+            <a:schemeClr val="accent1"/>
+          </a:effectRef>
+          <a:fontRef idx="minor">
+            <a:schemeClr val="lt1"/>
+          </a:fontRef>
+        </p:style>
+        <p:txBody>
+          <a:bodyPr rtlCol="0" anchor="ctr" wrap="square"/>
+          <a:lstStyle/>
+          <a:p>
+            <a:pPr algn="ctr"/>
+          </a:p>
+        </p:txBody>
+      </p:sp>
+      <p:sp>
+        <p:nvSpPr>
+          <p:cNvPr id="8" name="TextBox 7"/>
+          <p:cNvSpPr txBox="1"/>
+          <p:nvPr/>
+        </p:nvSpPr>
+        <p:spPr>
+          <a:xfrm>
+            <a:off x="566928" y="1627632"/>
+            <a:ext cx="5373471" cy="2834640"/>
+          </a:xfrm>
+          <a:prstGeom prst="rect">
+            <a:avLst/>
+          </a:prstGeom>
+          <a:noFill/>
+        </p:spPr>
+        <p:txBody>
+          <a:bodyPr wrap="square" anchor="t" lIns="0" rIns="0" tIns="0" bIns="0">
+            <a:spAutoFit/>
+          </a:bodyPr>
+          <a:lstStyle/>
+          <a:p>
+            <a:pPr algn="l">
+              <a:lnSpc>
+                <a:spcPct val="120000"/>
+              </a:lnSpc>
+              <a:spcBef>
+                <a:spcPts val="0"/>
+              </a:spcBef>
+              <a:spcAft>
+                <a:spcPts val="900"/>
+              </a:spcAft>
+            </a:pPr>
+            <a:r>
+              <a:rPr sz="1150" b="1" i="0">
+                <a:solidFill>
+                  <a:srgbClr val="A02128"/>
+                </a:solidFill>
+                <a:latin typeface="Arial"/>
+              </a:rPr>
+              <a:t>—  </a:t>
+            </a:r>
+            <a:r>
+              <a:rPr sz="1150" b="1" i="0">
+                <a:solidFill>
+                  <a:srgbClr val="12263A"/>
+                </a:solidFill>
+                <a:latin typeface="Arial"/>
+              </a:rPr>
+              <a:t>A paired, same-checkpoint estimand.</a:t>
+            </a:r>
+            <a:r>
+              <a:rPr sz="1150" b="0" i="0">
+                <a:solidFill>
+                  <a:srgbClr val="5A6B7C"/>
+                </a:solidFill>
+                <a:latin typeface="Arial"/>
+              </a:rPr>
+              <a:t>  Compare each guard only to its OWN base on identical rows, split by represented vs held-out. That is what turns a leaderboard delta into an attributable one — three results here exist only because of it.</a:t>
+            </a:r>
+          </a:p>
+          <a:p>
+            <a:pPr algn="l">
+              <a:lnSpc>
+                <a:spcPct val="120000"/>
+              </a:lnSpc>
+              <a:spcBef>
+                <a:spcPts val="0"/>
+              </a:spcBef>
+              <a:spcAft>
+                <a:spcPts val="900"/>
+              </a:spcAft>
+            </a:pPr>
+            <a:r>
+              <a:rPr sz="1150" b="1" i="0">
+                <a:solidFill>
+                  <a:srgbClr val="A02128"/>
+                </a:solidFill>
+                <a:latin typeface="Arial"/>
+              </a:rPr>
+              <a:t>—  </a:t>
+            </a:r>
+            <a:r>
+              <a:rPr sz="1150" b="1" i="0">
+                <a:solidFill>
+                  <a:srgbClr val="12263A"/>
+                </a:solidFill>
+                <a:latin typeface="Arial"/>
+              </a:rPr>
+              <a:t>The matched-alarm-budget read.</a:t>
+            </a:r>
+            <a:r>
+              <a:rPr sz="1150" b="0" i="0">
+                <a:solidFill>
+                  <a:srgbClr val="5A6B7C"/>
+                </a:solidFill>
+                <a:latin typeface="Arial"/>
+              </a:rPr>
+              <a:t>  Cheap, almost never done, and it reverses a headline: transfer recall 0.517 → 0.217 at an equal false-alarm budget. Ranking arithmetic on committed scores — no GPU, no retraining.</a:t>
+            </a:r>
+          </a:p>
+          <a:p>
+            <a:pPr algn="l">
+              <a:lnSpc>
+                <a:spcPct val="120000"/>
+              </a:lnSpc>
+              <a:spcBef>
+                <a:spcPts val="0"/>
+              </a:spcBef>
+              <a:spcAft>
+                <a:spcPts val="900"/>
+              </a:spcAft>
+            </a:pPr>
+            <a:r>
+              <a:rPr sz="1150" b="1" i="0">
+                <a:solidFill>
+                  <a:srgbClr val="A02128"/>
+                </a:solidFill>
+                <a:latin typeface="Arial"/>
+              </a:rPr>
+              <a:t>—  </a:t>
+            </a:r>
+            <a:r>
+              <a:rPr sz="1150" b="1" i="0">
+                <a:solidFill>
+                  <a:srgbClr val="12263A"/>
+                </a:solidFill>
+                <a:latin typeface="Arial"/>
+              </a:rPr>
+              <a:t>Negative results kept as results.</a:t>
+            </a:r>
+            <a:r>
+              <a:rPr sz="1150" b="0" i="0">
+                <a:solidFill>
+                  <a:srgbClr val="5A6B7C"/>
+                </a:solidFill>
+                <a:latin typeface="Arial"/>
+              </a:rPr>
+              <a:t>  The preregistered study fails its own second criterion. The fairness probe we built fails its own audit. An accidental repeat gave us a measured reproduction noise floor that bounds our own small effects.</a:t>
+            </a:r>
+          </a:p>
+          <a:p>
+            <a:pPr algn="l">
+              <a:lnSpc>
+                <a:spcPct val="120000"/>
+              </a:lnSpc>
+              <a:spcBef>
+                <a:spcPts val="0"/>
+              </a:spcBef>
+              <a:spcAft>
+                <a:spcPts val="900"/>
+              </a:spcAft>
+            </a:pPr>
+            <a:r>
+              <a:rPr sz="1150" b="1" i="0">
+                <a:solidFill>
+                  <a:srgbClr val="A02128"/>
+                </a:solidFill>
+                <a:latin typeface="Arial"/>
+              </a:rPr>
+              <a:t>—  </a:t>
+            </a:r>
+            <a:r>
+              <a:rPr sz="1150" b="1" i="0">
+                <a:solidFill>
+                  <a:srgbClr val="12263A"/>
+                </a:solidFill>
+                <a:latin typeface="Arial"/>
+              </a:rPr>
+              <a:t>A released instrument.</a:t>
+            </a:r>
+            <a:r>
+              <a:rPr sz="1150" b="0" i="0">
+                <a:solidFill>
+                  <a:srgbClr val="5A6B7C"/>
+                </a:solidFill>
+                <a:latin typeface="Arial"/>
+              </a:rPr>
+              <a:t>  v1_hmda2022 — 994 dual-labeled rows, CC BY 4.0 — plus text-free per-row scores and one command that regenerates the covered tables and prints the coverage it did NOT achieve.</a:t>
+            </a:r>
+          </a:p>
+        </p:txBody>
+      </p:sp>
+      <p:sp>
+        <p:nvSpPr>
+          <p:cNvPr id="9" name="TextBox 8"/>
+          <p:cNvSpPr txBox="1"/>
+          <p:nvPr/>
+        </p:nvSpPr>
+        <p:spPr>
+          <a:xfrm>
+            <a:off x="6251295" y="1591056"/>
+            <a:ext cx="5373471" cy="274320"/>
+          </a:xfrm>
+          <a:prstGeom prst="rect">
+            <a:avLst/>
+          </a:prstGeom>
+          <a:noFill/>
+        </p:spPr>
+        <p:txBody>
+          <a:bodyPr wrap="square" anchor="t" lIns="0" rIns="0" tIns="0" bIns="0">
+            <a:spAutoFit/>
+          </a:bodyPr>
+          <a:lstStyle/>
+          <a:p>
+            <a:pPr algn="l">
+              <a:lnSpc>
+                <a:spcPct val="116000"/>
+              </a:lnSpc>
+              <a:spcBef>
+                <a:spcPts val="0"/>
+              </a:spcBef>
+              <a:spcAft>
+                <a:spcPts val="0"/>
+              </a:spcAft>
+            </a:pPr>
+            <a:r>
+              <a:rPr sz="1100" b="1" i="0" spc="110">
+                <a:solidFill>
+                  <a:srgbClr val="A02128"/>
+                </a:solidFill>
+                <a:latin typeface="Arial"/>
+              </a:rPr>
+              <a:t>WHAT WOULD MAKE IT EVIDENCE</a:t>
+            </a:r>
+          </a:p>
+        </p:txBody>
+      </p:sp>
+      <p:sp>
+        <p:nvSpPr>
+          <p:cNvPr id="10" name="TextBox 9"/>
+          <p:cNvSpPr txBox="1"/>
+          <p:nvPr/>
+        </p:nvSpPr>
+        <p:spPr>
+          <a:xfrm>
+            <a:off x="6251295" y="1956816"/>
+            <a:ext cx="5373471" cy="2560320"/>
+          </a:xfrm>
+          <a:prstGeom prst="rect">
+            <a:avLst/>
+          </a:prstGeom>
+          <a:noFill/>
+        </p:spPr>
+        <p:txBody>
+          <a:bodyPr wrap="square" anchor="t" lIns="0" rIns="0" tIns="0" bIns="0">
+            <a:spAutoFit/>
+          </a:bodyPr>
+          <a:lstStyle/>
+          <a:p>
+            <a:pPr algn="l">
+              <a:lnSpc>
+                <a:spcPct val="120000"/>
+              </a:lnSpc>
+              <a:spcBef>
+                <a:spcPts val="0"/>
+              </a:spcBef>
+              <a:spcAft>
+                <a:spcPts val="800"/>
+              </a:spcAft>
+            </a:pPr>
+            <a:r>
+              <a:rPr sz="1100" b="1" i="0">
+                <a:solidFill>
+                  <a:srgbClr val="A02128"/>
+                </a:solidFill>
+                <a:latin typeface="Arial"/>
+              </a:rPr>
+              <a:t>—  </a:t>
+            </a:r>
+            <a:r>
+              <a:rPr sz="1100" b="1" i="0">
+                <a:solidFill>
+                  <a:srgbClr val="12263A"/>
+                </a:solidFill>
+                <a:latin typeface="Arial"/>
+              </a:rPr>
+              <a:t>1 · A prospectively locked run</a:t>
+            </a:r>
+            <a:r>
+              <a:rPr sz="1100" b="0" i="0">
+                <a:solidFill>
+                  <a:srgbClr val="5A6B7C"/>
+                </a:solidFill>
+                <a:latin typeface="Arial"/>
+              </a:rPr>
+              <a:t>  on genuinely uninspected sources. No amount of further analysis of these rows raises that ceiling.</a:t>
+            </a:r>
+          </a:p>
+          <a:p>
+            <a:pPr algn="l">
+              <a:lnSpc>
+                <a:spcPct val="120000"/>
+              </a:lnSpc>
+              <a:spcBef>
+                <a:spcPts val="0"/>
+              </a:spcBef>
+              <a:spcAft>
+                <a:spcPts val="800"/>
+              </a:spcAft>
+            </a:pPr>
+            <a:r>
+              <a:rPr sz="1100" b="1" i="0">
+                <a:solidFill>
+                  <a:srgbClr val="A02128"/>
+                </a:solidFill>
+                <a:latin typeface="Arial"/>
+              </a:rPr>
+              <a:t>—  </a:t>
+            </a:r>
+            <a:r>
+              <a:rPr sz="1100" b="1" i="0">
+                <a:solidFill>
+                  <a:srgbClr val="12263A"/>
+                </a:solidFill>
+                <a:latin typeface="Arial"/>
+              </a:rPr>
+              <a:t>2 · Environment-controlled replication</a:t>
+            </a:r>
+            <a:r>
+              <a:rPr sz="1100" b="0" i="0">
+                <a:solidFill>
+                  <a:srgbClr val="5A6B7C"/>
+                </a:solidFill>
+                <a:latin typeface="Arial"/>
+              </a:rPr>
+              <a:t>  to shrink the noise floor rather than report it. Below it, nothing is resolvable.</a:t>
+            </a:r>
+          </a:p>
+          <a:p>
+            <a:pPr algn="l">
+              <a:lnSpc>
+                <a:spcPct val="120000"/>
+              </a:lnSpc>
+              <a:spcBef>
+                <a:spcPts val="0"/>
+              </a:spcBef>
+              <a:spcAft>
+                <a:spcPts val="800"/>
+              </a:spcAft>
+            </a:pPr>
+            <a:r>
+              <a:rPr sz="1100" b="1" i="0">
+                <a:solidFill>
+                  <a:srgbClr val="A02128"/>
+                </a:solidFill>
+                <a:latin typeface="Arial"/>
+              </a:rPr>
+              <a:t>—  </a:t>
+            </a:r>
+            <a:r>
+              <a:rPr sz="1100" b="1" i="0">
+                <a:solidFill>
+                  <a:srgbClr val="12263A"/>
+                </a:solidFill>
+                <a:latin typeface="Arial"/>
+              </a:rPr>
+              <a:t>3 · Decompose the transfer loss</a:t>
+            </a:r>
+            <a:r>
+              <a:rPr sz="1100" b="0" i="0">
+                <a:solidFill>
+                  <a:srgbClr val="5A6B7C"/>
+                </a:solidFill>
+                <a:latin typeface="Arial"/>
+              </a:rPr>
+              <a:t>  per source — free, on committed scores — then a diversity ladder at a fixed row budget.</a:t>
+            </a:r>
+          </a:p>
+          <a:p>
+            <a:pPr algn="l">
+              <a:lnSpc>
+                <a:spcPct val="120000"/>
+              </a:lnSpc>
+              <a:spcBef>
+                <a:spcPts val="0"/>
+              </a:spcBef>
+              <a:spcAft>
+                <a:spcPts val="800"/>
+              </a:spcAft>
+            </a:pPr>
+            <a:r>
+              <a:rPr sz="1100" b="1" i="0">
+                <a:solidFill>
+                  <a:srgbClr val="A02128"/>
+                </a:solidFill>
+                <a:latin typeface="Arial"/>
+              </a:rPr>
+              <a:t>—  </a:t>
+            </a:r>
+            <a:r>
+              <a:rPr sz="1100" b="1" i="0">
+                <a:solidFill>
+                  <a:srgbClr val="12263A"/>
+                </a:solidFill>
+                <a:latin typeface="Arial"/>
+              </a:rPr>
+              <a:t>4 · Finish the mortgage instrument</a:t>
+            </a:r>
+            <a:r>
+              <a:rPr sz="1100" b="0" i="0">
+                <a:solidFill>
+                  <a:srgbClr val="5A6B7C"/>
+                </a:solidFill>
+                <a:latin typeface="Arial"/>
+              </a:rPr>
+              <a:t>  SME adjudication, the empty G1/D0 quadrant, and the 39 unscored protected pairs.</a:t>
+            </a:r>
+          </a:p>
+          <a:p>
+            <a:pPr algn="l">
+              <a:lnSpc>
+                <a:spcPct val="120000"/>
+              </a:lnSpc>
+              <a:spcBef>
+                <a:spcPts val="0"/>
+              </a:spcBef>
+              <a:spcAft>
+                <a:spcPts val="800"/>
+              </a:spcAft>
+            </a:pPr>
+            <a:r>
+              <a:rPr sz="1100" b="1" i="0">
+                <a:solidFill>
+                  <a:srgbClr val="A02128"/>
+                </a:solidFill>
+                <a:latin typeface="Arial"/>
+              </a:rPr>
+              <a:t>—  </a:t>
+            </a:r>
+            <a:r>
+              <a:rPr sz="1100" b="1" i="0">
+                <a:solidFill>
+                  <a:srgbClr val="12263A"/>
+                </a:solidFill>
+                <a:latin typeface="Arial"/>
+              </a:rPr>
+              <a:t>5 · Close the loop to the policy source</a:t>
+            </a:r>
+            <a:r>
+              <a:rPr sz="1100" b="0" i="0">
+                <a:solidFill>
+                  <a:srgbClr val="5A6B7C"/>
+                </a:solidFill>
+                <a:latin typeface="Arial"/>
+              </a:rPr>
+              <a:t>  supply the policy explicitly, and route an observably invalid packet to review.</a:t>
+            </a:r>
+          </a:p>
+        </p:txBody>
+      </p:sp>
+      <p:sp>
+        <p:nvSpPr>
+          <p:cNvPr id="11" name="Rounded Rectangle 10"/>
+          <p:cNvSpPr/>
+          <p:nvPr/>
+        </p:nvSpPr>
+        <p:spPr>
+          <a:xfrm>
+            <a:off x="6251295" y="4663440"/>
+            <a:ext cx="5373471" cy="932688"/>
+          </a:xfrm>
+          <a:prstGeom prst="roundRect">
+            <a:avLst>
+              <a:gd name="adj" fmla="val 3000"/>
+            </a:avLst>
+          </a:prstGeom>
+          <a:solidFill>
+            <a:srgbClr val="EEF6F0"/>
+          </a:solidFill>
+          <a:ln>
+            <a:noFill/>
+          </a:ln>
+          <a:effectLst/>
+        </p:spPr>
+        <p:style>
+          <a:lnRef idx="1">
+            <a:schemeClr val="accent1"/>
+          </a:lnRef>
+          <a:fillRef idx="3">
+            <a:schemeClr val="accent1"/>
+          </a:fillRef>
+          <a:effectRef idx="2">
+            <a:schemeClr val="accent1"/>
+          </a:effectRef>
+          <a:fontRef idx="minor">
+            <a:schemeClr val="lt1"/>
+          </a:fontRef>
+        </p:style>
+        <p:txBody>
+          <a:bodyPr rtlCol="0" anchor="ctr" wrap="square" lIns="219456" rIns="164592" tIns="91440" bIns="91440"/>
+          <a:lstStyle/>
+          <a:p>
+            <a:pPr algn="l">
+              <a:lnSpc>
+                <a:spcPct val="116000"/>
+              </a:lnSpc>
+              <a:spcBef>
+                <a:spcPts val="0"/>
+              </a:spcBef>
+              <a:spcAft>
+                <a:spcPts val="300"/>
+              </a:spcAft>
+            </a:pPr>
+            <a:r>
+              <a:rPr sz="1150" b="1" i="0" spc="90">
+                <a:solidFill>
+                  <a:srgbClr val="15803D"/>
+                </a:solidFill>
+                <a:latin typeface="Arial"/>
+              </a:rPr>
+              <a:t>THE THROUGH-LINE</a:t>
+            </a:r>
+          </a:p>
+          <a:p>
+            <a:pPr algn="l">
+              <a:lnSpc>
+                <a:spcPct val="116000"/>
+              </a:lnSpc>
+              <a:spcBef>
+                <a:spcPts val="0"/>
+              </a:spcBef>
+              <a:spcAft>
+                <a:spcPts val="0"/>
+              </a:spcAft>
+            </a:pPr>
+            <a:r>
+              <a:rPr sz="1150" b="0" i="0">
+                <a:solidFill>
+                  <a:srgbClr val="12263A"/>
+                </a:solidFill>
+                <a:latin typeface="Arial"/>
+              </a:rPr>
+              <a:t>Prefer the measurement that can be wrong in a detectable way. Everything above that survived did so because some check was built to fail first.</a:t>
+            </a:r>
+          </a:p>
+        </p:txBody>
+      </p:sp>
+      <p:sp>
+        <p:nvSpPr>
+          <p:cNvPr id="12" name="Rectangle 11"/>
+          <p:cNvSpPr/>
+          <p:nvPr/>
+        </p:nvSpPr>
+        <p:spPr>
+          <a:xfrm>
+            <a:off x="6251295" y="4663440"/>
+            <a:ext cx="50292" cy="932688"/>
+          </a:xfrm>
+          <a:prstGeom prst="rect">
+            <a:avLst/>
+          </a:prstGeom>
+          <a:solidFill>
+            <a:srgbClr val="15803D"/>
           </a:solidFill>
           <a:ln>
             <a:noFill/>

--- a/papers/unified-report/slides/safety_guard_benchmark_deck.pptx
+++ b/papers/unified-report/slides/safety_guard_benchmark_deck.pptx
@@ -23,6 +23,8 @@
     <p:sldId id="271" r:id="rId23"/>
     <p:sldId id="272" r:id="rId24"/>
     <p:sldId id="273" r:id="rId25"/>
+    <p:sldId id="274" r:id="rId26"/>
+    <p:sldId id="275" r:id="rId27"/>
   </p:sldIdLst>
   <p:sldSz cx="12191695" cy="6858000" type="screen4x3"/>
   <p:notesSz cx="6858000" cy="9144000"/>
@@ -1399,17 +1401,28 @@
           </a:p>
           <a:p>
             <a:r>
-              <a:t>serving path, which carries a higher fixed per-call overhead. And the frontier-API column</a:t>
-            </a:r>
-          </a:p>
-          <a:p>
-            <a:r>
-              <a:t>is an order-of-magnitude sketch from public characteristics as of mid-2026; we did not</a:t>
-            </a:r>
-          </a:p>
-          <a:p>
-            <a:r>
-              <a:t>benchmark a hosted API here.</a:t>
+              <a:t>serving path, which carries a higher fixed per-call overhead.</a:t>
+            </a:r>
+          </a:p>
+          <a:p/>
+          <a:p>
+            <a:r>
+              <a:t>The right-hand column USED to be an order-of-magnitude sketch. It no longer is: we measured</a:t>
+            </a:r>
+          </a:p>
+          <a:p>
+            <a:r>
+              <a:t>gpt-5.4 on the same ExpGuard rows, and the numbers in the table are ours. The honest framing</a:t>
+            </a:r>
+          </a:p>
+          <a:p>
+            <a:r>
+              <a:t>now is that both columns are throughput-regime measurements, so the ratio is sound but each</a:t>
+            </a:r>
+          </a:p>
+          <a:p>
+            <a:r>
+              <a:t>is an upper bound on a single isolated request.</a:t>
             </a:r>
           </a:p>
           <a:p/>
@@ -1490,60 +1503,70 @@
           <a:lstStyle/>
           <a:p>
             <a:r>
-              <a:t>Close on the workflow, not on a winner. The deliverable of this work is a</a:t>
-            </a:r>
-          </a:p>
-          <a:p>
-            <a:r>
-              <a:t>measurement-and-decision procedure, not a new model.</a:t>
+              <a:t>This slide exists because a reader is entitled to ask whether the whole small-guard programme</a:t>
+            </a:r>
+          </a:p>
+          <a:p>
+            <a:r>
+              <a:t>is solving a problem a hosted API makes disappear. On external expert-annotated rows, the</a:t>
+            </a:r>
+          </a:p>
+          <a:p>
+            <a:r>
+              <a:t>honest answer is that the hosted model is better, and by the largest margin anywhere in this</a:t>
+            </a:r>
+          </a:p>
+          <a:p>
+            <a:r>
+              <a:t>report.</a:t>
             </a:r>
           </a:p>
           <a:p/>
           <a:p>
             <a:r>
-              <a:t>Two rows deserve a sharper edge than a bullet allows. First, composition is a REPAIR for</a:t>
-            </a:r>
-          </a:p>
-          <a:p>
-            <a:r>
-              <a:t>a guard you already tuned, not a free win over the base — if you have not tuned yet and</a:t>
-            </a:r>
-          </a:p>
-          <a:p>
-            <a:r>
-              <a:t>transfer is the priority, the untuned base can already be your best transfer scorer.</a:t>
-            </a:r>
-          </a:p>
-          <a:p>
-            <a:r>
-              <a:t>Second, an empty feasible set is a deliberate NO-SHIP, not an invitation to relax the</a:t>
-            </a:r>
-          </a:p>
-          <a:p>
-            <a:r>
-              <a:t>cutoff.</a:t>
+              <a:t>Exact figures: gpt-5.4 (low) .896 against Qwen3-32B .830,</a:t>
+            </a:r>
+          </a:p>
+          <a:p>
+            <a:r>
+              <a:t>paired difference +0.066 with 95% interval [+0.043, +0.089]. Against the</a:t>
+            </a:r>
+          </a:p>
+          <a:p>
+            <a:r>
+              <a:t>strongest Act I panel base it is +0.109 [+0.077, +0.139]. Paired row</a:t>
+            </a:r>
+          </a:p>
+          <a:p>
+            <a:r>
+              <a:t>bootstrap on the rows both scored, so row difficulty cancels.</a:t>
             </a:r>
           </a:p>
           <a:p/>
           <a:p>
             <a:r>
-              <a:t>The deployment economics have their own slide immediately before this one, so do not</a:t>
-            </a:r>
-          </a:p>
-          <a:p>
-            <a:r>
-              <a:t>re-litigate them here — this list is the methodological guidance only.</a:t>
+              <a:t>Say the matched-budget point out loud; it is the same discipline as the Act I slide. And make</a:t>
+            </a:r>
+          </a:p>
+          <a:p>
+            <a:r>
+              <a:t>the coarse-score concession unprompted -- it is the one place we disadvantaged the hosted</a:t>
+            </a:r>
+          </a:p>
+          <a:p>
+            <a:r>
+              <a:t>model, and it makes the conclusion stronger rather than weaker.</a:t>
             </a:r>
           </a:p>
           <a:p/>
           <a:p>
             <a:r>
-              <a:t>Honest next step, straight from the conclusion: not a more confident headline, but a</a:t>
-            </a:r>
-          </a:p>
-          <a:p>
-            <a:r>
-              <a:t>prospectively locked evaluation on genuinely uninspected data.</a:t>
+              <a:t>What this does NOT say: nothing about the mortgage dual-label construct, which is a different</a:t>
+            </a:r>
+          </a:p>
+          <a:p>
+            <a:r>
+              <a:t>and harder task, and nothing about serving cost -- the previous slide has that.</a:t>
             </a:r>
           </a:p>
         </p:txBody>
@@ -1613,91 +1636,209 @@
           <a:lstStyle/>
           <a:p>
             <a:r>
-              <a:t>Close here, not on the decision guide. Two minutes, and do not read the columns aloud.</a:t>
+              <a:t>This is the slide that turns Act I's specialization finding into a scaling law, and it is new</a:t>
+            </a:r>
+          </a:p>
+          <a:p>
+            <a:r>
+              <a:t>evidence rather than a restatement.</a:t>
             </a:r>
           </a:p>
           <a:p/>
           <a:p>
             <a:r>
-              <a:t>The left column is the answer to "what did you actually do." Lead with the paired estimand,</a:t>
-            </a:r>
-          </a:p>
-          <a:p>
-            <a:r>
-              <a:t>because it is the cheap methodological point that costs a reader nothing to adopt and changes</a:t>
-            </a:r>
-          </a:p>
-          <a:p>
-            <a:r>
-              <a:t>what their own numbers mean. Then the matched-alarm-budget read: that is the result to be</a:t>
-            </a:r>
-          </a:p>
-          <a:p>
-            <a:r>
-              <a:t>remembered, and the reason to say it out loud is that it is nearly free and it reverses a</a:t>
-            </a:r>
-          </a:p>
-          <a:p>
-            <a:r>
-              <a:t>headline. If you only get one sentence, use that one.</a:t>
+              <a:t>Left column: the two routes a reader will propose. Tuning helps only the weakest base and hurts</a:t>
+            </a:r>
+          </a:p>
+          <a:p>
+            <a:r>
+              <a:t>4 of 6 on external held-out prompts. Scale moves in the right</a:t>
+            </a:r>
+          </a:p>
+          <a:p>
+            <a:r>
+              <a:t>direction but an eightfold parameter increase bought slightly less than the gap that remained.</a:t>
             </a:r>
           </a:p>
           <a:p/>
           <a:p>
             <a:r>
-              <a:t>The third bullet is the one that earns trust in a research audience. We preregistered a</a:t>
-            </a:r>
-          </a:p>
-          <a:p>
-            <a:r>
-              <a:t>criterion and failed it. We built a fairness probe and it did not survive its own audit. We</a:t>
-            </a:r>
-          </a:p>
-          <a:p>
-            <a:r>
-              <a:t>found a reproduction noise floor by accident and then used it against our own small effects.</a:t>
-            </a:r>
-          </a:p>
-          <a:p>
-            <a:r>
-              <a:t>Say plainly that the noise floor is a tooling problem before it is a science problem.</a:t>
+              <a:t>Right column is the important one. Order the panel by how strong the base already was and the</a:t>
+            </a:r>
+          </a:p>
+          <a:p>
+            <a:r>
+              <a:t>represented gain decays monotonically -- .528, .354, .313, .098, .076,</a:t>
+            </a:r>
+          </a:p>
+          <a:p>
+            <a:r>
+              <a:t>+0.037 -- while the transfer cost grows and plateaus around minus .10 to</a:t>
+            </a:r>
+          </a:p>
+          <a:p>
+            <a:r>
+              <a:t>minus .15. The tax is not fixed overhead; it is the price of forcing an already-capable base</a:t>
+            </a:r>
+          </a:p>
+          <a:p>
+            <a:r>
+              <a:t>onto a narrow distribution.</a:t>
             </a:r>
           </a:p>
           <a:p/>
           <a:p>
             <a:r>
-              <a:t>On the right, items 1 and 2 are the honest ceiling of this work: retrospective on an inspected</a:t>
-            </a:r>
-          </a:p>
-          <a:p>
-            <a:r>
-              <a:t>manifest, and an environment term the bootstrap intervals do not capture. Item 3 is the cheapest</a:t>
-            </a:r>
-          </a:p>
-          <a:p>
-            <a:r>
-              <a:t>real science available -- the per-source decomposition runs on committed scores at zero cost and</a:t>
-            </a:r>
-          </a:p>
-          <a:p>
-            <a:r>
-              <a:t>decides whether the next experiment should add training SOURCES or wider CONSTRUCT coverage.</a:t>
+              <a:t>The 32B row was the objection we went and measured: someone will say a tuned big model beats an</a:t>
+            </a:r>
+          </a:p>
+          <a:p>
+            <a:r>
+              <a:t>untuned one. It does not. Untuned .9533/.9620 against</a:t>
+            </a:r>
+          </a:p>
+          <a:p>
+            <a:r>
+              <a:t>tuned .9903/.8447.</a:t>
             </a:r>
           </a:p>
           <a:p/>
           <a:p>
             <a:r>
-              <a:t>If asked "so what would you deploy": nothing here, yet. That is the correct answer and it is not</a:t>
-            </a:r>
-          </a:p>
-          <a:p>
-            <a:r>
-              <a:t>evasive -- the report measures a workflow for choosing guards, and every arm still fails at least</a:t>
-            </a:r>
-          </a:p>
-          <a:p>
-            <a:r>
-              <a:t>one gate the workflow itself defines.</a:t>
+              <a:t>Caveat to state if pushed: comparing a 32B base to a tuned 4B is a deployment-choice contrast,</a:t>
+            </a:r>
+          </a:p>
+          <a:p>
+            <a:r>
+              <a:t>not a controlled one at fixed size. What the tuned-32B cell establishes is narrower -- at that</a:t>
+            </a:r>
+          </a:p>
+          <a:p>
+            <a:r>
+              <a:t>size, on this recipe and data, tuning is not where the next increment should go.</a:t>
+            </a:r>
+          </a:p>
+        </p:txBody>
+      </p:sp>
+      <p:sp>
+        <p:nvSpPr>
+          <p:cNvPr id="4" name="Slide Number Placeholder 3"/>
+          <p:cNvSpPr>
+            <a:spLocks noGrp="1"/>
+          </p:cNvSpPr>
+          <p:nvPr>
+            <p:ph type="sldNum" idx="5" sz="quarter"/>
+          </p:nvPr>
+        </p:nvSpPr>
+        <p:spPr/>
+      </p:sp>
+    </p:spTree>
+  </p:cSld>
+  <p:clrMapOvr>
+    <a:masterClrMapping/>
+  </p:clrMapOvr>
+</p:notes>
+</file>
+
+<file path=ppt/notesSlides/notesSlide19.xml><?xml version="1.0" encoding="utf-8"?>
+<p:notes xmlns:a="http://schemas.openxmlformats.org/drawingml/2006/main" xmlns:p="http://schemas.openxmlformats.org/presentationml/2006/main" xmlns:r="http://schemas.openxmlformats.org/officeDocument/2006/relationships">
+  <p:cSld>
+    <p:spTree>
+      <p:nvGrpSpPr>
+        <p:cNvPr id="1" name=""/>
+        <p:cNvGrpSpPr/>
+        <p:nvPr/>
+      </p:nvGrpSpPr>
+      <p:grpSpPr>
+        <a:xfrm>
+          <a:off x="0" y="0"/>
+          <a:ext cx="0" cy="0"/>
+          <a:chOff x="0" y="0"/>
+          <a:chExt cx="0" cy="0"/>
+        </a:xfrm>
+      </p:grpSpPr>
+      <p:sp>
+        <p:nvSpPr>
+          <p:cNvPr id="2" name="Slide Image Placeholder 1"/>
+          <p:cNvSpPr>
+            <a:spLocks noGrp="1"/>
+          </p:cNvSpPr>
+          <p:nvPr>
+            <p:ph type="sldImg" idx="2"/>
+          </p:nvPr>
+        </p:nvSpPr>
+        <p:spPr/>
+      </p:sp>
+      <p:sp>
+        <p:nvSpPr>
+          <p:cNvPr id="3" name="Notes Placeholder 2"/>
+          <p:cNvSpPr>
+            <a:spLocks noGrp="1"/>
+          </p:cNvSpPr>
+          <p:nvPr>
+            <p:ph type="body" idx="3" sz="quarter"/>
+          </p:nvPr>
+        </p:nvSpPr>
+        <p:spPr/>
+        <p:txBody>
+          <a:bodyPr/>
+          <a:lstStyle/>
+          <a:p>
+            <a:r>
+              <a:t>Close on the workflow, not on a winner. The deliverable of this work is a</a:t>
+            </a:r>
+          </a:p>
+          <a:p>
+            <a:r>
+              <a:t>measurement-and-decision procedure, not a new model.</a:t>
+            </a:r>
+          </a:p>
+          <a:p/>
+          <a:p>
+            <a:r>
+              <a:t>Two rows deserve a sharper edge than a bullet allows. First, composition is a REPAIR for</a:t>
+            </a:r>
+          </a:p>
+          <a:p>
+            <a:r>
+              <a:t>a guard you already tuned, not a free win over the base — if you have not tuned yet and</a:t>
+            </a:r>
+          </a:p>
+          <a:p>
+            <a:r>
+              <a:t>transfer is the priority, the untuned base can already be your best transfer scorer.</a:t>
+            </a:r>
+          </a:p>
+          <a:p>
+            <a:r>
+              <a:t>Second, an empty feasible set is a deliberate NO-SHIP, not an invitation to relax the</a:t>
+            </a:r>
+          </a:p>
+          <a:p>
+            <a:r>
+              <a:t>cutoff.</a:t>
+            </a:r>
+          </a:p>
+          <a:p/>
+          <a:p>
+            <a:r>
+              <a:t>The deployment economics have their own slide immediately before this one, so do not</a:t>
+            </a:r>
+          </a:p>
+          <a:p>
+            <a:r>
+              <a:t>re-litigate them here — this list is the methodological guidance only.</a:t>
+            </a:r>
+          </a:p>
+          <a:p/>
+          <a:p>
+            <a:r>
+              <a:t>Honest next step, straight from the conclusion: not a more confident headline, but a</a:t>
+            </a:r>
+          </a:p>
+          <a:p>
+            <a:r>
+              <a:t>prospectively locked evaluation on genuinely uninspected data.</a:t>
             </a:r>
           </a:p>
         </p:txBody>
@@ -1815,6 +1956,160 @@
           <a:p>
             <a:r>
               <a:t>point as a caveat — it is measured, and it is Table 4.</a:t>
+            </a:r>
+          </a:p>
+        </p:txBody>
+      </p:sp>
+      <p:sp>
+        <p:nvSpPr>
+          <p:cNvPr id="4" name="Slide Number Placeholder 3"/>
+          <p:cNvSpPr>
+            <a:spLocks noGrp="1"/>
+          </p:cNvSpPr>
+          <p:nvPr>
+            <p:ph type="sldNum" idx="5" sz="quarter"/>
+          </p:nvPr>
+        </p:nvSpPr>
+        <p:spPr/>
+      </p:sp>
+    </p:spTree>
+  </p:cSld>
+  <p:clrMapOvr>
+    <a:masterClrMapping/>
+  </p:clrMapOvr>
+</p:notes>
+</file>
+
+<file path=ppt/notesSlides/notesSlide20.xml><?xml version="1.0" encoding="utf-8"?>
+<p:notes xmlns:a="http://schemas.openxmlformats.org/drawingml/2006/main" xmlns:p="http://schemas.openxmlformats.org/presentationml/2006/main" xmlns:r="http://schemas.openxmlformats.org/officeDocument/2006/relationships">
+  <p:cSld>
+    <p:spTree>
+      <p:nvGrpSpPr>
+        <p:cNvPr id="1" name=""/>
+        <p:cNvGrpSpPr/>
+        <p:nvPr/>
+      </p:nvGrpSpPr>
+      <p:grpSpPr>
+        <a:xfrm>
+          <a:off x="0" y="0"/>
+          <a:ext cx="0" cy="0"/>
+          <a:chOff x="0" y="0"/>
+          <a:chExt cx="0" cy="0"/>
+        </a:xfrm>
+      </p:grpSpPr>
+      <p:sp>
+        <p:nvSpPr>
+          <p:cNvPr id="2" name="Slide Image Placeholder 1"/>
+          <p:cNvSpPr>
+            <a:spLocks noGrp="1"/>
+          </p:cNvSpPr>
+          <p:nvPr>
+            <p:ph type="sldImg" idx="2"/>
+          </p:nvPr>
+        </p:nvSpPr>
+        <p:spPr/>
+      </p:sp>
+      <p:sp>
+        <p:nvSpPr>
+          <p:cNvPr id="3" name="Notes Placeholder 2"/>
+          <p:cNvSpPr>
+            <a:spLocks noGrp="1"/>
+          </p:cNvSpPr>
+          <p:nvPr>
+            <p:ph type="body" idx="3" sz="quarter"/>
+          </p:nvPr>
+        </p:nvSpPr>
+        <p:spPr/>
+        <p:txBody>
+          <a:bodyPr/>
+          <a:lstStyle/>
+          <a:p>
+            <a:r>
+              <a:t>Close here, not on the decision guide. Two minutes, and do not read the columns aloud.</a:t>
+            </a:r>
+          </a:p>
+          <a:p/>
+          <a:p>
+            <a:r>
+              <a:t>The left column is the answer to "what did you actually do." Lead with the paired estimand,</a:t>
+            </a:r>
+          </a:p>
+          <a:p>
+            <a:r>
+              <a:t>because it is the cheap methodological point that costs a reader nothing to adopt and changes</a:t>
+            </a:r>
+          </a:p>
+          <a:p>
+            <a:r>
+              <a:t>what their own numbers mean. Then the matched-alarm-budget read: that is the result to be</a:t>
+            </a:r>
+          </a:p>
+          <a:p>
+            <a:r>
+              <a:t>remembered, and the reason to say it out loud is that it is nearly free and it reverses a</a:t>
+            </a:r>
+          </a:p>
+          <a:p>
+            <a:r>
+              <a:t>headline. If you only get one sentence, use that one.</a:t>
+            </a:r>
+          </a:p>
+          <a:p/>
+          <a:p>
+            <a:r>
+              <a:t>The third bullet is the one that earns trust in a research audience. We preregistered a</a:t>
+            </a:r>
+          </a:p>
+          <a:p>
+            <a:r>
+              <a:t>criterion and failed it. We built a fairness probe and it did not survive its own audit. We</a:t>
+            </a:r>
+          </a:p>
+          <a:p>
+            <a:r>
+              <a:t>found a reproduction noise floor by accident and then used it against our own small effects.</a:t>
+            </a:r>
+          </a:p>
+          <a:p>
+            <a:r>
+              <a:t>Say plainly that the noise floor is a tooling problem before it is a science problem.</a:t>
+            </a:r>
+          </a:p>
+          <a:p/>
+          <a:p>
+            <a:r>
+              <a:t>On the right, items 1 and 2 are the honest ceiling of this work: retrospective on an inspected</a:t>
+            </a:r>
+          </a:p>
+          <a:p>
+            <a:r>
+              <a:t>manifest, and an environment term the bootstrap intervals do not capture. Item 3 is the cheapest</a:t>
+            </a:r>
+          </a:p>
+          <a:p>
+            <a:r>
+              <a:t>real science available -- the per-source decomposition runs on committed scores at zero cost and</a:t>
+            </a:r>
+          </a:p>
+          <a:p>
+            <a:r>
+              <a:t>decides whether the next experiment should add training SOURCES or wider CONSTRUCT coverage.</a:t>
+            </a:r>
+          </a:p>
+          <a:p/>
+          <a:p>
+            <a:r>
+              <a:t>If asked "so what would you deploy": nothing here, yet. That is the correct answer and it is not</a:t>
+            </a:r>
+          </a:p>
+          <a:p>
+            <a:r>
+              <a:t>evasive -- the report measures a workflow for choosing guards, and every arm still fails at least</a:t>
+            </a:r>
+          </a:p>
+          <a:p>
+            <a:r>
+              <a:t>one gate the workflow itself defines.</a:t>
             </a:r>
           </a:p>
         </p:txBody>
@@ -12960,13 +13255,13 @@
                         </a:spcAft>
                       </a:pPr>
                       <a:r>
-                        <a:rPr sz="1050" b="0">
+                        <a:rPr sz="1050" b="1">
                           <a:solidFill>
-                            <a:srgbClr val="12263A"/>
+                            <a:srgbClr val="A02128"/>
                           </a:solidFill>
                           <a:latin typeface="Arial"/>
                         </a:rPr>
-                        <a:t>network round-trip, 10²–10³ ms</a:t>
+                        <a:t>1,553 ms P50  measured</a:t>
                       </a:r>
                     </a:p>
                   </a:txBody>
@@ -13052,13 +13347,13 @@
                         </a:spcAft>
                       </a:pPr>
                       <a:r>
-                        <a:rPr sz="1050" b="0">
+                        <a:rPr sz="1050" b="1">
                           <a:solidFill>
-                            <a:srgbClr val="12263A"/>
+                            <a:srgbClr val="A02128"/>
                           </a:solidFill>
                           <a:latin typeface="Arial"/>
                         </a:rPr>
-                        <a:t>per-token fee on every request</a:t>
+                        <a:t>$0.80 / 1k prompts</a:t>
                       </a:r>
                     </a:p>
                   </a:txBody>
@@ -13402,7 +13697,7 @@
                 </a:solidFill>
                 <a:latin typeface="Arial"/>
               </a:rPr>
-              <a:t>Batched per-row times at batch 16 on one A100 — throughput-latency, not a batch-1 SLA. The right-hand column is an illustrative sketch, not our measurement.</a:t>
+              <a:t>Batched per-row times at batch 16 on one A100 — throughput-latency, not a batch-1 SLA. The hosted column is now measured too (77× the median), at concurrency 200 — also a throughput regime, so an upper bound per request.</a:t>
             </a:r>
           </a:p>
         </p:txBody>
@@ -13661,7 +13956,7 @@
                 </a:solidFill>
                 <a:latin typeface="Arial"/>
               </a:rPr>
-              <a:t>WHAT TO DO</a:t>
+              <a:t>EXTERNAL REFERENCE POINT</a:t>
             </a:r>
           </a:p>
         </p:txBody>
@@ -13675,7 +13970,7 @@
         <p:spPr>
           <a:xfrm>
             <a:off x="566928" y="676656"/>
-            <a:ext cx="11057839" cy="658368"/>
+            <a:ext cx="11057839" cy="566928"/>
           </a:xfrm>
           <a:prstGeom prst="rect">
             <a:avLst/>
@@ -13706,20 +14001,65 @@
                 </a:solidFill>
                 <a:latin typeface="Georgia"/>
               </a:rPr>
-              <a:t>Gate candidates, not leaderboards</a:t>
-            </a:r>
-          </a:p>
-        </p:txBody>
-      </p:sp>
-      <p:sp>
-        <p:nvSpPr>
-          <p:cNvPr id="7" name="Rectangle 6"/>
+              <a:t>A hosted frontier model is a materially better ranker on the same rows</a:t>
+            </a:r>
+          </a:p>
+        </p:txBody>
+      </p:sp>
+      <p:sp>
+        <p:nvSpPr>
+          <p:cNvPr id="7" name="TextBox 6"/>
+          <p:cNvSpPr txBox="1"/>
+          <p:nvPr/>
+        </p:nvSpPr>
+        <p:spPr>
+          <a:xfrm>
+            <a:off x="566928" y="1188720"/>
+            <a:ext cx="11057839" cy="310896"/>
+          </a:xfrm>
+          <a:prstGeom prst="rect">
+            <a:avLst/>
+          </a:prstGeom>
+          <a:noFill/>
+        </p:spPr>
+        <p:txBody>
+          <a:bodyPr wrap="square" anchor="t" lIns="0" rIns="0" tIns="0" bIns="0">
+            <a:spAutoFit/>
+          </a:bodyPr>
+          <a:lstStyle/>
+          <a:p>
+            <a:pPr algn="l">
+              <a:lnSpc>
+                <a:spcPct val="116000"/>
+              </a:lnSpc>
+              <a:spcBef>
+                <a:spcPts val="0"/>
+              </a:spcBef>
+              <a:spcAft>
+                <a:spcPts val="0"/>
+              </a:spcAft>
+            </a:pPr>
+            <a:r>
+              <a:rPr sz="1450" b="0" i="0">
+                <a:solidFill>
+                  <a:srgbClr val="5A6B7C"/>
+                </a:solidFill>
+                <a:latin typeface="Arial"/>
+              </a:rPr>
+              <a:t>ExpGuard, 2,275 expert-annotated finance/health/law prompts · recall at a matched 5% false-alarm budget</a:t>
+            </a:r>
+          </a:p>
+        </p:txBody>
+      </p:sp>
+      <p:sp>
+        <p:nvSpPr>
+          <p:cNvPr id="8" name="Rectangle 7"/>
           <p:cNvSpPr/>
           <p:nvPr/>
         </p:nvSpPr>
         <p:spPr>
           <a:xfrm>
-            <a:off x="566928" y="1444752"/>
+            <a:off x="566928" y="1554480"/>
             <a:ext cx="11057839" cy="11430"/>
           </a:xfrm>
           <a:prstGeom prst="rect">
@@ -13755,29 +14095,768 @@
           </a:p>
         </p:txBody>
       </p:sp>
-      <p:sp>
-        <p:nvSpPr>
-          <p:cNvPr id="8" name="Rounded Rectangle 7"/>
+      <p:graphicFrame>
+        <p:nvGraphicFramePr>
+          <p:cNvPr id="9" name="Table 8"/>
+          <p:cNvGraphicFramePr>
+            <a:graphicFrameLocks noGrp="1"/>
+          </p:cNvGraphicFramePr>
+          <p:nvPr/>
+        </p:nvGraphicFramePr>
+        <p:xfrm>
+          <a:off x="566928" y="1737360"/>
+          <a:ext cx="5943598" cy="2194560"/>
+        </p:xfrm>
+        <a:graphic>
+          <a:graphicData uri="http://schemas.openxmlformats.org/drawingml/2006/table">
+            <a:tbl>
+              <a:tblPr firstRow="1">
+                <a:tableStyleId>{5C22544A-7EE6-4342-B048-85BDC9FD1C3A}</a:tableStyleId>
+              </a:tblPr>
+              <a:tblGrid>
+                <a:gridCol w="1907822"/>
+                <a:gridCol w="1394177"/>
+                <a:gridCol w="1174044"/>
+                <a:gridCol w="1467555"/>
+              </a:tblGrid>
+              <a:tr h="365760">
+                <a:tc>
+                  <a:txBody>
+                    <a:bodyPr wrap="square"/>
+                    <a:lstStyle/>
+                    <a:p>
+                      <a:pPr algn="l">
+                        <a:spcBef>
+                          <a:spcPts val="0"/>
+                        </a:spcBef>
+                        <a:spcAft>
+                          <a:spcPts val="0"/>
+                        </a:spcAft>
+                      </a:pPr>
+                      <a:r>
+                        <a:rPr sz="1000" b="1">
+                          <a:solidFill>
+                            <a:srgbClr val="FFFFFF"/>
+                          </a:solidFill>
+                          <a:latin typeface="Arial"/>
+                        </a:rPr>
+                        <a:t>Guard</a:t>
+                      </a:r>
+                    </a:p>
+                  </a:txBody>
+                  <a:tcPr anchor="ctr" marL="91440" marR="91440" marT="0" marB="0">
+                    <a:solidFill>
+                      <a:srgbClr val="12263A"/>
+                    </a:solidFill>
+                  </a:tcPr>
+                </a:tc>
+                <a:tc>
+                  <a:txBody>
+                    <a:bodyPr wrap="square"/>
+                    <a:lstStyle/>
+                    <a:p>
+                      <a:pPr algn="ctr">
+                        <a:spcBef>
+                          <a:spcPts val="0"/>
+                        </a:spcBef>
+                        <a:spcAft>
+                          <a:spcPts val="0"/>
+                        </a:spcAft>
+                      </a:pPr>
+                      <a:r>
+                        <a:rPr sz="1000" b="1">
+                          <a:solidFill>
+                            <a:srgbClr val="FFFFFF"/>
+                          </a:solidFill>
+                          <a:latin typeface="Arial"/>
+                        </a:rPr>
+                        <a:t>TPR@5%FPR</a:t>
+                      </a:r>
+                    </a:p>
+                  </a:txBody>
+                  <a:tcPr anchor="ctr" marL="91440" marR="91440" marT="0" marB="0">
+                    <a:solidFill>
+                      <a:srgbClr val="12263A"/>
+                    </a:solidFill>
+                  </a:tcPr>
+                </a:tc>
+                <a:tc>
+                  <a:txBody>
+                    <a:bodyPr wrap="square"/>
+                    <a:lstStyle/>
+                    <a:p>
+                      <a:pPr algn="ctr">
+                        <a:spcBef>
+                          <a:spcPts val="0"/>
+                        </a:spcBef>
+                        <a:spcAft>
+                          <a:spcPts val="0"/>
+                        </a:spcAft>
+                      </a:pPr>
+                      <a:r>
+                        <a:rPr sz="1000" b="1">
+                          <a:solidFill>
+                            <a:srgbClr val="FFFFFF"/>
+                          </a:solidFill>
+                          <a:latin typeface="Arial"/>
+                        </a:rPr>
+                        <a:t>AP</a:t>
+                      </a:r>
+                    </a:p>
+                  </a:txBody>
+                  <a:tcPr anchor="ctr" marL="91440" marR="91440" marT="0" marB="0">
+                    <a:solidFill>
+                      <a:srgbClr val="12263A"/>
+                    </a:solidFill>
+                  </a:tcPr>
+                </a:tc>
+                <a:tc>
+                  <a:txBody>
+                    <a:bodyPr wrap="square"/>
+                    <a:lstStyle/>
+                    <a:p>
+                      <a:pPr algn="ctr">
+                        <a:spcBef>
+                          <a:spcPts val="0"/>
+                        </a:spcBef>
+                        <a:spcAft>
+                          <a:spcPts val="0"/>
+                        </a:spcAft>
+                      </a:pPr>
+                      <a:r>
+                        <a:rPr sz="1000" b="1">
+                          <a:solidFill>
+                            <a:srgbClr val="FFFFFF"/>
+                          </a:solidFill>
+                          <a:latin typeface="Arial"/>
+                        </a:rPr>
+                        <a:t>Where it runs</a:t>
+                      </a:r>
+                    </a:p>
+                  </a:txBody>
+                  <a:tcPr anchor="ctr" marL="91440" marR="91440" marT="0" marB="0">
+                    <a:solidFill>
+                      <a:srgbClr val="12263A"/>
+                    </a:solidFill>
+                  </a:tcPr>
+                </a:tc>
+              </a:tr>
+              <a:tr h="457200">
+                <a:tc>
+                  <a:txBody>
+                    <a:bodyPr wrap="square"/>
+                    <a:lstStyle/>
+                    <a:p>
+                      <a:pPr algn="l">
+                        <a:spcBef>
+                          <a:spcPts val="0"/>
+                        </a:spcBef>
+                        <a:spcAft>
+                          <a:spcPts val="0"/>
+                        </a:spcAft>
+                      </a:pPr>
+                      <a:r>
+                        <a:rPr sz="1100" b="0">
+                          <a:solidFill>
+                            <a:srgbClr val="12263A"/>
+                          </a:solidFill>
+                          <a:latin typeface="Arial"/>
+                        </a:rPr>
+                        <a:t>gpt-5.4 (low)</a:t>
+                      </a:r>
+                    </a:p>
+                  </a:txBody>
+                  <a:tcPr anchor="ctr" marL="91440" marR="91440" marT="0" marB="0">
+                    <a:solidFill>
+                      <a:srgbClr val="FFFFFF"/>
+                    </a:solidFill>
+                  </a:tcPr>
+                </a:tc>
+                <a:tc>
+                  <a:txBody>
+                    <a:bodyPr wrap="square"/>
+                    <a:lstStyle/>
+                    <a:p>
+                      <a:pPr algn="ctr">
+                        <a:spcBef>
+                          <a:spcPts val="0"/>
+                        </a:spcBef>
+                        <a:spcAft>
+                          <a:spcPts val="0"/>
+                        </a:spcAft>
+                      </a:pPr>
+                      <a:r>
+                        <a:rPr sz="1100" b="1">
+                          <a:solidFill>
+                            <a:srgbClr val="A02128"/>
+                          </a:solidFill>
+                          <a:latin typeface="Arial"/>
+                        </a:rPr>
+                        <a:t>.896</a:t>
+                      </a:r>
+                    </a:p>
+                  </a:txBody>
+                  <a:tcPr anchor="ctr" marL="91440" marR="91440" marT="0" marB="0">
+                    <a:solidFill>
+                      <a:srgbClr val="FFFFFF"/>
+                    </a:solidFill>
+                  </a:tcPr>
+                </a:tc>
+                <a:tc>
+                  <a:txBody>
+                    <a:bodyPr wrap="square"/>
+                    <a:lstStyle/>
+                    <a:p>
+                      <a:pPr algn="ctr">
+                        <a:spcBef>
+                          <a:spcPts val="0"/>
+                        </a:spcBef>
+                        <a:spcAft>
+                          <a:spcPts val="0"/>
+                        </a:spcAft>
+                      </a:pPr>
+                      <a:r>
+                        <a:rPr sz="1100" b="0">
+                          <a:solidFill>
+                            <a:srgbClr val="12263A"/>
+                          </a:solidFill>
+                          <a:latin typeface="Arial"/>
+                        </a:rPr>
+                        <a:t>.9773</a:t>
+                      </a:r>
+                    </a:p>
+                  </a:txBody>
+                  <a:tcPr anchor="ctr" marL="91440" marR="91440" marT="0" marB="0">
+                    <a:solidFill>
+                      <a:srgbClr val="FFFFFF"/>
+                    </a:solidFill>
+                  </a:tcPr>
+                </a:tc>
+                <a:tc>
+                  <a:txBody>
+                    <a:bodyPr wrap="square"/>
+                    <a:lstStyle/>
+                    <a:p>
+                      <a:pPr algn="ctr">
+                        <a:spcBef>
+                          <a:spcPts val="0"/>
+                        </a:spcBef>
+                        <a:spcAft>
+                          <a:spcPts val="0"/>
+                        </a:spcAft>
+                      </a:pPr>
+                      <a:r>
+                        <a:rPr sz="1100" b="0">
+                          <a:solidFill>
+                            <a:srgbClr val="12263A"/>
+                          </a:solidFill>
+                          <a:latin typeface="Arial"/>
+                        </a:rPr>
+                        <a:t>hosted API</a:t>
+                      </a:r>
+                    </a:p>
+                  </a:txBody>
+                  <a:tcPr anchor="ctr" marL="91440" marR="91440" marT="0" marB="0">
+                    <a:solidFill>
+                      <a:srgbClr val="FFFFFF"/>
+                    </a:solidFill>
+                  </a:tcPr>
+                </a:tc>
+              </a:tr>
+              <a:tr h="457200">
+                <a:tc>
+                  <a:txBody>
+                    <a:bodyPr wrap="square"/>
+                    <a:lstStyle/>
+                    <a:p>
+                      <a:pPr algn="l">
+                        <a:spcBef>
+                          <a:spcPts val="0"/>
+                        </a:spcBef>
+                        <a:spcAft>
+                          <a:spcPts val="0"/>
+                        </a:spcAft>
+                      </a:pPr>
+                      <a:r>
+                        <a:rPr sz="1100" b="0">
+                          <a:solidFill>
+                            <a:srgbClr val="12263A"/>
+                          </a:solidFill>
+                          <a:latin typeface="Arial"/>
+                        </a:rPr>
+                        <a:t>Qwen3-32B base</a:t>
+                      </a:r>
+                    </a:p>
+                  </a:txBody>
+                  <a:tcPr anchor="ctr" marL="91440" marR="91440" marT="0" marB="0">
+                    <a:solidFill>
+                      <a:srgbClr val="F7F9FA"/>
+                    </a:solidFill>
+                  </a:tcPr>
+                </a:tc>
+                <a:tc>
+                  <a:txBody>
+                    <a:bodyPr wrap="square"/>
+                    <a:lstStyle/>
+                    <a:p>
+                      <a:pPr algn="ctr">
+                        <a:spcBef>
+                          <a:spcPts val="0"/>
+                        </a:spcBef>
+                        <a:spcAft>
+                          <a:spcPts val="0"/>
+                        </a:spcAft>
+                      </a:pPr>
+                      <a:r>
+                        <a:rPr sz="1100" b="1">
+                          <a:solidFill>
+                            <a:srgbClr val="15803D"/>
+                          </a:solidFill>
+                          <a:latin typeface="Arial"/>
+                        </a:rPr>
+                        <a:t>.830</a:t>
+                      </a:r>
+                    </a:p>
+                  </a:txBody>
+                  <a:tcPr anchor="ctr" marL="91440" marR="91440" marT="0" marB="0">
+                    <a:solidFill>
+                      <a:srgbClr val="F7F9FA"/>
+                    </a:solidFill>
+                  </a:tcPr>
+                </a:tc>
+                <a:tc>
+                  <a:txBody>
+                    <a:bodyPr wrap="square"/>
+                    <a:lstStyle/>
+                    <a:p>
+                      <a:pPr algn="ctr">
+                        <a:spcBef>
+                          <a:spcPts val="0"/>
+                        </a:spcBef>
+                        <a:spcAft>
+                          <a:spcPts val="0"/>
+                        </a:spcAft>
+                      </a:pPr>
+                      <a:r>
+                        <a:rPr sz="1100" b="0">
+                          <a:solidFill>
+                            <a:srgbClr val="12263A"/>
+                          </a:solidFill>
+                          <a:latin typeface="Arial"/>
+                        </a:rPr>
+                        <a:t>.9633</a:t>
+                      </a:r>
+                    </a:p>
+                  </a:txBody>
+                  <a:tcPr anchor="ctr" marL="91440" marR="91440" marT="0" marB="0">
+                    <a:solidFill>
+                      <a:srgbClr val="F7F9FA"/>
+                    </a:solidFill>
+                  </a:tcPr>
+                </a:tc>
+                <a:tc>
+                  <a:txBody>
+                    <a:bodyPr wrap="square"/>
+                    <a:lstStyle/>
+                    <a:p>
+                      <a:pPr algn="ctr">
+                        <a:spcBef>
+                          <a:spcPts val="0"/>
+                        </a:spcBef>
+                        <a:spcAft>
+                          <a:spcPts val="0"/>
+                        </a:spcAft>
+                      </a:pPr>
+                      <a:r>
+                        <a:rPr sz="1100" b="0">
+                          <a:solidFill>
+                            <a:srgbClr val="12263A"/>
+                          </a:solidFill>
+                          <a:latin typeface="Arial"/>
+                        </a:rPr>
+                        <a:t>self-hosted</a:t>
+                      </a:r>
+                    </a:p>
+                  </a:txBody>
+                  <a:tcPr anchor="ctr" marL="91440" marR="91440" marT="0" marB="0">
+                    <a:solidFill>
+                      <a:srgbClr val="F7F9FA"/>
+                    </a:solidFill>
+                  </a:tcPr>
+                </a:tc>
+              </a:tr>
+              <a:tr h="457200">
+                <a:tc>
+                  <a:txBody>
+                    <a:bodyPr wrap="square"/>
+                    <a:lstStyle/>
+                    <a:p>
+                      <a:pPr algn="l">
+                        <a:spcBef>
+                          <a:spcPts val="0"/>
+                        </a:spcBef>
+                        <a:spcAft>
+                          <a:spcPts val="0"/>
+                        </a:spcAft>
+                      </a:pPr>
+                      <a:r>
+                        <a:rPr sz="1100" b="0">
+                          <a:solidFill>
+                            <a:srgbClr val="12263A"/>
+                          </a:solidFill>
+                          <a:latin typeface="Arial"/>
+                        </a:rPr>
+                        <a:t>Qwen3-32B SFT</a:t>
+                      </a:r>
+                    </a:p>
+                  </a:txBody>
+                  <a:tcPr anchor="ctr" marL="91440" marR="91440" marT="0" marB="0">
+                    <a:solidFill>
+                      <a:srgbClr val="FFFFFF"/>
+                    </a:solidFill>
+                  </a:tcPr>
+                </a:tc>
+                <a:tc>
+                  <a:txBody>
+                    <a:bodyPr wrap="square"/>
+                    <a:lstStyle/>
+                    <a:p>
+                      <a:pPr algn="ctr">
+                        <a:spcBef>
+                          <a:spcPts val="0"/>
+                        </a:spcBef>
+                        <a:spcAft>
+                          <a:spcPts val="0"/>
+                        </a:spcAft>
+                      </a:pPr>
+                      <a:r>
+                        <a:rPr sz="1100" b="1">
+                          <a:solidFill>
+                            <a:srgbClr val="12263A"/>
+                          </a:solidFill>
+                          <a:latin typeface="Arial"/>
+                        </a:rPr>
+                        <a:t>.809</a:t>
+                      </a:r>
+                    </a:p>
+                  </a:txBody>
+                  <a:tcPr anchor="ctr" marL="91440" marR="91440" marT="0" marB="0">
+                    <a:solidFill>
+                      <a:srgbClr val="FFFFFF"/>
+                    </a:solidFill>
+                  </a:tcPr>
+                </a:tc>
+                <a:tc>
+                  <a:txBody>
+                    <a:bodyPr wrap="square"/>
+                    <a:lstStyle/>
+                    <a:p>
+                      <a:pPr algn="ctr">
+                        <a:spcBef>
+                          <a:spcPts val="0"/>
+                        </a:spcBef>
+                        <a:spcAft>
+                          <a:spcPts val="0"/>
+                        </a:spcAft>
+                      </a:pPr>
+                      <a:r>
+                        <a:rPr sz="1100" b="0">
+                          <a:solidFill>
+                            <a:srgbClr val="12263A"/>
+                          </a:solidFill>
+                          <a:latin typeface="Arial"/>
+                        </a:rPr>
+                        <a:t>.9563</a:t>
+                      </a:r>
+                    </a:p>
+                  </a:txBody>
+                  <a:tcPr anchor="ctr" marL="91440" marR="91440" marT="0" marB="0">
+                    <a:solidFill>
+                      <a:srgbClr val="FFFFFF"/>
+                    </a:solidFill>
+                  </a:tcPr>
+                </a:tc>
+                <a:tc>
+                  <a:txBody>
+                    <a:bodyPr wrap="square"/>
+                    <a:lstStyle/>
+                    <a:p>
+                      <a:pPr algn="ctr">
+                        <a:spcBef>
+                          <a:spcPts val="0"/>
+                        </a:spcBef>
+                        <a:spcAft>
+                          <a:spcPts val="0"/>
+                        </a:spcAft>
+                      </a:pPr>
+                      <a:r>
+                        <a:rPr sz="1100" b="0">
+                          <a:solidFill>
+                            <a:srgbClr val="12263A"/>
+                          </a:solidFill>
+                          <a:latin typeface="Arial"/>
+                        </a:rPr>
+                        <a:t>self-hosted</a:t>
+                      </a:r>
+                    </a:p>
+                  </a:txBody>
+                  <a:tcPr anchor="ctr" marL="91440" marR="91440" marT="0" marB="0">
+                    <a:solidFill>
+                      <a:srgbClr val="FFFFFF"/>
+                    </a:solidFill>
+                  </a:tcPr>
+                </a:tc>
+              </a:tr>
+              <a:tr h="457200">
+                <a:tc>
+                  <a:txBody>
+                    <a:bodyPr wrap="square"/>
+                    <a:lstStyle/>
+                    <a:p>
+                      <a:pPr algn="l">
+                        <a:spcBef>
+                          <a:spcPts val="0"/>
+                        </a:spcBef>
+                        <a:spcAft>
+                          <a:spcPts val="0"/>
+                        </a:spcAft>
+                      </a:pPr>
+                      <a:r>
+                        <a:rPr sz="1100" b="0">
+                          <a:solidFill>
+                            <a:srgbClr val="12263A"/>
+                          </a:solidFill>
+                          <a:latin typeface="Arial"/>
+                        </a:rPr>
+                        <a:t>SmolLM3-3B base</a:t>
+                      </a:r>
+                    </a:p>
+                  </a:txBody>
+                  <a:tcPr anchor="ctr" marL="91440" marR="91440" marT="0" marB="0">
+                    <a:solidFill>
+                      <a:srgbClr val="F7F9FA"/>
+                    </a:solidFill>
+                  </a:tcPr>
+                </a:tc>
+                <a:tc>
+                  <a:txBody>
+                    <a:bodyPr wrap="square"/>
+                    <a:lstStyle/>
+                    <a:p>
+                      <a:pPr algn="ctr">
+                        <a:spcBef>
+                          <a:spcPts val="0"/>
+                        </a:spcBef>
+                        <a:spcAft>
+                          <a:spcPts val="0"/>
+                        </a:spcAft>
+                      </a:pPr>
+                      <a:r>
+                        <a:rPr sz="1100" b="1">
+                          <a:solidFill>
+                            <a:srgbClr val="12263A"/>
+                          </a:solidFill>
+                          <a:latin typeface="Arial"/>
+                        </a:rPr>
+                        <a:t>.787</a:t>
+                      </a:r>
+                    </a:p>
+                  </a:txBody>
+                  <a:tcPr anchor="ctr" marL="91440" marR="91440" marT="0" marB="0">
+                    <a:solidFill>
+                      <a:srgbClr val="F7F9FA"/>
+                    </a:solidFill>
+                  </a:tcPr>
+                </a:tc>
+                <a:tc>
+                  <a:txBody>
+                    <a:bodyPr wrap="square"/>
+                    <a:lstStyle/>
+                    <a:p>
+                      <a:pPr algn="ctr">
+                        <a:spcBef>
+                          <a:spcPts val="0"/>
+                        </a:spcBef>
+                        <a:spcAft>
+                          <a:spcPts val="0"/>
+                        </a:spcAft>
+                      </a:pPr>
+                      <a:r>
+                        <a:rPr sz="1100" b="0">
+                          <a:solidFill>
+                            <a:srgbClr val="12263A"/>
+                          </a:solidFill>
+                          <a:latin typeface="Arial"/>
+                        </a:rPr>
+                        <a:t>.9561</a:t>
+                      </a:r>
+                    </a:p>
+                  </a:txBody>
+                  <a:tcPr anchor="ctr" marL="91440" marR="91440" marT="0" marB="0">
+                    <a:solidFill>
+                      <a:srgbClr val="F7F9FA"/>
+                    </a:solidFill>
+                  </a:tcPr>
+                </a:tc>
+                <a:tc>
+                  <a:txBody>
+                    <a:bodyPr wrap="square"/>
+                    <a:lstStyle/>
+                    <a:p>
+                      <a:pPr algn="ctr">
+                        <a:spcBef>
+                          <a:spcPts val="0"/>
+                        </a:spcBef>
+                        <a:spcAft>
+                          <a:spcPts val="0"/>
+                        </a:spcAft>
+                      </a:pPr>
+                      <a:r>
+                        <a:rPr sz="1100" b="0">
+                          <a:solidFill>
+                            <a:srgbClr val="12263A"/>
+                          </a:solidFill>
+                          <a:latin typeface="Arial"/>
+                        </a:rPr>
+                        <a:t>self-hosted</a:t>
+                      </a:r>
+                    </a:p>
+                  </a:txBody>
+                  <a:tcPr anchor="ctr" marL="91440" marR="91440" marT="0" marB="0">
+                    <a:solidFill>
+                      <a:srgbClr val="F7F9FA"/>
+                    </a:solidFill>
+                  </a:tcPr>
+                </a:tc>
+              </a:tr>
+            </a:tbl>
+          </a:graphicData>
+        </a:graphic>
+      </p:graphicFrame>
+      <p:sp>
+        <p:nvSpPr>
+          <p:cNvPr id="10" name="TextBox 9"/>
+          <p:cNvSpPr txBox="1"/>
+          <p:nvPr/>
+        </p:nvSpPr>
+        <p:spPr>
+          <a:xfrm>
+            <a:off x="6830568" y="1737360"/>
+            <a:ext cx="4794199" cy="2011680"/>
+          </a:xfrm>
+          <a:prstGeom prst="rect">
+            <a:avLst/>
+          </a:prstGeom>
+          <a:noFill/>
+        </p:spPr>
+        <p:txBody>
+          <a:bodyPr wrap="square" anchor="t" lIns="0" rIns="0" tIns="0" bIns="0">
+            <a:spAutoFit/>
+          </a:bodyPr>
+          <a:lstStyle/>
+          <a:p>
+            <a:pPr algn="l">
+              <a:lnSpc>
+                <a:spcPct val="120000"/>
+              </a:lnSpc>
+              <a:spcBef>
+                <a:spcPts val="0"/>
+              </a:spcBef>
+              <a:spcAft>
+                <a:spcPts val="800"/>
+              </a:spcAft>
+            </a:pPr>
+            <a:r>
+              <a:rPr sz="1100" b="1" i="0">
+                <a:solidFill>
+                  <a:srgbClr val="A02128"/>
+                </a:solidFill>
+                <a:latin typeface="Arial"/>
+              </a:rPr>
+              <a:t>—  </a:t>
+            </a:r>
+            <a:r>
+              <a:rPr sz="1100" b="1" i="0">
+                <a:solidFill>
+                  <a:srgbClr val="12263A"/>
+                </a:solidFill>
+                <a:latin typeface="Arial"/>
+              </a:rPr>
+              <a:t>Paired, on identical rows.</a:t>
+            </a:r>
+            <a:r>
+              <a:rPr sz="1100" b="0" i="0">
+                <a:solidFill>
+                  <a:srgbClr val="5A6B7C"/>
+                </a:solidFill>
+                <a:latin typeface="Arial"/>
+              </a:rPr>
+              <a:t>  +0.066 TPR [+0.043, +0.089] against the strongest open guard; +0.109 [+0.077, +0.139] against the strongest Act I base. Both intervals exclude zero.</a:t>
+            </a:r>
+          </a:p>
+          <a:p>
+            <a:pPr algn="l">
+              <a:lnSpc>
+                <a:spcPct val="120000"/>
+              </a:lnSpc>
+              <a:spcBef>
+                <a:spcPts val="0"/>
+              </a:spcBef>
+              <a:spcAft>
+                <a:spcPts val="800"/>
+              </a:spcAft>
+            </a:pPr>
+            <a:r>
+              <a:rPr sz="1100" b="1" i="0">
+                <a:solidFill>
+                  <a:srgbClr val="A02128"/>
+                </a:solidFill>
+                <a:latin typeface="Arial"/>
+              </a:rPr>
+              <a:t>—  </a:t>
+            </a:r>
+            <a:r>
+              <a:rPr sz="1100" b="1" i="0">
+                <a:solidFill>
+                  <a:srgbClr val="12263A"/>
+                </a:solidFill>
+                <a:latin typeface="Arial"/>
+              </a:rPr>
+              <a:t>Matched budget, not each model's own verdict.</a:t>
+            </a:r>
+            <a:r>
+              <a:rPr sz="1100" b="0" i="0">
+                <a:solidFill>
+                  <a:srgbClr val="5A6B7C"/>
+                </a:solidFill>
+                <a:latin typeface="Arial"/>
+              </a:rPr>
+              <a:t>  The hosted configs sit at 2.3–3.4% FPR by themselves; comparing recall there would flatter them for alarming less, not for discriminating better.</a:t>
+            </a:r>
+          </a:p>
+        </p:txBody>
+      </p:sp>
+      <p:sp>
+        <p:nvSpPr>
+          <p:cNvPr id="11" name="Rounded Rectangle 10"/>
           <p:cNvSpPr/>
           <p:nvPr/>
         </p:nvSpPr>
         <p:spPr>
           <a:xfrm>
-            <a:off x="566928" y="1645920"/>
-            <a:ext cx="4480560" cy="603504"/>
+            <a:off x="6830568" y="3858768"/>
+            <a:ext cx="4794199" cy="1188720"/>
           </a:xfrm>
           <a:prstGeom prst="roundRect">
             <a:avLst>
-              <a:gd name="adj" fmla="val 5000"/>
+              <a:gd name="adj" fmla="val 3000"/>
             </a:avLst>
           </a:prstGeom>
           <a:solidFill>
-            <a:srgbClr val="F7F9FA"/>
+            <a:srgbClr val="EFF4FE"/>
           </a:solidFill>
-          <a:ln w="12700">
-            <a:solidFill>
-              <a:srgbClr val="D8DEE4"/>
-            </a:solidFill>
+          <a:ln>
+            <a:noFill/>
           </a:ln>
           <a:effectLst/>
         </p:spPr>
@@ -13796,891 +14875,6 @@
           </a:fontRef>
         </p:style>
         <p:txBody>
-          <a:bodyPr rtlCol="0" anchor="ctr" wrap="square" lIns="164592" rIns="128016"/>
-          <a:lstStyle/>
-          <a:p>
-            <a:pPr algn="l">
-              <a:lnSpc>
-                <a:spcPct val="100000"/>
-              </a:lnSpc>
-              <a:spcBef>
-                <a:spcPts val="0"/>
-              </a:spcBef>
-              <a:spcAft>
-                <a:spcPts val="200"/>
-              </a:spcAft>
-            </a:pPr>
-            <a:r>
-              <a:rPr sz="1200" b="1" i="0">
-                <a:solidFill>
-                  <a:srgbClr val="12263A"/>
-                </a:solidFill>
-                <a:latin typeface="Arial"/>
-              </a:rPr>
-              <a:t>1.  Freeze the candidate registry</a:t>
-            </a:r>
-          </a:p>
-          <a:p>
-            <a:pPr algn="l">
-              <a:lnSpc>
-                <a:spcPct val="108000"/>
-              </a:lnSpc>
-              <a:spcBef>
-                <a:spcPts val="0"/>
-              </a:spcBef>
-              <a:spcAft>
-                <a:spcPts val="0"/>
-              </a:spcAft>
-            </a:pPr>
-            <a:r>
-              <a:rPr sz="1000" b="0" i="0">
-                <a:solidFill>
-                  <a:srgbClr val="5A6B7C"/>
-                </a:solidFill>
-                <a:latin typeface="Arial"/>
-              </a:rPr>
-              <a:t>base · SFT · KL-SFT · composition — with checkpoint, prompt, calibrator, threshold rule, owner</a:t>
-            </a:r>
-          </a:p>
-        </p:txBody>
-      </p:sp>
-      <p:sp>
-        <p:nvSpPr>
-          <p:cNvPr id="9" name="Down Arrow 8"/>
-          <p:cNvSpPr/>
-          <p:nvPr/>
-        </p:nvSpPr>
-        <p:spPr>
-          <a:xfrm>
-            <a:off x="2729484" y="2286000"/>
-            <a:ext cx="155448" cy="201168"/>
-          </a:xfrm>
-          <a:prstGeom prst="downArrow">
-            <a:avLst/>
-          </a:prstGeom>
-          <a:solidFill>
-            <a:srgbClr val="8A97A5"/>
-          </a:solidFill>
-          <a:ln>
-            <a:noFill/>
-          </a:ln>
-          <a:effectLst/>
-        </p:spPr>
-        <p:style>
-          <a:lnRef idx="1">
-            <a:schemeClr val="accent1"/>
-          </a:lnRef>
-          <a:fillRef idx="3">
-            <a:schemeClr val="accent1"/>
-          </a:fillRef>
-          <a:effectRef idx="2">
-            <a:schemeClr val="accent1"/>
-          </a:effectRef>
-          <a:fontRef idx="minor">
-            <a:schemeClr val="lt1"/>
-          </a:fontRef>
-        </p:style>
-        <p:txBody>
-          <a:bodyPr rtlCol="0" anchor="ctr" wrap="square"/>
-          <a:lstStyle/>
-          <a:p>
-            <a:pPr algn="ctr"/>
-          </a:p>
-        </p:txBody>
-      </p:sp>
-      <p:sp>
-        <p:nvSpPr>
-          <p:cNvPr id="10" name="Rounded Rectangle 9"/>
-          <p:cNvSpPr/>
-          <p:nvPr/>
-        </p:nvSpPr>
-        <p:spPr>
-          <a:xfrm>
-            <a:off x="566928" y="2523744"/>
-            <a:ext cx="4480560" cy="603504"/>
-          </a:xfrm>
-          <a:prstGeom prst="roundRect">
-            <a:avLst>
-              <a:gd name="adj" fmla="val 5000"/>
-            </a:avLst>
-          </a:prstGeom>
-          <a:solidFill>
-            <a:srgbClr val="F7F9FA"/>
-          </a:solidFill>
-          <a:ln w="12700">
-            <a:solidFill>
-              <a:srgbClr val="D8DEE4"/>
-            </a:solidFill>
-          </a:ln>
-          <a:effectLst/>
-        </p:spPr>
-        <p:style>
-          <a:lnRef idx="1">
-            <a:schemeClr val="accent1"/>
-          </a:lnRef>
-          <a:fillRef idx="3">
-            <a:schemeClr val="accent1"/>
-          </a:fillRef>
-          <a:effectRef idx="2">
-            <a:schemeClr val="accent1"/>
-          </a:effectRef>
-          <a:fontRef idx="minor">
-            <a:schemeClr val="lt1"/>
-          </a:fontRef>
-        </p:style>
-        <p:txBody>
-          <a:bodyPr rtlCol="0" anchor="ctr" wrap="square" lIns="164592" rIns="128016"/>
-          <a:lstStyle/>
-          <a:p>
-            <a:pPr algn="l">
-              <a:lnSpc>
-                <a:spcPct val="100000"/>
-              </a:lnSpc>
-              <a:spcBef>
-                <a:spcPts val="0"/>
-              </a:spcBef>
-              <a:spcAft>
-                <a:spcPts val="200"/>
-              </a:spcAft>
-            </a:pPr>
-            <a:r>
-              <a:rPr sz="1200" b="1" i="0">
-                <a:solidFill>
-                  <a:srgbClr val="12263A"/>
-                </a:solidFill>
-                <a:latin typeface="Arial"/>
-              </a:rPr>
-              <a:t>2.  Calibrate and threshold each candidate</a:t>
-            </a:r>
-          </a:p>
-          <a:p>
-            <a:pPr algn="l">
-              <a:lnSpc>
-                <a:spcPct val="108000"/>
-              </a:lnSpc>
-              <a:spcBef>
-                <a:spcPts val="0"/>
-              </a:spcBef>
-              <a:spcAft>
-                <a:spcPts val="0"/>
-              </a:spcAft>
-            </a:pPr>
-            <a:r>
-              <a:rPr sz="1000" b="0" i="0">
-                <a:solidFill>
-                  <a:srgbClr val="5A6B7C"/>
-                </a:solidFill>
-                <a:latin typeface="Arial"/>
-              </a:rPr>
-              <a:t>separately, on target-regime calibration data</a:t>
-            </a:r>
-          </a:p>
-        </p:txBody>
-      </p:sp>
-      <p:sp>
-        <p:nvSpPr>
-          <p:cNvPr id="11" name="Down Arrow 10"/>
-          <p:cNvSpPr/>
-          <p:nvPr/>
-        </p:nvSpPr>
-        <p:spPr>
-          <a:xfrm>
-            <a:off x="2729484" y="3163824"/>
-            <a:ext cx="155448" cy="201168"/>
-          </a:xfrm>
-          <a:prstGeom prst="downArrow">
-            <a:avLst/>
-          </a:prstGeom>
-          <a:solidFill>
-            <a:srgbClr val="8A97A5"/>
-          </a:solidFill>
-          <a:ln>
-            <a:noFill/>
-          </a:ln>
-          <a:effectLst/>
-        </p:spPr>
-        <p:style>
-          <a:lnRef idx="1">
-            <a:schemeClr val="accent1"/>
-          </a:lnRef>
-          <a:fillRef idx="3">
-            <a:schemeClr val="accent1"/>
-          </a:fillRef>
-          <a:effectRef idx="2">
-            <a:schemeClr val="accent1"/>
-          </a:effectRef>
-          <a:fontRef idx="minor">
-            <a:schemeClr val="lt1"/>
-          </a:fontRef>
-        </p:style>
-        <p:txBody>
-          <a:bodyPr rtlCol="0" anchor="ctr" wrap="square"/>
-          <a:lstStyle/>
-          <a:p>
-            <a:pPr algn="ctr"/>
-          </a:p>
-        </p:txBody>
-      </p:sp>
-      <p:sp>
-        <p:nvSpPr>
-          <p:cNvPr id="12" name="Rounded Rectangle 11"/>
-          <p:cNvSpPr/>
-          <p:nvPr/>
-        </p:nvSpPr>
-        <p:spPr>
-          <a:xfrm>
-            <a:off x="566928" y="3401568"/>
-            <a:ext cx="4480560" cy="603504"/>
-          </a:xfrm>
-          <a:prstGeom prst="roundRect">
-            <a:avLst>
-              <a:gd name="adj" fmla="val 5000"/>
-            </a:avLst>
-          </a:prstGeom>
-          <a:solidFill>
-            <a:srgbClr val="F7F9FA"/>
-          </a:solidFill>
-          <a:ln w="12700">
-            <a:solidFill>
-              <a:srgbClr val="D8DEE4"/>
-            </a:solidFill>
-          </a:ln>
-          <a:effectLst/>
-        </p:spPr>
-        <p:style>
-          <a:lnRef idx="1">
-            <a:schemeClr val="accent1"/>
-          </a:lnRef>
-          <a:fillRef idx="3">
-            <a:schemeClr val="accent1"/>
-          </a:fillRef>
-          <a:effectRef idx="2">
-            <a:schemeClr val="accent1"/>
-          </a:effectRef>
-          <a:fontRef idx="minor">
-            <a:schemeClr val="lt1"/>
-          </a:fontRef>
-        </p:style>
-        <p:txBody>
-          <a:bodyPr rtlCol="0" anchor="ctr" wrap="square" lIns="164592" rIns="128016"/>
-          <a:lstStyle/>
-          <a:p>
-            <a:pPr algn="l">
-              <a:lnSpc>
-                <a:spcPct val="100000"/>
-              </a:lnSpc>
-              <a:spcBef>
-                <a:spcPts val="0"/>
-              </a:spcBef>
-              <a:spcAft>
-                <a:spcPts val="200"/>
-              </a:spcAft>
-            </a:pPr>
-            <a:r>
-              <a:rPr sz="1200" b="1" i="0">
-                <a:solidFill>
-                  <a:srgbClr val="12263A"/>
-                </a:solidFill>
-                <a:latin typeface="Arial"/>
-              </a:rPr>
-              <a:t>3.  Open the blind acceptance set once</a:t>
-            </a:r>
-          </a:p>
-          <a:p>
-            <a:pPr algn="l">
-              <a:lnSpc>
-                <a:spcPct val="108000"/>
-              </a:lnSpc>
-              <a:spcBef>
-                <a:spcPts val="0"/>
-              </a:spcBef>
-              <a:spcAft>
-                <a:spcPts val="0"/>
-              </a:spcAft>
-            </a:pPr>
-            <a:r>
-              <a:rPr sz="1000" b="0" i="0">
-                <a:solidFill>
-                  <a:srgbClr val="5A6B7C"/>
-                </a:solidFill>
-                <a:latin typeface="Arial"/>
-              </a:rPr>
-              <a:t>paired rows, one shot</a:t>
-            </a:r>
-          </a:p>
-        </p:txBody>
-      </p:sp>
-      <p:sp>
-        <p:nvSpPr>
-          <p:cNvPr id="13" name="Down Arrow 12"/>
-          <p:cNvSpPr/>
-          <p:nvPr/>
-        </p:nvSpPr>
-        <p:spPr>
-          <a:xfrm>
-            <a:off x="2729484" y="4041648"/>
-            <a:ext cx="155448" cy="201168"/>
-          </a:xfrm>
-          <a:prstGeom prst="downArrow">
-            <a:avLst/>
-          </a:prstGeom>
-          <a:solidFill>
-            <a:srgbClr val="8A97A5"/>
-          </a:solidFill>
-          <a:ln>
-            <a:noFill/>
-          </a:ln>
-          <a:effectLst/>
-        </p:spPr>
-        <p:style>
-          <a:lnRef idx="1">
-            <a:schemeClr val="accent1"/>
-          </a:lnRef>
-          <a:fillRef idx="3">
-            <a:schemeClr val="accent1"/>
-          </a:fillRef>
-          <a:effectRef idx="2">
-            <a:schemeClr val="accent1"/>
-          </a:effectRef>
-          <a:fontRef idx="minor">
-            <a:schemeClr val="lt1"/>
-          </a:fontRef>
-        </p:style>
-        <p:txBody>
-          <a:bodyPr rtlCol="0" anchor="ctr" wrap="square"/>
-          <a:lstStyle/>
-          <a:p>
-            <a:pPr algn="ctr"/>
-          </a:p>
-        </p:txBody>
-      </p:sp>
-      <p:sp>
-        <p:nvSpPr>
-          <p:cNvPr id="14" name="Rounded Rectangle 13"/>
-          <p:cNvSpPr/>
-          <p:nvPr/>
-        </p:nvSpPr>
-        <p:spPr>
-          <a:xfrm>
-            <a:off x="566928" y="4279392"/>
-            <a:ext cx="4480560" cy="786384"/>
-          </a:xfrm>
-          <a:prstGeom prst="roundRect">
-            <a:avLst>
-              <a:gd name="adj" fmla="val 5000"/>
-            </a:avLst>
-          </a:prstGeom>
-          <a:solidFill>
-            <a:srgbClr val="EFF4FE"/>
-          </a:solidFill>
-          <a:ln w="12700">
-            <a:solidFill>
-              <a:srgbClr val="D8DEE4"/>
-            </a:solidFill>
-          </a:ln>
-          <a:effectLst/>
-        </p:spPr>
-        <p:style>
-          <a:lnRef idx="1">
-            <a:schemeClr val="accent1"/>
-          </a:lnRef>
-          <a:fillRef idx="3">
-            <a:schemeClr val="accent1"/>
-          </a:fillRef>
-          <a:effectRef idx="2">
-            <a:schemeClr val="accent1"/>
-          </a:effectRef>
-          <a:fontRef idx="minor">
-            <a:schemeClr val="lt1"/>
-          </a:fontRef>
-        </p:style>
-        <p:txBody>
-          <a:bodyPr rtlCol="0" anchor="ctr" wrap="square" lIns="164592" rIns="128016"/>
-          <a:lstStyle/>
-          <a:p>
-            <a:pPr algn="l">
-              <a:lnSpc>
-                <a:spcPct val="100000"/>
-              </a:lnSpc>
-              <a:spcBef>
-                <a:spcPts val="0"/>
-              </a:spcBef>
-              <a:spcAft>
-                <a:spcPts val="200"/>
-              </a:spcAft>
-            </a:pPr>
-            <a:r>
-              <a:rPr sz="1200" b="1" i="0">
-                <a:solidFill>
-                  <a:srgbClr val="12263A"/>
-                </a:solidFill>
-                <a:latin typeface="Arial"/>
-              </a:rPr>
-              <a:t>4.  Require every gate to pass</a:t>
-            </a:r>
-          </a:p>
-          <a:p>
-            <a:pPr algn="l">
-              <a:lnSpc>
-                <a:spcPct val="108000"/>
-              </a:lnSpc>
-              <a:spcBef>
-                <a:spcPts val="0"/>
-              </a:spcBef>
-              <a:spcAft>
-                <a:spcPts val="0"/>
-              </a:spcAft>
-            </a:pPr>
-            <a:r>
-              <a:rPr sz="1000" b="0" i="0">
-                <a:solidFill>
-                  <a:srgbClr val="5A6B7C"/>
-                </a:solidFill>
-                <a:latin typeface="Arial"/>
-              </a:rPr>
-              <a:t>absolute-AP floor · operating point · transfer retention vs base · each domain separately · reliability · SLO · governance</a:t>
-            </a:r>
-          </a:p>
-        </p:txBody>
-      </p:sp>
-      <p:sp>
-        <p:nvSpPr>
-          <p:cNvPr id="15" name="Rounded Rectangle 14"/>
-          <p:cNvSpPr/>
-          <p:nvPr/>
-        </p:nvSpPr>
-        <p:spPr>
-          <a:xfrm>
-            <a:off x="566928" y="5340096"/>
-            <a:ext cx="2148840" cy="566928"/>
-          </a:xfrm>
-          <a:prstGeom prst="roundRect">
-            <a:avLst>
-              <a:gd name="adj" fmla="val 6000"/>
-            </a:avLst>
-          </a:prstGeom>
-          <a:solidFill>
-            <a:srgbClr val="EEF6F0"/>
-          </a:solidFill>
-          <a:ln w="12700">
-            <a:solidFill>
-              <a:srgbClr val="15803D"/>
-            </a:solidFill>
-          </a:ln>
-          <a:effectLst/>
-        </p:spPr>
-        <p:style>
-          <a:lnRef idx="1">
-            <a:schemeClr val="accent1"/>
-          </a:lnRef>
-          <a:fillRef idx="3">
-            <a:schemeClr val="accent1"/>
-          </a:fillRef>
-          <a:effectRef idx="2">
-            <a:schemeClr val="accent1"/>
-          </a:effectRef>
-          <a:fontRef idx="minor">
-            <a:schemeClr val="lt1"/>
-          </a:fontRef>
-        </p:style>
-        <p:txBody>
-          <a:bodyPr rtlCol="0" anchor="ctr" wrap="square"/>
-          <a:lstStyle/>
-          <a:p>
-            <a:pPr algn="ctr">
-              <a:lnSpc>
-                <a:spcPct val="100000"/>
-              </a:lnSpc>
-              <a:spcBef>
-                <a:spcPts val="0"/>
-              </a:spcBef>
-              <a:spcAft>
-                <a:spcPts val="0"/>
-              </a:spcAft>
-            </a:pPr>
-            <a:r>
-              <a:rPr sz="1050" b="1" i="0">
-                <a:solidFill>
-                  <a:srgbClr val="15803D"/>
-                </a:solidFill>
-                <a:latin typeface="Arial"/>
-              </a:rPr>
-              <a:t>all pass  →  shadow, canary,
-monitor, rollback-ready</a:t>
-            </a:r>
-          </a:p>
-        </p:txBody>
-      </p:sp>
-      <p:sp>
-        <p:nvSpPr>
-          <p:cNvPr id="16" name="Rounded Rectangle 15"/>
-          <p:cNvSpPr/>
-          <p:nvPr/>
-        </p:nvSpPr>
-        <p:spPr>
-          <a:xfrm>
-            <a:off x="2898648" y="5340096"/>
-            <a:ext cx="2148840" cy="566928"/>
-          </a:xfrm>
-          <a:prstGeom prst="roundRect">
-            <a:avLst>
-              <a:gd name="adj" fmla="val 6000"/>
-            </a:avLst>
-          </a:prstGeom>
-          <a:solidFill>
-            <a:srgbClr val="FAF0F0"/>
-          </a:solidFill>
-          <a:ln w="12700">
-            <a:solidFill>
-              <a:srgbClr val="A02128"/>
-            </a:solidFill>
-          </a:ln>
-          <a:effectLst/>
-        </p:spPr>
-        <p:style>
-          <a:lnRef idx="1">
-            <a:schemeClr val="accent1"/>
-          </a:lnRef>
-          <a:fillRef idx="3">
-            <a:schemeClr val="accent1"/>
-          </a:fillRef>
-          <a:effectRef idx="2">
-            <a:schemeClr val="accent1"/>
-          </a:effectRef>
-          <a:fontRef idx="minor">
-            <a:schemeClr val="lt1"/>
-          </a:fontRef>
-        </p:style>
-        <p:txBody>
-          <a:bodyPr rtlCol="0" anchor="ctr" wrap="square"/>
-          <a:lstStyle/>
-          <a:p>
-            <a:pPr algn="ctr">
-              <a:lnSpc>
-                <a:spcPct val="100000"/>
-              </a:lnSpc>
-              <a:spcBef>
-                <a:spcPts val="0"/>
-              </a:spcBef>
-              <a:spcAft>
-                <a:spcPts val="0"/>
-              </a:spcAft>
-            </a:pPr>
-            <a:r>
-              <a:rPr sz="1050" b="1" i="0">
-                <a:solidFill>
-                  <a:srgbClr val="A02128"/>
-                </a:solidFill>
-                <a:latin typeface="Arial"/>
-              </a:rPr>
-              <a:t>any gate missing  →  NO SHIP
-(a missing gate is a failure)</a:t>
-            </a:r>
-          </a:p>
-        </p:txBody>
-      </p:sp>
-      <p:sp>
-        <p:nvSpPr>
-          <p:cNvPr id="17" name="TextBox 16"/>
-          <p:cNvSpPr txBox="1"/>
-          <p:nvPr/>
-        </p:nvSpPr>
-        <p:spPr>
-          <a:xfrm>
-            <a:off x="5504688" y="1627632"/>
-            <a:ext cx="6120079" cy="3017520"/>
-          </a:xfrm>
-          <a:prstGeom prst="rect">
-            <a:avLst/>
-          </a:prstGeom>
-          <a:noFill/>
-        </p:spPr>
-        <p:txBody>
-          <a:bodyPr wrap="square" anchor="t" lIns="0" rIns="0" tIns="0" bIns="0">
-            <a:spAutoFit/>
-          </a:bodyPr>
-          <a:lstStyle/>
-          <a:p>
-            <a:pPr algn="l">
-              <a:lnSpc>
-                <a:spcPct val="120000"/>
-              </a:lnSpc>
-              <a:spcBef>
-                <a:spcPts val="0"/>
-              </a:spcBef>
-              <a:spcAft>
-                <a:spcPts val="800"/>
-              </a:spcAft>
-            </a:pPr>
-            <a:r>
-              <a:rPr sz="1150" b="1" i="0">
-                <a:solidFill>
-                  <a:srgbClr val="A02128"/>
-                </a:solidFill>
-                <a:latin typeface="Arial"/>
-              </a:rPr>
-              <a:t>—  </a:t>
-            </a:r>
-            <a:r>
-              <a:rPr sz="1150" b="1" i="0">
-                <a:solidFill>
-                  <a:srgbClr val="12263A"/>
-                </a:solidFill>
-                <a:latin typeface="Arial"/>
-              </a:rPr>
-              <a:t>Never rank guards on a single leaderboard.</a:t>
-            </a:r>
-            <a:r>
-              <a:rPr sz="1150" b="0" i="0">
-                <a:solidFill>
-                  <a:srgbClr val="5A6B7C"/>
-                </a:solidFill>
-                <a:latin typeface="Arial"/>
-              </a:rPr>
-              <a:t>  Score your candidates on represented, held-out, over-refusal and domain sets.</a:t>
-            </a:r>
-          </a:p>
-          <a:p>
-            <a:pPr algn="l">
-              <a:lnSpc>
-                <a:spcPct val="120000"/>
-              </a:lnSpc>
-              <a:spcBef>
-                <a:spcPts val="0"/>
-              </a:spcBef>
-              <a:spcAft>
-                <a:spcPts val="800"/>
-              </a:spcAft>
-            </a:pPr>
-            <a:r>
-              <a:rPr sz="1150" b="1" i="0">
-                <a:solidFill>
-                  <a:srgbClr val="A02128"/>
-                </a:solidFill>
-                <a:latin typeface="Arial"/>
-              </a:rPr>
-              <a:t>—  </a:t>
-            </a:r>
-            <a:r>
-              <a:rPr sz="1150" b="1" i="0">
-                <a:solidFill>
-                  <a:srgbClr val="12263A"/>
-                </a:solidFill>
-                <a:latin typeface="Arial"/>
-              </a:rPr>
-              <a:t>Always compare a tune to its own base — at a matched false-alarm rate.</a:t>
-            </a:r>
-            <a:r>
-              <a:rPr sz="1150" b="0" i="0">
-                <a:solidFill>
-                  <a:srgbClr val="5A6B7C"/>
-                </a:solidFill>
-                <a:latin typeface="Arial"/>
-              </a:rPr>
-              <a:t>  A delta against other models hides the transfer cost; a recall compared at unequal alarm rates hides its sign.</a:t>
-            </a:r>
-          </a:p>
-          <a:p>
-            <a:pPr algn="l">
-              <a:lnSpc>
-                <a:spcPct val="120000"/>
-              </a:lnSpc>
-              <a:spcBef>
-                <a:spcPts val="0"/>
-              </a:spcBef>
-              <a:spcAft>
-                <a:spcPts val="800"/>
-              </a:spcAft>
-            </a:pPr>
-            <a:r>
-              <a:rPr sz="1150" b="1" i="0">
-                <a:solidFill>
-                  <a:srgbClr val="A02128"/>
-                </a:solidFill>
-                <a:latin typeface="Arial"/>
-              </a:rPr>
-              <a:t>—  </a:t>
-            </a:r>
-            <a:r>
-              <a:rPr sz="1150" b="1" i="0">
-                <a:solidFill>
-                  <a:srgbClr val="12263A"/>
-                </a:solidFill>
-                <a:latin typeface="Arial"/>
-              </a:rPr>
-              <a:t>Treat KL-β as a dial, not a default.</a:t>
-            </a:r>
-            <a:r>
-              <a:rPr sz="1150" b="0" i="0">
-                <a:solidFill>
-                  <a:srgbClr val="5A6B7C"/>
-                </a:solidFill>
-                <a:latin typeface="Arial"/>
-              </a:rPr>
-              <a:t>  It buys transfer at a real represented cost that failed our preregistered margin.</a:t>
-            </a:r>
-          </a:p>
-          <a:p>
-            <a:pPr algn="l">
-              <a:lnSpc>
-                <a:spcPct val="120000"/>
-              </a:lnSpc>
-              <a:spcBef>
-                <a:spcPts val="0"/>
-              </a:spcBef>
-              <a:spcAft>
-                <a:spcPts val="800"/>
-              </a:spcAft>
-            </a:pPr>
-            <a:r>
-              <a:rPr sz="1150" b="1" i="0">
-                <a:solidFill>
-                  <a:srgbClr val="A02128"/>
-                </a:solidFill>
-                <a:latin typeface="Arial"/>
-              </a:rPr>
-              <a:t>—  </a:t>
-            </a:r>
-            <a:r>
-              <a:rPr sz="1150" b="1" i="0">
-                <a:solidFill>
-                  <a:srgbClr val="12263A"/>
-                </a:solidFill>
-                <a:latin typeface="Arial"/>
-              </a:rPr>
-              <a:t>Compose to repair, not to upgrade.</a:t>
-            </a:r>
-            <a:r>
-              <a:rPr sz="1150" b="0" i="0">
-                <a:solidFill>
-                  <a:srgbClr val="5A6B7C"/>
-                </a:solidFill>
-                <a:latin typeface="Arial"/>
-              </a:rPr>
-              <a:t>  If you already tuned and transfer regressed, average base + adapter — the base is what buys the recovery back.</a:t>
-            </a:r>
-          </a:p>
-          <a:p>
-            <a:pPr algn="l">
-              <a:lnSpc>
-                <a:spcPct val="120000"/>
-              </a:lnSpc>
-              <a:spcBef>
-                <a:spcPts val="0"/>
-              </a:spcBef>
-              <a:spcAft>
-                <a:spcPts val="800"/>
-              </a:spcAft>
-            </a:pPr>
-            <a:r>
-              <a:rPr sz="1150" b="1" i="0">
-                <a:solidFill>
-                  <a:srgbClr val="A02128"/>
-                </a:solidFill>
-                <a:latin typeface="Arial"/>
-              </a:rPr>
-              <a:t>—  </a:t>
-            </a:r>
-            <a:r>
-              <a:rPr sz="1150" b="1" i="0">
-                <a:solidFill>
-                  <a:srgbClr val="12263A"/>
-                </a:solidFill>
-                <a:latin typeface="Arial"/>
-              </a:rPr>
-              <a:t>Rank recovery is never threshold reuse.</a:t>
-            </a:r>
-            <a:r>
-              <a:rPr sz="1150" b="0" i="0">
-                <a:solidFill>
-                  <a:srgbClr val="5A6B7C"/>
-                </a:solidFill>
-                <a:latin typeface="Arial"/>
-              </a:rPr>
-              <a:t>  Re-choose the operating point on the target regime — and quote AP at your prevalence, not at balance.</a:t>
-            </a:r>
-          </a:p>
-          <a:p>
-            <a:pPr algn="l">
-              <a:lnSpc>
-                <a:spcPct val="120000"/>
-              </a:lnSpc>
-              <a:spcBef>
-                <a:spcPts val="0"/>
-              </a:spcBef>
-              <a:spcAft>
-                <a:spcPts val="800"/>
-              </a:spcAft>
-            </a:pPr>
-            <a:r>
-              <a:rPr sz="1150" b="1" i="0">
-                <a:solidFill>
-                  <a:srgbClr val="A02128"/>
-                </a:solidFill>
-                <a:latin typeface="Arial"/>
-              </a:rPr>
-              <a:t>—  </a:t>
-            </a:r>
-            <a:r>
-              <a:rPr sz="1150" b="1" i="0">
-                <a:solidFill>
-                  <a:srgbClr val="12263A"/>
-                </a:solidFill>
-                <a:latin typeface="Arial"/>
-              </a:rPr>
-              <a:t>In a regulated domain, build the instrument.</a:t>
-            </a:r>
-            <a:r>
-              <a:rPr sz="1150" b="0" i="0">
-                <a:solidFill>
-                  <a:srgbClr val="5A6B7C"/>
-                </a:solidFill>
-                <a:latin typeface="Arial"/>
-              </a:rPr>
-              <a:t>  A dual-labeled domain set plus an invariance check — and audit the gate as hard as the guards.</a:t>
-            </a:r>
-          </a:p>
-        </p:txBody>
-      </p:sp>
-      <p:sp>
-        <p:nvSpPr>
-          <p:cNvPr id="18" name="Rounded Rectangle 17"/>
-          <p:cNvSpPr/>
-          <p:nvPr/>
-        </p:nvSpPr>
-        <p:spPr>
-          <a:xfrm>
-            <a:off x="5504688" y="4864608"/>
-            <a:ext cx="6120079" cy="1042415"/>
-          </a:xfrm>
-          <a:prstGeom prst="roundRect">
-            <a:avLst>
-              <a:gd name="adj" fmla="val 3000"/>
-            </a:avLst>
-          </a:prstGeom>
-          <a:solidFill>
-            <a:srgbClr val="F2F4F6"/>
-          </a:solidFill>
-          <a:ln>
-            <a:noFill/>
-          </a:ln>
-          <a:effectLst/>
-        </p:spPr>
-        <p:style>
-          <a:lnRef idx="1">
-            <a:schemeClr val="accent1"/>
-          </a:lnRef>
-          <a:fillRef idx="3">
-            <a:schemeClr val="accent1"/>
-          </a:fillRef>
-          <a:effectRef idx="2">
-            <a:schemeClr val="accent1"/>
-          </a:effectRef>
-          <a:fontRef idx="minor">
-            <a:schemeClr val="lt1"/>
-          </a:fontRef>
-        </p:style>
-        <p:txBody>
           <a:bodyPr rtlCol="0" anchor="ctr" wrap="square" lIns="219456" rIns="164592" tIns="91440" bIns="91440"/>
           <a:lstStyle/>
           <a:p>
@@ -14698,11 +14892,11 @@
             <a:r>
               <a:rPr sz="1150" b="1" i="0" spc="90">
                 <a:solidFill>
-                  <a:srgbClr val="5A6B7C"/>
-                </a:solidFill>
-                <a:latin typeface="Arial"/>
-              </a:rPr>
-              <a:t>SCOPE, STATED PLAINLY</a:t>
+                  <a:srgbClr val="2563EB"/>
+                </a:solidFill>
+                <a:latin typeface="Arial"/>
+              </a:rPr>
+              <a:t>THE GAP IS A FLOOR, NOT A CEILING</a:t>
             </a:r>
           </a:p>
           <a:p>
@@ -14718,33 +14912,33 @@
               </a:spcAft>
             </a:pPr>
             <a:r>
-              <a:rPr sz="1150" b="0" i="0">
+              <a:rPr sz="1050" b="0" i="0">
                 <a:solidFill>
                   <a:srgbClr val="12263A"/>
                 </a:solidFill>
                 <a:latin typeface="Arial"/>
               </a:rPr>
-              <a:t>Retrospective estimation on a fixed four-checkpoint panel with an inspected manifest; only the adaptation study is preregistered. Mortgage labels are LLM-judge, not counsel-reviewed. No causal, universal, deployment, or fair-lending claim is licensed by anything here.</a:t>
-            </a:r>
-          </a:p>
-        </p:txBody>
-      </p:sp>
-      <p:sp>
-        <p:nvSpPr>
-          <p:cNvPr id="19" name="Rectangle 18"/>
+              <a:t>The hosted score is a coarse integer 0–100 risk — 47–65 distinct values over 2,275 rows. Heavy ties cap AP resolution, so this comparison handicaps the hosted model. A frontier number above a local one is conservative.</a:t>
+            </a:r>
+          </a:p>
+        </p:txBody>
+      </p:sp>
+      <p:sp>
+        <p:nvSpPr>
+          <p:cNvPr id="12" name="Rectangle 11"/>
           <p:cNvSpPr/>
           <p:nvPr/>
         </p:nvSpPr>
         <p:spPr>
           <a:xfrm>
-            <a:off x="5504688" y="4864608"/>
-            <a:ext cx="50292" cy="1042415"/>
+            <a:off x="6830568" y="3858768"/>
+            <a:ext cx="50292" cy="1188720"/>
           </a:xfrm>
           <a:prstGeom prst="rect">
             <a:avLst/>
           </a:prstGeom>
           <a:solidFill>
-            <a:srgbClr val="5A6B7C"/>
+            <a:srgbClr val="2563EB"/>
           </a:solidFill>
           <a:ln>
             <a:noFill/>
@@ -14983,7 +15177,7 @@
                 </a:solidFill>
                 <a:latin typeface="Arial"/>
               </a:rPr>
-              <a:t>WHAT THIS CONTRIBUTES</a:t>
+              <a:t>TWO ROUTES THAT DO NOT WORK</a:t>
             </a:r>
           </a:p>
         </p:txBody>
@@ -14997,7 +15191,7 @@
         <p:spPr>
           <a:xfrm>
             <a:off x="566928" y="676656"/>
-            <a:ext cx="11057839" cy="658368"/>
+            <a:ext cx="11057839" cy="566928"/>
           </a:xfrm>
           <a:prstGeom prst="rect">
             <a:avLst/>
@@ -15028,20 +15222,65 @@
                 </a:solidFill>
                 <a:latin typeface="Georgia"/>
               </a:rPr>
-              <a:t>Four things we can defend, and what would make them evidence</a:t>
-            </a:r>
-          </a:p>
-        </p:txBody>
-      </p:sp>
-      <p:sp>
-        <p:nvSpPr>
-          <p:cNvPr id="7" name="Rectangle 6"/>
+              <a:t>Tuning does not close it, and neither does scale</a:t>
+            </a:r>
+          </a:p>
+        </p:txBody>
+      </p:sp>
+      <p:sp>
+        <p:nvSpPr>
+          <p:cNvPr id="7" name="TextBox 6"/>
+          <p:cNvSpPr txBox="1"/>
+          <p:nvPr/>
+        </p:nvSpPr>
+        <p:spPr>
+          <a:xfrm>
+            <a:off x="566928" y="1188720"/>
+            <a:ext cx="11057839" cy="310896"/>
+          </a:xfrm>
+          <a:prstGeom prst="rect">
+            <a:avLst/>
+          </a:prstGeom>
+          <a:noFill/>
+        </p:spPr>
+        <p:txBody>
+          <a:bodyPr wrap="square" anchor="t" lIns="0" rIns="0" tIns="0" bIns="0">
+            <a:spAutoFit/>
+          </a:bodyPr>
+          <a:lstStyle/>
+          <a:p>
+            <a:pPr algn="l">
+              <a:lnSpc>
+                <a:spcPct val="116000"/>
+              </a:lnSpc>
+              <a:spcBef>
+                <a:spcPts val="0"/>
+              </a:spcBef>
+              <a:spcAft>
+                <a:spcPts val="0"/>
+              </a:spcAft>
+            </a:pPr>
+            <a:r>
+              <a:rPr sz="1450" b="0" i="0">
+                <a:solidFill>
+                  <a:srgbClr val="5A6B7C"/>
+                </a:solidFill>
+                <a:latin typeface="Arial"/>
+              </a:rPr>
+              <a:t>Both tested on the same rows, at the same matched false-alarm budget</a:t>
+            </a:r>
+          </a:p>
+        </p:txBody>
+      </p:sp>
+      <p:sp>
+        <p:nvSpPr>
+          <p:cNvPr id="8" name="Rectangle 7"/>
           <p:cNvSpPr/>
           <p:nvPr/>
         </p:nvSpPr>
         <p:spPr>
           <a:xfrm>
-            <a:off x="566928" y="1444752"/>
+            <a:off x="566928" y="1554480"/>
             <a:ext cx="11057839" cy="11430"/>
           </a:xfrm>
           <a:prstGeom prst="rect">
@@ -15079,14 +15318,14 @@
       </p:sp>
       <p:sp>
         <p:nvSpPr>
-          <p:cNvPr id="8" name="TextBox 7"/>
+          <p:cNvPr id="9" name="TextBox 8"/>
           <p:cNvSpPr txBox="1"/>
           <p:nvPr/>
         </p:nvSpPr>
         <p:spPr>
           <a:xfrm>
-            <a:off x="566928" y="1627632"/>
-            <a:ext cx="5373471" cy="2834640"/>
+            <a:off x="566928" y="1737360"/>
+            <a:ext cx="5336895" cy="2286000"/>
           </a:xfrm>
           <a:prstGeom prst="rect">
             <a:avLst/>
@@ -15126,7 +15365,7 @@
                 </a:solidFill>
                 <a:latin typeface="Arial"/>
               </a:rPr>
-              <a:t>A paired, same-checkpoint estimand.</a:t>
+              <a:t>Tuning: 4 of 6 checkpoints got worse.</a:t>
             </a:r>
             <a:r>
               <a:rPr sz="1150" b="0" i="0">
@@ -15135,7 +15374,7 @@
                 </a:solidFill>
                 <a:latin typeface="Arial"/>
               </a:rPr>
-              <a:t>  Compare each guard only to its OWN base on identical rows, split by represented vs held-out. That is what turns a leaderboard delta into an attributable one — three results here exist only because of it.</a:t>
+              <a:t>  +0.122 on SmolLM2-1.7B, the weakest base; -0.059 on SmolLM3-3B. Mean +0.005 — a small number hiding swings ten times its size.</a:t>
             </a:r>
           </a:p>
           <a:p>
@@ -15166,7 +15405,7 @@
                 </a:solidFill>
                 <a:latin typeface="Arial"/>
               </a:rPr>
-              <a:t>The matched-alarm-budget read.</a:t>
+              <a:t>Scale: 8× the parameters bought +0.062.</a:t>
             </a:r>
             <a:r>
               <a:rPr sz="1150" b="0" i="0">
@@ -15175,7 +15414,7 @@
                 </a:solidFill>
                 <a:latin typeface="Arial"/>
               </a:rPr>
-              <a:t>  Cheap, almost never done, and it reverses a headline: transfer recall 0.517 → 0.217 at an equal false-alarm budget. Ranking arithmetic on committed scores — no GPU, no retraining.</a:t>
+              <a:t>  4B → 32B, interval [+0.039, +0.084]. The gap still left to hosted is +0.066 — about as much as scaling bought.</a:t>
             </a:r>
           </a:p>
           <a:p>
@@ -15206,7 +15445,7 @@
                 </a:solidFill>
                 <a:latin typeface="Arial"/>
               </a:rPr>
-              <a:t>Negative results kept as results.</a:t>
+              <a:t>4B → 8B bought nothing.</a:t>
             </a:r>
             <a:r>
               <a:rPr sz="1150" b="0" i="0">
@@ -15215,9 +15454,1762 @@
                 </a:solidFill>
                 <a:latin typeface="Arial"/>
               </a:rPr>
-              <a:t>  The preregistered study fails its own second criterion. The fairness probe we built fails its own audit. An accidental repeat gave us a measured reproduction noise floor that bounds our own small effects.</a:t>
-            </a:r>
-          </a:p>
+              <a:t>  -0.020 [-0.050, +0.001]; the interval includes zero, so read it as no gain rather than a loss.</a:t>
+            </a:r>
+          </a:p>
+        </p:txBody>
+      </p:sp>
+      <p:graphicFrame>
+        <p:nvGraphicFramePr>
+          <p:cNvPr id="10" name="Table 9"/>
+          <p:cNvGraphicFramePr>
+            <a:graphicFrameLocks noGrp="1"/>
+          </p:cNvGraphicFramePr>
+          <p:nvPr/>
+        </p:nvGraphicFramePr>
+        <p:xfrm>
+          <a:off x="6287871.5" y="1737360"/>
+          <a:ext cx="5336894" cy="2542032"/>
+        </p:xfrm>
+        <a:graphic>
+          <a:graphicData uri="http://schemas.openxmlformats.org/drawingml/2006/table">
+            <a:tbl>
+              <a:tblPr firstRow="1">
+                <a:tableStyleId>{5C22544A-7EE6-4342-B048-85BDC9FD1C3A}</a:tableStyleId>
+              </a:tblPr>
+              <a:tblGrid>
+                <a:gridCol w="2605555"/>
+                <a:gridCol w="1293792"/>
+                <a:gridCol w="1437547"/>
+              </a:tblGrid>
+              <a:tr h="347472">
+                <a:tc>
+                  <a:txBody>
+                    <a:bodyPr wrap="square"/>
+                    <a:lstStyle/>
+                    <a:p>
+                      <a:pPr algn="l">
+                        <a:spcBef>
+                          <a:spcPts val="0"/>
+                        </a:spcBef>
+                        <a:spcAft>
+                          <a:spcPts val="0"/>
+                        </a:spcAft>
+                      </a:pPr>
+                      <a:r>
+                        <a:rPr sz="950" b="1">
+                          <a:solidFill>
+                            <a:srgbClr val="FFFFFF"/>
+                          </a:solidFill>
+                          <a:latin typeface="Arial"/>
+                        </a:rPr>
+                        <a:t>Base (represented AP)</a:t>
+                      </a:r>
+                    </a:p>
+                  </a:txBody>
+                  <a:tcPr anchor="ctr" marL="91440" marR="91440" marT="0" marB="0">
+                    <a:solidFill>
+                      <a:srgbClr val="12263A"/>
+                    </a:solidFill>
+                  </a:tcPr>
+                </a:tc>
+                <a:tc>
+                  <a:txBody>
+                    <a:bodyPr wrap="square"/>
+                    <a:lstStyle/>
+                    <a:p>
+                      <a:pPr algn="ctr">
+                        <a:spcBef>
+                          <a:spcPts val="0"/>
+                        </a:spcBef>
+                        <a:spcAft>
+                          <a:spcPts val="0"/>
+                        </a:spcAft>
+                      </a:pPr>
+                      <a:r>
+                        <a:rPr sz="950" b="1">
+                          <a:solidFill>
+                            <a:srgbClr val="FFFFFF"/>
+                          </a:solidFill>
+                          <a:latin typeface="Arial"/>
+                        </a:rPr>
+                        <a:t>Δ repr.</a:t>
+                      </a:r>
+                    </a:p>
+                  </a:txBody>
+                  <a:tcPr anchor="ctr" marL="91440" marR="91440" marT="0" marB="0">
+                    <a:solidFill>
+                      <a:srgbClr val="12263A"/>
+                    </a:solidFill>
+                  </a:tcPr>
+                </a:tc>
+                <a:tc>
+                  <a:txBody>
+                    <a:bodyPr wrap="square"/>
+                    <a:lstStyle/>
+                    <a:p>
+                      <a:pPr algn="ctr">
+                        <a:spcBef>
+                          <a:spcPts val="0"/>
+                        </a:spcBef>
+                        <a:spcAft>
+                          <a:spcPts val="0"/>
+                        </a:spcAft>
+                      </a:pPr>
+                      <a:r>
+                        <a:rPr sz="950" b="1">
+                          <a:solidFill>
+                            <a:srgbClr val="FFFFFF"/>
+                          </a:solidFill>
+                          <a:latin typeface="Arial"/>
+                        </a:rPr>
+                        <a:t>Δ transfer</a:t>
+                      </a:r>
+                    </a:p>
+                  </a:txBody>
+                  <a:tcPr anchor="ctr" marL="91440" marR="91440" marT="0" marB="0">
+                    <a:solidFill>
+                      <a:srgbClr val="12263A"/>
+                    </a:solidFill>
+                  </a:tcPr>
+                </a:tc>
+              </a:tr>
+              <a:tr h="365760">
+                <a:tc>
+                  <a:txBody>
+                    <a:bodyPr wrap="square"/>
+                    <a:lstStyle/>
+                    <a:p>
+                      <a:pPr algn="l">
+                        <a:spcBef>
+                          <a:spcPts val="0"/>
+                        </a:spcBef>
+                        <a:spcAft>
+                          <a:spcPts val="0"/>
+                        </a:spcAft>
+                      </a:pPr>
+                      <a:r>
+                        <a:rPr sz="1050" b="0">
+                          <a:solidFill>
+                            <a:srgbClr val="12263A"/>
+                          </a:solidFill>
+                          <a:latin typeface="Arial"/>
+                        </a:rPr>
+                        <a:t>SmolLM2-1.7B  (.452)</a:t>
+                      </a:r>
+                    </a:p>
+                  </a:txBody>
+                  <a:tcPr anchor="ctr" marL="91440" marR="91440" marT="0" marB="0">
+                    <a:solidFill>
+                      <a:srgbClr val="FFFFFF"/>
+                    </a:solidFill>
+                  </a:tcPr>
+                </a:tc>
+                <a:tc>
+                  <a:txBody>
+                    <a:bodyPr wrap="square"/>
+                    <a:lstStyle/>
+                    <a:p>
+                      <a:pPr algn="ctr">
+                        <a:spcBef>
+                          <a:spcPts val="0"/>
+                        </a:spcBef>
+                        <a:spcAft>
+                          <a:spcPts val="0"/>
+                        </a:spcAft>
+                      </a:pPr>
+                      <a:r>
+                        <a:rPr sz="1050" b="0">
+                          <a:solidFill>
+                            <a:srgbClr val="12263A"/>
+                          </a:solidFill>
+                          <a:latin typeface="Arial"/>
+                        </a:rPr>
+                        <a:t>+0.528</a:t>
+                      </a:r>
+                    </a:p>
+                  </a:txBody>
+                  <a:tcPr anchor="ctr" marL="91440" marR="91440" marT="0" marB="0">
+                    <a:solidFill>
+                      <a:srgbClr val="FFFFFF"/>
+                    </a:solidFill>
+                  </a:tcPr>
+                </a:tc>
+                <a:tc>
+                  <a:txBody>
+                    <a:bodyPr wrap="square"/>
+                    <a:lstStyle/>
+                    <a:p>
+                      <a:pPr algn="ctr">
+                        <a:spcBef>
+                          <a:spcPts val="0"/>
+                        </a:spcBef>
+                        <a:spcAft>
+                          <a:spcPts val="0"/>
+                        </a:spcAft>
+                      </a:pPr>
+                      <a:r>
+                        <a:rPr sz="1050" b="1">
+                          <a:solidFill>
+                            <a:srgbClr val="15803D"/>
+                          </a:solidFill>
+                          <a:latin typeface="Arial"/>
+                        </a:rPr>
+                        <a:t>+0.040</a:t>
+                      </a:r>
+                    </a:p>
+                  </a:txBody>
+                  <a:tcPr anchor="ctr" marL="91440" marR="91440" marT="0" marB="0">
+                    <a:solidFill>
+                      <a:srgbClr val="FFFFFF"/>
+                    </a:solidFill>
+                  </a:tcPr>
+                </a:tc>
+              </a:tr>
+              <a:tr h="365760">
+                <a:tc>
+                  <a:txBody>
+                    <a:bodyPr wrap="square"/>
+                    <a:lstStyle/>
+                    <a:p>
+                      <a:pPr algn="l">
+                        <a:spcBef>
+                          <a:spcPts val="0"/>
+                        </a:spcBef>
+                        <a:spcAft>
+                          <a:spcPts val="0"/>
+                        </a:spcAft>
+                      </a:pPr>
+                      <a:r>
+                        <a:rPr sz="1050" b="0">
+                          <a:solidFill>
+                            <a:srgbClr val="12263A"/>
+                          </a:solidFill>
+                          <a:latin typeface="Arial"/>
+                        </a:rPr>
+                        <a:t>Qwen2.5-1.5B  (.633)</a:t>
+                      </a:r>
+                    </a:p>
+                  </a:txBody>
+                  <a:tcPr anchor="ctr" marL="91440" marR="91440" marT="0" marB="0">
+                    <a:solidFill>
+                      <a:srgbClr val="F7F9FA"/>
+                    </a:solidFill>
+                  </a:tcPr>
+                </a:tc>
+                <a:tc>
+                  <a:txBody>
+                    <a:bodyPr wrap="square"/>
+                    <a:lstStyle/>
+                    <a:p>
+                      <a:pPr algn="ctr">
+                        <a:spcBef>
+                          <a:spcPts val="0"/>
+                        </a:spcBef>
+                        <a:spcAft>
+                          <a:spcPts val="0"/>
+                        </a:spcAft>
+                      </a:pPr>
+                      <a:r>
+                        <a:rPr sz="1050" b="0">
+                          <a:solidFill>
+                            <a:srgbClr val="12263A"/>
+                          </a:solidFill>
+                          <a:latin typeface="Arial"/>
+                        </a:rPr>
+                        <a:t>+0.354</a:t>
+                      </a:r>
+                    </a:p>
+                  </a:txBody>
+                  <a:tcPr anchor="ctr" marL="91440" marR="91440" marT="0" marB="0">
+                    <a:solidFill>
+                      <a:srgbClr val="F7F9FA"/>
+                    </a:solidFill>
+                  </a:tcPr>
+                </a:tc>
+                <a:tc>
+                  <a:txBody>
+                    <a:bodyPr wrap="square"/>
+                    <a:lstStyle/>
+                    <a:p>
+                      <a:pPr algn="ctr">
+                        <a:spcBef>
+                          <a:spcPts val="0"/>
+                        </a:spcBef>
+                        <a:spcAft>
+                          <a:spcPts val="0"/>
+                        </a:spcAft>
+                      </a:pPr>
+                      <a:r>
+                        <a:rPr sz="1050" b="0">
+                          <a:solidFill>
+                            <a:srgbClr val="12263A"/>
+                          </a:solidFill>
+                          <a:latin typeface="Arial"/>
+                        </a:rPr>
+                        <a:t>−0.039</a:t>
+                      </a:r>
+                    </a:p>
+                  </a:txBody>
+                  <a:tcPr anchor="ctr" marL="91440" marR="91440" marT="0" marB="0">
+                    <a:solidFill>
+                      <a:srgbClr val="F7F9FA"/>
+                    </a:solidFill>
+                  </a:tcPr>
+                </a:tc>
+              </a:tr>
+              <a:tr h="365760">
+                <a:tc>
+                  <a:txBody>
+                    <a:bodyPr wrap="square"/>
+                    <a:lstStyle/>
+                    <a:p>
+                      <a:pPr algn="l">
+                        <a:spcBef>
+                          <a:spcPts val="0"/>
+                        </a:spcBef>
+                        <a:spcAft>
+                          <a:spcPts val="0"/>
+                        </a:spcAft>
+                      </a:pPr>
+                      <a:r>
+                        <a:rPr sz="1050" b="0">
+                          <a:solidFill>
+                            <a:srgbClr val="12263A"/>
+                          </a:solidFill>
+                          <a:latin typeface="Arial"/>
+                        </a:rPr>
+                        <a:t>SmolLM3-3B  (.662)</a:t>
+                      </a:r>
+                    </a:p>
+                  </a:txBody>
+                  <a:tcPr anchor="ctr" marL="91440" marR="91440" marT="0" marB="0">
+                    <a:solidFill>
+                      <a:srgbClr val="FFFFFF"/>
+                    </a:solidFill>
+                  </a:tcPr>
+                </a:tc>
+                <a:tc>
+                  <a:txBody>
+                    <a:bodyPr wrap="square"/>
+                    <a:lstStyle/>
+                    <a:p>
+                      <a:pPr algn="ctr">
+                        <a:spcBef>
+                          <a:spcPts val="0"/>
+                        </a:spcBef>
+                        <a:spcAft>
+                          <a:spcPts val="0"/>
+                        </a:spcAft>
+                      </a:pPr>
+                      <a:r>
+                        <a:rPr sz="1050" b="0">
+                          <a:solidFill>
+                            <a:srgbClr val="12263A"/>
+                          </a:solidFill>
+                          <a:latin typeface="Arial"/>
+                        </a:rPr>
+                        <a:t>+0.313</a:t>
+                      </a:r>
+                    </a:p>
+                  </a:txBody>
+                  <a:tcPr anchor="ctr" marL="91440" marR="91440" marT="0" marB="0">
+                    <a:solidFill>
+                      <a:srgbClr val="FFFFFF"/>
+                    </a:solidFill>
+                  </a:tcPr>
+                </a:tc>
+                <a:tc>
+                  <a:txBody>
+                    <a:bodyPr wrap="square"/>
+                    <a:lstStyle/>
+                    <a:p>
+                      <a:pPr algn="ctr">
+                        <a:spcBef>
+                          <a:spcPts val="0"/>
+                        </a:spcBef>
+                        <a:spcAft>
+                          <a:spcPts val="0"/>
+                        </a:spcAft>
+                      </a:pPr>
+                      <a:r>
+                        <a:rPr sz="1050" b="0">
+                          <a:solidFill>
+                            <a:srgbClr val="12263A"/>
+                          </a:solidFill>
+                          <a:latin typeface="Arial"/>
+                        </a:rPr>
+                        <a:t>−0.087</a:t>
+                      </a:r>
+                    </a:p>
+                  </a:txBody>
+                  <a:tcPr anchor="ctr" marL="91440" marR="91440" marT="0" marB="0">
+                    <a:solidFill>
+                      <a:srgbClr val="FFFFFF"/>
+                    </a:solidFill>
+                  </a:tcPr>
+                </a:tc>
+              </a:tr>
+              <a:tr h="365760">
+                <a:tc>
+                  <a:txBody>
+                    <a:bodyPr wrap="square"/>
+                    <a:lstStyle/>
+                    <a:p>
+                      <a:pPr algn="l">
+                        <a:spcBef>
+                          <a:spcPts val="0"/>
+                        </a:spcBef>
+                        <a:spcAft>
+                          <a:spcPts val="0"/>
+                        </a:spcAft>
+                      </a:pPr>
+                      <a:r>
+                        <a:rPr sz="1050" b="0">
+                          <a:solidFill>
+                            <a:srgbClr val="12263A"/>
+                          </a:solidFill>
+                          <a:latin typeface="Arial"/>
+                        </a:rPr>
+                        <a:t>Qwen3-4B  (.885)</a:t>
+                      </a:r>
+                    </a:p>
+                  </a:txBody>
+                  <a:tcPr anchor="ctr" marL="91440" marR="91440" marT="0" marB="0">
+                    <a:solidFill>
+                      <a:srgbClr val="F7F9FA"/>
+                    </a:solidFill>
+                  </a:tcPr>
+                </a:tc>
+                <a:tc>
+                  <a:txBody>
+                    <a:bodyPr wrap="square"/>
+                    <a:lstStyle/>
+                    <a:p>
+                      <a:pPr algn="ctr">
+                        <a:spcBef>
+                          <a:spcPts val="0"/>
+                        </a:spcBef>
+                        <a:spcAft>
+                          <a:spcPts val="0"/>
+                        </a:spcAft>
+                      </a:pPr>
+                      <a:r>
+                        <a:rPr sz="1050" b="0">
+                          <a:solidFill>
+                            <a:srgbClr val="12263A"/>
+                          </a:solidFill>
+                          <a:latin typeface="Arial"/>
+                        </a:rPr>
+                        <a:t>+0.098</a:t>
+                      </a:r>
+                    </a:p>
+                  </a:txBody>
+                  <a:tcPr anchor="ctr" marL="91440" marR="91440" marT="0" marB="0">
+                    <a:solidFill>
+                      <a:srgbClr val="F7F9FA"/>
+                    </a:solidFill>
+                  </a:tcPr>
+                </a:tc>
+                <a:tc>
+                  <a:txBody>
+                    <a:bodyPr wrap="square"/>
+                    <a:lstStyle/>
+                    <a:p>
+                      <a:pPr algn="ctr">
+                        <a:spcBef>
+                          <a:spcPts val="0"/>
+                        </a:spcBef>
+                        <a:spcAft>
+                          <a:spcPts val="0"/>
+                        </a:spcAft>
+                      </a:pPr>
+                      <a:r>
+                        <a:rPr sz="1050" b="0">
+                          <a:solidFill>
+                            <a:srgbClr val="12263A"/>
+                          </a:solidFill>
+                          <a:latin typeface="Arial"/>
+                        </a:rPr>
+                        <a:t>−0.150</a:t>
+                      </a:r>
+                    </a:p>
+                  </a:txBody>
+                  <a:tcPr anchor="ctr" marL="91440" marR="91440" marT="0" marB="0">
+                    <a:solidFill>
+                      <a:srgbClr val="F7F9FA"/>
+                    </a:solidFill>
+                  </a:tcPr>
+                </a:tc>
+              </a:tr>
+              <a:tr h="365760">
+                <a:tc>
+                  <a:txBody>
+                    <a:bodyPr wrap="square"/>
+                    <a:lstStyle/>
+                    <a:p>
+                      <a:pPr algn="l">
+                        <a:spcBef>
+                          <a:spcPts val="0"/>
+                        </a:spcBef>
+                        <a:spcAft>
+                          <a:spcPts val="0"/>
+                        </a:spcAft>
+                      </a:pPr>
+                      <a:r>
+                        <a:rPr sz="1050" b="0">
+                          <a:solidFill>
+                            <a:srgbClr val="12263A"/>
+                          </a:solidFill>
+                          <a:latin typeface="Arial"/>
+                        </a:rPr>
+                        <a:t>Qwen3-8B  (.905)</a:t>
+                      </a:r>
+                    </a:p>
+                  </a:txBody>
+                  <a:tcPr anchor="ctr" marL="91440" marR="91440" marT="0" marB="0">
+                    <a:solidFill>
+                      <a:srgbClr val="FFFFFF"/>
+                    </a:solidFill>
+                  </a:tcPr>
+                </a:tc>
+                <a:tc>
+                  <a:txBody>
+                    <a:bodyPr wrap="square"/>
+                    <a:lstStyle/>
+                    <a:p>
+                      <a:pPr algn="ctr">
+                        <a:spcBef>
+                          <a:spcPts val="0"/>
+                        </a:spcBef>
+                        <a:spcAft>
+                          <a:spcPts val="0"/>
+                        </a:spcAft>
+                      </a:pPr>
+                      <a:r>
+                        <a:rPr sz="1050" b="0">
+                          <a:solidFill>
+                            <a:srgbClr val="12263A"/>
+                          </a:solidFill>
+                          <a:latin typeface="Arial"/>
+                        </a:rPr>
+                        <a:t>+0.076</a:t>
+                      </a:r>
+                    </a:p>
+                  </a:txBody>
+                  <a:tcPr anchor="ctr" marL="91440" marR="91440" marT="0" marB="0">
+                    <a:solidFill>
+                      <a:srgbClr val="FFFFFF"/>
+                    </a:solidFill>
+                  </a:tcPr>
+                </a:tc>
+                <a:tc>
+                  <a:txBody>
+                    <a:bodyPr wrap="square"/>
+                    <a:lstStyle/>
+                    <a:p>
+                      <a:pPr algn="ctr">
+                        <a:spcBef>
+                          <a:spcPts val="0"/>
+                        </a:spcBef>
+                        <a:spcAft>
+                          <a:spcPts val="0"/>
+                        </a:spcAft>
+                      </a:pPr>
+                      <a:r>
+                        <a:rPr sz="1050" b="0">
+                          <a:solidFill>
+                            <a:srgbClr val="12263A"/>
+                          </a:solidFill>
+                          <a:latin typeface="Arial"/>
+                        </a:rPr>
+                        <a:t>−0.101</a:t>
+                      </a:r>
+                    </a:p>
+                  </a:txBody>
+                  <a:tcPr anchor="ctr" marL="91440" marR="91440" marT="0" marB="0">
+                    <a:solidFill>
+                      <a:srgbClr val="FFFFFF"/>
+                    </a:solidFill>
+                  </a:tcPr>
+                </a:tc>
+              </a:tr>
+              <a:tr h="365760">
+                <a:tc>
+                  <a:txBody>
+                    <a:bodyPr wrap="square"/>
+                    <a:lstStyle/>
+                    <a:p>
+                      <a:pPr algn="l">
+                        <a:spcBef>
+                          <a:spcPts val="0"/>
+                        </a:spcBef>
+                        <a:spcAft>
+                          <a:spcPts val="0"/>
+                        </a:spcAft>
+                      </a:pPr>
+                      <a:r>
+                        <a:rPr sz="1050" b="0">
+                          <a:solidFill>
+                            <a:srgbClr val="12263A"/>
+                          </a:solidFill>
+                          <a:latin typeface="Arial"/>
+                        </a:rPr>
+                        <a:t>Qwen3-32B  (.953)</a:t>
+                      </a:r>
+                    </a:p>
+                  </a:txBody>
+                  <a:tcPr anchor="ctr" marL="91440" marR="91440" marT="0" marB="0">
+                    <a:solidFill>
+                      <a:srgbClr val="F7F9FA"/>
+                    </a:solidFill>
+                  </a:tcPr>
+                </a:tc>
+                <a:tc>
+                  <a:txBody>
+                    <a:bodyPr wrap="square"/>
+                    <a:lstStyle/>
+                    <a:p>
+                      <a:pPr algn="ctr">
+                        <a:spcBef>
+                          <a:spcPts val="0"/>
+                        </a:spcBef>
+                        <a:spcAft>
+                          <a:spcPts val="0"/>
+                        </a:spcAft>
+                      </a:pPr>
+                      <a:r>
+                        <a:rPr sz="1050" b="1">
+                          <a:solidFill>
+                            <a:srgbClr val="A02128"/>
+                          </a:solidFill>
+                          <a:latin typeface="Arial"/>
+                        </a:rPr>
+                        <a:t>+0.037</a:t>
+                      </a:r>
+                    </a:p>
+                  </a:txBody>
+                  <a:tcPr anchor="ctr" marL="91440" marR="91440" marT="0" marB="0">
+                    <a:solidFill>
+                      <a:srgbClr val="F7F9FA"/>
+                    </a:solidFill>
+                  </a:tcPr>
+                </a:tc>
+                <a:tc>
+                  <a:txBody>
+                    <a:bodyPr wrap="square"/>
+                    <a:lstStyle/>
+                    <a:p>
+                      <a:pPr algn="ctr">
+                        <a:spcBef>
+                          <a:spcPts val="0"/>
+                        </a:spcBef>
+                        <a:spcAft>
+                          <a:spcPts val="0"/>
+                        </a:spcAft>
+                      </a:pPr>
+                      <a:r>
+                        <a:rPr sz="1050" b="1">
+                          <a:solidFill>
+                            <a:srgbClr val="A02128"/>
+                          </a:solidFill>
+                          <a:latin typeface="Arial"/>
+                        </a:rPr>
+                        <a:t>-0.117</a:t>
+                      </a:r>
+                    </a:p>
+                  </a:txBody>
+                  <a:tcPr anchor="ctr" marL="91440" marR="91440" marT="0" marB="0">
+                    <a:solidFill>
+                      <a:srgbClr val="F7F9FA"/>
+                    </a:solidFill>
+                  </a:tcPr>
+                </a:tc>
+              </a:tr>
+            </a:tbl>
+          </a:graphicData>
+        </a:graphic>
+      </p:graphicFrame>
+      <p:sp>
+        <p:nvSpPr>
+          <p:cNvPr id="11" name="Rounded Rectangle 10"/>
+          <p:cNvSpPr/>
+          <p:nvPr/>
+        </p:nvSpPr>
+        <p:spPr>
+          <a:xfrm>
+            <a:off x="566928" y="4187952"/>
+            <a:ext cx="11057839" cy="859536"/>
+          </a:xfrm>
+          <a:prstGeom prst="roundRect">
+            <a:avLst>
+              <a:gd name="adj" fmla="val 3000"/>
+            </a:avLst>
+          </a:prstGeom>
+          <a:solidFill>
+            <a:srgbClr val="FAF0F0"/>
+          </a:solidFill>
+          <a:ln>
+            <a:noFill/>
+          </a:ln>
+          <a:effectLst/>
+        </p:spPr>
+        <p:style>
+          <a:lnRef idx="1">
+            <a:schemeClr val="accent1"/>
+          </a:lnRef>
+          <a:fillRef idx="3">
+            <a:schemeClr val="accent1"/>
+          </a:fillRef>
+          <a:effectRef idx="2">
+            <a:schemeClr val="accent1"/>
+          </a:effectRef>
+          <a:fontRef idx="minor">
+            <a:schemeClr val="lt1"/>
+          </a:fontRef>
+        </p:style>
+        <p:txBody>
+          <a:bodyPr rtlCol="0" anchor="ctr" wrap="square" lIns="219456" rIns="164592" tIns="91440" bIns="91440"/>
+          <a:lstStyle/>
+          <a:p>
+            <a:pPr algn="l">
+              <a:lnSpc>
+                <a:spcPct val="116000"/>
+              </a:lnSpc>
+              <a:spcBef>
+                <a:spcPts val="0"/>
+              </a:spcBef>
+              <a:spcAft>
+                <a:spcPts val="300"/>
+              </a:spcAft>
+            </a:pPr>
+            <a:r>
+              <a:rPr sz="1150" b="1" i="0" spc="90">
+                <a:solidFill>
+                  <a:srgbClr val="A02128"/>
+                </a:solidFill>
+                <a:latin typeface="Arial"/>
+              </a:rPr>
+              <a:t>THE SPECIALIZATION TAX SCALES WITH THE BASE</a:t>
+            </a:r>
+          </a:p>
+          <a:p>
+            <a:pPr algn="l">
+              <a:lnSpc>
+                <a:spcPct val="116000"/>
+              </a:lnSpc>
+              <a:spcBef>
+                <a:spcPts val="0"/>
+              </a:spcBef>
+              <a:spcAft>
+                <a:spcPts val="0"/>
+              </a:spcAft>
+            </a:pPr>
+            <a:r>
+              <a:rPr sz="1050" b="0" i="0">
+                <a:solidFill>
+                  <a:srgbClr val="12263A"/>
+                </a:solidFill>
+                <a:latin typeface="Arial"/>
+              </a:rPr>
+              <a:t>Ordered by base strength, SFT's represented gain decays monotonically while its transfer cost grows. Tuning Qwen3-32B buys +0.037 represented and costs -0.117 transfer — and moves its ExpGuard recall -0.020, the wrong way. For a guardrail, whose job is the traffic nobody anticipated, that is a bad trade at any size.</a:t>
+            </a:r>
+          </a:p>
+        </p:txBody>
+      </p:sp>
+      <p:sp>
+        <p:nvSpPr>
+          <p:cNvPr id="12" name="Rectangle 11"/>
+          <p:cNvSpPr/>
+          <p:nvPr/>
+        </p:nvSpPr>
+        <p:spPr>
+          <a:xfrm>
+            <a:off x="566928" y="4187952"/>
+            <a:ext cx="50292" cy="859536"/>
+          </a:xfrm>
+          <a:prstGeom prst="rect">
+            <a:avLst/>
+          </a:prstGeom>
+          <a:solidFill>
+            <a:srgbClr val="A02128"/>
+          </a:solidFill>
+          <a:ln>
+            <a:noFill/>
+          </a:ln>
+          <a:effectLst/>
+        </p:spPr>
+        <p:style>
+          <a:lnRef idx="1">
+            <a:schemeClr val="accent1"/>
+          </a:lnRef>
+          <a:fillRef idx="3">
+            <a:schemeClr val="accent1"/>
+          </a:fillRef>
+          <a:effectRef idx="2">
+            <a:schemeClr val="accent1"/>
+          </a:effectRef>
+          <a:fontRef idx="minor">
+            <a:schemeClr val="lt1"/>
+          </a:fontRef>
+        </p:style>
+        <p:txBody>
+          <a:bodyPr rtlCol="0" anchor="ctr" wrap="square"/>
+          <a:lstStyle/>
+          <a:p>
+            <a:pPr algn="ctr"/>
+          </a:p>
+        </p:txBody>
+      </p:sp>
+    </p:spTree>
+  </p:cSld>
+  <p:clrMapOvr>
+    <a:masterClrMapping/>
+  </p:clrMapOvr>
+</p:sld>
+</file>
+
+<file path=ppt/slides/slide19.xml><?xml version="1.0" encoding="utf-8"?>
+<p:sld xmlns:a="http://schemas.openxmlformats.org/drawingml/2006/main" xmlns:p="http://schemas.openxmlformats.org/presentationml/2006/main" xmlns:r="http://schemas.openxmlformats.org/officeDocument/2006/relationships">
+  <p:cSld>
+    <p:spTree>
+      <p:nvGrpSpPr>
+        <p:cNvPr id="1" name=""/>
+        <p:cNvGrpSpPr/>
+        <p:nvPr/>
+      </p:nvGrpSpPr>
+      <p:grpSpPr/>
+      <p:sp>
+        <p:nvSpPr>
+          <p:cNvPr id="2" name="Rectangle 1"/>
+          <p:cNvSpPr/>
+          <p:nvPr/>
+        </p:nvSpPr>
+        <p:spPr>
+          <a:xfrm>
+            <a:off x="0" y="0"/>
+            <a:ext cx="12191695" cy="56692"/>
+          </a:xfrm>
+          <a:prstGeom prst="rect">
+            <a:avLst/>
+          </a:prstGeom>
+          <a:solidFill>
+            <a:srgbClr val="A02128"/>
+          </a:solidFill>
+          <a:ln>
+            <a:noFill/>
+          </a:ln>
+          <a:effectLst/>
+        </p:spPr>
+        <p:style>
+          <a:lnRef idx="1">
+            <a:schemeClr val="accent1"/>
+          </a:lnRef>
+          <a:fillRef idx="3">
+            <a:schemeClr val="accent1"/>
+          </a:fillRef>
+          <a:effectRef idx="2">
+            <a:schemeClr val="accent1"/>
+          </a:effectRef>
+          <a:fontRef idx="minor">
+            <a:schemeClr val="lt1"/>
+          </a:fontRef>
+        </p:style>
+        <p:txBody>
+          <a:bodyPr rtlCol="0" anchor="ctr" wrap="square"/>
+          <a:lstStyle/>
+          <a:p>
+            <a:pPr algn="ctr"/>
+          </a:p>
+        </p:txBody>
+      </p:sp>
+      <p:sp>
+        <p:nvSpPr>
+          <p:cNvPr id="3" name="TextBox 2"/>
+          <p:cNvSpPr txBox="1"/>
+          <p:nvPr/>
+        </p:nvSpPr>
+        <p:spPr>
+          <a:xfrm>
+            <a:off x="566928" y="6382512"/>
+            <a:ext cx="8229600" cy="256032"/>
+          </a:xfrm>
+          <a:prstGeom prst="rect">
+            <a:avLst/>
+          </a:prstGeom>
+          <a:noFill/>
+        </p:spPr>
+        <p:txBody>
+          <a:bodyPr wrap="square" anchor="t" lIns="0" rIns="0" tIns="0" bIns="0">
+            <a:spAutoFit/>
+          </a:bodyPr>
+          <a:lstStyle/>
+          <a:p>
+            <a:pPr algn="l">
+              <a:lnSpc>
+                <a:spcPct val="116000"/>
+              </a:lnSpc>
+              <a:spcBef>
+                <a:spcPts val="0"/>
+              </a:spcBef>
+              <a:spcAft>
+                <a:spcPts val="0"/>
+              </a:spcAft>
+            </a:pPr>
+            <a:r>
+              <a:rPr sz="950" b="0" i="0">
+                <a:solidFill>
+                  <a:srgbClr val="8A97A5"/>
+                </a:solidFill>
+                <a:latin typeface="Arial"/>
+              </a:rPr>
+              <a:t>The Safety-Guard Benchmark Chooses the Winner</a:t>
+            </a:r>
+            <a:r>
+              <a:rPr sz="950" b="0" i="0">
+                <a:solidFill>
+                  <a:srgbClr val="D8DEE4"/>
+                </a:solidFill>
+                <a:latin typeface="Arial"/>
+              </a:rPr>
+              <a:t>     ·     </a:t>
+            </a:r>
+            <a:r>
+              <a:rPr sz="950" b="0" i="0">
+                <a:solidFill>
+                  <a:srgbClr val="8A97A5"/>
+                </a:solidFill>
+                <a:latin typeface="Arial"/>
+              </a:rPr>
+              <a:t>github.com/rrahimi-uci/safety-guard-dynamics</a:t>
+            </a:r>
+          </a:p>
+        </p:txBody>
+      </p:sp>
+      <p:sp>
+        <p:nvSpPr>
+          <p:cNvPr id="4" name="TextBox 3"/>
+          <p:cNvSpPr txBox="1"/>
+          <p:nvPr/>
+        </p:nvSpPr>
+        <p:spPr>
+          <a:xfrm>
+            <a:off x="10527487" y="6382512"/>
+            <a:ext cx="1097280" cy="256032"/>
+          </a:xfrm>
+          <a:prstGeom prst="rect">
+            <a:avLst/>
+          </a:prstGeom>
+          <a:noFill/>
+        </p:spPr>
+        <p:txBody>
+          <a:bodyPr wrap="square" anchor="t" lIns="0" rIns="0" tIns="0" bIns="0">
+            <a:spAutoFit/>
+          </a:bodyPr>
+          <a:lstStyle/>
+          <a:p>
+            <a:pPr algn="r">
+              <a:lnSpc>
+                <a:spcPct val="116000"/>
+              </a:lnSpc>
+              <a:spcBef>
+                <a:spcPts val="0"/>
+              </a:spcBef>
+              <a:spcAft>
+                <a:spcPts val="0"/>
+              </a:spcAft>
+            </a:pPr>
+            <a:r>
+              <a:rPr sz="1050" b="1" i="0" spc="60">
+                <a:solidFill>
+                  <a:srgbClr val="A02128"/>
+                </a:solidFill>
+                <a:latin typeface="Arial"/>
+              </a:rPr>
+              <a:t>18</a:t>
+            </a:r>
+          </a:p>
+        </p:txBody>
+      </p:sp>
+      <p:sp>
+        <p:nvSpPr>
+          <p:cNvPr id="5" name="TextBox 4"/>
+          <p:cNvSpPr txBox="1"/>
+          <p:nvPr/>
+        </p:nvSpPr>
+        <p:spPr>
+          <a:xfrm>
+            <a:off x="566928" y="365760"/>
+            <a:ext cx="11057839" cy="237744"/>
+          </a:xfrm>
+          <a:prstGeom prst="rect">
+            <a:avLst/>
+          </a:prstGeom>
+          <a:noFill/>
+        </p:spPr>
+        <p:txBody>
+          <a:bodyPr wrap="square" anchor="t" lIns="0" rIns="0" tIns="0" bIns="0">
+            <a:spAutoFit/>
+          </a:bodyPr>
+          <a:lstStyle/>
+          <a:p>
+            <a:pPr algn="l">
+              <a:lnSpc>
+                <a:spcPct val="116000"/>
+              </a:lnSpc>
+              <a:spcBef>
+                <a:spcPts val="0"/>
+              </a:spcBef>
+              <a:spcAft>
+                <a:spcPts val="0"/>
+              </a:spcAft>
+            </a:pPr>
+            <a:r>
+              <a:rPr sz="1050" b="1" i="0" spc="140">
+                <a:solidFill>
+                  <a:srgbClr val="A02128"/>
+                </a:solidFill>
+                <a:latin typeface="Arial"/>
+              </a:rPr>
+              <a:t>WHAT TO DO</a:t>
+            </a:r>
+          </a:p>
+        </p:txBody>
+      </p:sp>
+      <p:sp>
+        <p:nvSpPr>
+          <p:cNvPr id="6" name="TextBox 5"/>
+          <p:cNvSpPr txBox="1"/>
+          <p:nvPr/>
+        </p:nvSpPr>
+        <p:spPr>
+          <a:xfrm>
+            <a:off x="566928" y="676656"/>
+            <a:ext cx="11057839" cy="658368"/>
+          </a:xfrm>
+          <a:prstGeom prst="rect">
+            <a:avLst/>
+          </a:prstGeom>
+          <a:noFill/>
+        </p:spPr>
+        <p:txBody>
+          <a:bodyPr wrap="square" anchor="t" lIns="0" rIns="0" tIns="0" bIns="0">
+            <a:spAutoFit/>
+          </a:bodyPr>
+          <a:lstStyle/>
+          <a:p>
+            <a:pPr algn="l">
+              <a:lnSpc>
+                <a:spcPct val="100000"/>
+              </a:lnSpc>
+              <a:spcBef>
+                <a:spcPts val="0"/>
+              </a:spcBef>
+              <a:spcAft>
+                <a:spcPts val="0"/>
+              </a:spcAft>
+            </a:pPr>
+            <a:r>
+              <a:rPr sz="2700" b="1" i="0">
+                <a:solidFill>
+                  <a:srgbClr val="12263A"/>
+                </a:solidFill>
+                <a:latin typeface="Georgia"/>
+              </a:rPr>
+              <a:t>Gate candidates, not leaderboards</a:t>
+            </a:r>
+          </a:p>
+        </p:txBody>
+      </p:sp>
+      <p:sp>
+        <p:nvSpPr>
+          <p:cNvPr id="7" name="Rectangle 6"/>
+          <p:cNvSpPr/>
+          <p:nvPr/>
+        </p:nvSpPr>
+        <p:spPr>
+          <a:xfrm>
+            <a:off x="566928" y="1444752"/>
+            <a:ext cx="11057839" cy="11430"/>
+          </a:xfrm>
+          <a:prstGeom prst="rect">
+            <a:avLst/>
+          </a:prstGeom>
+          <a:solidFill>
+            <a:srgbClr val="D8DEE4"/>
+          </a:solidFill>
+          <a:ln>
+            <a:noFill/>
+          </a:ln>
+          <a:effectLst/>
+        </p:spPr>
+        <p:style>
+          <a:lnRef idx="1">
+            <a:schemeClr val="accent1"/>
+          </a:lnRef>
+          <a:fillRef idx="3">
+            <a:schemeClr val="accent1"/>
+          </a:fillRef>
+          <a:effectRef idx="2">
+            <a:schemeClr val="accent1"/>
+          </a:effectRef>
+          <a:fontRef idx="minor">
+            <a:schemeClr val="lt1"/>
+          </a:fontRef>
+        </p:style>
+        <p:txBody>
+          <a:bodyPr rtlCol="0" anchor="ctr" wrap="square"/>
+          <a:lstStyle/>
+          <a:p>
+            <a:pPr algn="ctr"/>
+          </a:p>
+        </p:txBody>
+      </p:sp>
+      <p:sp>
+        <p:nvSpPr>
+          <p:cNvPr id="8" name="Rounded Rectangle 7"/>
+          <p:cNvSpPr/>
+          <p:nvPr/>
+        </p:nvSpPr>
+        <p:spPr>
+          <a:xfrm>
+            <a:off x="566928" y="1645920"/>
+            <a:ext cx="4480560" cy="603504"/>
+          </a:xfrm>
+          <a:prstGeom prst="roundRect">
+            <a:avLst>
+              <a:gd name="adj" fmla="val 5000"/>
+            </a:avLst>
+          </a:prstGeom>
+          <a:solidFill>
+            <a:srgbClr val="F7F9FA"/>
+          </a:solidFill>
+          <a:ln w="12700">
+            <a:solidFill>
+              <a:srgbClr val="D8DEE4"/>
+            </a:solidFill>
+          </a:ln>
+          <a:effectLst/>
+        </p:spPr>
+        <p:style>
+          <a:lnRef idx="1">
+            <a:schemeClr val="accent1"/>
+          </a:lnRef>
+          <a:fillRef idx="3">
+            <a:schemeClr val="accent1"/>
+          </a:fillRef>
+          <a:effectRef idx="2">
+            <a:schemeClr val="accent1"/>
+          </a:effectRef>
+          <a:fontRef idx="minor">
+            <a:schemeClr val="lt1"/>
+          </a:fontRef>
+        </p:style>
+        <p:txBody>
+          <a:bodyPr rtlCol="0" anchor="ctr" wrap="square" lIns="164592" rIns="128016"/>
+          <a:lstStyle/>
+          <a:p>
+            <a:pPr algn="l">
+              <a:lnSpc>
+                <a:spcPct val="100000"/>
+              </a:lnSpc>
+              <a:spcBef>
+                <a:spcPts val="0"/>
+              </a:spcBef>
+              <a:spcAft>
+                <a:spcPts val="200"/>
+              </a:spcAft>
+            </a:pPr>
+            <a:r>
+              <a:rPr sz="1200" b="1" i="0">
+                <a:solidFill>
+                  <a:srgbClr val="12263A"/>
+                </a:solidFill>
+                <a:latin typeface="Arial"/>
+              </a:rPr>
+              <a:t>1.  Freeze the candidate registry</a:t>
+            </a:r>
+          </a:p>
+          <a:p>
+            <a:pPr algn="l">
+              <a:lnSpc>
+                <a:spcPct val="108000"/>
+              </a:lnSpc>
+              <a:spcBef>
+                <a:spcPts val="0"/>
+              </a:spcBef>
+              <a:spcAft>
+                <a:spcPts val="0"/>
+              </a:spcAft>
+            </a:pPr>
+            <a:r>
+              <a:rPr sz="1000" b="0" i="0">
+                <a:solidFill>
+                  <a:srgbClr val="5A6B7C"/>
+                </a:solidFill>
+                <a:latin typeface="Arial"/>
+              </a:rPr>
+              <a:t>base · SFT · KL-SFT · composition — with checkpoint, prompt, calibrator, threshold rule, owner</a:t>
+            </a:r>
+          </a:p>
+        </p:txBody>
+      </p:sp>
+      <p:sp>
+        <p:nvSpPr>
+          <p:cNvPr id="9" name="Down Arrow 8"/>
+          <p:cNvSpPr/>
+          <p:nvPr/>
+        </p:nvSpPr>
+        <p:spPr>
+          <a:xfrm>
+            <a:off x="2729484" y="2286000"/>
+            <a:ext cx="155448" cy="201168"/>
+          </a:xfrm>
+          <a:prstGeom prst="downArrow">
+            <a:avLst/>
+          </a:prstGeom>
+          <a:solidFill>
+            <a:srgbClr val="8A97A5"/>
+          </a:solidFill>
+          <a:ln>
+            <a:noFill/>
+          </a:ln>
+          <a:effectLst/>
+        </p:spPr>
+        <p:style>
+          <a:lnRef idx="1">
+            <a:schemeClr val="accent1"/>
+          </a:lnRef>
+          <a:fillRef idx="3">
+            <a:schemeClr val="accent1"/>
+          </a:fillRef>
+          <a:effectRef idx="2">
+            <a:schemeClr val="accent1"/>
+          </a:effectRef>
+          <a:fontRef idx="minor">
+            <a:schemeClr val="lt1"/>
+          </a:fontRef>
+        </p:style>
+        <p:txBody>
+          <a:bodyPr rtlCol="0" anchor="ctr" wrap="square"/>
+          <a:lstStyle/>
+          <a:p>
+            <a:pPr algn="ctr"/>
+          </a:p>
+        </p:txBody>
+      </p:sp>
+      <p:sp>
+        <p:nvSpPr>
+          <p:cNvPr id="10" name="Rounded Rectangle 9"/>
+          <p:cNvSpPr/>
+          <p:nvPr/>
+        </p:nvSpPr>
+        <p:spPr>
+          <a:xfrm>
+            <a:off x="566928" y="2523744"/>
+            <a:ext cx="4480560" cy="603504"/>
+          </a:xfrm>
+          <a:prstGeom prst="roundRect">
+            <a:avLst>
+              <a:gd name="adj" fmla="val 5000"/>
+            </a:avLst>
+          </a:prstGeom>
+          <a:solidFill>
+            <a:srgbClr val="F7F9FA"/>
+          </a:solidFill>
+          <a:ln w="12700">
+            <a:solidFill>
+              <a:srgbClr val="D8DEE4"/>
+            </a:solidFill>
+          </a:ln>
+          <a:effectLst/>
+        </p:spPr>
+        <p:style>
+          <a:lnRef idx="1">
+            <a:schemeClr val="accent1"/>
+          </a:lnRef>
+          <a:fillRef idx="3">
+            <a:schemeClr val="accent1"/>
+          </a:fillRef>
+          <a:effectRef idx="2">
+            <a:schemeClr val="accent1"/>
+          </a:effectRef>
+          <a:fontRef idx="minor">
+            <a:schemeClr val="lt1"/>
+          </a:fontRef>
+        </p:style>
+        <p:txBody>
+          <a:bodyPr rtlCol="0" anchor="ctr" wrap="square" lIns="164592" rIns="128016"/>
+          <a:lstStyle/>
+          <a:p>
+            <a:pPr algn="l">
+              <a:lnSpc>
+                <a:spcPct val="100000"/>
+              </a:lnSpc>
+              <a:spcBef>
+                <a:spcPts val="0"/>
+              </a:spcBef>
+              <a:spcAft>
+                <a:spcPts val="200"/>
+              </a:spcAft>
+            </a:pPr>
+            <a:r>
+              <a:rPr sz="1200" b="1" i="0">
+                <a:solidFill>
+                  <a:srgbClr val="12263A"/>
+                </a:solidFill>
+                <a:latin typeface="Arial"/>
+              </a:rPr>
+              <a:t>2.  Calibrate and threshold each candidate</a:t>
+            </a:r>
+          </a:p>
+          <a:p>
+            <a:pPr algn="l">
+              <a:lnSpc>
+                <a:spcPct val="108000"/>
+              </a:lnSpc>
+              <a:spcBef>
+                <a:spcPts val="0"/>
+              </a:spcBef>
+              <a:spcAft>
+                <a:spcPts val="0"/>
+              </a:spcAft>
+            </a:pPr>
+            <a:r>
+              <a:rPr sz="1000" b="0" i="0">
+                <a:solidFill>
+                  <a:srgbClr val="5A6B7C"/>
+                </a:solidFill>
+                <a:latin typeface="Arial"/>
+              </a:rPr>
+              <a:t>separately, on target-regime calibration data</a:t>
+            </a:r>
+          </a:p>
+        </p:txBody>
+      </p:sp>
+      <p:sp>
+        <p:nvSpPr>
+          <p:cNvPr id="11" name="Down Arrow 10"/>
+          <p:cNvSpPr/>
+          <p:nvPr/>
+        </p:nvSpPr>
+        <p:spPr>
+          <a:xfrm>
+            <a:off x="2729484" y="3163824"/>
+            <a:ext cx="155448" cy="201168"/>
+          </a:xfrm>
+          <a:prstGeom prst="downArrow">
+            <a:avLst/>
+          </a:prstGeom>
+          <a:solidFill>
+            <a:srgbClr val="8A97A5"/>
+          </a:solidFill>
+          <a:ln>
+            <a:noFill/>
+          </a:ln>
+          <a:effectLst/>
+        </p:spPr>
+        <p:style>
+          <a:lnRef idx="1">
+            <a:schemeClr val="accent1"/>
+          </a:lnRef>
+          <a:fillRef idx="3">
+            <a:schemeClr val="accent1"/>
+          </a:fillRef>
+          <a:effectRef idx="2">
+            <a:schemeClr val="accent1"/>
+          </a:effectRef>
+          <a:fontRef idx="minor">
+            <a:schemeClr val="lt1"/>
+          </a:fontRef>
+        </p:style>
+        <p:txBody>
+          <a:bodyPr rtlCol="0" anchor="ctr" wrap="square"/>
+          <a:lstStyle/>
+          <a:p>
+            <a:pPr algn="ctr"/>
+          </a:p>
+        </p:txBody>
+      </p:sp>
+      <p:sp>
+        <p:nvSpPr>
+          <p:cNvPr id="12" name="Rounded Rectangle 11"/>
+          <p:cNvSpPr/>
+          <p:nvPr/>
+        </p:nvSpPr>
+        <p:spPr>
+          <a:xfrm>
+            <a:off x="566928" y="3401568"/>
+            <a:ext cx="4480560" cy="603504"/>
+          </a:xfrm>
+          <a:prstGeom prst="roundRect">
+            <a:avLst>
+              <a:gd name="adj" fmla="val 5000"/>
+            </a:avLst>
+          </a:prstGeom>
+          <a:solidFill>
+            <a:srgbClr val="F7F9FA"/>
+          </a:solidFill>
+          <a:ln w="12700">
+            <a:solidFill>
+              <a:srgbClr val="D8DEE4"/>
+            </a:solidFill>
+          </a:ln>
+          <a:effectLst/>
+        </p:spPr>
+        <p:style>
+          <a:lnRef idx="1">
+            <a:schemeClr val="accent1"/>
+          </a:lnRef>
+          <a:fillRef idx="3">
+            <a:schemeClr val="accent1"/>
+          </a:fillRef>
+          <a:effectRef idx="2">
+            <a:schemeClr val="accent1"/>
+          </a:effectRef>
+          <a:fontRef idx="minor">
+            <a:schemeClr val="lt1"/>
+          </a:fontRef>
+        </p:style>
+        <p:txBody>
+          <a:bodyPr rtlCol="0" anchor="ctr" wrap="square" lIns="164592" rIns="128016"/>
+          <a:lstStyle/>
+          <a:p>
+            <a:pPr algn="l">
+              <a:lnSpc>
+                <a:spcPct val="100000"/>
+              </a:lnSpc>
+              <a:spcBef>
+                <a:spcPts val="0"/>
+              </a:spcBef>
+              <a:spcAft>
+                <a:spcPts val="200"/>
+              </a:spcAft>
+            </a:pPr>
+            <a:r>
+              <a:rPr sz="1200" b="1" i="0">
+                <a:solidFill>
+                  <a:srgbClr val="12263A"/>
+                </a:solidFill>
+                <a:latin typeface="Arial"/>
+              </a:rPr>
+              <a:t>3.  Open the blind acceptance set once</a:t>
+            </a:r>
+          </a:p>
+          <a:p>
+            <a:pPr algn="l">
+              <a:lnSpc>
+                <a:spcPct val="108000"/>
+              </a:lnSpc>
+              <a:spcBef>
+                <a:spcPts val="0"/>
+              </a:spcBef>
+              <a:spcAft>
+                <a:spcPts val="0"/>
+              </a:spcAft>
+            </a:pPr>
+            <a:r>
+              <a:rPr sz="1000" b="0" i="0">
+                <a:solidFill>
+                  <a:srgbClr val="5A6B7C"/>
+                </a:solidFill>
+                <a:latin typeface="Arial"/>
+              </a:rPr>
+              <a:t>paired rows, one shot</a:t>
+            </a:r>
+          </a:p>
+        </p:txBody>
+      </p:sp>
+      <p:sp>
+        <p:nvSpPr>
+          <p:cNvPr id="13" name="Down Arrow 12"/>
+          <p:cNvSpPr/>
+          <p:nvPr/>
+        </p:nvSpPr>
+        <p:spPr>
+          <a:xfrm>
+            <a:off x="2729484" y="4041648"/>
+            <a:ext cx="155448" cy="201168"/>
+          </a:xfrm>
+          <a:prstGeom prst="downArrow">
+            <a:avLst/>
+          </a:prstGeom>
+          <a:solidFill>
+            <a:srgbClr val="8A97A5"/>
+          </a:solidFill>
+          <a:ln>
+            <a:noFill/>
+          </a:ln>
+          <a:effectLst/>
+        </p:spPr>
+        <p:style>
+          <a:lnRef idx="1">
+            <a:schemeClr val="accent1"/>
+          </a:lnRef>
+          <a:fillRef idx="3">
+            <a:schemeClr val="accent1"/>
+          </a:fillRef>
+          <a:effectRef idx="2">
+            <a:schemeClr val="accent1"/>
+          </a:effectRef>
+          <a:fontRef idx="minor">
+            <a:schemeClr val="lt1"/>
+          </a:fontRef>
+        </p:style>
+        <p:txBody>
+          <a:bodyPr rtlCol="0" anchor="ctr" wrap="square"/>
+          <a:lstStyle/>
+          <a:p>
+            <a:pPr algn="ctr"/>
+          </a:p>
+        </p:txBody>
+      </p:sp>
+      <p:sp>
+        <p:nvSpPr>
+          <p:cNvPr id="14" name="Rounded Rectangle 13"/>
+          <p:cNvSpPr/>
+          <p:nvPr/>
+        </p:nvSpPr>
+        <p:spPr>
+          <a:xfrm>
+            <a:off x="566928" y="4279392"/>
+            <a:ext cx="4480560" cy="786384"/>
+          </a:xfrm>
+          <a:prstGeom prst="roundRect">
+            <a:avLst>
+              <a:gd name="adj" fmla="val 5000"/>
+            </a:avLst>
+          </a:prstGeom>
+          <a:solidFill>
+            <a:srgbClr val="EFF4FE"/>
+          </a:solidFill>
+          <a:ln w="12700">
+            <a:solidFill>
+              <a:srgbClr val="D8DEE4"/>
+            </a:solidFill>
+          </a:ln>
+          <a:effectLst/>
+        </p:spPr>
+        <p:style>
+          <a:lnRef idx="1">
+            <a:schemeClr val="accent1"/>
+          </a:lnRef>
+          <a:fillRef idx="3">
+            <a:schemeClr val="accent1"/>
+          </a:fillRef>
+          <a:effectRef idx="2">
+            <a:schemeClr val="accent1"/>
+          </a:effectRef>
+          <a:fontRef idx="minor">
+            <a:schemeClr val="lt1"/>
+          </a:fontRef>
+        </p:style>
+        <p:txBody>
+          <a:bodyPr rtlCol="0" anchor="ctr" wrap="square" lIns="164592" rIns="128016"/>
+          <a:lstStyle/>
+          <a:p>
+            <a:pPr algn="l">
+              <a:lnSpc>
+                <a:spcPct val="100000"/>
+              </a:lnSpc>
+              <a:spcBef>
+                <a:spcPts val="0"/>
+              </a:spcBef>
+              <a:spcAft>
+                <a:spcPts val="200"/>
+              </a:spcAft>
+            </a:pPr>
+            <a:r>
+              <a:rPr sz="1200" b="1" i="0">
+                <a:solidFill>
+                  <a:srgbClr val="12263A"/>
+                </a:solidFill>
+                <a:latin typeface="Arial"/>
+              </a:rPr>
+              <a:t>4.  Require every gate to pass</a:t>
+            </a:r>
+          </a:p>
+          <a:p>
+            <a:pPr algn="l">
+              <a:lnSpc>
+                <a:spcPct val="108000"/>
+              </a:lnSpc>
+              <a:spcBef>
+                <a:spcPts val="0"/>
+              </a:spcBef>
+              <a:spcAft>
+                <a:spcPts val="0"/>
+              </a:spcAft>
+            </a:pPr>
+            <a:r>
+              <a:rPr sz="1000" b="0" i="0">
+                <a:solidFill>
+                  <a:srgbClr val="5A6B7C"/>
+                </a:solidFill>
+                <a:latin typeface="Arial"/>
+              </a:rPr>
+              <a:t>absolute-AP floor · operating point · transfer retention vs base · each domain separately · reliability · SLO · governance</a:t>
+            </a:r>
+          </a:p>
+        </p:txBody>
+      </p:sp>
+      <p:sp>
+        <p:nvSpPr>
+          <p:cNvPr id="15" name="Rounded Rectangle 14"/>
+          <p:cNvSpPr/>
+          <p:nvPr/>
+        </p:nvSpPr>
+        <p:spPr>
+          <a:xfrm>
+            <a:off x="566928" y="5340096"/>
+            <a:ext cx="2148840" cy="566928"/>
+          </a:xfrm>
+          <a:prstGeom prst="roundRect">
+            <a:avLst>
+              <a:gd name="adj" fmla="val 6000"/>
+            </a:avLst>
+          </a:prstGeom>
+          <a:solidFill>
+            <a:srgbClr val="EEF6F0"/>
+          </a:solidFill>
+          <a:ln w="12700">
+            <a:solidFill>
+              <a:srgbClr val="15803D"/>
+            </a:solidFill>
+          </a:ln>
+          <a:effectLst/>
+        </p:spPr>
+        <p:style>
+          <a:lnRef idx="1">
+            <a:schemeClr val="accent1"/>
+          </a:lnRef>
+          <a:fillRef idx="3">
+            <a:schemeClr val="accent1"/>
+          </a:fillRef>
+          <a:effectRef idx="2">
+            <a:schemeClr val="accent1"/>
+          </a:effectRef>
+          <a:fontRef idx="minor">
+            <a:schemeClr val="lt1"/>
+          </a:fontRef>
+        </p:style>
+        <p:txBody>
+          <a:bodyPr rtlCol="0" anchor="ctr" wrap="square"/>
+          <a:lstStyle/>
+          <a:p>
+            <a:pPr algn="ctr">
+              <a:lnSpc>
+                <a:spcPct val="100000"/>
+              </a:lnSpc>
+              <a:spcBef>
+                <a:spcPts val="0"/>
+              </a:spcBef>
+              <a:spcAft>
+                <a:spcPts val="0"/>
+              </a:spcAft>
+            </a:pPr>
+            <a:r>
+              <a:rPr sz="1050" b="1" i="0">
+                <a:solidFill>
+                  <a:srgbClr val="15803D"/>
+                </a:solidFill>
+                <a:latin typeface="Arial"/>
+              </a:rPr>
+              <a:t>all pass  →  shadow, canary,
+monitor, rollback-ready</a:t>
+            </a:r>
+          </a:p>
+        </p:txBody>
+      </p:sp>
+      <p:sp>
+        <p:nvSpPr>
+          <p:cNvPr id="16" name="Rounded Rectangle 15"/>
+          <p:cNvSpPr/>
+          <p:nvPr/>
+        </p:nvSpPr>
+        <p:spPr>
+          <a:xfrm>
+            <a:off x="2898648" y="5340096"/>
+            <a:ext cx="2148840" cy="566928"/>
+          </a:xfrm>
+          <a:prstGeom prst="roundRect">
+            <a:avLst>
+              <a:gd name="adj" fmla="val 6000"/>
+            </a:avLst>
+          </a:prstGeom>
+          <a:solidFill>
+            <a:srgbClr val="FAF0F0"/>
+          </a:solidFill>
+          <a:ln w="12700">
+            <a:solidFill>
+              <a:srgbClr val="A02128"/>
+            </a:solidFill>
+          </a:ln>
+          <a:effectLst/>
+        </p:spPr>
+        <p:style>
+          <a:lnRef idx="1">
+            <a:schemeClr val="accent1"/>
+          </a:lnRef>
+          <a:fillRef idx="3">
+            <a:schemeClr val="accent1"/>
+          </a:fillRef>
+          <a:effectRef idx="2">
+            <a:schemeClr val="accent1"/>
+          </a:effectRef>
+          <a:fontRef idx="minor">
+            <a:schemeClr val="lt1"/>
+          </a:fontRef>
+        </p:style>
+        <p:txBody>
+          <a:bodyPr rtlCol="0" anchor="ctr" wrap="square"/>
+          <a:lstStyle/>
+          <a:p>
+            <a:pPr algn="ctr">
+              <a:lnSpc>
+                <a:spcPct val="100000"/>
+              </a:lnSpc>
+              <a:spcBef>
+                <a:spcPts val="0"/>
+              </a:spcBef>
+              <a:spcAft>
+                <a:spcPts val="0"/>
+              </a:spcAft>
+            </a:pPr>
+            <a:r>
+              <a:rPr sz="1050" b="1" i="0">
+                <a:solidFill>
+                  <a:srgbClr val="A02128"/>
+                </a:solidFill>
+                <a:latin typeface="Arial"/>
+              </a:rPr>
+              <a:t>any gate missing  →  NO SHIP
+(a missing gate is a failure)</a:t>
+            </a:r>
+          </a:p>
+        </p:txBody>
+      </p:sp>
+      <p:sp>
+        <p:nvSpPr>
+          <p:cNvPr id="17" name="TextBox 16"/>
+          <p:cNvSpPr txBox="1"/>
+          <p:nvPr/>
+        </p:nvSpPr>
+        <p:spPr>
+          <a:xfrm>
+            <a:off x="5504688" y="1627632"/>
+            <a:ext cx="6120079" cy="3017520"/>
+          </a:xfrm>
+          <a:prstGeom prst="rect">
+            <a:avLst/>
+          </a:prstGeom>
+          <a:noFill/>
+        </p:spPr>
+        <p:txBody>
+          <a:bodyPr wrap="square" anchor="t" lIns="0" rIns="0" tIns="0" bIns="0">
+            <a:spAutoFit/>
+          </a:bodyPr>
+          <a:lstStyle/>
           <a:p>
             <a:pPr algn="l">
               <a:lnSpc>
@@ -15227,7 +17219,7 @@
                 <a:spcPts val="0"/>
               </a:spcBef>
               <a:spcAft>
-                <a:spcPts val="900"/>
+                <a:spcPts val="800"/>
               </a:spcAft>
             </a:pPr>
             <a:r>
@@ -15246,7 +17238,7 @@
                 </a:solidFill>
                 <a:latin typeface="Arial"/>
               </a:rPr>
-              <a:t>A released instrument.</a:t>
+              <a:t>Never rank guards on a single leaderboard.</a:t>
             </a:r>
             <a:r>
               <a:rPr sz="1150" b="0" i="0">
@@ -15255,31 +17247,251 @@
                 </a:solidFill>
                 <a:latin typeface="Arial"/>
               </a:rPr>
-              <a:t>  v1_hmda2022 — 994 dual-labeled rows, CC BY 4.0 — plus text-free per-row scores and one command that regenerates the covered tables and prints the coverage it did NOT achieve.</a:t>
-            </a:r>
-          </a:p>
-        </p:txBody>
-      </p:sp>
-      <p:sp>
-        <p:nvSpPr>
-          <p:cNvPr id="9" name="TextBox 8"/>
-          <p:cNvSpPr txBox="1"/>
-          <p:nvPr/>
-        </p:nvSpPr>
-        <p:spPr>
-          <a:xfrm>
-            <a:off x="6251295" y="1591056"/>
-            <a:ext cx="5373471" cy="274320"/>
-          </a:xfrm>
-          <a:prstGeom prst="rect">
-            <a:avLst/>
-          </a:prstGeom>
-          <a:noFill/>
-        </p:spPr>
-        <p:txBody>
-          <a:bodyPr wrap="square" anchor="t" lIns="0" rIns="0" tIns="0" bIns="0">
-            <a:spAutoFit/>
-          </a:bodyPr>
+              <a:t>  Score your candidates on represented, held-out, over-refusal and domain sets.</a:t>
+            </a:r>
+          </a:p>
+          <a:p>
+            <a:pPr algn="l">
+              <a:lnSpc>
+                <a:spcPct val="120000"/>
+              </a:lnSpc>
+              <a:spcBef>
+                <a:spcPts val="0"/>
+              </a:spcBef>
+              <a:spcAft>
+                <a:spcPts val="800"/>
+              </a:spcAft>
+            </a:pPr>
+            <a:r>
+              <a:rPr sz="1150" b="1" i="0">
+                <a:solidFill>
+                  <a:srgbClr val="A02128"/>
+                </a:solidFill>
+                <a:latin typeface="Arial"/>
+              </a:rPr>
+              <a:t>—  </a:t>
+            </a:r>
+            <a:r>
+              <a:rPr sz="1150" b="1" i="0">
+                <a:solidFill>
+                  <a:srgbClr val="12263A"/>
+                </a:solidFill>
+                <a:latin typeface="Arial"/>
+              </a:rPr>
+              <a:t>Always compare a tune to its own base — at a matched false-alarm rate.</a:t>
+            </a:r>
+            <a:r>
+              <a:rPr sz="1150" b="0" i="0">
+                <a:solidFill>
+                  <a:srgbClr val="5A6B7C"/>
+                </a:solidFill>
+                <a:latin typeface="Arial"/>
+              </a:rPr>
+              <a:t>  A delta against other models hides the transfer cost; a recall compared at unequal alarm rates hides its sign.</a:t>
+            </a:r>
+          </a:p>
+          <a:p>
+            <a:pPr algn="l">
+              <a:lnSpc>
+                <a:spcPct val="120000"/>
+              </a:lnSpc>
+              <a:spcBef>
+                <a:spcPts val="0"/>
+              </a:spcBef>
+              <a:spcAft>
+                <a:spcPts val="800"/>
+              </a:spcAft>
+            </a:pPr>
+            <a:r>
+              <a:rPr sz="1150" b="1" i="0">
+                <a:solidFill>
+                  <a:srgbClr val="A02128"/>
+                </a:solidFill>
+                <a:latin typeface="Arial"/>
+              </a:rPr>
+              <a:t>—  </a:t>
+            </a:r>
+            <a:r>
+              <a:rPr sz="1150" b="1" i="0">
+                <a:solidFill>
+                  <a:srgbClr val="12263A"/>
+                </a:solidFill>
+                <a:latin typeface="Arial"/>
+              </a:rPr>
+              <a:t>Treat KL-β as a dial, not a default.</a:t>
+            </a:r>
+            <a:r>
+              <a:rPr sz="1150" b="0" i="0">
+                <a:solidFill>
+                  <a:srgbClr val="5A6B7C"/>
+                </a:solidFill>
+                <a:latin typeface="Arial"/>
+              </a:rPr>
+              <a:t>  It buys transfer at a real represented cost that failed our preregistered margin.</a:t>
+            </a:r>
+          </a:p>
+          <a:p>
+            <a:pPr algn="l">
+              <a:lnSpc>
+                <a:spcPct val="120000"/>
+              </a:lnSpc>
+              <a:spcBef>
+                <a:spcPts val="0"/>
+              </a:spcBef>
+              <a:spcAft>
+                <a:spcPts val="800"/>
+              </a:spcAft>
+            </a:pPr>
+            <a:r>
+              <a:rPr sz="1150" b="1" i="0">
+                <a:solidFill>
+                  <a:srgbClr val="A02128"/>
+                </a:solidFill>
+                <a:latin typeface="Arial"/>
+              </a:rPr>
+              <a:t>—  </a:t>
+            </a:r>
+            <a:r>
+              <a:rPr sz="1150" b="1" i="0">
+                <a:solidFill>
+                  <a:srgbClr val="12263A"/>
+                </a:solidFill>
+                <a:latin typeface="Arial"/>
+              </a:rPr>
+              <a:t>Compose to repair, not to upgrade.</a:t>
+            </a:r>
+            <a:r>
+              <a:rPr sz="1150" b="0" i="0">
+                <a:solidFill>
+                  <a:srgbClr val="5A6B7C"/>
+                </a:solidFill>
+                <a:latin typeface="Arial"/>
+              </a:rPr>
+              <a:t>  If you already tuned and transfer regressed, average base + adapter — the base is what buys the recovery back.</a:t>
+            </a:r>
+          </a:p>
+          <a:p>
+            <a:pPr algn="l">
+              <a:lnSpc>
+                <a:spcPct val="120000"/>
+              </a:lnSpc>
+              <a:spcBef>
+                <a:spcPts val="0"/>
+              </a:spcBef>
+              <a:spcAft>
+                <a:spcPts val="800"/>
+              </a:spcAft>
+            </a:pPr>
+            <a:r>
+              <a:rPr sz="1150" b="1" i="0">
+                <a:solidFill>
+                  <a:srgbClr val="A02128"/>
+                </a:solidFill>
+                <a:latin typeface="Arial"/>
+              </a:rPr>
+              <a:t>—  </a:t>
+            </a:r>
+            <a:r>
+              <a:rPr sz="1150" b="1" i="0">
+                <a:solidFill>
+                  <a:srgbClr val="12263A"/>
+                </a:solidFill>
+                <a:latin typeface="Arial"/>
+              </a:rPr>
+              <a:t>Rank recovery is never threshold reuse.</a:t>
+            </a:r>
+            <a:r>
+              <a:rPr sz="1150" b="0" i="0">
+                <a:solidFill>
+                  <a:srgbClr val="5A6B7C"/>
+                </a:solidFill>
+                <a:latin typeface="Arial"/>
+              </a:rPr>
+              <a:t>  Re-choose the operating point on the target regime — and quote AP at your prevalence, not at balance.</a:t>
+            </a:r>
+          </a:p>
+          <a:p>
+            <a:pPr algn="l">
+              <a:lnSpc>
+                <a:spcPct val="120000"/>
+              </a:lnSpc>
+              <a:spcBef>
+                <a:spcPts val="0"/>
+              </a:spcBef>
+              <a:spcAft>
+                <a:spcPts val="800"/>
+              </a:spcAft>
+            </a:pPr>
+            <a:r>
+              <a:rPr sz="1150" b="1" i="0">
+                <a:solidFill>
+                  <a:srgbClr val="A02128"/>
+                </a:solidFill>
+                <a:latin typeface="Arial"/>
+              </a:rPr>
+              <a:t>—  </a:t>
+            </a:r>
+            <a:r>
+              <a:rPr sz="1150" b="1" i="0">
+                <a:solidFill>
+                  <a:srgbClr val="12263A"/>
+                </a:solidFill>
+                <a:latin typeface="Arial"/>
+              </a:rPr>
+              <a:t>In a regulated domain, build the instrument.</a:t>
+            </a:r>
+            <a:r>
+              <a:rPr sz="1150" b="0" i="0">
+                <a:solidFill>
+                  <a:srgbClr val="5A6B7C"/>
+                </a:solidFill>
+                <a:latin typeface="Arial"/>
+              </a:rPr>
+              <a:t>  A dual-labeled domain set plus an invariance check — and audit the gate as hard as the guards.</a:t>
+            </a:r>
+          </a:p>
+        </p:txBody>
+      </p:sp>
+      <p:sp>
+        <p:nvSpPr>
+          <p:cNvPr id="18" name="Rounded Rectangle 17"/>
+          <p:cNvSpPr/>
+          <p:nvPr/>
+        </p:nvSpPr>
+        <p:spPr>
+          <a:xfrm>
+            <a:off x="5504688" y="4864608"/>
+            <a:ext cx="6120079" cy="1042415"/>
+          </a:xfrm>
+          <a:prstGeom prst="roundRect">
+            <a:avLst>
+              <a:gd name="adj" fmla="val 3000"/>
+            </a:avLst>
+          </a:prstGeom>
+          <a:solidFill>
+            <a:srgbClr val="F2F4F6"/>
+          </a:solidFill>
+          <a:ln>
+            <a:noFill/>
+          </a:ln>
+          <a:effectLst/>
+        </p:spPr>
+        <p:style>
+          <a:lnRef idx="1">
+            <a:schemeClr val="accent1"/>
+          </a:lnRef>
+          <a:fillRef idx="3">
+            <a:schemeClr val="accent1"/>
+          </a:fillRef>
+          <a:effectRef idx="2">
+            <a:schemeClr val="accent1"/>
+          </a:effectRef>
+          <a:fontRef idx="minor">
+            <a:schemeClr val="lt1"/>
+          </a:fontRef>
+        </p:style>
+        <p:txBody>
+          <a:bodyPr rtlCol="0" anchor="ctr" wrap="square" lIns="219456" rIns="164592" tIns="91440" bIns="91440"/>
           <a:lstStyle/>
           <a:p>
             <a:pPr algn="l">
@@ -15290,285 +17502,19 @@
                 <a:spcPts val="0"/>
               </a:spcBef>
               <a:spcAft>
-                <a:spcPts val="0"/>
+                <a:spcPts val="300"/>
               </a:spcAft>
             </a:pPr>
             <a:r>
-              <a:rPr sz="1100" b="1" i="0" spc="110">
-                <a:solidFill>
-                  <a:srgbClr val="A02128"/>
-                </a:solidFill>
-                <a:latin typeface="Arial"/>
-              </a:rPr>
-              <a:t>WHAT WOULD MAKE IT EVIDENCE</a:t>
-            </a:r>
-          </a:p>
-        </p:txBody>
-      </p:sp>
-      <p:sp>
-        <p:nvSpPr>
-          <p:cNvPr id="10" name="TextBox 9"/>
-          <p:cNvSpPr txBox="1"/>
-          <p:nvPr/>
-        </p:nvSpPr>
-        <p:spPr>
-          <a:xfrm>
-            <a:off x="6251295" y="1956816"/>
-            <a:ext cx="5373471" cy="2560320"/>
-          </a:xfrm>
-          <a:prstGeom prst="rect">
-            <a:avLst/>
-          </a:prstGeom>
-          <a:noFill/>
-        </p:spPr>
-        <p:txBody>
-          <a:bodyPr wrap="square" anchor="t" lIns="0" rIns="0" tIns="0" bIns="0">
-            <a:spAutoFit/>
-          </a:bodyPr>
-          <a:lstStyle/>
-          <a:p>
-            <a:pPr algn="l">
-              <a:lnSpc>
-                <a:spcPct val="120000"/>
-              </a:lnSpc>
-              <a:spcBef>
-                <a:spcPts val="0"/>
-              </a:spcBef>
-              <a:spcAft>
-                <a:spcPts val="800"/>
-              </a:spcAft>
-            </a:pPr>
-            <a:r>
-              <a:rPr sz="1100" b="1" i="0">
-                <a:solidFill>
-                  <a:srgbClr val="A02128"/>
-                </a:solidFill>
-                <a:latin typeface="Arial"/>
-              </a:rPr>
-              <a:t>—  </a:t>
-            </a:r>
-            <a:r>
-              <a:rPr sz="1100" b="1" i="0">
-                <a:solidFill>
-                  <a:srgbClr val="12263A"/>
-                </a:solidFill>
-                <a:latin typeface="Arial"/>
-              </a:rPr>
-              <a:t>1 · A prospectively locked run</a:t>
-            </a:r>
-            <a:r>
-              <a:rPr sz="1100" b="0" i="0">
+              <a:rPr sz="1150" b="1" i="0" spc="90">
                 <a:solidFill>
                   <a:srgbClr val="5A6B7C"/>
                 </a:solidFill>
                 <a:latin typeface="Arial"/>
               </a:rPr>
-              <a:t>  on genuinely uninspected sources. No amount of further analysis of these rows raises that ceiling.</a:t>
-            </a:r>
-          </a:p>
-          <a:p>
-            <a:pPr algn="l">
-              <a:lnSpc>
-                <a:spcPct val="120000"/>
-              </a:lnSpc>
-              <a:spcBef>
-                <a:spcPts val="0"/>
-              </a:spcBef>
-              <a:spcAft>
-                <a:spcPts val="800"/>
-              </a:spcAft>
-            </a:pPr>
-            <a:r>
-              <a:rPr sz="1100" b="1" i="0">
-                <a:solidFill>
-                  <a:srgbClr val="A02128"/>
-                </a:solidFill>
-                <a:latin typeface="Arial"/>
-              </a:rPr>
-              <a:t>—  </a:t>
-            </a:r>
-            <a:r>
-              <a:rPr sz="1100" b="1" i="0">
-                <a:solidFill>
-                  <a:srgbClr val="12263A"/>
-                </a:solidFill>
-                <a:latin typeface="Arial"/>
-              </a:rPr>
-              <a:t>2 · Environment-controlled replication</a:t>
-            </a:r>
-            <a:r>
-              <a:rPr sz="1100" b="0" i="0">
-                <a:solidFill>
-                  <a:srgbClr val="5A6B7C"/>
-                </a:solidFill>
-                <a:latin typeface="Arial"/>
-              </a:rPr>
-              <a:t>  to shrink the noise floor rather than report it. Below it, nothing is resolvable.</a:t>
-            </a:r>
-          </a:p>
-          <a:p>
-            <a:pPr algn="l">
-              <a:lnSpc>
-                <a:spcPct val="120000"/>
-              </a:lnSpc>
-              <a:spcBef>
-                <a:spcPts val="0"/>
-              </a:spcBef>
-              <a:spcAft>
-                <a:spcPts val="800"/>
-              </a:spcAft>
-            </a:pPr>
-            <a:r>
-              <a:rPr sz="1100" b="1" i="0">
-                <a:solidFill>
-                  <a:srgbClr val="A02128"/>
-                </a:solidFill>
-                <a:latin typeface="Arial"/>
-              </a:rPr>
-              <a:t>—  </a:t>
-            </a:r>
-            <a:r>
-              <a:rPr sz="1100" b="1" i="0">
-                <a:solidFill>
-                  <a:srgbClr val="12263A"/>
-                </a:solidFill>
-                <a:latin typeface="Arial"/>
-              </a:rPr>
-              <a:t>3 · Decompose the transfer loss</a:t>
-            </a:r>
-            <a:r>
-              <a:rPr sz="1100" b="0" i="0">
-                <a:solidFill>
-                  <a:srgbClr val="5A6B7C"/>
-                </a:solidFill>
-                <a:latin typeface="Arial"/>
-              </a:rPr>
-              <a:t>  per source — free, on committed scores — then a diversity ladder at a fixed row budget.</a:t>
-            </a:r>
-          </a:p>
-          <a:p>
-            <a:pPr algn="l">
-              <a:lnSpc>
-                <a:spcPct val="120000"/>
-              </a:lnSpc>
-              <a:spcBef>
-                <a:spcPts val="0"/>
-              </a:spcBef>
-              <a:spcAft>
-                <a:spcPts val="800"/>
-              </a:spcAft>
-            </a:pPr>
-            <a:r>
-              <a:rPr sz="1100" b="1" i="0">
-                <a:solidFill>
-                  <a:srgbClr val="A02128"/>
-                </a:solidFill>
-                <a:latin typeface="Arial"/>
-              </a:rPr>
-              <a:t>—  </a:t>
-            </a:r>
-            <a:r>
-              <a:rPr sz="1100" b="1" i="0">
-                <a:solidFill>
-                  <a:srgbClr val="12263A"/>
-                </a:solidFill>
-                <a:latin typeface="Arial"/>
-              </a:rPr>
-              <a:t>4 · Finish the mortgage instrument</a:t>
-            </a:r>
-            <a:r>
-              <a:rPr sz="1100" b="0" i="0">
-                <a:solidFill>
-                  <a:srgbClr val="5A6B7C"/>
-                </a:solidFill>
-                <a:latin typeface="Arial"/>
-              </a:rPr>
-              <a:t>  SME adjudication, the empty G1/D0 quadrant, and the 39 unscored protected pairs.</a:t>
-            </a:r>
-          </a:p>
-          <a:p>
-            <a:pPr algn="l">
-              <a:lnSpc>
-                <a:spcPct val="120000"/>
-              </a:lnSpc>
-              <a:spcBef>
-                <a:spcPts val="0"/>
-              </a:spcBef>
-              <a:spcAft>
-                <a:spcPts val="800"/>
-              </a:spcAft>
-            </a:pPr>
-            <a:r>
-              <a:rPr sz="1100" b="1" i="0">
-                <a:solidFill>
-                  <a:srgbClr val="A02128"/>
-                </a:solidFill>
-                <a:latin typeface="Arial"/>
-              </a:rPr>
-              <a:t>—  </a:t>
-            </a:r>
-            <a:r>
-              <a:rPr sz="1100" b="1" i="0">
-                <a:solidFill>
-                  <a:srgbClr val="12263A"/>
-                </a:solidFill>
-                <a:latin typeface="Arial"/>
-              </a:rPr>
-              <a:t>5 · Close the loop to the policy source</a:t>
-            </a:r>
-            <a:r>
-              <a:rPr sz="1100" b="0" i="0">
-                <a:solidFill>
-                  <a:srgbClr val="5A6B7C"/>
-                </a:solidFill>
-                <a:latin typeface="Arial"/>
-              </a:rPr>
-              <a:t>  supply the policy explicitly, and route an observably invalid packet to review.</a:t>
-            </a:r>
-          </a:p>
-        </p:txBody>
-      </p:sp>
-      <p:sp>
-        <p:nvSpPr>
-          <p:cNvPr id="11" name="Rounded Rectangle 10"/>
-          <p:cNvSpPr/>
-          <p:nvPr/>
-        </p:nvSpPr>
-        <p:spPr>
-          <a:xfrm>
-            <a:off x="6251295" y="4663440"/>
-            <a:ext cx="5373471" cy="932688"/>
-          </a:xfrm>
-          <a:prstGeom prst="roundRect">
-            <a:avLst>
-              <a:gd name="adj" fmla="val 3000"/>
-            </a:avLst>
-          </a:prstGeom>
-          <a:solidFill>
-            <a:srgbClr val="EEF6F0"/>
-          </a:solidFill>
-          <a:ln>
-            <a:noFill/>
-          </a:ln>
-          <a:effectLst/>
-        </p:spPr>
-        <p:style>
-          <a:lnRef idx="1">
-            <a:schemeClr val="accent1"/>
-          </a:lnRef>
-          <a:fillRef idx="3">
-            <a:schemeClr val="accent1"/>
-          </a:fillRef>
-          <a:effectRef idx="2">
-            <a:schemeClr val="accent1"/>
-          </a:effectRef>
-          <a:fontRef idx="minor">
-            <a:schemeClr val="lt1"/>
-          </a:fontRef>
-        </p:style>
-        <p:txBody>
-          <a:bodyPr rtlCol="0" anchor="ctr" wrap="square" lIns="219456" rIns="164592" tIns="91440" bIns="91440"/>
-          <a:lstStyle/>
+              <a:t>SCOPE, STATED PLAINLY</a:t>
+            </a:r>
+          </a:p>
           <a:p>
             <a:pPr algn="l">
               <a:lnSpc>
@@ -15578,59 +17524,37 @@
                 <a:spcPts val="0"/>
               </a:spcBef>
               <a:spcAft>
-                <a:spcPts val="300"/>
+                <a:spcPts val="0"/>
               </a:spcAft>
             </a:pPr>
             <a:r>
-              <a:rPr sz="1150" b="1" i="0" spc="90">
-                <a:solidFill>
-                  <a:srgbClr val="15803D"/>
-                </a:solidFill>
-                <a:latin typeface="Arial"/>
-              </a:rPr>
-              <a:t>THE THROUGH-LINE</a:t>
-            </a:r>
-          </a:p>
-          <a:p>
-            <a:pPr algn="l">
-              <a:lnSpc>
-                <a:spcPct val="116000"/>
-              </a:lnSpc>
-              <a:spcBef>
-                <a:spcPts val="0"/>
-              </a:spcBef>
-              <a:spcAft>
-                <a:spcPts val="0"/>
-              </a:spcAft>
-            </a:pPr>
-            <a:r>
               <a:rPr sz="1150" b="0" i="0">
                 <a:solidFill>
                   <a:srgbClr val="12263A"/>
                 </a:solidFill>
                 <a:latin typeface="Arial"/>
               </a:rPr>
-              <a:t>Prefer the measurement that can be wrong in a detectable way. Everything above that survived did so because some check was built to fail first.</a:t>
-            </a:r>
-          </a:p>
-        </p:txBody>
-      </p:sp>
-      <p:sp>
-        <p:nvSpPr>
-          <p:cNvPr id="12" name="Rectangle 11"/>
+              <a:t>Retrospective estimation on a fixed four-checkpoint panel with an inspected manifest; only the adaptation study is preregistered. Mortgage labels are LLM-judge, not counsel-reviewed. No causal, universal, deployment, or fair-lending claim is licensed by anything here.</a:t>
+            </a:r>
+          </a:p>
+        </p:txBody>
+      </p:sp>
+      <p:sp>
+        <p:nvSpPr>
+          <p:cNvPr id="19" name="Rectangle 18"/>
           <p:cNvSpPr/>
           <p:nvPr/>
         </p:nvSpPr>
         <p:spPr>
           <a:xfrm>
-            <a:off x="6251295" y="4663440"/>
-            <a:ext cx="50292" cy="932688"/>
+            <a:off x="5504688" y="4864608"/>
+            <a:ext cx="50292" cy="1042415"/>
           </a:xfrm>
           <a:prstGeom prst="rect">
             <a:avLst/>
           </a:prstGeom>
           <a:solidFill>
-            <a:srgbClr val="15803D"/>
+            <a:srgbClr val="5A6B7C"/>
           </a:solidFill>
           <a:ln>
             <a:noFill/>
@@ -16703,6 +18627,892 @@
               </a:rPr>
               <a:t>Does one score cover a regulated domain?</a:t>
             </a:r>
+          </a:p>
+        </p:txBody>
+      </p:sp>
+    </p:spTree>
+  </p:cSld>
+  <p:clrMapOvr>
+    <a:masterClrMapping/>
+  </p:clrMapOvr>
+</p:sld>
+</file>
+
+<file path=ppt/slides/slide20.xml><?xml version="1.0" encoding="utf-8"?>
+<p:sld xmlns:a="http://schemas.openxmlformats.org/drawingml/2006/main" xmlns:p="http://schemas.openxmlformats.org/presentationml/2006/main" xmlns:r="http://schemas.openxmlformats.org/officeDocument/2006/relationships">
+  <p:cSld>
+    <p:spTree>
+      <p:nvGrpSpPr>
+        <p:cNvPr id="1" name=""/>
+        <p:cNvGrpSpPr/>
+        <p:nvPr/>
+      </p:nvGrpSpPr>
+      <p:grpSpPr/>
+      <p:sp>
+        <p:nvSpPr>
+          <p:cNvPr id="2" name="Rectangle 1"/>
+          <p:cNvSpPr/>
+          <p:nvPr/>
+        </p:nvSpPr>
+        <p:spPr>
+          <a:xfrm>
+            <a:off x="0" y="0"/>
+            <a:ext cx="12191695" cy="56692"/>
+          </a:xfrm>
+          <a:prstGeom prst="rect">
+            <a:avLst/>
+          </a:prstGeom>
+          <a:solidFill>
+            <a:srgbClr val="A02128"/>
+          </a:solidFill>
+          <a:ln>
+            <a:noFill/>
+          </a:ln>
+          <a:effectLst/>
+        </p:spPr>
+        <p:style>
+          <a:lnRef idx="1">
+            <a:schemeClr val="accent1"/>
+          </a:lnRef>
+          <a:fillRef idx="3">
+            <a:schemeClr val="accent1"/>
+          </a:fillRef>
+          <a:effectRef idx="2">
+            <a:schemeClr val="accent1"/>
+          </a:effectRef>
+          <a:fontRef idx="minor">
+            <a:schemeClr val="lt1"/>
+          </a:fontRef>
+        </p:style>
+        <p:txBody>
+          <a:bodyPr rtlCol="0" anchor="ctr" wrap="square"/>
+          <a:lstStyle/>
+          <a:p>
+            <a:pPr algn="ctr"/>
+          </a:p>
+        </p:txBody>
+      </p:sp>
+      <p:sp>
+        <p:nvSpPr>
+          <p:cNvPr id="3" name="TextBox 2"/>
+          <p:cNvSpPr txBox="1"/>
+          <p:nvPr/>
+        </p:nvSpPr>
+        <p:spPr>
+          <a:xfrm>
+            <a:off x="566928" y="6382512"/>
+            <a:ext cx="8229600" cy="256032"/>
+          </a:xfrm>
+          <a:prstGeom prst="rect">
+            <a:avLst/>
+          </a:prstGeom>
+          <a:noFill/>
+        </p:spPr>
+        <p:txBody>
+          <a:bodyPr wrap="square" anchor="t" lIns="0" rIns="0" tIns="0" bIns="0">
+            <a:spAutoFit/>
+          </a:bodyPr>
+          <a:lstStyle/>
+          <a:p>
+            <a:pPr algn="l">
+              <a:lnSpc>
+                <a:spcPct val="116000"/>
+              </a:lnSpc>
+              <a:spcBef>
+                <a:spcPts val="0"/>
+              </a:spcBef>
+              <a:spcAft>
+                <a:spcPts val="0"/>
+              </a:spcAft>
+            </a:pPr>
+            <a:r>
+              <a:rPr sz="950" b="0" i="0">
+                <a:solidFill>
+                  <a:srgbClr val="8A97A5"/>
+                </a:solidFill>
+                <a:latin typeface="Arial"/>
+              </a:rPr>
+              <a:t>The Safety-Guard Benchmark Chooses the Winner</a:t>
+            </a:r>
+            <a:r>
+              <a:rPr sz="950" b="0" i="0">
+                <a:solidFill>
+                  <a:srgbClr val="D8DEE4"/>
+                </a:solidFill>
+                <a:latin typeface="Arial"/>
+              </a:rPr>
+              <a:t>     ·     </a:t>
+            </a:r>
+            <a:r>
+              <a:rPr sz="950" b="0" i="0">
+                <a:solidFill>
+                  <a:srgbClr val="8A97A5"/>
+                </a:solidFill>
+                <a:latin typeface="Arial"/>
+              </a:rPr>
+              <a:t>github.com/rrahimi-uci/safety-guard-dynamics</a:t>
+            </a:r>
+          </a:p>
+        </p:txBody>
+      </p:sp>
+      <p:sp>
+        <p:nvSpPr>
+          <p:cNvPr id="4" name="TextBox 3"/>
+          <p:cNvSpPr txBox="1"/>
+          <p:nvPr/>
+        </p:nvSpPr>
+        <p:spPr>
+          <a:xfrm>
+            <a:off x="10527487" y="6382512"/>
+            <a:ext cx="1097280" cy="256032"/>
+          </a:xfrm>
+          <a:prstGeom prst="rect">
+            <a:avLst/>
+          </a:prstGeom>
+          <a:noFill/>
+        </p:spPr>
+        <p:txBody>
+          <a:bodyPr wrap="square" anchor="t" lIns="0" rIns="0" tIns="0" bIns="0">
+            <a:spAutoFit/>
+          </a:bodyPr>
+          <a:lstStyle/>
+          <a:p>
+            <a:pPr algn="r">
+              <a:lnSpc>
+                <a:spcPct val="116000"/>
+              </a:lnSpc>
+              <a:spcBef>
+                <a:spcPts val="0"/>
+              </a:spcBef>
+              <a:spcAft>
+                <a:spcPts val="0"/>
+              </a:spcAft>
+            </a:pPr>
+            <a:r>
+              <a:rPr sz="1050" b="1" i="0" spc="60">
+                <a:solidFill>
+                  <a:srgbClr val="A02128"/>
+                </a:solidFill>
+                <a:latin typeface="Arial"/>
+              </a:rPr>
+              <a:t>19</a:t>
+            </a:r>
+          </a:p>
+        </p:txBody>
+      </p:sp>
+      <p:sp>
+        <p:nvSpPr>
+          <p:cNvPr id="5" name="TextBox 4"/>
+          <p:cNvSpPr txBox="1"/>
+          <p:nvPr/>
+        </p:nvSpPr>
+        <p:spPr>
+          <a:xfrm>
+            <a:off x="566928" y="365760"/>
+            <a:ext cx="11057839" cy="237744"/>
+          </a:xfrm>
+          <a:prstGeom prst="rect">
+            <a:avLst/>
+          </a:prstGeom>
+          <a:noFill/>
+        </p:spPr>
+        <p:txBody>
+          <a:bodyPr wrap="square" anchor="t" lIns="0" rIns="0" tIns="0" bIns="0">
+            <a:spAutoFit/>
+          </a:bodyPr>
+          <a:lstStyle/>
+          <a:p>
+            <a:pPr algn="l">
+              <a:lnSpc>
+                <a:spcPct val="116000"/>
+              </a:lnSpc>
+              <a:spcBef>
+                <a:spcPts val="0"/>
+              </a:spcBef>
+              <a:spcAft>
+                <a:spcPts val="0"/>
+              </a:spcAft>
+            </a:pPr>
+            <a:r>
+              <a:rPr sz="1050" b="1" i="0" spc="140">
+                <a:solidFill>
+                  <a:srgbClr val="A02128"/>
+                </a:solidFill>
+                <a:latin typeface="Arial"/>
+              </a:rPr>
+              <a:t>WHAT THIS CONTRIBUTES</a:t>
+            </a:r>
+          </a:p>
+        </p:txBody>
+      </p:sp>
+      <p:sp>
+        <p:nvSpPr>
+          <p:cNvPr id="6" name="TextBox 5"/>
+          <p:cNvSpPr txBox="1"/>
+          <p:nvPr/>
+        </p:nvSpPr>
+        <p:spPr>
+          <a:xfrm>
+            <a:off x="566928" y="676656"/>
+            <a:ext cx="11057839" cy="658368"/>
+          </a:xfrm>
+          <a:prstGeom prst="rect">
+            <a:avLst/>
+          </a:prstGeom>
+          <a:noFill/>
+        </p:spPr>
+        <p:txBody>
+          <a:bodyPr wrap="square" anchor="t" lIns="0" rIns="0" tIns="0" bIns="0">
+            <a:spAutoFit/>
+          </a:bodyPr>
+          <a:lstStyle/>
+          <a:p>
+            <a:pPr algn="l">
+              <a:lnSpc>
+                <a:spcPct val="100000"/>
+              </a:lnSpc>
+              <a:spcBef>
+                <a:spcPts val="0"/>
+              </a:spcBef>
+              <a:spcAft>
+                <a:spcPts val="0"/>
+              </a:spcAft>
+            </a:pPr>
+            <a:r>
+              <a:rPr sz="2700" b="1" i="0">
+                <a:solidFill>
+                  <a:srgbClr val="12263A"/>
+                </a:solidFill>
+                <a:latin typeface="Georgia"/>
+              </a:rPr>
+              <a:t>Four things we can defend, and what would make them evidence</a:t>
+            </a:r>
+          </a:p>
+        </p:txBody>
+      </p:sp>
+      <p:sp>
+        <p:nvSpPr>
+          <p:cNvPr id="7" name="Rectangle 6"/>
+          <p:cNvSpPr/>
+          <p:nvPr/>
+        </p:nvSpPr>
+        <p:spPr>
+          <a:xfrm>
+            <a:off x="566928" y="1444752"/>
+            <a:ext cx="11057839" cy="11430"/>
+          </a:xfrm>
+          <a:prstGeom prst="rect">
+            <a:avLst/>
+          </a:prstGeom>
+          <a:solidFill>
+            <a:srgbClr val="D8DEE4"/>
+          </a:solidFill>
+          <a:ln>
+            <a:noFill/>
+          </a:ln>
+          <a:effectLst/>
+        </p:spPr>
+        <p:style>
+          <a:lnRef idx="1">
+            <a:schemeClr val="accent1"/>
+          </a:lnRef>
+          <a:fillRef idx="3">
+            <a:schemeClr val="accent1"/>
+          </a:fillRef>
+          <a:effectRef idx="2">
+            <a:schemeClr val="accent1"/>
+          </a:effectRef>
+          <a:fontRef idx="minor">
+            <a:schemeClr val="lt1"/>
+          </a:fontRef>
+        </p:style>
+        <p:txBody>
+          <a:bodyPr rtlCol="0" anchor="ctr" wrap="square"/>
+          <a:lstStyle/>
+          <a:p>
+            <a:pPr algn="ctr"/>
+          </a:p>
+        </p:txBody>
+      </p:sp>
+      <p:sp>
+        <p:nvSpPr>
+          <p:cNvPr id="8" name="TextBox 7"/>
+          <p:cNvSpPr txBox="1"/>
+          <p:nvPr/>
+        </p:nvSpPr>
+        <p:spPr>
+          <a:xfrm>
+            <a:off x="566928" y="1627632"/>
+            <a:ext cx="5373471" cy="2834640"/>
+          </a:xfrm>
+          <a:prstGeom prst="rect">
+            <a:avLst/>
+          </a:prstGeom>
+          <a:noFill/>
+        </p:spPr>
+        <p:txBody>
+          <a:bodyPr wrap="square" anchor="t" lIns="0" rIns="0" tIns="0" bIns="0">
+            <a:spAutoFit/>
+          </a:bodyPr>
+          <a:lstStyle/>
+          <a:p>
+            <a:pPr algn="l">
+              <a:lnSpc>
+                <a:spcPct val="120000"/>
+              </a:lnSpc>
+              <a:spcBef>
+                <a:spcPts val="0"/>
+              </a:spcBef>
+              <a:spcAft>
+                <a:spcPts val="900"/>
+              </a:spcAft>
+            </a:pPr>
+            <a:r>
+              <a:rPr sz="1150" b="1" i="0">
+                <a:solidFill>
+                  <a:srgbClr val="A02128"/>
+                </a:solidFill>
+                <a:latin typeface="Arial"/>
+              </a:rPr>
+              <a:t>—  </a:t>
+            </a:r>
+            <a:r>
+              <a:rPr sz="1150" b="1" i="0">
+                <a:solidFill>
+                  <a:srgbClr val="12263A"/>
+                </a:solidFill>
+                <a:latin typeface="Arial"/>
+              </a:rPr>
+              <a:t>A paired, same-checkpoint estimand.</a:t>
+            </a:r>
+            <a:r>
+              <a:rPr sz="1150" b="0" i="0">
+                <a:solidFill>
+                  <a:srgbClr val="5A6B7C"/>
+                </a:solidFill>
+                <a:latin typeface="Arial"/>
+              </a:rPr>
+              <a:t>  Compare each guard only to its OWN base on identical rows, split by represented vs held-out. That is what turns a leaderboard delta into an attributable one — three results here exist only because of it.</a:t>
+            </a:r>
+          </a:p>
+          <a:p>
+            <a:pPr algn="l">
+              <a:lnSpc>
+                <a:spcPct val="120000"/>
+              </a:lnSpc>
+              <a:spcBef>
+                <a:spcPts val="0"/>
+              </a:spcBef>
+              <a:spcAft>
+                <a:spcPts val="900"/>
+              </a:spcAft>
+            </a:pPr>
+            <a:r>
+              <a:rPr sz="1150" b="1" i="0">
+                <a:solidFill>
+                  <a:srgbClr val="A02128"/>
+                </a:solidFill>
+                <a:latin typeface="Arial"/>
+              </a:rPr>
+              <a:t>—  </a:t>
+            </a:r>
+            <a:r>
+              <a:rPr sz="1150" b="1" i="0">
+                <a:solidFill>
+                  <a:srgbClr val="12263A"/>
+                </a:solidFill>
+                <a:latin typeface="Arial"/>
+              </a:rPr>
+              <a:t>The matched-alarm-budget read.</a:t>
+            </a:r>
+            <a:r>
+              <a:rPr sz="1150" b="0" i="0">
+                <a:solidFill>
+                  <a:srgbClr val="5A6B7C"/>
+                </a:solidFill>
+                <a:latin typeface="Arial"/>
+              </a:rPr>
+              <a:t>  Cheap, almost never done, and it reverses a headline: transfer recall 0.517 → 0.217 at an equal false-alarm budget. Ranking arithmetic on committed scores — no GPU, no retraining.</a:t>
+            </a:r>
+          </a:p>
+          <a:p>
+            <a:pPr algn="l">
+              <a:lnSpc>
+                <a:spcPct val="120000"/>
+              </a:lnSpc>
+              <a:spcBef>
+                <a:spcPts val="0"/>
+              </a:spcBef>
+              <a:spcAft>
+                <a:spcPts val="900"/>
+              </a:spcAft>
+            </a:pPr>
+            <a:r>
+              <a:rPr sz="1150" b="1" i="0">
+                <a:solidFill>
+                  <a:srgbClr val="A02128"/>
+                </a:solidFill>
+                <a:latin typeface="Arial"/>
+              </a:rPr>
+              <a:t>—  </a:t>
+            </a:r>
+            <a:r>
+              <a:rPr sz="1150" b="1" i="0">
+                <a:solidFill>
+                  <a:srgbClr val="12263A"/>
+                </a:solidFill>
+                <a:latin typeface="Arial"/>
+              </a:rPr>
+              <a:t>Negative results kept as results.</a:t>
+            </a:r>
+            <a:r>
+              <a:rPr sz="1150" b="0" i="0">
+                <a:solidFill>
+                  <a:srgbClr val="5A6B7C"/>
+                </a:solidFill>
+                <a:latin typeface="Arial"/>
+              </a:rPr>
+              <a:t>  The preregistered study fails its own second criterion. The fairness probe we built fails its own audit. An accidental repeat gave us a measured reproduction noise floor that bounds our own small effects.</a:t>
+            </a:r>
+          </a:p>
+          <a:p>
+            <a:pPr algn="l">
+              <a:lnSpc>
+                <a:spcPct val="120000"/>
+              </a:lnSpc>
+              <a:spcBef>
+                <a:spcPts val="0"/>
+              </a:spcBef>
+              <a:spcAft>
+                <a:spcPts val="900"/>
+              </a:spcAft>
+            </a:pPr>
+            <a:r>
+              <a:rPr sz="1150" b="1" i="0">
+                <a:solidFill>
+                  <a:srgbClr val="A02128"/>
+                </a:solidFill>
+                <a:latin typeface="Arial"/>
+              </a:rPr>
+              <a:t>—  </a:t>
+            </a:r>
+            <a:r>
+              <a:rPr sz="1150" b="1" i="0">
+                <a:solidFill>
+                  <a:srgbClr val="12263A"/>
+                </a:solidFill>
+                <a:latin typeface="Arial"/>
+              </a:rPr>
+              <a:t>A released instrument.</a:t>
+            </a:r>
+            <a:r>
+              <a:rPr sz="1150" b="0" i="0">
+                <a:solidFill>
+                  <a:srgbClr val="5A6B7C"/>
+                </a:solidFill>
+                <a:latin typeface="Arial"/>
+              </a:rPr>
+              <a:t>  v1_hmda2022 — 994 dual-labeled rows, CC BY 4.0 — plus text-free per-row scores and one command that regenerates the covered tables and prints the coverage it did NOT achieve.</a:t>
+            </a:r>
+          </a:p>
+        </p:txBody>
+      </p:sp>
+      <p:sp>
+        <p:nvSpPr>
+          <p:cNvPr id="9" name="TextBox 8"/>
+          <p:cNvSpPr txBox="1"/>
+          <p:nvPr/>
+        </p:nvSpPr>
+        <p:spPr>
+          <a:xfrm>
+            <a:off x="6251295" y="1591056"/>
+            <a:ext cx="5373471" cy="274320"/>
+          </a:xfrm>
+          <a:prstGeom prst="rect">
+            <a:avLst/>
+          </a:prstGeom>
+          <a:noFill/>
+        </p:spPr>
+        <p:txBody>
+          <a:bodyPr wrap="square" anchor="t" lIns="0" rIns="0" tIns="0" bIns="0">
+            <a:spAutoFit/>
+          </a:bodyPr>
+          <a:lstStyle/>
+          <a:p>
+            <a:pPr algn="l">
+              <a:lnSpc>
+                <a:spcPct val="116000"/>
+              </a:lnSpc>
+              <a:spcBef>
+                <a:spcPts val="0"/>
+              </a:spcBef>
+              <a:spcAft>
+                <a:spcPts val="0"/>
+              </a:spcAft>
+            </a:pPr>
+            <a:r>
+              <a:rPr sz="1100" b="1" i="0" spc="110">
+                <a:solidFill>
+                  <a:srgbClr val="A02128"/>
+                </a:solidFill>
+                <a:latin typeface="Arial"/>
+              </a:rPr>
+              <a:t>WHAT WOULD MAKE IT EVIDENCE</a:t>
+            </a:r>
+          </a:p>
+        </p:txBody>
+      </p:sp>
+      <p:sp>
+        <p:nvSpPr>
+          <p:cNvPr id="10" name="TextBox 9"/>
+          <p:cNvSpPr txBox="1"/>
+          <p:nvPr/>
+        </p:nvSpPr>
+        <p:spPr>
+          <a:xfrm>
+            <a:off x="6251295" y="1956816"/>
+            <a:ext cx="5373471" cy="2560320"/>
+          </a:xfrm>
+          <a:prstGeom prst="rect">
+            <a:avLst/>
+          </a:prstGeom>
+          <a:noFill/>
+        </p:spPr>
+        <p:txBody>
+          <a:bodyPr wrap="square" anchor="t" lIns="0" rIns="0" tIns="0" bIns="0">
+            <a:spAutoFit/>
+          </a:bodyPr>
+          <a:lstStyle/>
+          <a:p>
+            <a:pPr algn="l">
+              <a:lnSpc>
+                <a:spcPct val="120000"/>
+              </a:lnSpc>
+              <a:spcBef>
+                <a:spcPts val="0"/>
+              </a:spcBef>
+              <a:spcAft>
+                <a:spcPts val="800"/>
+              </a:spcAft>
+            </a:pPr>
+            <a:r>
+              <a:rPr sz="1100" b="1" i="0">
+                <a:solidFill>
+                  <a:srgbClr val="A02128"/>
+                </a:solidFill>
+                <a:latin typeface="Arial"/>
+              </a:rPr>
+              <a:t>—  </a:t>
+            </a:r>
+            <a:r>
+              <a:rPr sz="1100" b="1" i="0">
+                <a:solidFill>
+                  <a:srgbClr val="12263A"/>
+                </a:solidFill>
+                <a:latin typeface="Arial"/>
+              </a:rPr>
+              <a:t>1 · A prospectively locked run</a:t>
+            </a:r>
+            <a:r>
+              <a:rPr sz="1100" b="0" i="0">
+                <a:solidFill>
+                  <a:srgbClr val="5A6B7C"/>
+                </a:solidFill>
+                <a:latin typeface="Arial"/>
+              </a:rPr>
+              <a:t>  on genuinely uninspected sources. No amount of further analysis of these rows raises that ceiling.</a:t>
+            </a:r>
+          </a:p>
+          <a:p>
+            <a:pPr algn="l">
+              <a:lnSpc>
+                <a:spcPct val="120000"/>
+              </a:lnSpc>
+              <a:spcBef>
+                <a:spcPts val="0"/>
+              </a:spcBef>
+              <a:spcAft>
+                <a:spcPts val="800"/>
+              </a:spcAft>
+            </a:pPr>
+            <a:r>
+              <a:rPr sz="1100" b="1" i="0">
+                <a:solidFill>
+                  <a:srgbClr val="A02128"/>
+                </a:solidFill>
+                <a:latin typeface="Arial"/>
+              </a:rPr>
+              <a:t>—  </a:t>
+            </a:r>
+            <a:r>
+              <a:rPr sz="1100" b="1" i="0">
+                <a:solidFill>
+                  <a:srgbClr val="12263A"/>
+                </a:solidFill>
+                <a:latin typeface="Arial"/>
+              </a:rPr>
+              <a:t>2 · Environment-controlled replication</a:t>
+            </a:r>
+            <a:r>
+              <a:rPr sz="1100" b="0" i="0">
+                <a:solidFill>
+                  <a:srgbClr val="5A6B7C"/>
+                </a:solidFill>
+                <a:latin typeface="Arial"/>
+              </a:rPr>
+              <a:t>  to shrink the noise floor rather than report it. Below it, nothing is resolvable.</a:t>
+            </a:r>
+          </a:p>
+          <a:p>
+            <a:pPr algn="l">
+              <a:lnSpc>
+                <a:spcPct val="120000"/>
+              </a:lnSpc>
+              <a:spcBef>
+                <a:spcPts val="0"/>
+              </a:spcBef>
+              <a:spcAft>
+                <a:spcPts val="800"/>
+              </a:spcAft>
+            </a:pPr>
+            <a:r>
+              <a:rPr sz="1100" b="1" i="0">
+                <a:solidFill>
+                  <a:srgbClr val="A02128"/>
+                </a:solidFill>
+                <a:latin typeface="Arial"/>
+              </a:rPr>
+              <a:t>—  </a:t>
+            </a:r>
+            <a:r>
+              <a:rPr sz="1100" b="1" i="0">
+                <a:solidFill>
+                  <a:srgbClr val="12263A"/>
+                </a:solidFill>
+                <a:latin typeface="Arial"/>
+              </a:rPr>
+              <a:t>3 · Decompose the transfer loss</a:t>
+            </a:r>
+            <a:r>
+              <a:rPr sz="1100" b="0" i="0">
+                <a:solidFill>
+                  <a:srgbClr val="5A6B7C"/>
+                </a:solidFill>
+                <a:latin typeface="Arial"/>
+              </a:rPr>
+              <a:t>  per source — free, on committed scores — then a diversity ladder at a fixed row budget.</a:t>
+            </a:r>
+          </a:p>
+          <a:p>
+            <a:pPr algn="l">
+              <a:lnSpc>
+                <a:spcPct val="120000"/>
+              </a:lnSpc>
+              <a:spcBef>
+                <a:spcPts val="0"/>
+              </a:spcBef>
+              <a:spcAft>
+                <a:spcPts val="800"/>
+              </a:spcAft>
+            </a:pPr>
+            <a:r>
+              <a:rPr sz="1100" b="1" i="0">
+                <a:solidFill>
+                  <a:srgbClr val="A02128"/>
+                </a:solidFill>
+                <a:latin typeface="Arial"/>
+              </a:rPr>
+              <a:t>—  </a:t>
+            </a:r>
+            <a:r>
+              <a:rPr sz="1100" b="1" i="0">
+                <a:solidFill>
+                  <a:srgbClr val="12263A"/>
+                </a:solidFill>
+                <a:latin typeface="Arial"/>
+              </a:rPr>
+              <a:t>4 · Finish the mortgage instrument</a:t>
+            </a:r>
+            <a:r>
+              <a:rPr sz="1100" b="0" i="0">
+                <a:solidFill>
+                  <a:srgbClr val="5A6B7C"/>
+                </a:solidFill>
+                <a:latin typeface="Arial"/>
+              </a:rPr>
+              <a:t>  SME adjudication, the empty G1/D0 quadrant, and the 39 unscored protected pairs.</a:t>
+            </a:r>
+          </a:p>
+          <a:p>
+            <a:pPr algn="l">
+              <a:lnSpc>
+                <a:spcPct val="120000"/>
+              </a:lnSpc>
+              <a:spcBef>
+                <a:spcPts val="0"/>
+              </a:spcBef>
+              <a:spcAft>
+                <a:spcPts val="800"/>
+              </a:spcAft>
+            </a:pPr>
+            <a:r>
+              <a:rPr sz="1100" b="1" i="0">
+                <a:solidFill>
+                  <a:srgbClr val="A02128"/>
+                </a:solidFill>
+                <a:latin typeface="Arial"/>
+              </a:rPr>
+              <a:t>—  </a:t>
+            </a:r>
+            <a:r>
+              <a:rPr sz="1100" b="1" i="0">
+                <a:solidFill>
+                  <a:srgbClr val="12263A"/>
+                </a:solidFill>
+                <a:latin typeface="Arial"/>
+              </a:rPr>
+              <a:t>5 · Close the loop to the policy source</a:t>
+            </a:r>
+            <a:r>
+              <a:rPr sz="1100" b="0" i="0">
+                <a:solidFill>
+                  <a:srgbClr val="5A6B7C"/>
+                </a:solidFill>
+                <a:latin typeface="Arial"/>
+              </a:rPr>
+              <a:t>  supply the policy explicitly, and route an observably invalid packet to review.</a:t>
+            </a:r>
+          </a:p>
+        </p:txBody>
+      </p:sp>
+      <p:sp>
+        <p:nvSpPr>
+          <p:cNvPr id="11" name="Rounded Rectangle 10"/>
+          <p:cNvSpPr/>
+          <p:nvPr/>
+        </p:nvSpPr>
+        <p:spPr>
+          <a:xfrm>
+            <a:off x="6251295" y="4663440"/>
+            <a:ext cx="5373471" cy="932688"/>
+          </a:xfrm>
+          <a:prstGeom prst="roundRect">
+            <a:avLst>
+              <a:gd name="adj" fmla="val 3000"/>
+            </a:avLst>
+          </a:prstGeom>
+          <a:solidFill>
+            <a:srgbClr val="EEF6F0"/>
+          </a:solidFill>
+          <a:ln>
+            <a:noFill/>
+          </a:ln>
+          <a:effectLst/>
+        </p:spPr>
+        <p:style>
+          <a:lnRef idx="1">
+            <a:schemeClr val="accent1"/>
+          </a:lnRef>
+          <a:fillRef idx="3">
+            <a:schemeClr val="accent1"/>
+          </a:fillRef>
+          <a:effectRef idx="2">
+            <a:schemeClr val="accent1"/>
+          </a:effectRef>
+          <a:fontRef idx="minor">
+            <a:schemeClr val="lt1"/>
+          </a:fontRef>
+        </p:style>
+        <p:txBody>
+          <a:bodyPr rtlCol="0" anchor="ctr" wrap="square" lIns="219456" rIns="164592" tIns="91440" bIns="91440"/>
+          <a:lstStyle/>
+          <a:p>
+            <a:pPr algn="l">
+              <a:lnSpc>
+                <a:spcPct val="116000"/>
+              </a:lnSpc>
+              <a:spcBef>
+                <a:spcPts val="0"/>
+              </a:spcBef>
+              <a:spcAft>
+                <a:spcPts val="300"/>
+              </a:spcAft>
+            </a:pPr>
+            <a:r>
+              <a:rPr sz="1150" b="1" i="0" spc="90">
+                <a:solidFill>
+                  <a:srgbClr val="15803D"/>
+                </a:solidFill>
+                <a:latin typeface="Arial"/>
+              </a:rPr>
+              <a:t>THE THROUGH-LINE</a:t>
+            </a:r>
+          </a:p>
+          <a:p>
+            <a:pPr algn="l">
+              <a:lnSpc>
+                <a:spcPct val="116000"/>
+              </a:lnSpc>
+              <a:spcBef>
+                <a:spcPts val="0"/>
+              </a:spcBef>
+              <a:spcAft>
+                <a:spcPts val="0"/>
+              </a:spcAft>
+            </a:pPr>
+            <a:r>
+              <a:rPr sz="1150" b="0" i="0">
+                <a:solidFill>
+                  <a:srgbClr val="12263A"/>
+                </a:solidFill>
+                <a:latin typeface="Arial"/>
+              </a:rPr>
+              <a:t>Prefer the measurement that can be wrong in a detectable way. Everything above that survived did so because some check was built to fail first.</a:t>
+            </a:r>
+          </a:p>
+        </p:txBody>
+      </p:sp>
+      <p:sp>
+        <p:nvSpPr>
+          <p:cNvPr id="12" name="Rectangle 11"/>
+          <p:cNvSpPr/>
+          <p:nvPr/>
+        </p:nvSpPr>
+        <p:spPr>
+          <a:xfrm>
+            <a:off x="6251295" y="4663440"/>
+            <a:ext cx="50292" cy="932688"/>
+          </a:xfrm>
+          <a:prstGeom prst="rect">
+            <a:avLst/>
+          </a:prstGeom>
+          <a:solidFill>
+            <a:srgbClr val="15803D"/>
+          </a:solidFill>
+          <a:ln>
+            <a:noFill/>
+          </a:ln>
+          <a:effectLst/>
+        </p:spPr>
+        <p:style>
+          <a:lnRef idx="1">
+            <a:schemeClr val="accent1"/>
+          </a:lnRef>
+          <a:fillRef idx="3">
+            <a:schemeClr val="accent1"/>
+          </a:fillRef>
+          <a:effectRef idx="2">
+            <a:schemeClr val="accent1"/>
+          </a:effectRef>
+          <a:fontRef idx="minor">
+            <a:schemeClr val="lt1"/>
+          </a:fontRef>
+        </p:style>
+        <p:txBody>
+          <a:bodyPr rtlCol="0" anchor="ctr" wrap="square"/>
+          <a:lstStyle/>
+          <a:p>
+            <a:pPr algn="ctr"/>
           </a:p>
         </p:txBody>
       </p:sp>

--- a/papers/unified-report/slides/safety_guard_benchmark_deck.pptx
+++ b/papers/unified-report/slides/safety_guard_benchmark_deck.pptx
@@ -25,6 +25,7 @@
     <p:sldId id="273" r:id="rId25"/>
     <p:sldId id="274" r:id="rId26"/>
     <p:sldId id="275" r:id="rId27"/>
+    <p:sldId id="276" r:id="rId28"/>
   </p:sldIdLst>
   <p:sldSz cx="12191695" cy="6858000" type="screen4x3"/>
   <p:notesSz cx="6858000" cy="9144000"/>
@@ -1785,60 +1786,81 @@
           <a:lstStyle/>
           <a:p>
             <a:r>
-              <a:t>Close on the workflow, not on a winner. The deliverable of this work is a</a:t>
-            </a:r>
-          </a:p>
-          <a:p>
-            <a:r>
-              <a:t>measurement-and-decision procedure, not a new model.</a:t>
+              <a:t>The point of this slide is that the previous one was asking the wrong question.</a:t>
             </a:r>
           </a:p>
           <a:p/>
           <a:p>
             <a:r>
-              <a:t>Two rows deserve a sharper edge than a bullet allows. First, composition is a REPAIR for</a:t>
-            </a:r>
-          </a:p>
-          <a:p>
-            <a:r>
-              <a:t>a guard you already tuned, not a free win over the base — if you have not tuned yet and</a:t>
-            </a:r>
-          </a:p>
-          <a:p>
-            <a:r>
-              <a:t>transfer is the priority, the untuned base can already be your best transfer scorer.</a:t>
-            </a:r>
-          </a:p>
-          <a:p>
-            <a:r>
-              <a:t>Second, an empty feasible set is a deliberate NO-SHIP, not an invitation to relax the</a:t>
-            </a:r>
-          </a:p>
-          <a:p>
-            <a:r>
-              <a:t>cutoff.</a:t>
+              <a:t>Tuning and scale both failed to close the gap because the gap is not a capacity gap. Split the</a:t>
+            </a:r>
+          </a:p>
+          <a:p>
+            <a:r>
+              <a:t>same five corpora by whether the source was in the training manifest and the ordering inverts:</a:t>
+            </a:r>
+          </a:p>
+          <a:p>
+            <a:r>
+              <a:t>on represented sources Qwen2.5-1.5B — a 1.5B model — reaches .948 against</a:t>
+            </a:r>
+          </a:p>
+          <a:p>
+            <a:r>
+              <a:t>the hosted .741, paired difference +0.185</a:t>
+            </a:r>
+          </a:p>
+          <a:p>
+            <a:r>
+              <a:t>[+0.065, +0.423]. AUROC 0.9928 against 0.8731 confirms it</a:t>
+            </a:r>
+          </a:p>
+          <a:p>
+            <a:r>
+              <a:t>is the ranking, not the threshold.</a:t>
             </a:r>
           </a:p>
           <a:p/>
           <a:p>
             <a:r>
-              <a:t>The deployment economics have their own slide immediately before this one, so do not</a:t>
-            </a:r>
-          </a:p>
-          <a:p>
-            <a:r>
-              <a:t>re-litigate them here — this list is the methodological guidance only.</a:t>
+              <a:t>Represented = jailbreak_classification, prompt_injections, toxicchat, read from the training manifest rather than asserted.</a:t>
             </a:r>
           </a:p>
           <a:p/>
           <a:p>
             <a:r>
-              <a:t>Honest next step, straight from the conclusion: not a more confident headline, but a</a:t>
-            </a:r>
-          </a:p>
-          <a:p>
-            <a:r>
-              <a:t>prospectively locked evaluation on genuinely uninspected data.</a:t>
+              <a:t>The join is worth mentioning if anyone asks why this was not in the earlier tables: the two</a:t>
+            </a:r>
+          </a:p>
+          <a:p>
+            <a:r>
+              <a:t>runs hash row identities differently — raw bytes on one side, NFC-normalised on the other — so</a:t>
+            </a:r>
+          </a:p>
+          <a:p>
+            <a:r>
+              <a:t>re-deriving both digests from the local corpus was what made the comparison possible at all.</a:t>
+            </a:r>
+          </a:p>
+          <a:p>
+            <a:r>
+              <a:t>100% of the panel's rows join.</a:t>
+            </a:r>
+          </a:p>
+          <a:p/>
+          <a:p>
+            <a:r>
+              <a:t>Do not oversell. This is retrospective on an inspected panel, the per-source samples are small,</a:t>
+            </a:r>
+          </a:p>
+          <a:p>
+            <a:r>
+              <a:t>and one column (jailbreakbench) supports no comparison at all because the hosted model's own</a:t>
+            </a:r>
+          </a:p>
+          <a:p>
+            <a:r>
+              <a:t>score ties so heavily that its threshold lands inside a tie block.</a:t>
             </a:r>
           </a:p>
         </p:txBody>
@@ -1981,6 +2003,129 @@
 </file>
 
 <file path=ppt/notesSlides/notesSlide20.xml><?xml version="1.0" encoding="utf-8"?>
+<p:notes xmlns:a="http://schemas.openxmlformats.org/drawingml/2006/main" xmlns:p="http://schemas.openxmlformats.org/presentationml/2006/main" xmlns:r="http://schemas.openxmlformats.org/officeDocument/2006/relationships">
+  <p:cSld>
+    <p:spTree>
+      <p:nvGrpSpPr>
+        <p:cNvPr id="1" name=""/>
+        <p:cNvGrpSpPr/>
+        <p:nvPr/>
+      </p:nvGrpSpPr>
+      <p:grpSpPr>
+        <a:xfrm>
+          <a:off x="0" y="0"/>
+          <a:ext cx="0" cy="0"/>
+          <a:chOff x="0" y="0"/>
+          <a:chExt cx="0" cy="0"/>
+        </a:xfrm>
+      </p:grpSpPr>
+      <p:sp>
+        <p:nvSpPr>
+          <p:cNvPr id="2" name="Slide Image Placeholder 1"/>
+          <p:cNvSpPr>
+            <a:spLocks noGrp="1"/>
+          </p:cNvSpPr>
+          <p:nvPr>
+            <p:ph type="sldImg" idx="2"/>
+          </p:nvPr>
+        </p:nvSpPr>
+        <p:spPr/>
+      </p:sp>
+      <p:sp>
+        <p:nvSpPr>
+          <p:cNvPr id="3" name="Notes Placeholder 2"/>
+          <p:cNvSpPr>
+            <a:spLocks noGrp="1"/>
+          </p:cNvSpPr>
+          <p:nvPr>
+            <p:ph type="body" idx="3" sz="quarter"/>
+          </p:nvPr>
+        </p:nvSpPr>
+        <p:spPr/>
+        <p:txBody>
+          <a:bodyPr/>
+          <a:lstStyle/>
+          <a:p>
+            <a:r>
+              <a:t>Close on the workflow, not on a winner. The deliverable of this work is a</a:t>
+            </a:r>
+          </a:p>
+          <a:p>
+            <a:r>
+              <a:t>measurement-and-decision procedure, not a new model.</a:t>
+            </a:r>
+          </a:p>
+          <a:p/>
+          <a:p>
+            <a:r>
+              <a:t>Two rows deserve a sharper edge than a bullet allows. First, composition is a REPAIR for</a:t>
+            </a:r>
+          </a:p>
+          <a:p>
+            <a:r>
+              <a:t>a guard you already tuned, not a free win over the base — if you have not tuned yet and</a:t>
+            </a:r>
+          </a:p>
+          <a:p>
+            <a:r>
+              <a:t>transfer is the priority, the untuned base can already be your best transfer scorer.</a:t>
+            </a:r>
+          </a:p>
+          <a:p>
+            <a:r>
+              <a:t>Second, an empty feasible set is a deliberate NO-SHIP, not an invitation to relax the</a:t>
+            </a:r>
+          </a:p>
+          <a:p>
+            <a:r>
+              <a:t>cutoff.</a:t>
+            </a:r>
+          </a:p>
+          <a:p/>
+          <a:p>
+            <a:r>
+              <a:t>The deployment economics have their own slide immediately before this one, so do not</a:t>
+            </a:r>
+          </a:p>
+          <a:p>
+            <a:r>
+              <a:t>re-litigate them here — this list is the methodological guidance only.</a:t>
+            </a:r>
+          </a:p>
+          <a:p/>
+          <a:p>
+            <a:r>
+              <a:t>Honest next step, straight from the conclusion: not a more confident headline, but a</a:t>
+            </a:r>
+          </a:p>
+          <a:p>
+            <a:r>
+              <a:t>prospectively locked evaluation on genuinely uninspected data.</a:t>
+            </a:r>
+          </a:p>
+        </p:txBody>
+      </p:sp>
+      <p:sp>
+        <p:nvSpPr>
+          <p:cNvPr id="4" name="Slide Number Placeholder 3"/>
+          <p:cNvSpPr>
+            <a:spLocks noGrp="1"/>
+          </p:cNvSpPr>
+          <p:nvPr>
+            <p:ph type="sldNum" idx="5" sz="quarter"/>
+          </p:nvPr>
+        </p:nvSpPr>
+        <p:spPr/>
+      </p:sp>
+    </p:spTree>
+  </p:cSld>
+  <p:clrMapOvr>
+    <a:masterClrMapping/>
+  </p:clrMapOvr>
+</p:notes>
+</file>
+
+<file path=ppt/notesSlides/notesSlide21.xml><?xml version="1.0" encoding="utf-8"?>
 <p:notes xmlns:a="http://schemas.openxmlformats.org/drawingml/2006/main" xmlns:p="http://schemas.openxmlformats.org/presentationml/2006/main" xmlns:r="http://schemas.openxmlformats.org/officeDocument/2006/relationships">
   <p:cSld>
     <p:spTree>
@@ -15335,6 +15480,1424 @@
                 </a:solidFill>
                 <a:latin typeface="Calibri"/>
               </a:rPr>
+              <a:t>THE GAP IS A REGIME, NOT A SIZE</a:t>
+            </a:r>
+          </a:p>
+        </p:txBody>
+      </p:sp>
+      <p:sp>
+        <p:nvSpPr>
+          <p:cNvPr id="5" name="TextBox 4"/>
+          <p:cNvSpPr txBox="1"/>
+          <p:nvPr/>
+        </p:nvSpPr>
+        <p:spPr>
+          <a:xfrm>
+            <a:off x="658368" y="585216"/>
+            <a:ext cx="10874959" cy="512064"/>
+          </a:xfrm>
+          <a:prstGeom prst="rect">
+            <a:avLst/>
+          </a:prstGeom>
+          <a:noFill/>
+        </p:spPr>
+        <p:txBody>
+          <a:bodyPr wrap="square" anchor="t" lIns="0" rIns="0" tIns="0" bIns="0">
+            <a:spAutoFit/>
+          </a:bodyPr>
+          <a:lstStyle/>
+          <a:p>
+            <a:pPr algn="l">
+              <a:lnSpc>
+                <a:spcPct val="100000"/>
+              </a:lnSpc>
+              <a:spcBef>
+                <a:spcPts val="0"/>
+              </a:spcBef>
+              <a:spcAft>
+                <a:spcPts val="0"/>
+              </a:spcAft>
+            </a:pPr>
+            <a:r>
+              <a:rPr sz="2500" b="1" i="0">
+                <a:solidFill>
+                  <a:srgbClr val="EEF2F8"/>
+                </a:solidFill>
+                <a:latin typeface="Cambria"/>
+              </a:rPr>
+              <a:t>On sources it represents, a 1.5B guard beats the hosted model</a:t>
+            </a:r>
+          </a:p>
+        </p:txBody>
+      </p:sp>
+      <p:sp>
+        <p:nvSpPr>
+          <p:cNvPr id="6" name="TextBox 5"/>
+          <p:cNvSpPr txBox="1"/>
+          <p:nvPr/>
+        </p:nvSpPr>
+        <p:spPr>
+          <a:xfrm>
+            <a:off x="658368" y="1152144"/>
+            <a:ext cx="10874959" cy="274320"/>
+          </a:xfrm>
+          <a:prstGeom prst="rect">
+            <a:avLst/>
+          </a:prstGeom>
+          <a:noFill/>
+        </p:spPr>
+        <p:txBody>
+          <a:bodyPr wrap="square" anchor="t" lIns="0" rIns="0" tIns="0" bIns="0">
+            <a:spAutoFit/>
+          </a:bodyPr>
+          <a:lstStyle/>
+          <a:p>
+            <a:pPr algn="l">
+              <a:lnSpc>
+                <a:spcPct val="116000"/>
+              </a:lnSpc>
+              <a:spcBef>
+                <a:spcPts val="0"/>
+              </a:spcBef>
+              <a:spcAft>
+                <a:spcPts val="0"/>
+              </a:spcAft>
+            </a:pPr>
+            <a:r>
+              <a:rPr sz="1150" b="0" i="0">
+                <a:solidFill>
+                  <a:srgbClr val="6B7F9F"/>
+                </a:solidFill>
+                <a:latin typeface="Calibri"/>
+              </a:rPr>
+              <a:t>Five corpora scored by both sides, joined by row hash, at the same 5% false-alarm budget</a:t>
+            </a:r>
+          </a:p>
+        </p:txBody>
+      </p:sp>
+      <p:sp>
+        <p:nvSpPr>
+          <p:cNvPr id="7" name="TextBox 6"/>
+          <p:cNvSpPr txBox="1"/>
+          <p:nvPr/>
+        </p:nvSpPr>
+        <p:spPr>
+          <a:xfrm>
+            <a:off x="658368" y="1627632"/>
+            <a:ext cx="5245455" cy="2377440"/>
+          </a:xfrm>
+          <a:prstGeom prst="rect">
+            <a:avLst/>
+          </a:prstGeom>
+          <a:noFill/>
+        </p:spPr>
+        <p:txBody>
+          <a:bodyPr wrap="square" anchor="t" lIns="0" rIns="0" tIns="0" bIns="0">
+            <a:spAutoFit/>
+          </a:bodyPr>
+          <a:lstStyle/>
+          <a:p>
+            <a:pPr algn="l">
+              <a:lnSpc>
+                <a:spcPct val="120000"/>
+              </a:lnSpc>
+              <a:spcBef>
+                <a:spcPts val="0"/>
+              </a:spcBef>
+              <a:spcAft>
+                <a:spcPts val="900"/>
+              </a:spcAft>
+            </a:pPr>
+            <a:r>
+              <a:rPr sz="1150" b="1" i="0">
+                <a:solidFill>
+                  <a:srgbClr val="E0564F"/>
+                </a:solidFill>
+                <a:latin typeface="Calibri"/>
+              </a:rPr>
+              <a:t>—  </a:t>
+            </a:r>
+            <a:r>
+              <a:rPr sz="1150" b="1" i="0">
+                <a:solidFill>
+                  <a:srgbClr val="EEF2F8"/>
+                </a:solidFill>
+                <a:latin typeface="Calibri"/>
+              </a:rPr>
+              <a:t>Represented sources: .948 vs .741.</a:t>
+            </a:r>
+            <a:r>
+              <a:rPr sz="1150" b="0" i="0">
+                <a:solidFill>
+                  <a:srgbClr val="9DAFC7"/>
+                </a:solidFill>
+                <a:latin typeface="Calibri"/>
+              </a:rPr>
+              <a:t>  Qwen2.5-1.5B SFT on prompt_injections against the hosted reference. Paired +0.185 [+0.065, +0.423], and a ranking win rather than a threshold placement — AUROC 0.9928 vs 0.8731. 5 of 12 represented cells clear zero.</a:t>
+            </a:r>
+          </a:p>
+          <a:p>
+            <a:pPr algn="l">
+              <a:lnSpc>
+                <a:spcPct val="120000"/>
+              </a:lnSpc>
+              <a:spcBef>
+                <a:spcPts val="0"/>
+              </a:spcBef>
+              <a:spcAft>
+                <a:spcPts val="900"/>
+              </a:spcAft>
+            </a:pPr>
+            <a:r>
+              <a:rPr sz="1150" b="1" i="0">
+                <a:solidFill>
+                  <a:srgbClr val="E0564F"/>
+                </a:solidFill>
+                <a:latin typeface="Calibri"/>
+              </a:rPr>
+              <a:t>—  </a:t>
+            </a:r>
+            <a:r>
+              <a:rPr sz="1150" b="1" i="0">
+                <a:solidFill>
+                  <a:srgbClr val="EEF2F8"/>
+                </a:solidFill>
+                <a:latin typeface="Calibri"/>
+              </a:rPr>
+              <a:t>Transfer sources: the ordering reverses.</a:t>
+            </a:r>
+            <a:r>
+              <a:rPr sz="1150" b="0" i="0">
+                <a:solidFill>
+                  <a:srgbClr val="9DAFC7"/>
+                </a:solidFill>
+                <a:latin typeface="Calibri"/>
+              </a:rPr>
+              <a:t>  .967 for the hosted model against .917 for Qwen3-4B base — and the best local guard there is untuned. Tuning is what costs it the position.</a:t>
+            </a:r>
+          </a:p>
+        </p:txBody>
+      </p:sp>
+      <p:sp>
+        <p:nvSpPr>
+          <p:cNvPr id="8" name="Rectangle 7"/>
+          <p:cNvSpPr/>
+          <p:nvPr/>
+        </p:nvSpPr>
+        <p:spPr>
+          <a:xfrm>
+            <a:off x="6287871" y="1627632"/>
+            <a:ext cx="5245455" cy="1133856"/>
+          </a:xfrm>
+          <a:prstGeom prst="rect">
+            <a:avLst/>
+          </a:prstGeom>
+          <a:solidFill>
+            <a:srgbClr val="18263D"/>
+          </a:solidFill>
+          <a:ln w="9525">
+            <a:solidFill>
+              <a:srgbClr val="1E3050"/>
+            </a:solidFill>
+          </a:ln>
+          <a:effectLst/>
+        </p:spPr>
+        <p:style>
+          <a:lnRef idx="1">
+            <a:schemeClr val="accent1"/>
+          </a:lnRef>
+          <a:fillRef idx="3">
+            <a:schemeClr val="accent1"/>
+          </a:fillRef>
+          <a:effectRef idx="2">
+            <a:schemeClr val="accent1"/>
+          </a:effectRef>
+          <a:fontRef idx="minor">
+            <a:schemeClr val="lt1"/>
+          </a:fontRef>
+        </p:style>
+        <p:txBody>
+          <a:bodyPr rtlCol="0" anchor="ctr" wrap="square" lIns="237744" rIns="182880" tIns="91440" bIns="91440"/>
+          <a:lstStyle/>
+          <a:p>
+            <a:pPr algn="l">
+              <a:lnSpc>
+                <a:spcPct val="116000"/>
+              </a:lnSpc>
+              <a:spcBef>
+                <a:spcPts val="0"/>
+              </a:spcBef>
+              <a:spcAft>
+                <a:spcPts val="300"/>
+              </a:spcAft>
+            </a:pPr>
+            <a:r>
+              <a:rPr sz="980" b="1" i="0" spc="90">
+                <a:solidFill>
+                  <a:srgbClr val="BFD8F5"/>
+                </a:solidFill>
+                <a:latin typeface="Calibri"/>
+              </a:rPr>
+              <a:t>WHY TUNING AND SCALE COULD NOT CLOSE IT</a:t>
+            </a:r>
+          </a:p>
+          <a:p>
+            <a:pPr algn="l">
+              <a:lnSpc>
+                <a:spcPct val="116000"/>
+              </a:lnSpc>
+              <a:spcBef>
+                <a:spcPts val="0"/>
+              </a:spcBef>
+              <a:spcAft>
+                <a:spcPts val="0"/>
+              </a:spcAft>
+            </a:pPr>
+            <a:r>
+              <a:rPr sz="1150" b="0" i="0">
+                <a:solidFill>
+                  <a:srgbClr val="9DAFC7"/>
+                </a:solidFill>
+                <a:latin typeface="Calibri"/>
+              </a:rPr>
+              <a:t>They were aimed at the wrong quantity. The gap is not capacity the student lacks; it is the price of being asked about traffic nobody put in the manifest.</a:t>
+            </a:r>
+          </a:p>
+        </p:txBody>
+      </p:sp>
+      <p:sp>
+        <p:nvSpPr>
+          <p:cNvPr id="9" name="Rectangle 8"/>
+          <p:cNvSpPr/>
+          <p:nvPr/>
+        </p:nvSpPr>
+        <p:spPr>
+          <a:xfrm>
+            <a:off x="6287871" y="2907792"/>
+            <a:ext cx="5245455" cy="1097280"/>
+          </a:xfrm>
+          <a:prstGeom prst="rect">
+            <a:avLst/>
+          </a:prstGeom>
+          <a:solidFill>
+            <a:srgbClr val="331A1C"/>
+          </a:solidFill>
+          <a:ln w="9525">
+            <a:solidFill>
+              <a:srgbClr val="4A2427"/>
+            </a:solidFill>
+          </a:ln>
+          <a:effectLst/>
+        </p:spPr>
+        <p:style>
+          <a:lnRef idx="1">
+            <a:schemeClr val="accent1"/>
+          </a:lnRef>
+          <a:fillRef idx="3">
+            <a:schemeClr val="accent1"/>
+          </a:fillRef>
+          <a:effectRef idx="2">
+            <a:schemeClr val="accent1"/>
+          </a:effectRef>
+          <a:fontRef idx="minor">
+            <a:schemeClr val="lt1"/>
+          </a:fontRef>
+        </p:style>
+        <p:txBody>
+          <a:bodyPr rtlCol="0" anchor="ctr" wrap="square" lIns="237744" rIns="182880" tIns="91440" bIns="91440"/>
+          <a:lstStyle/>
+          <a:p>
+            <a:pPr algn="l">
+              <a:lnSpc>
+                <a:spcPct val="116000"/>
+              </a:lnSpc>
+              <a:spcBef>
+                <a:spcPts val="0"/>
+              </a:spcBef>
+              <a:spcAft>
+                <a:spcPts val="300"/>
+              </a:spcAft>
+            </a:pPr>
+            <a:r>
+              <a:rPr sz="980" b="1" i="0" spc="90">
+                <a:solidFill>
+                  <a:srgbClr val="F08A7F"/>
+                </a:solidFill>
+                <a:latin typeface="Calibri"/>
+              </a:rPr>
+              <a:t>WHAT IT LICENSES</a:t>
+            </a:r>
+          </a:p>
+          <a:p>
+            <a:pPr algn="l">
+              <a:lnSpc>
+                <a:spcPct val="116000"/>
+              </a:lnSpc>
+              <a:spcBef>
+                <a:spcPts val="0"/>
+              </a:spcBef>
+              <a:spcAft>
+                <a:spcPts val="0"/>
+              </a:spcAft>
+            </a:pPr>
+            <a:r>
+              <a:rPr sz="1150" b="0" i="0">
+                <a:solidFill>
+                  <a:srgbClr val="9DAFC7"/>
+                </a:solidFill>
+                <a:latin typeface="Calibri"/>
+              </a:rPr>
+              <a:t>Not “small guards match the frontier”. Only: on distributions an operator can enumerate, a small self-hosted guard wins at a matched alarm budget — a deployment property, not a capability claim.</a:t>
+            </a:r>
+          </a:p>
+        </p:txBody>
+      </p:sp>
+      <p:sp>
+        <p:nvSpPr>
+          <p:cNvPr id="10" name="Rectangle 9"/>
+          <p:cNvSpPr/>
+          <p:nvPr/>
+        </p:nvSpPr>
+        <p:spPr>
+          <a:xfrm>
+            <a:off x="658368" y="4133088"/>
+            <a:ext cx="10874959" cy="841248"/>
+          </a:xfrm>
+          <a:prstGeom prst="rect">
+            <a:avLst/>
+          </a:prstGeom>
+          <a:solidFill>
+            <a:srgbClr val="18263D"/>
+          </a:solidFill>
+          <a:ln w="9525">
+            <a:solidFill>
+              <a:srgbClr val="1E3050"/>
+            </a:solidFill>
+          </a:ln>
+          <a:effectLst/>
+        </p:spPr>
+        <p:style>
+          <a:lnRef idx="1">
+            <a:schemeClr val="accent1"/>
+          </a:lnRef>
+          <a:fillRef idx="3">
+            <a:schemeClr val="accent1"/>
+          </a:fillRef>
+          <a:effectRef idx="2">
+            <a:schemeClr val="accent1"/>
+          </a:effectRef>
+          <a:fontRef idx="minor">
+            <a:schemeClr val="lt1"/>
+          </a:fontRef>
+        </p:style>
+        <p:txBody>
+          <a:bodyPr rtlCol="0" anchor="ctr" wrap="square" lIns="237744" rIns="182880" tIns="91440" bIns="91440"/>
+          <a:lstStyle/>
+          <a:p>
+            <a:pPr algn="l">
+              <a:lnSpc>
+                <a:spcPct val="116000"/>
+              </a:lnSpc>
+              <a:spcBef>
+                <a:spcPts val="0"/>
+              </a:spcBef>
+              <a:spcAft>
+                <a:spcPts val="300"/>
+              </a:spcAft>
+            </a:pPr>
+            <a:r>
+              <a:rPr sz="980" b="1" i="0" spc="90">
+                <a:solidFill>
+                  <a:srgbClr val="6B7F9F"/>
+                </a:solidFill>
+                <a:latin typeface="Calibri"/>
+              </a:rPr>
+              <a:t>READ WITH THESE LIMITS</a:t>
+            </a:r>
+          </a:p>
+          <a:p>
+            <a:pPr algn="l">
+              <a:lnSpc>
+                <a:spcPct val="116000"/>
+              </a:lnSpc>
+              <a:spcBef>
+                <a:spcPts val="0"/>
+              </a:spcBef>
+              <a:spcAft>
+                <a:spcPts val="0"/>
+              </a:spcAft>
+            </a:pPr>
+            <a:r>
+              <a:rPr sz="1150" b="0" i="0">
+                <a:solidFill>
+                  <a:srgbClr val="9DAFC7"/>
+                </a:solidFill>
+                <a:latin typeface="Calibri"/>
+              </a:rPr>
+              <a:t>Per-source n is 67–451, so the intervals are wide and no per-cell ordering is a ranking. Retrospective and estimation-only: these rows and this panel were inspected during development. And id_test is held out by row, not by content — 1.6–5.0% of each represented split sits within Jaccard 0.70 of a training row.</a:t>
+            </a:r>
+          </a:p>
+        </p:txBody>
+      </p:sp>
+    </p:spTree>
+  </p:cSld>
+  <p:clrMapOvr>
+    <a:masterClrMapping/>
+  </p:clrMapOvr>
+</p:sld>
+</file>
+
+<file path=ppt/slides/slide2.xml><?xml version="1.0" encoding="utf-8"?>
+<p:sld xmlns:a="http://schemas.openxmlformats.org/drawingml/2006/main" xmlns:p="http://schemas.openxmlformats.org/presentationml/2006/main" xmlns:r="http://schemas.openxmlformats.org/officeDocument/2006/relationships">
+  <p:cSld>
+    <p:bg>
+      <p:bgPr>
+        <a:solidFill>
+          <a:srgbClr val="0C1424"/>
+        </a:solidFill>
+        <a:effectLst/>
+      </p:bgPr>
+    </p:bg>
+    <p:spTree>
+      <p:nvGrpSpPr>
+        <p:cNvPr id="1" name=""/>
+        <p:cNvGrpSpPr/>
+        <p:nvPr/>
+      </p:nvGrpSpPr>
+      <p:grpSpPr/>
+      <p:sp>
+        <p:nvSpPr>
+          <p:cNvPr id="2" name="TextBox 1"/>
+          <p:cNvSpPr txBox="1"/>
+          <p:nvPr/>
+        </p:nvSpPr>
+        <p:spPr>
+          <a:xfrm>
+            <a:off x="658368" y="6400800"/>
+            <a:ext cx="9144000" cy="237744"/>
+          </a:xfrm>
+          <a:prstGeom prst="rect">
+            <a:avLst/>
+          </a:prstGeom>
+          <a:noFill/>
+        </p:spPr>
+        <p:txBody>
+          <a:bodyPr wrap="square" anchor="t" lIns="0" rIns="0" tIns="0" bIns="0">
+            <a:spAutoFit/>
+          </a:bodyPr>
+          <a:lstStyle/>
+          <a:p>
+            <a:pPr algn="l">
+              <a:lnSpc>
+                <a:spcPct val="116000"/>
+              </a:lnSpc>
+              <a:spcBef>
+                <a:spcPts val="0"/>
+              </a:spcBef>
+              <a:spcAft>
+                <a:spcPts val="0"/>
+              </a:spcAft>
+            </a:pPr>
+            <a:r>
+              <a:rPr sz="860" b="0" i="0">
+                <a:solidFill>
+                  <a:srgbClr val="7488A8"/>
+                </a:solidFill>
+                <a:latin typeface="Calibri"/>
+              </a:rPr>
+              <a:t>The Safety-Guard Benchmark Chooses the Winner</a:t>
+            </a:r>
+            <a:r>
+              <a:rPr sz="860" b="0" i="0">
+                <a:solidFill>
+                  <a:srgbClr val="7488A8"/>
+                </a:solidFill>
+                <a:latin typeface="Calibri"/>
+              </a:rPr>
+              <a:t>     ·     </a:t>
+            </a:r>
+            <a:r>
+              <a:rPr sz="860" b="0" i="0">
+                <a:solidFill>
+                  <a:srgbClr val="7488A8"/>
+                </a:solidFill>
+                <a:latin typeface="Calibri"/>
+              </a:rPr>
+              <a:t>github.com/rrahimi-uci/safety-guard-dynamics</a:t>
+            </a:r>
+          </a:p>
+        </p:txBody>
+      </p:sp>
+      <p:sp>
+        <p:nvSpPr>
+          <p:cNvPr id="3" name="TextBox 2"/>
+          <p:cNvSpPr txBox="1"/>
+          <p:nvPr/>
+        </p:nvSpPr>
+        <p:spPr>
+          <a:xfrm>
+            <a:off x="10436047" y="6400800"/>
+            <a:ext cx="1097280" cy="237744"/>
+          </a:xfrm>
+          <a:prstGeom prst="rect">
+            <a:avLst/>
+          </a:prstGeom>
+          <a:noFill/>
+        </p:spPr>
+        <p:txBody>
+          <a:bodyPr wrap="square" anchor="t" lIns="0" rIns="0" tIns="0" bIns="0">
+            <a:spAutoFit/>
+          </a:bodyPr>
+          <a:lstStyle/>
+          <a:p>
+            <a:pPr algn="r">
+              <a:lnSpc>
+                <a:spcPct val="116000"/>
+              </a:lnSpc>
+              <a:spcBef>
+                <a:spcPts val="0"/>
+              </a:spcBef>
+              <a:spcAft>
+                <a:spcPts val="0"/>
+              </a:spcAft>
+            </a:pPr>
+            <a:r>
+              <a:rPr sz="950" b="1" i="0" spc="60">
+                <a:solidFill>
+                  <a:srgbClr val="E0564F"/>
+                </a:solidFill>
+                <a:latin typeface="Calibri"/>
+              </a:rPr>
+              <a:t>01</a:t>
+            </a:r>
+          </a:p>
+        </p:txBody>
+      </p:sp>
+      <p:sp>
+        <p:nvSpPr>
+          <p:cNvPr id="4" name="TextBox 3"/>
+          <p:cNvSpPr txBox="1"/>
+          <p:nvPr/>
+        </p:nvSpPr>
+        <p:spPr>
+          <a:xfrm>
+            <a:off x="658368" y="329184"/>
+            <a:ext cx="10874959" cy="237744"/>
+          </a:xfrm>
+          <a:prstGeom prst="rect">
+            <a:avLst/>
+          </a:prstGeom>
+          <a:noFill/>
+        </p:spPr>
+        <p:txBody>
+          <a:bodyPr wrap="square" anchor="t" lIns="0" rIns="0" tIns="0" bIns="0">
+            <a:spAutoFit/>
+          </a:bodyPr>
+          <a:lstStyle/>
+          <a:p>
+            <a:pPr algn="l">
+              <a:lnSpc>
+                <a:spcPct val="116000"/>
+              </a:lnSpc>
+              <a:spcBef>
+                <a:spcPts val="0"/>
+              </a:spcBef>
+              <a:spcAft>
+                <a:spcPts val="0"/>
+              </a:spcAft>
+            </a:pPr>
+            <a:r>
+              <a:rPr sz="1000" b="1" i="0" spc="140">
+                <a:solidFill>
+                  <a:srgbClr val="E0564F"/>
+                </a:solidFill>
+                <a:latin typeface="Calibri"/>
+              </a:rPr>
+              <a:t>THE PROBLEM</a:t>
+            </a:r>
+          </a:p>
+        </p:txBody>
+      </p:sp>
+      <p:sp>
+        <p:nvSpPr>
+          <p:cNvPr id="5" name="TextBox 4"/>
+          <p:cNvSpPr txBox="1"/>
+          <p:nvPr/>
+        </p:nvSpPr>
+        <p:spPr>
+          <a:xfrm>
+            <a:off x="658368" y="585216"/>
+            <a:ext cx="10874959" cy="512064"/>
+          </a:xfrm>
+          <a:prstGeom prst="rect">
+            <a:avLst/>
+          </a:prstGeom>
+          <a:noFill/>
+        </p:spPr>
+        <p:txBody>
+          <a:bodyPr wrap="square" anchor="t" lIns="0" rIns="0" tIns="0" bIns="0">
+            <a:spAutoFit/>
+          </a:bodyPr>
+          <a:lstStyle/>
+          <a:p>
+            <a:pPr algn="l">
+              <a:lnSpc>
+                <a:spcPct val="100000"/>
+              </a:lnSpc>
+              <a:spcBef>
+                <a:spcPts val="0"/>
+              </a:spcBef>
+              <a:spcAft>
+                <a:spcPts val="0"/>
+              </a:spcAft>
+            </a:pPr>
+            <a:r>
+              <a:rPr sz="2500" b="1" i="0">
+                <a:solidFill>
+                  <a:srgbClr val="EEF2F8"/>
+                </a:solidFill>
+                <a:latin typeface="Cambria"/>
+              </a:rPr>
+              <a:t>A guard's benchmark score is not a property of the guard</a:t>
+            </a:r>
+          </a:p>
+        </p:txBody>
+      </p:sp>
+      <p:sp>
+        <p:nvSpPr>
+          <p:cNvPr id="6" name="TextBox 5"/>
+          <p:cNvSpPr txBox="1"/>
+          <p:nvPr/>
+        </p:nvSpPr>
+        <p:spPr>
+          <a:xfrm>
+            <a:off x="658368" y="1152144"/>
+            <a:ext cx="10874959" cy="274320"/>
+          </a:xfrm>
+          <a:prstGeom prst="rect">
+            <a:avLst/>
+          </a:prstGeom>
+          <a:noFill/>
+        </p:spPr>
+        <p:txBody>
+          <a:bodyPr wrap="square" anchor="t" lIns="0" rIns="0" tIns="0" bIns="0">
+            <a:spAutoFit/>
+          </a:bodyPr>
+          <a:lstStyle/>
+          <a:p>
+            <a:pPr algn="l">
+              <a:lnSpc>
+                <a:spcPct val="116000"/>
+              </a:lnSpc>
+              <a:spcBef>
+                <a:spcPts val="0"/>
+              </a:spcBef>
+              <a:spcAft>
+                <a:spcPts val="0"/>
+              </a:spcAft>
+            </a:pPr>
+            <a:r>
+              <a:rPr sz="1150" b="0" i="0">
+                <a:solidFill>
+                  <a:srgbClr val="6B7F9F"/>
+                </a:solidFill>
+                <a:latin typeface="Calibri"/>
+              </a:rPr>
+              <a:t>Three things a rising benchmark number does not show you</a:t>
+            </a:r>
+          </a:p>
+        </p:txBody>
+      </p:sp>
+      <p:sp>
+        <p:nvSpPr>
+          <p:cNvPr id="7" name="Rectangle 6"/>
+          <p:cNvSpPr/>
+          <p:nvPr/>
+        </p:nvSpPr>
+        <p:spPr>
+          <a:xfrm>
+            <a:off x="658368" y="1645920"/>
+            <a:ext cx="3529584" cy="1975104"/>
+          </a:xfrm>
+          <a:prstGeom prst="rect">
+            <a:avLst/>
+          </a:prstGeom>
+          <a:solidFill>
+            <a:srgbClr val="18263D"/>
+          </a:solidFill>
+          <a:ln w="9525">
+            <a:solidFill>
+              <a:srgbClr val="1E3050"/>
+            </a:solidFill>
+          </a:ln>
+          <a:effectLst/>
+        </p:spPr>
+        <p:style>
+          <a:lnRef idx="1">
+            <a:schemeClr val="accent1"/>
+          </a:lnRef>
+          <a:fillRef idx="3">
+            <a:schemeClr val="accent1"/>
+          </a:fillRef>
+          <a:effectRef idx="2">
+            <a:schemeClr val="accent1"/>
+          </a:effectRef>
+          <a:fontRef idx="minor">
+            <a:schemeClr val="lt1"/>
+          </a:fontRef>
+        </p:style>
+        <p:txBody>
+          <a:bodyPr rtlCol="0" anchor="ctr" wrap="square"/>
+          <a:lstStyle/>
+          <a:p>
+            <a:pPr algn="ctr"/>
+          </a:p>
+        </p:txBody>
+      </p:sp>
+      <p:sp>
+        <p:nvSpPr>
+          <p:cNvPr id="8" name="TextBox 7"/>
+          <p:cNvSpPr txBox="1"/>
+          <p:nvPr/>
+        </p:nvSpPr>
+        <p:spPr>
+          <a:xfrm>
+            <a:off x="896112" y="1755648"/>
+            <a:ext cx="3054096" cy="1755648"/>
+          </a:xfrm>
+          <a:prstGeom prst="rect">
+            <a:avLst/>
+          </a:prstGeom>
+          <a:noFill/>
+        </p:spPr>
+        <p:txBody>
+          <a:bodyPr wrap="square" anchor="t" lIns="0" rIns="0" tIns="0" bIns="0">
+            <a:spAutoFit/>
+          </a:bodyPr>
+          <a:lstStyle/>
+          <a:p>
+            <a:pPr algn="l">
+              <a:lnSpc>
+                <a:spcPct val="100000"/>
+              </a:lnSpc>
+              <a:spcBef>
+                <a:spcPts val="0"/>
+              </a:spcBef>
+              <a:spcAft>
+                <a:spcPts val="600"/>
+              </a:spcAft>
+            </a:pPr>
+            <a:r>
+              <a:rPr sz="2700" b="1" i="0">
+                <a:solidFill>
+                  <a:srgbClr val="E0564F"/>
+                </a:solidFill>
+                <a:latin typeface="Cambria"/>
+              </a:rPr>
+              <a:t>4.3%  →  17.0%</a:t>
+            </a:r>
+          </a:p>
+          <a:p>
+            <a:pPr algn="l">
+              <a:lnSpc>
+                <a:spcPct val="118000"/>
+              </a:lnSpc>
+              <a:spcBef>
+                <a:spcPts val="0"/>
+              </a:spcBef>
+              <a:spcAft>
+                <a:spcPts val="0"/>
+              </a:spcAft>
+            </a:pPr>
+            <a:r>
+              <a:rPr sz="1019" b="0" i="0">
+                <a:solidFill>
+                  <a:srgbClr val="9DAFC7"/>
+                </a:solidFill>
+                <a:latin typeface="Calibri"/>
+              </a:rPr>
+              <a:t>Pooled false alarms on unseen traffic — nearly four times the benign traffic blocked, after a fine-tune that raised represented macro-AP by +0.32.</a:t>
+            </a:r>
+          </a:p>
+        </p:txBody>
+      </p:sp>
+      <p:sp>
+        <p:nvSpPr>
+          <p:cNvPr id="9" name="Rectangle 8"/>
+          <p:cNvSpPr/>
+          <p:nvPr/>
+        </p:nvSpPr>
+        <p:spPr>
+          <a:xfrm>
+            <a:off x="4453128" y="1645920"/>
+            <a:ext cx="3529584" cy="1975104"/>
+          </a:xfrm>
+          <a:prstGeom prst="rect">
+            <a:avLst/>
+          </a:prstGeom>
+          <a:solidFill>
+            <a:srgbClr val="18263D"/>
+          </a:solidFill>
+          <a:ln w="9525">
+            <a:solidFill>
+              <a:srgbClr val="1E3050"/>
+            </a:solidFill>
+          </a:ln>
+          <a:effectLst/>
+        </p:spPr>
+        <p:style>
+          <a:lnRef idx="1">
+            <a:schemeClr val="accent1"/>
+          </a:lnRef>
+          <a:fillRef idx="3">
+            <a:schemeClr val="accent1"/>
+          </a:fillRef>
+          <a:effectRef idx="2">
+            <a:schemeClr val="accent1"/>
+          </a:effectRef>
+          <a:fontRef idx="minor">
+            <a:schemeClr val="lt1"/>
+          </a:fontRef>
+        </p:style>
+        <p:txBody>
+          <a:bodyPr rtlCol="0" anchor="ctr" wrap="square"/>
+          <a:lstStyle/>
+          <a:p>
+            <a:pPr algn="ctr"/>
+          </a:p>
+        </p:txBody>
+      </p:sp>
+      <p:sp>
+        <p:nvSpPr>
+          <p:cNvPr id="10" name="TextBox 9"/>
+          <p:cNvSpPr txBox="1"/>
+          <p:nvPr/>
+        </p:nvSpPr>
+        <p:spPr>
+          <a:xfrm>
+            <a:off x="4690872" y="1755648"/>
+            <a:ext cx="3054096" cy="1755648"/>
+          </a:xfrm>
+          <a:prstGeom prst="rect">
+            <a:avLst/>
+          </a:prstGeom>
+          <a:noFill/>
+        </p:spPr>
+        <p:txBody>
+          <a:bodyPr wrap="square" anchor="t" lIns="0" rIns="0" tIns="0" bIns="0">
+            <a:spAutoFit/>
+          </a:bodyPr>
+          <a:lstStyle/>
+          <a:p>
+            <a:pPr algn="l">
+              <a:lnSpc>
+                <a:spcPct val="100000"/>
+              </a:lnSpc>
+              <a:spcBef>
+                <a:spcPts val="0"/>
+              </a:spcBef>
+              <a:spcAft>
+                <a:spcPts val="600"/>
+              </a:spcAft>
+            </a:pPr>
+            <a:r>
+              <a:rPr sz="2700" b="1" i="0">
+                <a:solidFill>
+                  <a:srgbClr val="E0564F"/>
+                </a:solidFill>
+                <a:latin typeface="Cambria"/>
+              </a:rPr>
+              <a:t>78.0%  →  60.0%</a:t>
+            </a:r>
+          </a:p>
+          <a:p>
+            <a:pPr algn="l">
+              <a:lnSpc>
+                <a:spcPct val="118000"/>
+              </a:lnSpc>
+              <a:spcBef>
+                <a:spcPts val="0"/>
+              </a:spcBef>
+              <a:spcAft>
+                <a:spcPts val="0"/>
+              </a:spcAft>
+            </a:pPr>
+            <a:r>
+              <a:rPr sz="1019" b="0" i="0">
+                <a:solidFill>
+                  <a:srgbClr val="9DAFC7"/>
+                </a:solidFill>
+                <a:latin typeface="Calibri"/>
+              </a:rPr>
+              <a:t>Recall on HarmBench, from the same fine-tune: the hardest attacks, the exact content the guard was built to stop.</a:t>
+            </a:r>
+          </a:p>
+        </p:txBody>
+      </p:sp>
+      <p:sp>
+        <p:nvSpPr>
+          <p:cNvPr id="11" name="Rectangle 10"/>
+          <p:cNvSpPr/>
+          <p:nvPr/>
+        </p:nvSpPr>
+        <p:spPr>
+          <a:xfrm>
+            <a:off x="8247888" y="1645920"/>
+            <a:ext cx="3529584" cy="1975104"/>
+          </a:xfrm>
+          <a:prstGeom prst="rect">
+            <a:avLst/>
+          </a:prstGeom>
+          <a:solidFill>
+            <a:srgbClr val="18263D"/>
+          </a:solidFill>
+          <a:ln w="9525">
+            <a:solidFill>
+              <a:srgbClr val="1E3050"/>
+            </a:solidFill>
+          </a:ln>
+          <a:effectLst/>
+        </p:spPr>
+        <p:style>
+          <a:lnRef idx="1">
+            <a:schemeClr val="accent1"/>
+          </a:lnRef>
+          <a:fillRef idx="3">
+            <a:schemeClr val="accent1"/>
+          </a:fillRef>
+          <a:effectRef idx="2">
+            <a:schemeClr val="accent1"/>
+          </a:effectRef>
+          <a:fontRef idx="minor">
+            <a:schemeClr val="lt1"/>
+          </a:fontRef>
+        </p:style>
+        <p:txBody>
+          <a:bodyPr rtlCol="0" anchor="ctr" wrap="square"/>
+          <a:lstStyle/>
+          <a:p>
+            <a:pPr algn="ctr"/>
+          </a:p>
+        </p:txBody>
+      </p:sp>
+      <p:sp>
+        <p:nvSpPr>
+          <p:cNvPr id="12" name="TextBox 11"/>
+          <p:cNvSpPr txBox="1"/>
+          <p:nvPr/>
+        </p:nvSpPr>
+        <p:spPr>
+          <a:xfrm>
+            <a:off x="8485632" y="1755648"/>
+            <a:ext cx="3054096" cy="1755648"/>
+          </a:xfrm>
+          <a:prstGeom prst="rect">
+            <a:avLst/>
+          </a:prstGeom>
+          <a:noFill/>
+        </p:spPr>
+        <p:txBody>
+          <a:bodyPr wrap="square" anchor="t" lIns="0" rIns="0" tIns="0" bIns="0">
+            <a:spAutoFit/>
+          </a:bodyPr>
+          <a:lstStyle/>
+          <a:p>
+            <a:pPr algn="l">
+              <a:lnSpc>
+                <a:spcPct val="100000"/>
+              </a:lnSpc>
+              <a:spcBef>
+                <a:spcPts val="0"/>
+              </a:spcBef>
+              <a:spcAft>
+                <a:spcPts val="600"/>
+              </a:spcAft>
+            </a:pPr>
+            <a:r>
+              <a:rPr sz="2700" b="1" i="0">
+                <a:solidFill>
+                  <a:srgbClr val="E0564F"/>
+                </a:solidFill>
+                <a:latin typeface="Cambria"/>
+              </a:rPr>
+              <a:t>below all 65</a:t>
+            </a:r>
+          </a:p>
+          <a:p>
+            <a:pPr algn="l">
+              <a:lnSpc>
+                <a:spcPct val="118000"/>
+              </a:lnSpc>
+              <a:spcBef>
+                <a:spcPts val="0"/>
+              </a:spcBef>
+              <a:spcAft>
+                <a:spcPts val="0"/>
+              </a:spcAft>
+            </a:pPr>
+            <a:r>
+              <a:rPr sz="1019" b="0" i="0">
+                <a:solidFill>
+                  <a:srgbClr val="9DAFC7"/>
+                </a:solidFill>
+                <a:latin typeface="Calibri"/>
+              </a:rPr>
+              <a:t>A coded fair-lending violation ranked below every benign mortgage inquiry in the split — zero-shot, before any tuning at all.</a:t>
+            </a:r>
+          </a:p>
+        </p:txBody>
+      </p:sp>
+      <p:sp>
+        <p:nvSpPr>
+          <p:cNvPr id="13" name="Rectangle 12"/>
+          <p:cNvSpPr/>
+          <p:nvPr/>
+        </p:nvSpPr>
+        <p:spPr>
+          <a:xfrm>
+            <a:off x="658368" y="3858768"/>
+            <a:ext cx="10874959" cy="932688"/>
+          </a:xfrm>
+          <a:prstGeom prst="rect">
+            <a:avLst/>
+          </a:prstGeom>
+          <a:solidFill>
+            <a:srgbClr val="331A1C"/>
+          </a:solidFill>
+          <a:ln w="9525">
+            <a:solidFill>
+              <a:srgbClr val="4A2427"/>
+            </a:solidFill>
+          </a:ln>
+          <a:effectLst/>
+        </p:spPr>
+        <p:style>
+          <a:lnRef idx="1">
+            <a:schemeClr val="accent1"/>
+          </a:lnRef>
+          <a:fillRef idx="3">
+            <a:schemeClr val="accent1"/>
+          </a:fillRef>
+          <a:effectRef idx="2">
+            <a:schemeClr val="accent1"/>
+          </a:effectRef>
+          <a:fontRef idx="minor">
+            <a:schemeClr val="lt1"/>
+          </a:fontRef>
+        </p:style>
+        <p:txBody>
+          <a:bodyPr rtlCol="0" anchor="ctr" wrap="square" lIns="237744" rIns="182880" tIns="91440" bIns="91440"/>
+          <a:lstStyle/>
+          <a:p>
+            <a:pPr algn="l">
+              <a:lnSpc>
+                <a:spcPct val="116000"/>
+              </a:lnSpc>
+              <a:spcBef>
+                <a:spcPts val="0"/>
+              </a:spcBef>
+              <a:spcAft>
+                <a:spcPts val="300"/>
+              </a:spcAft>
+            </a:pPr>
+            <a:r>
+              <a:rPr sz="980" b="1" i="0" spc="90">
+                <a:solidFill>
+                  <a:srgbClr val="F08A7F"/>
+                </a:solidFill>
+                <a:latin typeface="Calibri"/>
+              </a:rPr>
+              <a:t>WHY A LEADERBOARD CANNOT SEE ANY OF THEM</a:t>
+            </a:r>
+          </a:p>
+          <a:p>
+            <a:pPr algn="l">
+              <a:lnSpc>
+                <a:spcPct val="116000"/>
+              </a:lnSpc>
+              <a:spcBef>
+                <a:spcPts val="0"/>
+              </a:spcBef>
+              <a:spcAft>
+                <a:spcPts val="0"/>
+              </a:spcAft>
+            </a:pPr>
+            <a:r>
+              <a:rPr sz="1150" b="0" i="0">
+                <a:solidFill>
+                  <a:srgbClr val="9DAFC7"/>
+                </a:solidFill>
+                <a:latin typeface="Calibri"/>
+              </a:rPr>
+              <a:t>The first two are a fine-tune cost invisible on the sources it trained on. The third is not about tuning at all: it is a policy violation no general safety taxonomy has a label for, so no general benchmark scores it either.</a:t>
+            </a:r>
+          </a:p>
+        </p:txBody>
+      </p:sp>
+      <p:sp>
+        <p:nvSpPr>
+          <p:cNvPr id="14" name="TextBox 13"/>
+          <p:cNvSpPr txBox="1"/>
+          <p:nvPr/>
+        </p:nvSpPr>
+        <p:spPr>
+          <a:xfrm>
+            <a:off x="658368" y="5029200"/>
+            <a:ext cx="10874959" cy="457200"/>
+          </a:xfrm>
+          <a:prstGeom prst="rect">
+            <a:avLst/>
+          </a:prstGeom>
+          <a:noFill/>
+        </p:spPr>
+        <p:txBody>
+          <a:bodyPr wrap="square" anchor="t" lIns="0" rIns="0" tIns="0" bIns="0">
+            <a:spAutoFit/>
+          </a:bodyPr>
+          <a:lstStyle/>
+          <a:p>
+            <a:pPr algn="l">
+              <a:lnSpc>
+                <a:spcPct val="116000"/>
+              </a:lnSpc>
+              <a:spcBef>
+                <a:spcPts val="0"/>
+              </a:spcBef>
+              <a:spcAft>
+                <a:spcPts val="0"/>
+              </a:spcAft>
+            </a:pPr>
+            <a:r>
+              <a:rPr sz="1150" b="1" i="0">
+                <a:solidFill>
+                  <a:srgbClr val="EEF2F8"/>
+                </a:solidFill>
+                <a:latin typeface="Calibri"/>
+              </a:rPr>
+              <a:t>Three questions on one fixed panel:   </a:t>
+            </a:r>
+            <a:r>
+              <a:rPr sz="1150" b="1" i="0">
+                <a:solidFill>
+                  <a:srgbClr val="BFD8F5"/>
+                </a:solidFill>
+                <a:latin typeface="Calibri"/>
+              </a:rPr>
+              <a:t>Does fine-tuning transfer?</a:t>
+            </a:r>
+            <a:r>
+              <a:rPr sz="1150" b="0" i="0">
+                <a:solidFill>
+                  <a:srgbClr val="6B7F9F"/>
+                </a:solidFill>
+                <a:latin typeface="Calibri"/>
+              </a:rPr>
+              <a:t>   ·   </a:t>
+            </a:r>
+            <a:r>
+              <a:rPr sz="1150" b="1" i="0">
+                <a:solidFill>
+                  <a:srgbClr val="8FD3B6"/>
+                </a:solidFill>
+                <a:latin typeface="Calibri"/>
+              </a:rPr>
+              <a:t>Can we recover it without retraining?</a:t>
+            </a:r>
+            <a:r>
+              <a:rPr sz="1150" b="0" i="0">
+                <a:solidFill>
+                  <a:srgbClr val="6B7F9F"/>
+                </a:solidFill>
+                <a:latin typeface="Calibri"/>
+              </a:rPr>
+              <a:t>   ·   </a:t>
+            </a:r>
+            <a:r>
+              <a:rPr sz="1150" b="1" i="0">
+                <a:solidFill>
+                  <a:srgbClr val="E3C285"/>
+                </a:solidFill>
+                <a:latin typeface="Calibri"/>
+              </a:rPr>
+              <a:t>Does one score cover a regulated domain?</a:t>
+            </a:r>
+          </a:p>
+        </p:txBody>
+      </p:sp>
+    </p:spTree>
+  </p:cSld>
+  <p:clrMapOvr>
+    <a:masterClrMapping/>
+  </p:clrMapOvr>
+</p:sld>
+</file>
+
+<file path=ppt/slides/slide20.xml><?xml version="1.0" encoding="utf-8"?>
+<p:sld xmlns:a="http://schemas.openxmlformats.org/drawingml/2006/main" xmlns:p="http://schemas.openxmlformats.org/presentationml/2006/main" xmlns:r="http://schemas.openxmlformats.org/officeDocument/2006/relationships">
+  <p:cSld>
+    <p:bg>
+      <p:bgPr>
+        <a:solidFill>
+          <a:srgbClr val="0C1424"/>
+        </a:solidFill>
+        <a:effectLst/>
+      </p:bgPr>
+    </p:bg>
+    <p:spTree>
+      <p:nvGrpSpPr>
+        <p:cNvPr id="1" name=""/>
+        <p:cNvGrpSpPr/>
+        <p:nvPr/>
+      </p:nvGrpSpPr>
+      <p:grpSpPr/>
+      <p:sp>
+        <p:nvSpPr>
+          <p:cNvPr id="2" name="TextBox 1"/>
+          <p:cNvSpPr txBox="1"/>
+          <p:nvPr/>
+        </p:nvSpPr>
+        <p:spPr>
+          <a:xfrm>
+            <a:off x="658368" y="6400800"/>
+            <a:ext cx="9144000" cy="237744"/>
+          </a:xfrm>
+          <a:prstGeom prst="rect">
+            <a:avLst/>
+          </a:prstGeom>
+          <a:noFill/>
+        </p:spPr>
+        <p:txBody>
+          <a:bodyPr wrap="square" anchor="t" lIns="0" rIns="0" tIns="0" bIns="0">
+            <a:spAutoFit/>
+          </a:bodyPr>
+          <a:lstStyle/>
+          <a:p>
+            <a:pPr algn="l">
+              <a:lnSpc>
+                <a:spcPct val="116000"/>
+              </a:lnSpc>
+              <a:spcBef>
+                <a:spcPts val="0"/>
+              </a:spcBef>
+              <a:spcAft>
+                <a:spcPts val="0"/>
+              </a:spcAft>
+            </a:pPr>
+            <a:r>
+              <a:rPr sz="860" b="0" i="0">
+                <a:solidFill>
+                  <a:srgbClr val="7488A8"/>
+                </a:solidFill>
+                <a:latin typeface="Calibri"/>
+              </a:rPr>
+              <a:t>The Safety-Guard Benchmark Chooses the Winner</a:t>
+            </a:r>
+            <a:r>
+              <a:rPr sz="860" b="0" i="0">
+                <a:solidFill>
+                  <a:srgbClr val="7488A8"/>
+                </a:solidFill>
+                <a:latin typeface="Calibri"/>
+              </a:rPr>
+              <a:t>     ·     </a:t>
+            </a:r>
+            <a:r>
+              <a:rPr sz="860" b="0" i="0">
+                <a:solidFill>
+                  <a:srgbClr val="7488A8"/>
+                </a:solidFill>
+                <a:latin typeface="Calibri"/>
+              </a:rPr>
+              <a:t>github.com/rrahimi-uci/safety-guard-dynamics</a:t>
+            </a:r>
+          </a:p>
+        </p:txBody>
+      </p:sp>
+      <p:sp>
+        <p:nvSpPr>
+          <p:cNvPr id="3" name="TextBox 2"/>
+          <p:cNvSpPr txBox="1"/>
+          <p:nvPr/>
+        </p:nvSpPr>
+        <p:spPr>
+          <a:xfrm>
+            <a:off x="10436047" y="6400800"/>
+            <a:ext cx="1097280" cy="237744"/>
+          </a:xfrm>
+          <a:prstGeom prst="rect">
+            <a:avLst/>
+          </a:prstGeom>
+          <a:noFill/>
+        </p:spPr>
+        <p:txBody>
+          <a:bodyPr wrap="square" anchor="t" lIns="0" rIns="0" tIns="0" bIns="0">
+            <a:spAutoFit/>
+          </a:bodyPr>
+          <a:lstStyle/>
+          <a:p>
+            <a:pPr algn="r">
+              <a:lnSpc>
+                <a:spcPct val="116000"/>
+              </a:lnSpc>
+              <a:spcBef>
+                <a:spcPts val="0"/>
+              </a:spcBef>
+              <a:spcAft>
+                <a:spcPts val="0"/>
+              </a:spcAft>
+            </a:pPr>
+            <a:r>
+              <a:rPr sz="950" b="1" i="0" spc="60">
+                <a:solidFill>
+                  <a:srgbClr val="E0564F"/>
+                </a:solidFill>
+                <a:latin typeface="Calibri"/>
+              </a:rPr>
+              <a:t>19</a:t>
+            </a:r>
+          </a:p>
+        </p:txBody>
+      </p:sp>
+      <p:sp>
+        <p:nvSpPr>
+          <p:cNvPr id="4" name="TextBox 3"/>
+          <p:cNvSpPr txBox="1"/>
+          <p:nvPr/>
+        </p:nvSpPr>
+        <p:spPr>
+          <a:xfrm>
+            <a:off x="658368" y="329184"/>
+            <a:ext cx="10874959" cy="237744"/>
+          </a:xfrm>
+          <a:prstGeom prst="rect">
+            <a:avLst/>
+          </a:prstGeom>
+          <a:noFill/>
+        </p:spPr>
+        <p:txBody>
+          <a:bodyPr wrap="square" anchor="t" lIns="0" rIns="0" tIns="0" bIns="0">
+            <a:spAutoFit/>
+          </a:bodyPr>
+          <a:lstStyle/>
+          <a:p>
+            <a:pPr algn="l">
+              <a:lnSpc>
+                <a:spcPct val="116000"/>
+              </a:lnSpc>
+              <a:spcBef>
+                <a:spcPts val="0"/>
+              </a:spcBef>
+              <a:spcAft>
+                <a:spcPts val="0"/>
+              </a:spcAft>
+            </a:pPr>
+            <a:r>
+              <a:rPr sz="1000" b="1" i="0" spc="140">
+                <a:solidFill>
+                  <a:srgbClr val="E0564F"/>
+                </a:solidFill>
+                <a:latin typeface="Calibri"/>
+              </a:rPr>
               <a:t>WHAT TO DO</a:t>
             </a:r>
           </a:p>
@@ -16367,792 +17930,7 @@
 </p:sld>
 </file>
 
-<file path=ppt/slides/slide2.xml><?xml version="1.0" encoding="utf-8"?>
-<p:sld xmlns:a="http://schemas.openxmlformats.org/drawingml/2006/main" xmlns:p="http://schemas.openxmlformats.org/presentationml/2006/main" xmlns:r="http://schemas.openxmlformats.org/officeDocument/2006/relationships">
-  <p:cSld>
-    <p:bg>
-      <p:bgPr>
-        <a:solidFill>
-          <a:srgbClr val="0C1424"/>
-        </a:solidFill>
-        <a:effectLst/>
-      </p:bgPr>
-    </p:bg>
-    <p:spTree>
-      <p:nvGrpSpPr>
-        <p:cNvPr id="1" name=""/>
-        <p:cNvGrpSpPr/>
-        <p:nvPr/>
-      </p:nvGrpSpPr>
-      <p:grpSpPr/>
-      <p:sp>
-        <p:nvSpPr>
-          <p:cNvPr id="2" name="TextBox 1"/>
-          <p:cNvSpPr txBox="1"/>
-          <p:nvPr/>
-        </p:nvSpPr>
-        <p:spPr>
-          <a:xfrm>
-            <a:off x="658368" y="6400800"/>
-            <a:ext cx="9144000" cy="237744"/>
-          </a:xfrm>
-          <a:prstGeom prst="rect">
-            <a:avLst/>
-          </a:prstGeom>
-          <a:noFill/>
-        </p:spPr>
-        <p:txBody>
-          <a:bodyPr wrap="square" anchor="t" lIns="0" rIns="0" tIns="0" bIns="0">
-            <a:spAutoFit/>
-          </a:bodyPr>
-          <a:lstStyle/>
-          <a:p>
-            <a:pPr algn="l">
-              <a:lnSpc>
-                <a:spcPct val="116000"/>
-              </a:lnSpc>
-              <a:spcBef>
-                <a:spcPts val="0"/>
-              </a:spcBef>
-              <a:spcAft>
-                <a:spcPts val="0"/>
-              </a:spcAft>
-            </a:pPr>
-            <a:r>
-              <a:rPr sz="860" b="0" i="0">
-                <a:solidFill>
-                  <a:srgbClr val="7488A8"/>
-                </a:solidFill>
-                <a:latin typeface="Calibri"/>
-              </a:rPr>
-              <a:t>The Safety-Guard Benchmark Chooses the Winner</a:t>
-            </a:r>
-            <a:r>
-              <a:rPr sz="860" b="0" i="0">
-                <a:solidFill>
-                  <a:srgbClr val="7488A8"/>
-                </a:solidFill>
-                <a:latin typeface="Calibri"/>
-              </a:rPr>
-              <a:t>     ·     </a:t>
-            </a:r>
-            <a:r>
-              <a:rPr sz="860" b="0" i="0">
-                <a:solidFill>
-                  <a:srgbClr val="7488A8"/>
-                </a:solidFill>
-                <a:latin typeface="Calibri"/>
-              </a:rPr>
-              <a:t>github.com/rrahimi-uci/safety-guard-dynamics</a:t>
-            </a:r>
-          </a:p>
-        </p:txBody>
-      </p:sp>
-      <p:sp>
-        <p:nvSpPr>
-          <p:cNvPr id="3" name="TextBox 2"/>
-          <p:cNvSpPr txBox="1"/>
-          <p:nvPr/>
-        </p:nvSpPr>
-        <p:spPr>
-          <a:xfrm>
-            <a:off x="10436047" y="6400800"/>
-            <a:ext cx="1097280" cy="237744"/>
-          </a:xfrm>
-          <a:prstGeom prst="rect">
-            <a:avLst/>
-          </a:prstGeom>
-          <a:noFill/>
-        </p:spPr>
-        <p:txBody>
-          <a:bodyPr wrap="square" anchor="t" lIns="0" rIns="0" tIns="0" bIns="0">
-            <a:spAutoFit/>
-          </a:bodyPr>
-          <a:lstStyle/>
-          <a:p>
-            <a:pPr algn="r">
-              <a:lnSpc>
-                <a:spcPct val="116000"/>
-              </a:lnSpc>
-              <a:spcBef>
-                <a:spcPts val="0"/>
-              </a:spcBef>
-              <a:spcAft>
-                <a:spcPts val="0"/>
-              </a:spcAft>
-            </a:pPr>
-            <a:r>
-              <a:rPr sz="950" b="1" i="0" spc="60">
-                <a:solidFill>
-                  <a:srgbClr val="E0564F"/>
-                </a:solidFill>
-                <a:latin typeface="Calibri"/>
-              </a:rPr>
-              <a:t>01</a:t>
-            </a:r>
-          </a:p>
-        </p:txBody>
-      </p:sp>
-      <p:sp>
-        <p:nvSpPr>
-          <p:cNvPr id="4" name="TextBox 3"/>
-          <p:cNvSpPr txBox="1"/>
-          <p:nvPr/>
-        </p:nvSpPr>
-        <p:spPr>
-          <a:xfrm>
-            <a:off x="658368" y="329184"/>
-            <a:ext cx="10874959" cy="237744"/>
-          </a:xfrm>
-          <a:prstGeom prst="rect">
-            <a:avLst/>
-          </a:prstGeom>
-          <a:noFill/>
-        </p:spPr>
-        <p:txBody>
-          <a:bodyPr wrap="square" anchor="t" lIns="0" rIns="0" tIns="0" bIns="0">
-            <a:spAutoFit/>
-          </a:bodyPr>
-          <a:lstStyle/>
-          <a:p>
-            <a:pPr algn="l">
-              <a:lnSpc>
-                <a:spcPct val="116000"/>
-              </a:lnSpc>
-              <a:spcBef>
-                <a:spcPts val="0"/>
-              </a:spcBef>
-              <a:spcAft>
-                <a:spcPts val="0"/>
-              </a:spcAft>
-            </a:pPr>
-            <a:r>
-              <a:rPr sz="1000" b="1" i="0" spc="140">
-                <a:solidFill>
-                  <a:srgbClr val="E0564F"/>
-                </a:solidFill>
-                <a:latin typeface="Calibri"/>
-              </a:rPr>
-              <a:t>THE PROBLEM</a:t>
-            </a:r>
-          </a:p>
-        </p:txBody>
-      </p:sp>
-      <p:sp>
-        <p:nvSpPr>
-          <p:cNvPr id="5" name="TextBox 4"/>
-          <p:cNvSpPr txBox="1"/>
-          <p:nvPr/>
-        </p:nvSpPr>
-        <p:spPr>
-          <a:xfrm>
-            <a:off x="658368" y="585216"/>
-            <a:ext cx="10874959" cy="512064"/>
-          </a:xfrm>
-          <a:prstGeom prst="rect">
-            <a:avLst/>
-          </a:prstGeom>
-          <a:noFill/>
-        </p:spPr>
-        <p:txBody>
-          <a:bodyPr wrap="square" anchor="t" lIns="0" rIns="0" tIns="0" bIns="0">
-            <a:spAutoFit/>
-          </a:bodyPr>
-          <a:lstStyle/>
-          <a:p>
-            <a:pPr algn="l">
-              <a:lnSpc>
-                <a:spcPct val="100000"/>
-              </a:lnSpc>
-              <a:spcBef>
-                <a:spcPts val="0"/>
-              </a:spcBef>
-              <a:spcAft>
-                <a:spcPts val="0"/>
-              </a:spcAft>
-            </a:pPr>
-            <a:r>
-              <a:rPr sz="2500" b="1" i="0">
-                <a:solidFill>
-                  <a:srgbClr val="EEF2F8"/>
-                </a:solidFill>
-                <a:latin typeface="Cambria"/>
-              </a:rPr>
-              <a:t>A guard's benchmark score is not a property of the guard</a:t>
-            </a:r>
-          </a:p>
-        </p:txBody>
-      </p:sp>
-      <p:sp>
-        <p:nvSpPr>
-          <p:cNvPr id="6" name="TextBox 5"/>
-          <p:cNvSpPr txBox="1"/>
-          <p:nvPr/>
-        </p:nvSpPr>
-        <p:spPr>
-          <a:xfrm>
-            <a:off x="658368" y="1152144"/>
-            <a:ext cx="10874959" cy="274320"/>
-          </a:xfrm>
-          <a:prstGeom prst="rect">
-            <a:avLst/>
-          </a:prstGeom>
-          <a:noFill/>
-        </p:spPr>
-        <p:txBody>
-          <a:bodyPr wrap="square" anchor="t" lIns="0" rIns="0" tIns="0" bIns="0">
-            <a:spAutoFit/>
-          </a:bodyPr>
-          <a:lstStyle/>
-          <a:p>
-            <a:pPr algn="l">
-              <a:lnSpc>
-                <a:spcPct val="116000"/>
-              </a:lnSpc>
-              <a:spcBef>
-                <a:spcPts val="0"/>
-              </a:spcBef>
-              <a:spcAft>
-                <a:spcPts val="0"/>
-              </a:spcAft>
-            </a:pPr>
-            <a:r>
-              <a:rPr sz="1150" b="0" i="0">
-                <a:solidFill>
-                  <a:srgbClr val="6B7F9F"/>
-                </a:solidFill>
-                <a:latin typeface="Calibri"/>
-              </a:rPr>
-              <a:t>Three things a rising benchmark number does not show you</a:t>
-            </a:r>
-          </a:p>
-        </p:txBody>
-      </p:sp>
-      <p:sp>
-        <p:nvSpPr>
-          <p:cNvPr id="7" name="Rectangle 6"/>
-          <p:cNvSpPr/>
-          <p:nvPr/>
-        </p:nvSpPr>
-        <p:spPr>
-          <a:xfrm>
-            <a:off x="658368" y="1645920"/>
-            <a:ext cx="3529584" cy="1975104"/>
-          </a:xfrm>
-          <a:prstGeom prst="rect">
-            <a:avLst/>
-          </a:prstGeom>
-          <a:solidFill>
-            <a:srgbClr val="18263D"/>
-          </a:solidFill>
-          <a:ln w="9525">
-            <a:solidFill>
-              <a:srgbClr val="1E3050"/>
-            </a:solidFill>
-          </a:ln>
-          <a:effectLst/>
-        </p:spPr>
-        <p:style>
-          <a:lnRef idx="1">
-            <a:schemeClr val="accent1"/>
-          </a:lnRef>
-          <a:fillRef idx="3">
-            <a:schemeClr val="accent1"/>
-          </a:fillRef>
-          <a:effectRef idx="2">
-            <a:schemeClr val="accent1"/>
-          </a:effectRef>
-          <a:fontRef idx="minor">
-            <a:schemeClr val="lt1"/>
-          </a:fontRef>
-        </p:style>
-        <p:txBody>
-          <a:bodyPr rtlCol="0" anchor="ctr" wrap="square"/>
-          <a:lstStyle/>
-          <a:p>
-            <a:pPr algn="ctr"/>
-          </a:p>
-        </p:txBody>
-      </p:sp>
-      <p:sp>
-        <p:nvSpPr>
-          <p:cNvPr id="8" name="TextBox 7"/>
-          <p:cNvSpPr txBox="1"/>
-          <p:nvPr/>
-        </p:nvSpPr>
-        <p:spPr>
-          <a:xfrm>
-            <a:off x="896112" y="1755648"/>
-            <a:ext cx="3054096" cy="1755648"/>
-          </a:xfrm>
-          <a:prstGeom prst="rect">
-            <a:avLst/>
-          </a:prstGeom>
-          <a:noFill/>
-        </p:spPr>
-        <p:txBody>
-          <a:bodyPr wrap="square" anchor="t" lIns="0" rIns="0" tIns="0" bIns="0">
-            <a:spAutoFit/>
-          </a:bodyPr>
-          <a:lstStyle/>
-          <a:p>
-            <a:pPr algn="l">
-              <a:lnSpc>
-                <a:spcPct val="100000"/>
-              </a:lnSpc>
-              <a:spcBef>
-                <a:spcPts val="0"/>
-              </a:spcBef>
-              <a:spcAft>
-                <a:spcPts val="600"/>
-              </a:spcAft>
-            </a:pPr>
-            <a:r>
-              <a:rPr sz="2700" b="1" i="0">
-                <a:solidFill>
-                  <a:srgbClr val="E0564F"/>
-                </a:solidFill>
-                <a:latin typeface="Cambria"/>
-              </a:rPr>
-              <a:t>4.3%  →  17.0%</a:t>
-            </a:r>
-          </a:p>
-          <a:p>
-            <a:pPr algn="l">
-              <a:lnSpc>
-                <a:spcPct val="118000"/>
-              </a:lnSpc>
-              <a:spcBef>
-                <a:spcPts val="0"/>
-              </a:spcBef>
-              <a:spcAft>
-                <a:spcPts val="0"/>
-              </a:spcAft>
-            </a:pPr>
-            <a:r>
-              <a:rPr sz="1019" b="0" i="0">
-                <a:solidFill>
-                  <a:srgbClr val="9DAFC7"/>
-                </a:solidFill>
-                <a:latin typeface="Calibri"/>
-              </a:rPr>
-              <a:t>Pooled false alarms on unseen traffic — nearly four times the benign traffic blocked, after a fine-tune that raised represented macro-AP by +0.32.</a:t>
-            </a:r>
-          </a:p>
-        </p:txBody>
-      </p:sp>
-      <p:sp>
-        <p:nvSpPr>
-          <p:cNvPr id="9" name="Rectangle 8"/>
-          <p:cNvSpPr/>
-          <p:nvPr/>
-        </p:nvSpPr>
-        <p:spPr>
-          <a:xfrm>
-            <a:off x="4453128" y="1645920"/>
-            <a:ext cx="3529584" cy="1975104"/>
-          </a:xfrm>
-          <a:prstGeom prst="rect">
-            <a:avLst/>
-          </a:prstGeom>
-          <a:solidFill>
-            <a:srgbClr val="18263D"/>
-          </a:solidFill>
-          <a:ln w="9525">
-            <a:solidFill>
-              <a:srgbClr val="1E3050"/>
-            </a:solidFill>
-          </a:ln>
-          <a:effectLst/>
-        </p:spPr>
-        <p:style>
-          <a:lnRef idx="1">
-            <a:schemeClr val="accent1"/>
-          </a:lnRef>
-          <a:fillRef idx="3">
-            <a:schemeClr val="accent1"/>
-          </a:fillRef>
-          <a:effectRef idx="2">
-            <a:schemeClr val="accent1"/>
-          </a:effectRef>
-          <a:fontRef idx="minor">
-            <a:schemeClr val="lt1"/>
-          </a:fontRef>
-        </p:style>
-        <p:txBody>
-          <a:bodyPr rtlCol="0" anchor="ctr" wrap="square"/>
-          <a:lstStyle/>
-          <a:p>
-            <a:pPr algn="ctr"/>
-          </a:p>
-        </p:txBody>
-      </p:sp>
-      <p:sp>
-        <p:nvSpPr>
-          <p:cNvPr id="10" name="TextBox 9"/>
-          <p:cNvSpPr txBox="1"/>
-          <p:nvPr/>
-        </p:nvSpPr>
-        <p:spPr>
-          <a:xfrm>
-            <a:off x="4690872" y="1755648"/>
-            <a:ext cx="3054096" cy="1755648"/>
-          </a:xfrm>
-          <a:prstGeom prst="rect">
-            <a:avLst/>
-          </a:prstGeom>
-          <a:noFill/>
-        </p:spPr>
-        <p:txBody>
-          <a:bodyPr wrap="square" anchor="t" lIns="0" rIns="0" tIns="0" bIns="0">
-            <a:spAutoFit/>
-          </a:bodyPr>
-          <a:lstStyle/>
-          <a:p>
-            <a:pPr algn="l">
-              <a:lnSpc>
-                <a:spcPct val="100000"/>
-              </a:lnSpc>
-              <a:spcBef>
-                <a:spcPts val="0"/>
-              </a:spcBef>
-              <a:spcAft>
-                <a:spcPts val="600"/>
-              </a:spcAft>
-            </a:pPr>
-            <a:r>
-              <a:rPr sz="2700" b="1" i="0">
-                <a:solidFill>
-                  <a:srgbClr val="E0564F"/>
-                </a:solidFill>
-                <a:latin typeface="Cambria"/>
-              </a:rPr>
-              <a:t>78.0%  →  60.0%</a:t>
-            </a:r>
-          </a:p>
-          <a:p>
-            <a:pPr algn="l">
-              <a:lnSpc>
-                <a:spcPct val="118000"/>
-              </a:lnSpc>
-              <a:spcBef>
-                <a:spcPts val="0"/>
-              </a:spcBef>
-              <a:spcAft>
-                <a:spcPts val="0"/>
-              </a:spcAft>
-            </a:pPr>
-            <a:r>
-              <a:rPr sz="1019" b="0" i="0">
-                <a:solidFill>
-                  <a:srgbClr val="9DAFC7"/>
-                </a:solidFill>
-                <a:latin typeface="Calibri"/>
-              </a:rPr>
-              <a:t>Recall on HarmBench, from the same fine-tune: the hardest attacks, the exact content the guard was built to stop.</a:t>
-            </a:r>
-          </a:p>
-        </p:txBody>
-      </p:sp>
-      <p:sp>
-        <p:nvSpPr>
-          <p:cNvPr id="11" name="Rectangle 10"/>
-          <p:cNvSpPr/>
-          <p:nvPr/>
-        </p:nvSpPr>
-        <p:spPr>
-          <a:xfrm>
-            <a:off x="8247888" y="1645920"/>
-            <a:ext cx="3529584" cy="1975104"/>
-          </a:xfrm>
-          <a:prstGeom prst="rect">
-            <a:avLst/>
-          </a:prstGeom>
-          <a:solidFill>
-            <a:srgbClr val="18263D"/>
-          </a:solidFill>
-          <a:ln w="9525">
-            <a:solidFill>
-              <a:srgbClr val="1E3050"/>
-            </a:solidFill>
-          </a:ln>
-          <a:effectLst/>
-        </p:spPr>
-        <p:style>
-          <a:lnRef idx="1">
-            <a:schemeClr val="accent1"/>
-          </a:lnRef>
-          <a:fillRef idx="3">
-            <a:schemeClr val="accent1"/>
-          </a:fillRef>
-          <a:effectRef idx="2">
-            <a:schemeClr val="accent1"/>
-          </a:effectRef>
-          <a:fontRef idx="minor">
-            <a:schemeClr val="lt1"/>
-          </a:fontRef>
-        </p:style>
-        <p:txBody>
-          <a:bodyPr rtlCol="0" anchor="ctr" wrap="square"/>
-          <a:lstStyle/>
-          <a:p>
-            <a:pPr algn="ctr"/>
-          </a:p>
-        </p:txBody>
-      </p:sp>
-      <p:sp>
-        <p:nvSpPr>
-          <p:cNvPr id="12" name="TextBox 11"/>
-          <p:cNvSpPr txBox="1"/>
-          <p:nvPr/>
-        </p:nvSpPr>
-        <p:spPr>
-          <a:xfrm>
-            <a:off x="8485632" y="1755648"/>
-            <a:ext cx="3054096" cy="1755648"/>
-          </a:xfrm>
-          <a:prstGeom prst="rect">
-            <a:avLst/>
-          </a:prstGeom>
-          <a:noFill/>
-        </p:spPr>
-        <p:txBody>
-          <a:bodyPr wrap="square" anchor="t" lIns="0" rIns="0" tIns="0" bIns="0">
-            <a:spAutoFit/>
-          </a:bodyPr>
-          <a:lstStyle/>
-          <a:p>
-            <a:pPr algn="l">
-              <a:lnSpc>
-                <a:spcPct val="100000"/>
-              </a:lnSpc>
-              <a:spcBef>
-                <a:spcPts val="0"/>
-              </a:spcBef>
-              <a:spcAft>
-                <a:spcPts val="600"/>
-              </a:spcAft>
-            </a:pPr>
-            <a:r>
-              <a:rPr sz="2700" b="1" i="0">
-                <a:solidFill>
-                  <a:srgbClr val="E0564F"/>
-                </a:solidFill>
-                <a:latin typeface="Cambria"/>
-              </a:rPr>
-              <a:t>below all 65</a:t>
-            </a:r>
-          </a:p>
-          <a:p>
-            <a:pPr algn="l">
-              <a:lnSpc>
-                <a:spcPct val="118000"/>
-              </a:lnSpc>
-              <a:spcBef>
-                <a:spcPts val="0"/>
-              </a:spcBef>
-              <a:spcAft>
-                <a:spcPts val="0"/>
-              </a:spcAft>
-            </a:pPr>
-            <a:r>
-              <a:rPr sz="1019" b="0" i="0">
-                <a:solidFill>
-                  <a:srgbClr val="9DAFC7"/>
-                </a:solidFill>
-                <a:latin typeface="Calibri"/>
-              </a:rPr>
-              <a:t>A coded fair-lending violation ranked below every benign mortgage inquiry in the split — zero-shot, before any tuning at all.</a:t>
-            </a:r>
-          </a:p>
-        </p:txBody>
-      </p:sp>
-      <p:sp>
-        <p:nvSpPr>
-          <p:cNvPr id="13" name="Rectangle 12"/>
-          <p:cNvSpPr/>
-          <p:nvPr/>
-        </p:nvSpPr>
-        <p:spPr>
-          <a:xfrm>
-            <a:off x="658368" y="3858768"/>
-            <a:ext cx="10874959" cy="932688"/>
-          </a:xfrm>
-          <a:prstGeom prst="rect">
-            <a:avLst/>
-          </a:prstGeom>
-          <a:solidFill>
-            <a:srgbClr val="331A1C"/>
-          </a:solidFill>
-          <a:ln w="9525">
-            <a:solidFill>
-              <a:srgbClr val="4A2427"/>
-            </a:solidFill>
-          </a:ln>
-          <a:effectLst/>
-        </p:spPr>
-        <p:style>
-          <a:lnRef idx="1">
-            <a:schemeClr val="accent1"/>
-          </a:lnRef>
-          <a:fillRef idx="3">
-            <a:schemeClr val="accent1"/>
-          </a:fillRef>
-          <a:effectRef idx="2">
-            <a:schemeClr val="accent1"/>
-          </a:effectRef>
-          <a:fontRef idx="minor">
-            <a:schemeClr val="lt1"/>
-          </a:fontRef>
-        </p:style>
-        <p:txBody>
-          <a:bodyPr rtlCol="0" anchor="ctr" wrap="square" lIns="237744" rIns="182880" tIns="91440" bIns="91440"/>
-          <a:lstStyle/>
-          <a:p>
-            <a:pPr algn="l">
-              <a:lnSpc>
-                <a:spcPct val="116000"/>
-              </a:lnSpc>
-              <a:spcBef>
-                <a:spcPts val="0"/>
-              </a:spcBef>
-              <a:spcAft>
-                <a:spcPts val="300"/>
-              </a:spcAft>
-            </a:pPr>
-            <a:r>
-              <a:rPr sz="980" b="1" i="0" spc="90">
-                <a:solidFill>
-                  <a:srgbClr val="F08A7F"/>
-                </a:solidFill>
-                <a:latin typeface="Calibri"/>
-              </a:rPr>
-              <a:t>WHY A LEADERBOARD CANNOT SEE ANY OF THEM</a:t>
-            </a:r>
-          </a:p>
-          <a:p>
-            <a:pPr algn="l">
-              <a:lnSpc>
-                <a:spcPct val="116000"/>
-              </a:lnSpc>
-              <a:spcBef>
-                <a:spcPts val="0"/>
-              </a:spcBef>
-              <a:spcAft>
-                <a:spcPts val="0"/>
-              </a:spcAft>
-            </a:pPr>
-            <a:r>
-              <a:rPr sz="1150" b="0" i="0">
-                <a:solidFill>
-                  <a:srgbClr val="9DAFC7"/>
-                </a:solidFill>
-                <a:latin typeface="Calibri"/>
-              </a:rPr>
-              <a:t>The first two are a fine-tune cost invisible on the sources it trained on. The third is not about tuning at all: it is a policy violation no general safety taxonomy has a label for, so no general benchmark scores it either.</a:t>
-            </a:r>
-          </a:p>
-        </p:txBody>
-      </p:sp>
-      <p:sp>
-        <p:nvSpPr>
-          <p:cNvPr id="14" name="TextBox 13"/>
-          <p:cNvSpPr txBox="1"/>
-          <p:nvPr/>
-        </p:nvSpPr>
-        <p:spPr>
-          <a:xfrm>
-            <a:off x="658368" y="5029200"/>
-            <a:ext cx="10874959" cy="457200"/>
-          </a:xfrm>
-          <a:prstGeom prst="rect">
-            <a:avLst/>
-          </a:prstGeom>
-          <a:noFill/>
-        </p:spPr>
-        <p:txBody>
-          <a:bodyPr wrap="square" anchor="t" lIns="0" rIns="0" tIns="0" bIns="0">
-            <a:spAutoFit/>
-          </a:bodyPr>
-          <a:lstStyle/>
-          <a:p>
-            <a:pPr algn="l">
-              <a:lnSpc>
-                <a:spcPct val="116000"/>
-              </a:lnSpc>
-              <a:spcBef>
-                <a:spcPts val="0"/>
-              </a:spcBef>
-              <a:spcAft>
-                <a:spcPts val="0"/>
-              </a:spcAft>
-            </a:pPr>
-            <a:r>
-              <a:rPr sz="1150" b="1" i="0">
-                <a:solidFill>
-                  <a:srgbClr val="EEF2F8"/>
-                </a:solidFill>
-                <a:latin typeface="Calibri"/>
-              </a:rPr>
-              <a:t>Three questions on one fixed panel:   </a:t>
-            </a:r>
-            <a:r>
-              <a:rPr sz="1150" b="1" i="0">
-                <a:solidFill>
-                  <a:srgbClr val="BFD8F5"/>
-                </a:solidFill>
-                <a:latin typeface="Calibri"/>
-              </a:rPr>
-              <a:t>Does fine-tuning transfer?</a:t>
-            </a:r>
-            <a:r>
-              <a:rPr sz="1150" b="0" i="0">
-                <a:solidFill>
-                  <a:srgbClr val="6B7F9F"/>
-                </a:solidFill>
-                <a:latin typeface="Calibri"/>
-              </a:rPr>
-              <a:t>   ·   </a:t>
-            </a:r>
-            <a:r>
-              <a:rPr sz="1150" b="1" i="0">
-                <a:solidFill>
-                  <a:srgbClr val="8FD3B6"/>
-                </a:solidFill>
-                <a:latin typeface="Calibri"/>
-              </a:rPr>
-              <a:t>Can we recover it without retraining?</a:t>
-            </a:r>
-            <a:r>
-              <a:rPr sz="1150" b="0" i="0">
-                <a:solidFill>
-                  <a:srgbClr val="6B7F9F"/>
-                </a:solidFill>
-                <a:latin typeface="Calibri"/>
-              </a:rPr>
-              <a:t>   ·   </a:t>
-            </a:r>
-            <a:r>
-              <a:rPr sz="1150" b="1" i="0">
-                <a:solidFill>
-                  <a:srgbClr val="E3C285"/>
-                </a:solidFill>
-                <a:latin typeface="Calibri"/>
-              </a:rPr>
-              <a:t>Does one score cover a regulated domain?</a:t>
-            </a:r>
-          </a:p>
-        </p:txBody>
-      </p:sp>
-    </p:spTree>
-  </p:cSld>
-  <p:clrMapOvr>
-    <a:masterClrMapping/>
-  </p:clrMapOvr>
-</p:sld>
-</file>
-
-<file path=ppt/slides/slide20.xml><?xml version="1.0" encoding="utf-8"?>
+<file path=ppt/slides/slide21.xml><?xml version="1.0" encoding="utf-8"?>
 <p:sld xmlns:a="http://schemas.openxmlformats.org/drawingml/2006/main" xmlns:p="http://schemas.openxmlformats.org/presentationml/2006/main" xmlns:r="http://schemas.openxmlformats.org/officeDocument/2006/relationships">
   <p:cSld>
     <p:bg>
@@ -17273,7 +18051,7 @@
                 </a:solidFill>
                 <a:latin typeface="Calibri"/>
               </a:rPr>
-              <a:t>19</a:t>
+              <a:t>20</a:t>
             </a:r>
           </a:p>
         </p:txBody>

--- a/papers/unified-report/slides/safety_guard_benchmark_deck.pptx
+++ b/papers/unified-report/slides/safety_guard_benchmark_deck.pptx
@@ -7613,7 +7613,7 @@
                 </a:solidFill>
                 <a:latin typeface="Calibri"/>
               </a:rPr>
-              <a:t>One null cell, reported as such.</a:t>
+              <a:t>One null cell — our bug, not their model.</a:t>
             </a:r>
             <a:r>
               <a:rPr sz="1150" b="0" i="0">
@@ -7622,7 +7622,7 @@
                 </a:solidFill>
                 <a:latin typeface="Calibri"/>
               </a:rPr>
-              <a:t>  Llama-Guard-3-1B's pruned, embedding-tied head leaves its margins unmoved by LoRA. Uninformative, not robust.</a:t>
+              <a:t>  Llama-Guard-3-1B returned one score for every row: two harness bugs, since fixed. Retained at zero, which dilutes every number here by 1.2x and only makes the verdicts harder to reach.</a:t>
             </a:r>
           </a:p>
         </p:txBody>

--- a/papers/unified-report/slides/safety_guard_benchmark_deck.pptx
+++ b/papers/unified-report/slides/safety_guard_benchmark_deck.pptx
@@ -532,7 +532,7 @@
           </a:p>
           <a:p>
             <a:r>
-              <a:t>purposively chosen panel, plus one preregistered confirmatory study and one</a:t>
+              <a:t>purposively chosen panel, plus one analysis-preregistered study and one</a:t>
             </a:r>
           </a:p>
           <a:p>
@@ -1807,12 +1807,12 @@
           </a:p>
           <a:p>
             <a:r>
-              <a:t>the hosted .741, paired difference +0.185</a:t>
-            </a:r>
-          </a:p>
-          <a:p>
-            <a:r>
-              <a:t>[+0.065, +0.423]. AUROC 0.9928 against 0.8731 confirms it</a:t>
+              <a:t>the hosted .741, paired difference +0.207</a:t>
+            </a:r>
+          </a:p>
+          <a:p>
+            <a:r>
+              <a:t>[+0.043, +0.390]. AUROC 0.9928 against 0.8731 confirms it</a:t>
             </a:r>
           </a:p>
           <a:p>
@@ -15525,7 +15525,7 @@
                 </a:solidFill>
                 <a:latin typeface="Cambria"/>
               </a:rPr>
-              <a:t>On sources it represents, a 1.5B guard beats the hosted model</a:t>
+              <a:t>On sources it represents, the panel ranks better than the hosted model</a:t>
             </a:r>
           </a:p>
         </p:txBody>
@@ -15624,7 +15624,7 @@
                 </a:solidFill>
                 <a:latin typeface="Calibri"/>
               </a:rPr>
-              <a:t>Represented sources: .948 vs .741.</a:t>
+              <a:t>Represented sources: +0.083 in the panel's favour.</a:t>
             </a:r>
             <a:r>
               <a:rPr sz="1150" b="0" i="0">
@@ -15633,7 +15633,7 @@
                 </a:solidFill>
                 <a:latin typeface="Calibri"/>
               </a:rPr>
-              <a:t>  Qwen2.5-1.5B SFT on prompt_injections against the hosted reference. Paired +0.185 [+0.065, +0.423], and a ranking win rather than a threshold placement — AUROC 0.9928 vs 0.8731. 5 of 12 represented cells clear zero.</a:t>
+              <a:t>  Equal-source, equal-checkpoint mean paired difference against the hosted reference, 95% CI [+0.008, +0.163] — excludes zero. In AP, +0.039 [+0.014, +0.072]. Pre-specified by the regime split, not picked as the best cell.</a:t>
             </a:r>
           </a:p>
           <a:p>

--- a/papers/unified-report/slides/safety_guard_benchmark_deck.pptx
+++ b/papers/unified-report/slides/safety_guard_benchmark_deck.pptx
@@ -15633,7 +15633,7 @@
                 </a:solidFill>
                 <a:latin typeface="Calibri"/>
               </a:rPr>
-              <a:t>  Equal-source, equal-checkpoint mean paired difference against the hosted reference, 95% CI [+0.008, +0.163] — excludes zero. In AP, +0.039 [+0.014, +0.072]. Pre-specified by the regime split, not picked as the best cell.</a:t>
+              <a:t>  Equal-source, equal-checkpoint mean paired difference against the hosted reference, 95% CI [+0.008, +0.163] — excludes zero. In AP, +0.039 [+0.014, +0.072]. Post-hoc descriptive summary, not a pre-specified test — but its weighting does not depend on which cell wins.</a:t>
             </a:r>
           </a:p>
           <a:p>

--- a/papers/unified-report/slides/safety_guard_benchmark_deck.pptx
+++ b/papers/unified-report/slides/safety_guard_benchmark_deck.pptx
@@ -655,12 +655,12 @@
           </a:p>
           <a:p>
             <a:r>
-              <a:t>one-sided interval end: "+0.174, LCB +0.129" means the estimate is +0.174 and it stayed</a:t>
-            </a:r>
-          </a:p>
-          <a:p>
-            <a:r>
-              <a:t>above +0.129 in 97.5% of the redraws, so "LCB &gt; 0" demands that even the pessimistic end</a:t>
+              <a:t>one-sided interval end: "+0.111, LCB +0.070" means the estimate is +0.111</a:t>
+            </a:r>
+          </a:p>
+          <a:p>
+            <a:r>
+              <a:t>and it stayed above +0.070 in 97.5% of the redraws, so "LCB &gt; 0" demands that even the pessimistic end</a:t>
             </a:r>
           </a:p>
           <a:p>
@@ -1812,7 +1812,7 @@
           </a:p>
           <a:p>
             <a:r>
-              <a:t>[+0.043, +0.390]. AUROC 0.9928 against 0.8731 confirms it</a:t>
+              <a:t>[+0.042, +0.389]. AUROC 0.9928 against 0.8731 confirms it</a:t>
             </a:r>
           </a:p>
           <a:p>
@@ -1930,7 +1930,7 @@
           <a:lstStyle/>
           <a:p>
             <a:r>
-              <a:t>Open here, not on the method. All three numbers are from Table 3 and Figure 8 of the</a:t>
+              <a:t>Open here, not on the method. All three numbers are from Table 4 and Figure 8 of the</a:t>
             </a:r>
           </a:p>
           <a:p>
@@ -2324,28 +2324,53 @@
           <a:lstStyle/>
           <a:p>
             <a:r>
-              <a:t>This is the whole report in one image; the rest of the talk says why each panel matters.</a:t>
+              <a:t>This is the whole report in one image, one panel per question, and it is the same Figure 1</a:t>
+            </a:r>
+          </a:p>
+          <a:p>
+            <a:r>
+              <a:t>the report opens with — Table 1 there states these four answers with their estimands and</a:t>
+            </a:r>
+          </a:p>
+          <a:p>
+            <a:r>
+              <a:t>evidence tiers. The rest of the talk derives them left to right.</a:t>
             </a:r>
           </a:p>
           <a:p/>
           <a:p>
             <a:r>
-              <a:t>Panel 2 is the honest one — those are point estimates and five of the six pairwise</a:t>
-            </a:r>
-          </a:p>
-          <a:p>
-            <a:r>
-              <a:t>mortgage CI comparisons overlap. The claim is NOT "SmolLM3 is the best domain guard."</a:t>
-            </a:r>
-          </a:p>
-          <a:p>
-            <a:r>
-              <a:t>The claim is that the identity of the winner depends on which benchmark you ask, which</a:t>
-            </a:r>
-          </a:p>
-          <a:p>
-            <a:r>
-              <a:t>is a statement about the measuring instrument, not about the models.</a:t>
+              <a:t>Two panels need the honest qualifier said out loud. Q3 is point estimates, and five of the</a:t>
+            </a:r>
+          </a:p>
+          <a:p>
+            <a:r>
+              <a:t>six pairwise mortgage CI comparisons overlap: the claim is NOT "SmolLM3 is the best domain</a:t>
+            </a:r>
+          </a:p>
+          <a:p>
+            <a:r>
+              <a:t>guard," it is that the identity of the winner depends on which benchmark you ask — a</a:t>
+            </a:r>
+          </a:p>
+          <a:p>
+            <a:r>
+              <a:t>statement about the measuring instrument, not about the models. And Q4's left bar (the</a:t>
+            </a:r>
+          </a:p>
+          <a:p>
+            <a:r>
+              <a:t>tuned panel ahead on sources it names) is a POST HOC summary over three purposively chosen</a:t>
+            </a:r>
+          </a:p>
+          <a:p>
+            <a:r>
+              <a:t>corpora that does not survive reweighting; the right bar, hosted ahead off-manifest, is the</a:t>
+            </a:r>
+          </a:p>
+          <a:p>
+            <a:r>
+              <a:t>sturdier of the two. Do not let the reversal be heard as "small guards beat the frontier."</a:t>
             </a:r>
           </a:p>
         </p:txBody>
@@ -2765,7 +2790,7 @@
           </a:p>
           <a:p>
             <a:r>
-              <a:t>regenerated and byte-checked by `make reproduce` like any other covered artifact. And the</a:t>
+              <a:t>regenerated and byte-checked by `make verify` like any other covered artifact. And the</a:t>
             </a:r>
           </a:p>
           <a:p>
@@ -6398,8 +6423,8 @@
                 </a:solidFill>
                 <a:latin typeface="Cambria"/>
               </a:rPr>
-              <a:t>The Safety-Guard Benchmark
-Chooses the Winner</a:t>
+              <a:t>Benchmark Gains Do Not Guarantee Transfer:
+Fine-Tuning Small Language Model Safety Guards</a:t>
             </a:r>
           </a:p>
         </p:txBody>
@@ -6444,8 +6469,7 @@
                 </a:solidFill>
                 <a:latin typeface="Calibri"/>
               </a:rPr>
-              <a:t>Measuring, tuning, and composing small safety guards
-in high-compliance regulated domains</a:t>
+              <a:t>Paired same-checkpoint evidence across represented and held-out traffic</a:t>
             </a:r>
           </a:p>
         </p:txBody>
@@ -6964,7 +6988,7 @@
                 </a:solidFill>
                 <a:latin typeface="Calibri"/>
               </a:rPr>
-              <a:t>make reproduce (covered tables)  ·  frozen benchmark v1_hmda2022</a:t>
+              <a:t>make verify (generated artifacts)  ·  frozen benchmark v1_hmda2022</a:t>
             </a:r>
           </a:p>
         </p:txBody>
@@ -7035,7 +7059,7 @@
                 </a:solidFill>
                 <a:latin typeface="Calibri"/>
               </a:rPr>
-              <a:t>The Safety-Guard Benchmark Chooses the Winner</a:t>
+              <a:t>Benchmark Gains Do Not Guarantee Transfer</a:t>
             </a:r>
             <a:r>
               <a:rPr sz="860" b="0" i="0">
@@ -7322,7 +7346,7 @@
                 </a:solidFill>
                 <a:latin typeface="Calibri"/>
               </a:rPr>
-              <a:t>RQ1  ·  SUPPORTED</a:t>
+              <a:t>RQ1  ·  CRITERION MET</a:t>
             </a:r>
           </a:p>
           <a:p>
@@ -7344,7 +7368,7 @@
                 </a:solidFill>
                 <a:latin typeface="Calibri"/>
               </a:rPr>
-              <a:t>SFT raises represented macro-AP +0.174 (LCB +0.129) and the gain is concentrated relative to held-out (+0.239, LCB +0.189). Both preregistered criteria met.</a:t>
+              <a:t>SFT raises represented macro-AP +0.111 (LCB +0.070) and the gain is concentrated relative to held-out (+0.183, LCB +0.137). Both registered criteria are met on the purpose-built panel.</a:t>
             </a:r>
           </a:p>
         </p:txBody>
@@ -7453,7 +7477,7 @@
                 </a:solidFill>
                 <a:latin typeface="Calibri"/>
               </a:rPr>
-              <a:t>RQ2  ·  NOT SUPPORTED</a:t>
+              <a:t>RQ2  ·  CRITERION FAILS</a:t>
             </a:r>
           </a:p>
           <a:p>
@@ -7475,7 +7499,7 @@
                 </a:solidFill>
                 <a:latin typeface="Calibri"/>
               </a:rPr>
-              <a:t>KL-SFT does preserve transfer (+0.049, LCB +0.035) — but its represented cost (−0.036, LCB −0.060) misses the −0.02 margin. A genuine trade, not a free lunch.</a:t>
+              <a:t>KL-SFT does preserve transfer (+0.047, LCB +0.032) — but its represented cost (−0.034, LCB −0.062) misses the −0.02 margin. A genuine trade, not a free lunch.</a:t>
             </a:r>
           </a:p>
         </p:txBody>
@@ -7622,7 +7646,7 @@
                 </a:solidFill>
                 <a:latin typeface="Calibri"/>
               </a:rPr>
-              <a:t>  Llama-Guard-3-1B returned one score for every row: two harness bugs, since fixed. Retained at zero, which dilutes every number here by 1.2x and only makes the verdicts harder to reach.</a:t>
+              <a:t>  Llama-Guard-3-1B returned one score for every row: two harness bugs, since fixed. Retained at zero, which dilutes every number here by 5/4 = 1.25\times and only makes the verdicts harder to reach.</a:t>
             </a:r>
           </a:p>
         </p:txBody>
@@ -7693,7 +7717,7 @@
                 </a:solidFill>
                 <a:latin typeface="Calibri"/>
               </a:rPr>
-              <a:t>The Safety-Guard Benchmark Chooses the Winner</a:t>
+              <a:t>Benchmark Gains Do Not Guarantee Transfer</a:t>
             </a:r>
             <a:r>
               <a:rPr sz="860" b="0" i="0">
@@ -8260,7 +8284,7 @@
                 </a:solidFill>
                 <a:latin typeface="Calibri"/>
               </a:rPr>
-              <a:t>The Safety-Guard Benchmark Chooses the Winner</a:t>
+              <a:t>Benchmark Gains Do Not Guarantee Transfer</a:t>
             </a:r>
             <a:r>
               <a:rPr sz="860" b="0" i="0">
@@ -9259,7 +9283,7 @@
                 </a:solidFill>
                 <a:latin typeface="Calibri"/>
               </a:rPr>
-              <a:t>The Safety-Guard Benchmark Chooses the Winner</a:t>
+              <a:t>Benchmark Gains Do Not Guarantee Transfer</a:t>
             </a:r>
             <a:r>
               <a:rPr sz="860" b="0" i="0">
@@ -10463,7 +10487,7 @@
                 </a:solidFill>
                 <a:latin typeface="Calibri"/>
               </a:rPr>
-              <a:t>The Safety-Guard Benchmark Chooses the Winner</a:t>
+              <a:t>Benchmark Gains Do Not Guarantee Transfer</a:t>
             </a:r>
             <a:r>
               <a:rPr sz="860" b="0" i="0">
@@ -11639,7 +11663,7 @@
                 </a:solidFill>
                 <a:latin typeface="Calibri"/>
               </a:rPr>
-              <a:t>The Safety-Guard Benchmark Chooses the Winner</a:t>
+              <a:t>Benchmark Gains Do Not Guarantee Transfer</a:t>
             </a:r>
             <a:r>
               <a:rPr sz="860" b="0" i="0">
@@ -12175,7 +12199,7 @@
                 </a:solidFill>
                 <a:latin typeface="Calibri"/>
               </a:rPr>
-              <a:t>The Safety-Guard Benchmark Chooses the Winner</a:t>
+              <a:t>Benchmark Gains Do Not Guarantee Transfer</a:t>
             </a:r>
             <a:r>
               <a:rPr sz="860" b="0" i="0">
@@ -13105,7 +13129,7 @@
                 </a:solidFill>
                 <a:latin typeface="Calibri"/>
               </a:rPr>
-              <a:t>The Safety-Guard Benchmark Chooses the Winner</a:t>
+              <a:t>Benchmark Gains Do Not Guarantee Transfer</a:t>
             </a:r>
             <a:r>
               <a:rPr sz="860" b="0" i="0">
@@ -14202,7 +14226,7 @@
                 </a:solidFill>
                 <a:latin typeface="Calibri"/>
               </a:rPr>
-              <a:t>The Safety-Guard Benchmark Chooses the Winner</a:t>
+              <a:t>Benchmark Gains Do Not Guarantee Transfer</a:t>
             </a:r>
             <a:r>
               <a:rPr sz="860" b="0" i="0">
@@ -15372,7 +15396,7 @@
                 </a:solidFill>
                 <a:latin typeface="Calibri"/>
               </a:rPr>
-              <a:t>The Safety-Guard Benchmark Chooses the Winner</a:t>
+              <a:t>Benchmark Gains Do Not Guarantee Transfer</a:t>
             </a:r>
             <a:r>
               <a:rPr sz="860" b="0" i="0">
@@ -15633,7 +15657,7 @@
                 </a:solidFill>
                 <a:latin typeface="Calibri"/>
               </a:rPr>
-              <a:t>  Equal-source, equal-checkpoint mean paired difference against the hosted reference, 95% CI [+0.008, +0.163] — excludes zero. In AP, +0.039 [+0.014, +0.072]. Post-hoc descriptive summary, not a pre-specified test — but its weighting does not depend on which cell wins.</a:t>
+              <a:t>  Equal-source, equal-checkpoint mean paired difference against the hosted reference, 95% CI [+0.013, +0.157] — excludes zero. In AP, +0.039 [+0.015, +0.072]. Post-hoc descriptive summary, not a pre-specified test — but its weighting does not depend on which cell wins.</a:t>
             </a:r>
           </a:p>
           <a:p>
@@ -16005,7 +16029,7 @@
                 </a:solidFill>
                 <a:latin typeface="Calibri"/>
               </a:rPr>
-              <a:t>The Safety-Guard Benchmark Chooses the Winner</a:t>
+              <a:t>Benchmark Gains Do Not Guarantee Transfer</a:t>
             </a:r>
             <a:r>
               <a:rPr sz="860" b="0" i="0">
@@ -16674,7 +16698,7 @@
                 </a:solidFill>
                 <a:latin typeface="Calibri"/>
               </a:rPr>
-              <a:t>Three questions on one fixed panel:   </a:t>
+              <a:t>Four questions on one fixed panel:   </a:t>
             </a:r>
             <a:r>
               <a:rPr sz="1150" b="1" i="0">
@@ -16683,7 +16707,7 @@
                 </a:solidFill>
                 <a:latin typeface="Calibri"/>
               </a:rPr>
-              <a:t>Does fine-tuning transfer?</a:t>
+              <a:t>Do benchmark gains transfer?</a:t>
             </a:r>
             <a:r>
               <a:rPr sz="1150" b="0" i="0">
@@ -16701,7 +16725,7 @@
                 </a:solidFill>
                 <a:latin typeface="Calibri"/>
               </a:rPr>
-              <a:t>Can we recover it without retraining?</a:t>
+              <a:t>Can transfer be recovered without retraining?</a:t>
             </a:r>
             <a:r>
               <a:rPr sz="1150" b="0" i="0">
@@ -16720,6 +16744,24 @@
                 <a:latin typeface="Calibri"/>
               </a:rPr>
               <a:t>Does one score cover a regulated domain?</a:t>
+            </a:r>
+            <a:r>
+              <a:rPr sz="1150" b="0" i="0">
+                <a:solidFill>
+                  <a:srgbClr val="6B7F9F"/>
+                </a:solidFill>
+                <a:latin typeface="Calibri"/>
+              </a:rPr>
+              <a:t>   ·   </a:t>
+            </a:r>
+            <a:r>
+              <a:rPr sz="1150" b="1" i="0">
+                <a:solidFill>
+                  <a:srgbClr val="E0564F"/>
+                </a:solidFill>
+                <a:latin typeface="Calibri"/>
+              </a:rPr>
+              <a:t>Should you run a small guard at all?</a:t>
             </a:r>
           </a:p>
         </p:txBody>
@@ -16790,7 +16832,7 @@
                 </a:solidFill>
                 <a:latin typeface="Calibri"/>
               </a:rPr>
-              <a:t>The Safety-Guard Benchmark Chooses the Winner</a:t>
+              <a:t>Benchmark Gains Do Not Guarantee Transfer</a:t>
             </a:r>
             <a:r>
               <a:rPr sz="860" b="0" i="0">
@@ -17988,7 +18030,7 @@
                 </a:solidFill>
                 <a:latin typeface="Calibri"/>
               </a:rPr>
-              <a:t>The Safety-Guard Benchmark Chooses the Winner</a:t>
+              <a:t>Benchmark Gains Do Not Guarantee Transfer</a:t>
             </a:r>
             <a:r>
               <a:rPr sz="860" b="0" i="0">
@@ -18750,7 +18792,7 @@
                 </a:solidFill>
                 <a:latin typeface="Calibri"/>
               </a:rPr>
-              <a:t>The Safety-Guard Benchmark Chooses the Winner</a:t>
+              <a:t>Benchmark Gains Do Not Guarantee Transfer</a:t>
             </a:r>
             <a:r>
               <a:rPr sz="860" b="0" i="0">
@@ -18903,7 +18945,7 @@
                 </a:solidFill>
                 <a:latin typeface="Cambria"/>
               </a:rPr>
-              <a:t>Three acts, one thesis: the benchmark co-produces the verdict</a:t>
+              <a:t>Four questions, four answers — the benchmark co-produces the verdict</a:t>
             </a:r>
           </a:p>
         </p:txBody>
@@ -18924,8 +18966,8 @@
         </p:blipFill>
         <p:spPr>
           <a:xfrm>
-            <a:off x="1082200" y="1591056"/>
-            <a:ext cx="10027294" cy="3218688"/>
+            <a:off x="658368" y="1756023"/>
+            <a:ext cx="10874959" cy="2687586"/>
           </a:xfrm>
           <a:prstGeom prst="rect">
             <a:avLst/>
@@ -18940,8 +18982,8 @@
         </p:nvSpPr>
         <p:spPr>
           <a:xfrm>
-            <a:off x="658368" y="4956048"/>
-            <a:ext cx="30480" cy="841248"/>
+            <a:off x="658368" y="4754880"/>
+            <a:ext cx="30480" cy="1005840"/>
           </a:xfrm>
           <a:prstGeom prst="rect">
             <a:avLst/>
@@ -18984,8 +19026,8 @@
         </p:nvSpPr>
         <p:spPr>
           <a:xfrm>
-            <a:off x="804672" y="4956048"/>
-            <a:ext cx="3346704" cy="868680"/>
+            <a:off x="786384" y="4754880"/>
+            <a:ext cx="2423160" cy="1042415"/>
           </a:xfrm>
           <a:prstGeom prst="rect">
             <a:avLst/>
@@ -19016,29 +19058,29 @@
                 </a:solidFill>
                 <a:latin typeface="Calibri"/>
               </a:rPr>
-              <a:t>Act I</a:t>
+              <a:t>Q1</a:t>
             </a:r>
           </a:p>
           <a:p>
             <a:pPr algn="l">
               <a:lnSpc>
-                <a:spcPct val="115000"/>
-              </a:lnSpc>
-              <a:spcBef>
-                <a:spcPts val="0"/>
-              </a:spcBef>
-              <a:spcAft>
-                <a:spcPts val="0"/>
-              </a:spcAft>
-            </a:pPr>
-            <a:r>
-              <a:rPr sz="1100" b="0" i="0">
+                <a:spcPct val="112000"/>
+              </a:lnSpc>
+              <a:spcBef>
+                <a:spcPts val="0"/>
+              </a:spcBef>
+              <a:spcAft>
+                <a:spcPts val="0"/>
+              </a:spcAft>
+            </a:pPr>
+            <a:r>
+              <a:rPr sz="980" b="0" i="0">
                 <a:solidFill>
                   <a:srgbClr val="6B7F9F"/>
                 </a:solidFill>
                 <a:latin typeface="Calibri"/>
               </a:rPr>
-              <a:t>Fine-tuning specializes: +0.32 represented, −0.06 transfer, pooling per-checkpoint effects from +0.04 to −0.15.</a:t>
+              <a:t>Tuning buys the benchmark: +0.32 represented, −0.06 transfer — and at an equal alarm budget the transfer-recall gain reverses on all four.</a:t>
             </a:r>
           </a:p>
         </p:txBody>
@@ -19051,8 +19093,119 @@
         </p:nvSpPr>
         <p:spPr>
           <a:xfrm>
-            <a:off x="4453128" y="4956048"/>
-            <a:ext cx="30480" cy="841248"/>
+            <a:off x="3429000" y="4754880"/>
+            <a:ext cx="30480" cy="1005840"/>
+          </a:xfrm>
+          <a:prstGeom prst="rect">
+            <a:avLst/>
+          </a:prstGeom>
+          <a:solidFill>
+            <a:srgbClr val="8FD3B6"/>
+          </a:solidFill>
+          <a:ln>
+            <a:noFill/>
+          </a:ln>
+          <a:effectLst/>
+        </p:spPr>
+        <p:style>
+          <a:lnRef idx="1">
+            <a:schemeClr val="accent1"/>
+          </a:lnRef>
+          <a:fillRef idx="3">
+            <a:schemeClr val="accent1"/>
+          </a:fillRef>
+          <a:effectRef idx="2">
+            <a:schemeClr val="accent1"/>
+          </a:effectRef>
+          <a:fontRef idx="minor">
+            <a:schemeClr val="lt1"/>
+          </a:fontRef>
+        </p:style>
+        <p:txBody>
+          <a:bodyPr rtlCol="0" anchor="ctr" wrap="square"/>
+          <a:lstStyle/>
+          <a:p>
+            <a:pPr algn="ctr"/>
+          </a:p>
+        </p:txBody>
+      </p:sp>
+      <p:sp>
+        <p:nvSpPr>
+          <p:cNvPr id="10" name="TextBox 9"/>
+          <p:cNvSpPr txBox="1"/>
+          <p:nvPr/>
+        </p:nvSpPr>
+        <p:spPr>
+          <a:xfrm>
+            <a:off x="3557016" y="4754880"/>
+            <a:ext cx="2423160" cy="1042415"/>
+          </a:xfrm>
+          <a:prstGeom prst="rect">
+            <a:avLst/>
+          </a:prstGeom>
+          <a:noFill/>
+        </p:spPr>
+        <p:txBody>
+          <a:bodyPr wrap="square" anchor="t" lIns="0" rIns="0" tIns="0" bIns="0">
+            <a:spAutoFit/>
+          </a:bodyPr>
+          <a:lstStyle/>
+          <a:p>
+            <a:pPr algn="l">
+              <a:lnSpc>
+                <a:spcPct val="100000"/>
+              </a:lnSpc>
+              <a:spcBef>
+                <a:spcPts val="0"/>
+              </a:spcBef>
+              <a:spcAft>
+                <a:spcPts val="200"/>
+              </a:spcAft>
+            </a:pPr>
+            <a:r>
+              <a:rPr sz="1150" b="1" i="0" spc="80">
+                <a:solidFill>
+                  <a:srgbClr val="8FD3B6"/>
+                </a:solidFill>
+                <a:latin typeface="Calibri"/>
+              </a:rPr>
+              <a:t>Q2</a:t>
+            </a:r>
+          </a:p>
+          <a:p>
+            <a:pPr algn="l">
+              <a:lnSpc>
+                <a:spcPct val="112000"/>
+              </a:lnSpc>
+              <a:spcBef>
+                <a:spcPts val="0"/>
+              </a:spcBef>
+              <a:spcAft>
+                <a:spcPts val="0"/>
+              </a:spcAft>
+            </a:pPr>
+            <a:r>
+              <a:rPr sz="980" b="0" i="0">
+                <a:solidFill>
+                  <a:srgbClr val="6B7F9F"/>
+                </a:solidFill>
+                <a:latin typeface="Calibri"/>
+              </a:rPr>
+              <a:t>Averaging a base with its own adapter recovers +0.076 of that transfer, for one extra inference pass and no retraining.</a:t>
+            </a:r>
+          </a:p>
+        </p:txBody>
+      </p:sp>
+      <p:sp>
+        <p:nvSpPr>
+          <p:cNvPr id="11" name="Rectangle 10"/>
+          <p:cNvSpPr/>
+          <p:nvPr/>
+        </p:nvSpPr>
+        <p:spPr>
+          <a:xfrm>
+            <a:off x="6199632" y="4754880"/>
+            <a:ext cx="30480" cy="1005840"/>
           </a:xfrm>
           <a:prstGeom prst="rect">
             <a:avLst/>
@@ -19089,14 +19242,14 @@
       </p:sp>
       <p:sp>
         <p:nvSpPr>
-          <p:cNvPr id="10" name="TextBox 9"/>
+          <p:cNvPr id="12" name="TextBox 11"/>
           <p:cNvSpPr txBox="1"/>
           <p:nvPr/>
         </p:nvSpPr>
         <p:spPr>
           <a:xfrm>
-            <a:off x="4599432" y="4956048"/>
-            <a:ext cx="3346704" cy="868680"/>
+            <a:off x="6327648" y="4754880"/>
+            <a:ext cx="2423160" cy="1042415"/>
           </a:xfrm>
           <a:prstGeom prst="rect">
             <a:avLst/>
@@ -19127,23 +19280,23 @@
                 </a:solidFill>
                 <a:latin typeface="Calibri"/>
               </a:rPr>
-              <a:t>Act II / III</a:t>
+              <a:t>Q3</a:t>
             </a:r>
           </a:p>
           <a:p>
             <a:pPr algn="l">
               <a:lnSpc>
-                <a:spcPct val="115000"/>
-              </a:lnSpc>
-              <a:spcBef>
-                <a:spcPts val="0"/>
-              </a:spcBef>
-              <a:spcAft>
-                <a:spcPts val="0"/>
-              </a:spcAft>
-            </a:pPr>
-            <a:r>
-              <a:rPr sz="1100" b="0" i="0">
+                <a:spcPct val="112000"/>
+              </a:lnSpc>
+              <a:spcBef>
+                <a:spcPts val="0"/>
+              </a:spcBef>
+              <a:spcAft>
+                <a:spcPts val="0"/>
+              </a:spcAft>
+            </a:pPr>
+            <a:r>
+              <a:rPr sz="980" b="0" i="0">
                 <a:solidFill>
                   <a:srgbClr val="6B7F9F"/>
                 </a:solidFill>
@@ -19156,20 +19309,20 @@
       </p:sp>
       <p:sp>
         <p:nvSpPr>
-          <p:cNvPr id="11" name="Rectangle 10"/>
+          <p:cNvPr id="13" name="Rectangle 12"/>
           <p:cNvSpPr/>
           <p:nvPr/>
         </p:nvSpPr>
         <p:spPr>
           <a:xfrm>
-            <a:off x="8247888" y="4956048"/>
-            <a:ext cx="30480" cy="841248"/>
+            <a:off x="8970264" y="4754880"/>
+            <a:ext cx="30480" cy="1005840"/>
           </a:xfrm>
           <a:prstGeom prst="rect">
             <a:avLst/>
           </a:prstGeom>
           <a:solidFill>
-            <a:srgbClr val="8FD3B6"/>
+            <a:srgbClr val="E0564F"/>
           </a:solidFill>
           <a:ln>
             <a:noFill/>
@@ -19200,14 +19353,14 @@
       </p:sp>
       <p:sp>
         <p:nvSpPr>
-          <p:cNvPr id="12" name="TextBox 11"/>
+          <p:cNvPr id="14" name="TextBox 13"/>
           <p:cNvSpPr txBox="1"/>
           <p:nvPr/>
         </p:nvSpPr>
         <p:spPr>
           <a:xfrm>
-            <a:off x="8394192" y="4956048"/>
-            <a:ext cx="3346704" cy="868680"/>
+            <a:off x="9098280" y="4754880"/>
+            <a:ext cx="2423160" cy="1042415"/>
           </a:xfrm>
           <a:prstGeom prst="rect">
             <a:avLst/>
@@ -19234,46 +19387,46 @@
             <a:r>
               <a:rPr sz="1150" b="1" i="0" spc="80">
                 <a:solidFill>
-                  <a:srgbClr val="8FD3B6"/>
-                </a:solidFill>
-                <a:latin typeface="Calibri"/>
-              </a:rPr>
-              <a:t>Act III</a:t>
+                  <a:srgbClr val="E0564F"/>
+                </a:solidFill>
+                <a:latin typeface="Calibri"/>
+              </a:rPr>
+              <a:t>Q4</a:t>
             </a:r>
           </a:p>
           <a:p>
             <a:pPr algn="l">
               <a:lnSpc>
-                <a:spcPct val="115000"/>
-              </a:lnSpc>
-              <a:spcBef>
-                <a:spcPts val="0"/>
-              </a:spcBef>
-              <a:spcAft>
-                <a:spcPts val="0"/>
-              </a:spcAft>
-            </a:pPr>
-            <a:r>
-              <a:rPr sz="1100" b="0" i="0">
+                <a:spcPct val="112000"/>
+              </a:lnSpc>
+              <a:spcBef>
+                <a:spcPts val="0"/>
+              </a:spcBef>
+              <a:spcAft>
+                <a:spcPts val="0"/>
+              </a:spcAft>
+            </a:pPr>
+            <a:r>
+              <a:rPr sz="980" b="0" i="0">
                 <a:solidFill>
                   <a:srgbClr val="6B7F9F"/>
                 </a:solidFill>
                 <a:latin typeface="Calibri"/>
               </a:rPr>
-              <a:t>Coded as a proxy, the fair-lending violation ranks below the benign median for all four; named outright, three of four rank it above nearly all — two different rows, not a controlled pair.</a:t>
-            </a:r>
-          </a:p>
-        </p:txBody>
-      </p:sp>
-      <p:sp>
-        <p:nvSpPr>
-          <p:cNvPr id="13" name="TextBox 12"/>
+              <a:t>Which is better reverses with the traffic: hosted ahead by +0.109 off-manifest, the tuned panel ahead by +0.083 on sources it names.</a:t>
+            </a:r>
+          </a:p>
+        </p:txBody>
+      </p:sp>
+      <p:sp>
+        <p:nvSpPr>
+          <p:cNvPr id="15" name="TextBox 14"/>
           <p:cNvSpPr txBox="1"/>
           <p:nvPr/>
         </p:nvSpPr>
         <p:spPr>
           <a:xfrm>
-            <a:off x="658368" y="5907024"/>
+            <a:off x="658368" y="5925312"/>
             <a:ext cx="10874959" cy="274320"/>
           </a:xfrm>
           <a:prstGeom prst="rect">
@@ -19305,7 +19458,7 @@
                 </a:solidFill>
                 <a:latin typeface="Calibri"/>
               </a:rPr>
-              <a:t>Point estimates with overlapping domain-arm CIs: the claim is that the leaderboard's answer moves, not that the ordering is resolved.</a:t>
+              <a:t>Point estimates with overlapping domain-arm CIs, and Q4's left bar is post hoc: the claim is that the leaderboard's answer moves, not that the ordering is resolved.</a:t>
             </a:r>
           </a:p>
         </p:txBody>
@@ -19376,7 +19529,7 @@
                 </a:solidFill>
                 <a:latin typeface="Calibri"/>
               </a:rPr>
-              <a:t>The Safety-Guard Benchmark Chooses the Winner</a:t>
+              <a:t>Benchmark Gains Do Not Guarantee Transfer</a:t>
             </a:r>
             <a:r>
               <a:rPr sz="860" b="0" i="0">
@@ -20416,7 +20569,7 @@
                 </a:solidFill>
                 <a:latin typeface="Calibri"/>
               </a:rPr>
-              <a:t>The Safety-Guard Benchmark Chooses the Winner</a:t>
+              <a:t>Benchmark Gains Do Not Guarantee Transfer</a:t>
             </a:r>
             <a:r>
               <a:rPr sz="860" b="0" i="0">
@@ -20965,7 +21118,7 @@
                 </a:solidFill>
                 <a:latin typeface="Calibri"/>
               </a:rPr>
-              <a:t>The Safety-Guard Benchmark Chooses the Winner</a:t>
+              <a:t>Benchmark Gains Do Not Guarantee Transfer</a:t>
             </a:r>
             <a:r>
               <a:rPr sz="860" b="0" i="0">
@@ -21930,7 +22083,7 @@
                 </a:solidFill>
                 <a:latin typeface="Calibri"/>
               </a:rPr>
-              <a:t>The Safety-Guard Benchmark Chooses the Winner</a:t>
+              <a:t>Benchmark Gains Do Not Guarantee Transfer</a:t>
             </a:r>
             <a:r>
               <a:rPr sz="860" b="0" i="0">
@@ -22453,7 +22606,7 @@
                 </a:solidFill>
                 <a:latin typeface="Calibri"/>
               </a:rPr>
-              <a:t>The Safety-Guard Benchmark Chooses the Winner</a:t>
+              <a:t>Benchmark Gains Do Not Guarantee Transfer</a:t>
             </a:r>
             <a:r>
               <a:rPr sz="860" b="0" i="0">
@@ -22606,7 +22759,7 @@
                 </a:solidFill>
                 <a:latin typeface="Cambria"/>
               </a:rPr>
-              <a:t>The prevalence you serve also chooses the winner</a:t>
+              <a:t>The prevalence you serve re-spaces the ranking</a:t>
             </a:r>
           </a:p>
         </p:txBody>
@@ -23472,7 +23625,7 @@
                 </a:solidFill>
                 <a:latin typeface="Calibri"/>
               </a:rPr>
-              <a:t>The Safety-Guard Benchmark Chooses the Winner</a:t>
+              <a:t>Benchmark Gains Do Not Guarantee Transfer</a:t>
             </a:r>
             <a:r>
               <a:rPr sz="860" b="0" i="0">
@@ -23868,7 +24021,7 @@
                 </a:solidFill>
                 <a:latin typeface="Calibri"/>
               </a:rPr>
-              <a:t>Represented macro-AP falls −0.035 here. In the preregistered ten-checkpoint study the same trade costs −0.036, whose lower bound (−0.060) fails the −0.02 non-inferiority margin: RQ2 NOT SUPPORTED.</a:t>
+              <a:t>Represented macro-AP falls −0.035 here. In the analysis-preregistered ten-checkpoint study the same trade costs −0.034, whose lower bound (−0.062) fails the −0.02 non-inferiority margin: RQ2 criterion NOT met.</a:t>
             </a:r>
           </a:p>
         </p:txBody>

--- a/papers/unified-report/slides/safety_guard_benchmark_deck.pptx
+++ b/papers/unified-report/slides/safety_guard_benchmark_deck.pptx
@@ -1930,12 +1930,12 @@
           <a:lstStyle/>
           <a:p>
             <a:r>
-              <a:t>Open here, not on the method. All three numbers are from Table 4 and Figure 8 of the</a:t>
-            </a:r>
-          </a:p>
-          <a:p>
-            <a:r>
-              <a:t>report and are recomputed from committed per-row scores.</a:t>
+              <a:t>Open here, not on the method. All three numbers are from the report's Act I operating-point table</a:t>
+            </a:r>
+          </a:p>
+          <a:p>
+            <a:r>
+              <a:t>(per-benchmark deltas and the 5%-FPR point) and its worked G0/D1 case-study figure and are recomputed from committed per-row scores.</a:t>
             </a:r>
           </a:p>
           <a:p/>
@@ -1977,7 +1977,7 @@
           </a:p>
           <a:p>
             <a:r>
-              <a:t>point as a caveat — it is measured, and it is Table 4.</a:t>
+              <a:t>point as a caveat — it is measured, and it is the report's matched-false-alarm-budget table.</a:t>
             </a:r>
           </a:p>
         </p:txBody>
@@ -2759,7 +2759,7 @@
           </a:p>
           <a:p>
             <a:r>
-              <a:t>budget column of report Table 4) and re-read the same rows. The apparent gain does not</a:t>
+              <a:t>budget column of the report's matched-false-alarm-budget table) and re-read the same rows. The apparent gain does not</a:t>
             </a:r>
           </a:p>
           <a:p>
@@ -2806,12 +2806,17 @@
           <a:p/>
           <a:p>
             <a:r>
-              <a:t>If asked why the paper reports both rows: Table 3 is what a practitioner who calibrated</a:t>
-            </a:r>
-          </a:p>
-          <a:p>
-            <a:r>
-              <a:t>each guard separately would actually deploy, and Table 4 is what the comparison means.</a:t>
+              <a:t>If asked why the paper reports both rows: the calibration-targeted operating-point table is</a:t>
+            </a:r>
+          </a:p>
+          <a:p>
+            <a:r>
+              <a:t>what a practitioner who calibrated each guard separately would actually deploy, and the</a:t>
+            </a:r>
+          </a:p>
+          <a:p>
+            <a:r>
+              <a:t>matched-budget table is what the comparison means.</a:t>
             </a:r>
           </a:p>
           <a:p>
@@ -6423,8 +6428,17 @@
                 </a:solidFill>
                 <a:latin typeface="Cambria"/>
               </a:rPr>
-              <a:t>Benchmark Gains Do Not Guarantee Transfer:
-Fine-Tuning Small Language Model Safety Guards</a:t>
+              <a:t>Benchmark Gains Do Not Guarantee Transfer:</a:t>
+            </a:r>
+            <a:br/>
+            <a:r>
+              <a:rPr sz="3800" b="1" i="0">
+                <a:solidFill>
+                  <a:srgbClr val="EEF2F8"/>
+                </a:solidFill>
+                <a:latin typeface="Cambria"/>
+              </a:rPr>
+              <a:t>Fine-Tuning Small Language Model Safety Guards</a:t>
             </a:r>
           </a:p>
         </p:txBody>
@@ -7646,7 +7660,7 @@
                 </a:solidFill>
                 <a:latin typeface="Calibri"/>
               </a:rPr>
-              <a:t>  Llama-Guard-3-1B returned one score for every row: two harness bugs, since fixed. Retained at zero, which dilutes every number here by 5/4 = 1.25\times and only makes the verdicts harder to reach.</a:t>
+              <a:t>  Llama-Guard-3-1B returned one score for every row: two harness bugs, since fixed. Retained at zero, which dilutes every number here by 5/4 = 1.25× and only makes the verdicts harder to reach.</a:t>
             </a:r>
           </a:p>
         </p:txBody>
@@ -9962,8 +9976,17 @@
                 </a:solidFill>
                 <a:latin typeface="Calibri"/>
               </a:rPr>
-              <a:t>D = 0
-allow</a:t>
+              <a:t>D = 0</a:t>
+            </a:r>
+            <a:br/>
+            <a:r>
+              <a:rPr sz="1100" b="1" i="0">
+                <a:solidFill>
+                  <a:srgbClr val="6B7F9F"/>
+                </a:solidFill>
+                <a:latin typeface="Calibri"/>
+              </a:rPr>
+              <a:t>allow</a:t>
             </a:r>
           </a:p>
         </p:txBody>
@@ -10008,8 +10031,17 @@
                 </a:solidFill>
                 <a:latin typeface="Calibri"/>
               </a:rPr>
-              <a:t>D = 1
-intervene</a:t>
+              <a:t>D = 1</a:t>
+            </a:r>
+            <a:br/>
+            <a:r>
+              <a:rPr sz="1100" b="1" i="0">
+                <a:solidFill>
+                  <a:srgbClr val="6B7F9F"/>
+                </a:solidFill>
+                <a:latin typeface="Calibri"/>
+              </a:rPr>
+              <a:t>intervene</a:t>
             </a:r>
           </a:p>
         </p:txBody>
@@ -14133,7 +14165,7 @@
                 </a:solidFill>
                 <a:latin typeface="Calibri"/>
               </a:rPr>
-              <a:t>THE GAP IS A FLOOR, NOT A CEILING</a:t>
+              <a:t>THE GAP IS COARSELY RESOLVED</a:t>
             </a:r>
           </a:p>
           <a:p>
@@ -14155,7 +14187,7 @@
                 </a:solidFill>
                 <a:latin typeface="Calibri"/>
               </a:rPr>
-              <a:t>The hosted score is a coarse integer 0–100 risk — 47–65 distinct values over 2,275 rows. Heavy ties cap AP resolution, so this comparison handicaps the hosted model. A frontier number above a local one is conservative.</a:t>
+              <a:t>The hosted score is a coarse integer 0–100 risk — 47–65 distinct values over 2,275 rows. Heavy ties cap how finely its ranking resolves, which bounds precision without fixing a direction: read the gap as coarse, not as conservative.</a:t>
             </a:r>
           </a:p>
         </p:txBody>
@@ -17540,8 +17572,17 @@
                 </a:solidFill>
                 <a:latin typeface="Calibri"/>
               </a:rPr>
-              <a:t>all pass  →  shadow, canary,
-monitor, rollback-ready</a:t>
+              <a:t>all pass  →  shadow, canary,</a:t>
+            </a:r>
+            <a:br/>
+            <a:r>
+              <a:rPr sz="1050" b="1" i="0">
+                <a:solidFill>
+                  <a:srgbClr val="8FD3B6"/>
+                </a:solidFill>
+                <a:latin typeface="Calibri"/>
+              </a:rPr>
+              <a:t>monitor, rollback-ready</a:t>
             </a:r>
           </a:p>
         </p:txBody>
@@ -17608,8 +17649,17 @@
                 </a:solidFill>
                 <a:latin typeface="Calibri"/>
               </a:rPr>
-              <a:t>any gate missing  →  NO SHIP
-(a missing gate is a failure)</a:t>
+              <a:t>any gate missing  →  NO SHIP</a:t>
+            </a:r>
+            <a:br/>
+            <a:r>
+              <a:rPr sz="1050" b="1" i="0">
+                <a:solidFill>
+                  <a:srgbClr val="E0564F"/>
+                </a:solidFill>
+                <a:latin typeface="Calibri"/>
+              </a:rPr>
+              <a:t>(a missing gate is a failure)</a:t>
             </a:r>
           </a:p>
         </p:txBody>

--- a/papers/unified-report/slides/safety_guard_benchmark_deck.pptx
+++ b/papers/unified-report/slides/safety_guard_benchmark_deck.pptx
@@ -22477,11 +22477,11 @@
                 <a:spcPts val="0"/>
               </a:spcBef>
               <a:spcAft>
-                <a:spcPts val="1000"/>
-              </a:spcAft>
-            </a:pPr>
-            <a:r>
-              <a:rPr sz="1150" b="1" i="0">
+                <a:spcPts val="800"/>
+              </a:spcAft>
+            </a:pPr>
+            <a:r>
+              <a:rPr sz="1100" b="1" i="0">
                 <a:solidFill>
                   <a:srgbClr val="E0564F"/>
                 </a:solidFill>
@@ -22490,7 +22490,7 @@
               <a:t>—  </a:t>
             </a:r>
             <a:r>
-              <a:rPr sz="1150" b="1" i="0">
+              <a:rPr sz="1100" b="1" i="0">
                 <a:solidFill>
                   <a:srgbClr val="EEF2F8"/>
                 </a:solidFill>
@@ -22499,7 +22499,7 @@
               <a:t>At an equal alarm budget, the gain reverses.</a:t>
             </a:r>
             <a:r>
-              <a:rPr sz="1150" b="0" i="0">
+              <a:rPr sz="1100" b="0" i="0">
                 <a:solidFill>
                   <a:srgbClr val="9DAFC7"/>
                 </a:solidFill>
@@ -22517,11 +22517,11 @@
                 <a:spcPts val="0"/>
               </a:spcBef>
               <a:spcAft>
-                <a:spcPts val="1000"/>
-              </a:spcAft>
-            </a:pPr>
-            <a:r>
-              <a:rPr sz="1150" b="1" i="0">
+                <a:spcPts val="800"/>
+              </a:spcAft>
+            </a:pPr>
+            <a:r>
+              <a:rPr sz="1100" b="1" i="0">
                 <a:solidFill>
                   <a:srgbClr val="E0564F"/>
                 </a:solidFill>
@@ -22530,7 +22530,7 @@
               <a:t>—  </a:t>
             </a:r>
             <a:r>
-              <a:rPr sz="1150" b="1" i="0">
+              <a:rPr sz="1100" b="1" i="0">
                 <a:solidFill>
                   <a:srgbClr val="EEF2F8"/>
                 </a:solidFill>
@@ -22539,7 +22539,7 @@
               <a:t>Off-distribution is not the explanation.</a:t>
             </a:r>
             <a:r>
-              <a:rPr sz="1150" b="0" i="0">
+              <a:rPr sz="1100" b="0" i="0">
                 <a:solidFill>
                   <a:srgbClr val="9DAFC7"/>
                 </a:solidFill>
@@ -22557,11 +22557,11 @@
                 <a:spcPts val="0"/>
               </a:spcBef>
               <a:spcAft>
-                <a:spcPts val="1000"/>
-              </a:spcAft>
-            </a:pPr>
-            <a:r>
-              <a:rPr sz="1150" b="1" i="0">
+                <a:spcPts val="800"/>
+              </a:spcAft>
+            </a:pPr>
+            <a:r>
+              <a:rPr sz="1100" b="1" i="0">
                 <a:solidFill>
                   <a:srgbClr val="E0564F"/>
                 </a:solidFill>
@@ -22570,7 +22570,7 @@
               <a:t>—  </a:t>
             </a:r>
             <a:r>
-              <a:rPr sz="1150" b="1" i="0">
+              <a:rPr sz="1100" b="1" i="0">
                 <a:solidFill>
                   <a:srgbClr val="EEF2F8"/>
                 </a:solidFill>
@@ -22579,13 +22579,53 @@
               <a:t>The threshold did not transfer.</a:t>
             </a:r>
             <a:r>
-              <a:rPr sz="1150" b="0" i="0">
+              <a:rPr sz="1100" b="0" i="0">
                 <a:solidFill>
                   <a:srgbClr val="9DAFC7"/>
                 </a:solidFill>
                 <a:latin typeface="Calibri"/>
               </a:rPr>
               <a:t>  The cutoff that looked safe in calibration is not the cutoff you get in the field.</a:t>
+            </a:r>
+          </a:p>
+          <a:p>
+            <a:pPr algn="l">
+              <a:lnSpc>
+                <a:spcPct val="120000"/>
+              </a:lnSpc>
+              <a:spcBef>
+                <a:spcPts val="0"/>
+              </a:spcBef>
+              <a:spcAft>
+                <a:spcPts val="800"/>
+              </a:spcAft>
+            </a:pPr>
+            <a:r>
+              <a:rPr sz="1100" b="1" i="0">
+                <a:solidFill>
+                  <a:srgbClr val="E0564F"/>
+                </a:solidFill>
+                <a:latin typeface="Calibri"/>
+              </a:rPr>
+              <a:t>—  </a:t>
+            </a:r>
+            <a:r>
+              <a:rPr sz="1100" b="1" i="0">
+                <a:solidFill>
+                  <a:srgbClr val="EEF2F8"/>
+                </a:solidFill>
+                <a:latin typeface="Calibri"/>
+              </a:rPr>
+              <a:t>Our headline metric understates all of this.</a:t>
+            </a:r>
+            <a:r>
+              <a:rPr sz="1100" b="0" i="0">
+                <a:solidFill>
+                  <a:srgbClr val="9DAFC7"/>
+                </a:solidFill>
+                <a:latin typeface="Calibri"/>
+              </a:rPr>
+              <a:t>  macro-AP averages over the whole ranking. Re-read only inside the 5% budget, no cell flips sign but the transfer cost goes -0.059 → -0.174 pAUC (3.0×).</a:t>
             </a:r>
           </a:p>
         </p:txBody>

--- a/papers/unified-report/slides/safety_guard_benchmark_deck.pptx
+++ b/papers/unified-report/slides/safety_guard_benchmark_deck.pptx
@@ -6396,8 +6396,8 @@
         </p:nvSpPr>
         <p:spPr>
           <a:xfrm>
-            <a:off x="658368" y="1609344"/>
-            <a:ext cx="8595360" cy="1645920"/>
+            <a:off x="658368" y="1481328"/>
+            <a:ext cx="8778240" cy="1005840"/>
           </a:xfrm>
           <a:prstGeom prst="rect">
             <a:avLst/>
@@ -6428,7 +6428,7 @@
                 </a:solidFill>
                 <a:latin typeface="Cambria"/>
               </a:rPr>
-              <a:t>Benchmark Gains Do Not Guarantee Transfer:</a:t>
+              <a:t>Safety Benchmark Gains Do Not</a:t>
             </a:r>
             <a:br/>
             <a:r>
@@ -6438,7 +6438,7 @@
                 </a:solidFill>
                 <a:latin typeface="Cambria"/>
               </a:rPr>
-              <a:t>Fine-Tuning Small Language Model Safety Guards</a:t>
+              <a:t>Guarantee Safety Transfer</a:t>
             </a:r>
           </a:p>
         </p:txBody>
@@ -6451,8 +6451,8 @@
         </p:nvSpPr>
         <p:spPr>
           <a:xfrm>
-            <a:off x="658368" y="3438144"/>
-            <a:ext cx="7680960" cy="731520"/>
+            <a:off x="658368" y="2688336"/>
+            <a:ext cx="8778240" cy="822960"/>
           </a:xfrm>
           <a:prstGeom prst="rect">
             <a:avLst/>
@@ -6467,6 +6467,51 @@
           <a:p>
             <a:pPr algn="l">
               <a:lnSpc>
+                <a:spcPct val="114000"/>
+              </a:lnSpc>
+              <a:spcBef>
+                <a:spcPts val="0"/>
+              </a:spcBef>
+              <a:spcAft>
+                <a:spcPts val="0"/>
+              </a:spcAft>
+            </a:pPr>
+            <a:r>
+              <a:rPr sz="1650" b="0" i="0">
+                <a:solidFill>
+                  <a:srgbClr val="EEF2F8"/>
+                </a:solidFill>
+                <a:latin typeface="Cambria"/>
+              </a:rPr>
+              <a:t>A Comprehensive Study of Fine-Tuning Small Language Model Safety Guards for High-Compliance and General Safety Domains</a:t>
+            </a:r>
+          </a:p>
+        </p:txBody>
+      </p:sp>
+      <p:sp>
+        <p:nvSpPr>
+          <p:cNvPr id="9" name="TextBox 8"/>
+          <p:cNvSpPr txBox="1"/>
+          <p:nvPr/>
+        </p:nvSpPr>
+        <p:spPr>
+          <a:xfrm>
+            <a:off x="658368" y="3657600"/>
+            <a:ext cx="7680960" cy="548640"/>
+          </a:xfrm>
+          <a:prstGeom prst="rect">
+            <a:avLst/>
+          </a:prstGeom>
+          <a:noFill/>
+        </p:spPr>
+        <p:txBody>
+          <a:bodyPr wrap="square" anchor="t" lIns="0" rIns="0" tIns="0" bIns="0">
+            <a:spAutoFit/>
+          </a:bodyPr>
+          <a:lstStyle/>
+          <a:p>
+            <a:pPr algn="l">
+              <a:lnSpc>
                 <a:spcPct val="124000"/>
               </a:lnSpc>
               <a:spcBef>
@@ -6490,7 +6535,7 @@
       </p:sp>
       <p:sp>
         <p:nvSpPr>
-          <p:cNvPr id="9" name="Rectangle 8"/>
+          <p:cNvPr id="10" name="Rectangle 9"/>
           <p:cNvSpPr/>
           <p:nvPr/>
         </p:nvSpPr>
@@ -6536,7 +6581,7 @@
       </p:sp>
       <p:sp>
         <p:nvSpPr>
-          <p:cNvPr id="10" name="TextBox 9"/>
+          <p:cNvPr id="11" name="TextBox 10"/>
           <p:cNvSpPr txBox="1"/>
           <p:nvPr/>
         </p:nvSpPr>
@@ -6603,7 +6648,7 @@
       </p:sp>
       <p:sp>
         <p:nvSpPr>
-          <p:cNvPr id="11" name="Rectangle 10"/>
+          <p:cNvPr id="12" name="Rectangle 11"/>
           <p:cNvSpPr/>
           <p:nvPr/>
         </p:nvSpPr>
@@ -6649,7 +6694,7 @@
       </p:sp>
       <p:sp>
         <p:nvSpPr>
-          <p:cNvPr id="12" name="TextBox 11"/>
+          <p:cNvPr id="13" name="TextBox 12"/>
           <p:cNvSpPr txBox="1"/>
           <p:nvPr/>
         </p:nvSpPr>
@@ -6716,7 +6761,7 @@
       </p:sp>
       <p:sp>
         <p:nvSpPr>
-          <p:cNvPr id="13" name="Rectangle 12"/>
+          <p:cNvPr id="14" name="Rectangle 13"/>
           <p:cNvSpPr/>
           <p:nvPr/>
         </p:nvSpPr>
@@ -6762,7 +6807,7 @@
       </p:sp>
       <p:sp>
         <p:nvSpPr>
-          <p:cNvPr id="14" name="TextBox 13"/>
+          <p:cNvPr id="15" name="TextBox 14"/>
           <p:cNvSpPr txBox="1"/>
           <p:nvPr/>
         </p:nvSpPr>
@@ -6829,7 +6874,7 @@
       </p:sp>
       <p:sp>
         <p:nvSpPr>
-          <p:cNvPr id="15" name="TextBox 14"/>
+          <p:cNvPr id="16" name="TextBox 15"/>
           <p:cNvSpPr txBox="1"/>
           <p:nvPr/>
         </p:nvSpPr>
@@ -6874,7 +6919,7 @@
       </p:sp>
       <p:sp>
         <p:nvSpPr>
-          <p:cNvPr id="16" name="TextBox 15"/>
+          <p:cNvPr id="17" name="TextBox 16"/>
           <p:cNvSpPr txBox="1"/>
           <p:nvPr/>
         </p:nvSpPr>
@@ -6919,7 +6964,7 @@
       </p:sp>
       <p:sp>
         <p:nvSpPr>
-          <p:cNvPr id="17" name="TextBox 16"/>
+          <p:cNvPr id="18" name="TextBox 17"/>
           <p:cNvSpPr txBox="1"/>
           <p:nvPr/>
         </p:nvSpPr>
@@ -6964,7 +7009,7 @@
       </p:sp>
       <p:sp>
         <p:nvSpPr>
-          <p:cNvPr id="18" name="TextBox 17"/>
+          <p:cNvPr id="19" name="TextBox 18"/>
           <p:cNvSpPr txBox="1"/>
           <p:nvPr/>
         </p:nvSpPr>
@@ -7073,7 +7118,7 @@
                 </a:solidFill>
                 <a:latin typeface="Calibri"/>
               </a:rPr>
-              <a:t>Benchmark Gains Do Not Guarantee Transfer</a:t>
+              <a:t>Safety Benchmark Gains Do Not Guarantee Safety Transfer</a:t>
             </a:r>
             <a:r>
               <a:rPr sz="860" b="0" i="0">
@@ -7731,7 +7776,7 @@
                 </a:solidFill>
                 <a:latin typeface="Calibri"/>
               </a:rPr>
-              <a:t>Benchmark Gains Do Not Guarantee Transfer</a:t>
+              <a:t>Safety Benchmark Gains Do Not Guarantee Safety Transfer</a:t>
             </a:r>
             <a:r>
               <a:rPr sz="860" b="0" i="0">
@@ -8298,7 +8343,7 @@
                 </a:solidFill>
                 <a:latin typeface="Calibri"/>
               </a:rPr>
-              <a:t>Benchmark Gains Do Not Guarantee Transfer</a:t>
+              <a:t>Safety Benchmark Gains Do Not Guarantee Safety Transfer</a:t>
             </a:r>
             <a:r>
               <a:rPr sz="860" b="0" i="0">
@@ -9297,7 +9342,7 @@
                 </a:solidFill>
                 <a:latin typeface="Calibri"/>
               </a:rPr>
-              <a:t>Benchmark Gains Do Not Guarantee Transfer</a:t>
+              <a:t>Safety Benchmark Gains Do Not Guarantee Safety Transfer</a:t>
             </a:r>
             <a:r>
               <a:rPr sz="860" b="0" i="0">
@@ -10519,7 +10564,7 @@
                 </a:solidFill>
                 <a:latin typeface="Calibri"/>
               </a:rPr>
-              <a:t>Benchmark Gains Do Not Guarantee Transfer</a:t>
+              <a:t>Safety Benchmark Gains Do Not Guarantee Safety Transfer</a:t>
             </a:r>
             <a:r>
               <a:rPr sz="860" b="0" i="0">
@@ -11695,7 +11740,7 @@
                 </a:solidFill>
                 <a:latin typeface="Calibri"/>
               </a:rPr>
-              <a:t>Benchmark Gains Do Not Guarantee Transfer</a:t>
+              <a:t>Safety Benchmark Gains Do Not Guarantee Safety Transfer</a:t>
             </a:r>
             <a:r>
               <a:rPr sz="860" b="0" i="0">
@@ -12231,7 +12276,7 @@
                 </a:solidFill>
                 <a:latin typeface="Calibri"/>
               </a:rPr>
-              <a:t>Benchmark Gains Do Not Guarantee Transfer</a:t>
+              <a:t>Safety Benchmark Gains Do Not Guarantee Safety Transfer</a:t>
             </a:r>
             <a:r>
               <a:rPr sz="860" b="0" i="0">
@@ -13161,7 +13206,7 @@
                 </a:solidFill>
                 <a:latin typeface="Calibri"/>
               </a:rPr>
-              <a:t>Benchmark Gains Do Not Guarantee Transfer</a:t>
+              <a:t>Safety Benchmark Gains Do Not Guarantee Safety Transfer</a:t>
             </a:r>
             <a:r>
               <a:rPr sz="860" b="0" i="0">
@@ -14258,7 +14303,7 @@
                 </a:solidFill>
                 <a:latin typeface="Calibri"/>
               </a:rPr>
-              <a:t>Benchmark Gains Do Not Guarantee Transfer</a:t>
+              <a:t>Safety Benchmark Gains Do Not Guarantee Safety Transfer</a:t>
             </a:r>
             <a:r>
               <a:rPr sz="860" b="0" i="0">
@@ -15428,7 +15473,7 @@
                 </a:solidFill>
                 <a:latin typeface="Calibri"/>
               </a:rPr>
-              <a:t>Benchmark Gains Do Not Guarantee Transfer</a:t>
+              <a:t>Safety Benchmark Gains Do Not Guarantee Safety Transfer</a:t>
             </a:r>
             <a:r>
               <a:rPr sz="860" b="0" i="0">
@@ -16061,7 +16106,7 @@
                 </a:solidFill>
                 <a:latin typeface="Calibri"/>
               </a:rPr>
-              <a:t>Benchmark Gains Do Not Guarantee Transfer</a:t>
+              <a:t>Safety Benchmark Gains Do Not Guarantee Safety Transfer</a:t>
             </a:r>
             <a:r>
               <a:rPr sz="860" b="0" i="0">
@@ -16864,7 +16909,7 @@
                 </a:solidFill>
                 <a:latin typeface="Calibri"/>
               </a:rPr>
-              <a:t>Benchmark Gains Do Not Guarantee Transfer</a:t>
+              <a:t>Safety Benchmark Gains Do Not Guarantee Safety Transfer</a:t>
             </a:r>
             <a:r>
               <a:rPr sz="860" b="0" i="0">
@@ -18080,7 +18125,7 @@
                 </a:solidFill>
                 <a:latin typeface="Calibri"/>
               </a:rPr>
-              <a:t>Benchmark Gains Do Not Guarantee Transfer</a:t>
+              <a:t>Safety Benchmark Gains Do Not Guarantee Safety Transfer</a:t>
             </a:r>
             <a:r>
               <a:rPr sz="860" b="0" i="0">
@@ -18842,7 +18887,7 @@
                 </a:solidFill>
                 <a:latin typeface="Calibri"/>
               </a:rPr>
-              <a:t>Benchmark Gains Do Not Guarantee Transfer</a:t>
+              <a:t>Safety Benchmark Gains Do Not Guarantee Safety Transfer</a:t>
             </a:r>
             <a:r>
               <a:rPr sz="860" b="0" i="0">
@@ -19579,7 +19624,7 @@
                 </a:solidFill>
                 <a:latin typeface="Calibri"/>
               </a:rPr>
-              <a:t>Benchmark Gains Do Not Guarantee Transfer</a:t>
+              <a:t>Safety Benchmark Gains Do Not Guarantee Safety Transfer</a:t>
             </a:r>
             <a:r>
               <a:rPr sz="860" b="0" i="0">
@@ -20619,7 +20664,7 @@
                 </a:solidFill>
                 <a:latin typeface="Calibri"/>
               </a:rPr>
-              <a:t>Benchmark Gains Do Not Guarantee Transfer</a:t>
+              <a:t>Safety Benchmark Gains Do Not Guarantee Safety Transfer</a:t>
             </a:r>
             <a:r>
               <a:rPr sz="860" b="0" i="0">
@@ -21168,7 +21213,7 @@
                 </a:solidFill>
                 <a:latin typeface="Calibri"/>
               </a:rPr>
-              <a:t>Benchmark Gains Do Not Guarantee Transfer</a:t>
+              <a:t>Safety Benchmark Gains Do Not Guarantee Safety Transfer</a:t>
             </a:r>
             <a:r>
               <a:rPr sz="860" b="0" i="0">
@@ -22133,7 +22178,7 @@
                 </a:solidFill>
                 <a:latin typeface="Calibri"/>
               </a:rPr>
-              <a:t>Benchmark Gains Do Not Guarantee Transfer</a:t>
+              <a:t>Safety Benchmark Gains Do Not Guarantee Safety Transfer</a:t>
             </a:r>
             <a:r>
               <a:rPr sz="860" b="0" i="0">
@@ -22696,7 +22741,7 @@
                 </a:solidFill>
                 <a:latin typeface="Calibri"/>
               </a:rPr>
-              <a:t>Benchmark Gains Do Not Guarantee Transfer</a:t>
+              <a:t>Safety Benchmark Gains Do Not Guarantee Safety Transfer</a:t>
             </a:r>
             <a:r>
               <a:rPr sz="860" b="0" i="0">
@@ -23715,7 +23760,7 @@
                 </a:solidFill>
                 <a:latin typeface="Calibri"/>
               </a:rPr>
-              <a:t>Benchmark Gains Do Not Guarantee Transfer</a:t>
+              <a:t>Safety Benchmark Gains Do Not Guarantee Safety Transfer</a:t>
             </a:r>
             <a:r>
               <a:rPr sz="860" b="0" i="0">

--- a/papers/unified-report/slides/safety_guard_benchmark_deck.pptx
+++ b/papers/unified-report/slides/safety_guard_benchmark_deck.pptx
@@ -1228,7 +1228,22 @@
           </a:p>
           <a:p>
             <a:r>
-              <a:t>to genuine single-token pairs Qwen2.5 scores 0.020, nominally the MOST invariant.</a:t>
+              <a:t>to genuine single-token pairs Qwen2.5 scores 0.020, which puts it INSIDE the unsaturated</a:t>
+            </a:r>
+          </a:p>
+          <a:p>
+            <a:r>
+              <a:t>guards' band rather than above it (SmolLM3-3B 0.012, SmolLM2-1.7B 0.024) — so the apparent</a:t>
+            </a:r>
+          </a:p>
+          <a:p>
+            <a:r>
+              <a:t>contrast is carried by the one non-minimal pair, not by the guard. Do not upgrade that to</a:t>
+            </a:r>
+          </a:p>
+          <a:p>
+            <a:r>
+              <a:t>"the most invariant"; the band is what the number supports.</a:t>
             </a:r>
           </a:p>
           <a:p>
@@ -1291,6 +1306,27 @@
           <a:p>
             <a:r>
               <a:t>you are asked to rank SmolLM3 against Qwen3 on this evidence, decline.</a:t>
+            </a:r>
+          </a:p>
+          <a:p/>
+          <a:p>
+            <a:r>
+              <a:t>Be equally careful in the other direction, which is the wording the report fixed. Finance</a:t>
+            </a:r>
+          </a:p>
+          <a:p>
+            <a:r>
+              <a:t>(+0.001) and law (+0.001) are NOT demonstrated equivalences: an interval containing zero is</a:t>
+            </a:r>
+          </a:p>
+          <a:p>
+            <a:r>
+              <a:t>not evidence of no difference, and no equivalence margin was registered. They are differences</a:t>
+            </a:r>
+          </a:p>
+          <a:p>
+            <a:r>
+              <a:t>too small for this sample to sign. Saying "ties" claims a result nobody measured.</a:t>
             </a:r>
           </a:p>
         </p:txBody>
@@ -1637,12 +1673,17 @@
           <a:lstStyle/>
           <a:p>
             <a:r>
-              <a:t>This is the slide that turns Act I's specialization finding into a scaling law, and it is new</a:t>
-            </a:r>
-          </a:p>
-          <a:p>
-            <a:r>
-              <a:t>evidence rather than a restatement.</a:t>
+              <a:t>This is the slide that carries Act I's specialization finding up the size ladder, and it is new</a:t>
+            </a:r>
+          </a:p>
+          <a:p>
+            <a:r>
+              <a:t>evidence rather than a restatement. Do not call it a scaling law -- three points, one of them</a:t>
+            </a:r>
+          </a:p>
+          <a:p>
+            <a:r>
+              <a:t>non-monotonic, identify no scaling law, and the report says so.</a:t>
             </a:r>
           </a:p>
           <a:p/>
@@ -1664,27 +1705,52 @@
           <a:p/>
           <a:p>
             <a:r>
-              <a:t>Right column is the important one. Order the panel by how strong the base already was and the</a:t>
-            </a:r>
-          </a:p>
-          <a:p>
-            <a:r>
-              <a:t>represented gain decays monotonically -- .528, .354, .313, .098, .076,</a:t>
-            </a:r>
-          </a:p>
-          <a:p>
-            <a:r>
-              <a:t>+0.037 -- while the transfer cost grows and plateaus around minus .10 to</a:t>
-            </a:r>
-          </a:p>
-          <a:p>
-            <a:r>
-              <a:t>minus .15. The tax is not fixed overhead; it is the price of forcing an already-capable base</a:t>
-            </a:r>
-          </a:p>
-          <a:p>
-            <a:r>
-              <a:t>onto a narrow distribution.</a:t>
+              <a:t>Right column is the important one, and it needs one qualification said out loud. Order the panel</a:t>
+            </a:r>
+          </a:p>
+          <a:p>
+            <a:r>
+              <a:t>by how strong the base already was and the represented gain decays monotonically -- .528, .354,</a:t>
+            </a:r>
+          </a:p>
+          <a:p>
+            <a:r>
+              <a:t>.313, .098, .076, +0.037. The transfer cost does NOT behave that way:</a:t>
+            </a:r>
+          </a:p>
+          <a:p>
+            <a:r>
+              <a:t>Qwen3-4B pays -0.150 from a .885 base, more than Qwen3-8B (-0.101 from .905) or</a:t>
+            </a:r>
+          </a:p>
+          <a:p>
+            <a:r>
+              <a:t>Qwen3-32B (-0.117 from .953). So this is not a demonstrated</a:t>
+            </a:r>
+          </a:p>
+          <a:p>
+            <a:r>
+              <a:t>tendency of capable bases to specialize harder, and an earlier version of this slide said it was.</a:t>
+            </a:r>
+          </a:p>
+          <a:p>
+            <a:r>
+              <a:t>What IS regular is the endpoint: every tuned checkpoint lands in .78-.85 transfer and .975-.990</a:t>
+            </a:r>
+          </a:p>
+          <a:p>
+            <a:r>
+              <a:t>represented whatever its base, so the tax is the distance to a benchmark-fixed endpoint --</a:t>
+            </a:r>
+          </a:p>
+          <a:p>
+            <a:r>
+              <a:t>arithmetic, not a behavioural law. The deployment consequence survives that reading intact: past</a:t>
+            </a:r>
+          </a:p>
+          <a:p>
+            <a:r>
+              <a:t>a base of roughly .9 represented, SFT buys under 0.10 AP and still charges close to full price.</a:t>
             </a:r>
           </a:p>
           <a:p/>
@@ -1850,6 +1916,73 @@
           <a:p/>
           <a:p>
             <a:r>
+              <a:t>Two conditionals behind the headline interval, and volunteer the first one -- it is the honest</a:t>
+            </a:r>
+          </a:p>
+          <a:p>
+            <a:r>
+              <a:t>statement of how far the result travels. The bootstrap holds the SOURCE SET fixed and resamples</a:t>
+            </a:r>
+          </a:p>
+          <a:p>
+            <a:r>
+              <a:t>evaluation families within it, because three purposively chosen corpora do not sample a</a:t>
+            </a:r>
+          </a:p>
+          <a:p>
+            <a:r>
+              <a:t>population of corpora. Draw sources with replacement instead and the interval widens to</a:t>
+            </a:r>
+          </a:p>
+          <a:p>
+            <a:r>
+              <a:t>[-0.019, +0.220], which includes zero. It is also conditional on the seed pairing:</a:t>
+            </a:r>
+          </a:p>
+          <a:p>
+            <a:r>
+              <a:t>one seed vector per checkpoint is reused across sources, which is what preserves the covariance.</a:t>
+            </a:r>
+          </a:p>
+          <a:p/>
+          <a:p>
+            <a:r>
+              <a:t>The weighting is the other place it is fragile, and the report tabulates all four. Only two of</a:t>
+            </a:r>
+          </a:p>
+          <a:p>
+            <a:r>
+              <a:t>the four support a positive advantage at all: weighting sources by row count roughly halves the</a:t>
+            </a:r>
+          </a:p>
+          <a:p>
+            <a:r>
+              <a:t>estimate to +0.049 [-0.031, +0.112] and straddles zero, and including the</a:t>
+            </a:r>
+          </a:p>
+          <a:p>
+            <a:r>
+              <a:t>BASE arms alongside the tuned ones excludes zero in the OPPOSITE direction</a:t>
+            </a:r>
+          </a:p>
+          <a:p>
+            <a:r>
+              <a:t>(-0.264). That last row says what the result is about: the represented-source</a:t>
+            </a:r>
+          </a:p>
+          <a:p>
+            <a:r>
+              <a:t>advantage is a property of TUNED guards specifically -- Act I's specialization seen from the</a:t>
+            </a:r>
+          </a:p>
+          <a:p>
+            <a:r>
+              <a:t>other side -- not a general statement that small guards beat hosted ones.</a:t>
+            </a:r>
+          </a:p>
+          <a:p/>
+          <a:p>
+            <a:r>
               <a:t>Do not oversell. This is retrospective on an inspected panel, the per-source samples are small,</a:t>
             </a:r>
           </a:p>
@@ -2586,6 +2719,32 @@
               <a:t>first.</a:t>
             </a:r>
           </a:p>
+          <a:p/>
+          <a:p>
+            <a:r>
+              <a:t>Scope the one positive cell before someone else does. SmolLM2's +0.0400 transfer gain is a</a:t>
+            </a:r>
+          </a:p>
+          <a:p>
+            <a:r>
+              <a:t>statement about AVERAGE RANKING, not about deployable recall: re-read inside the 5% alarm</a:t>
+            </a:r>
+          </a:p>
+          <a:p>
+            <a:r>
+              <a:t>budget it is +0.011 pAUC and -0.012 budget recall, both straddling zero. So "positive for</a:t>
+            </a:r>
+          </a:p>
+          <a:p>
+            <a:r>
+              <a:t>the weakest base" holds on the headline metric and does not survive at the operating point.</a:t>
+            </a:r>
+          </a:p>
+          <a:p>
+            <a:r>
+              <a:t>Slide 7 has the general form of that correction.</a:t>
+            </a:r>
+          </a:p>
         </p:txBody>
       </p:sp>
       <p:sp>
@@ -2853,6 +3012,42 @@
           <a:p/>
           <a:p>
             <a:r>
+              <a:t>The fourth bullet is the metric version of the same discipline, and it costs us a claim as</a:t>
+            </a:r>
+          </a:p>
+          <a:p>
+            <a:r>
+              <a:t>well as buying one. It buys: read where a guard is actually placed, the trade is 2-3x steeper</a:t>
+            </a:r>
+          </a:p>
+          <a:p>
+            <a:r>
+              <a:t>than the headline, in BOTH directions. It costs: SmolLM2-1.7B is the one checkpoint whose</a:t>
+            </a:r>
+          </a:p>
+          <a:p>
+            <a:r>
+              <a:t>transfer improves on macro-AP (+0.040, interval clears zero), and in the operating region that</a:t>
+            </a:r>
+          </a:p>
+          <a:p>
+            <a:r>
+              <a:t>gain is +0.011 pAUC and -0.012 budget recall — both straddling zero. So do not defend</a:t>
+            </a:r>
+          </a:p>
+          <a:p>
+            <a:r>
+              <a:t>"positive for the weakest base" as a deployment statement; it is an average-ranking statement.</a:t>
+            </a:r>
+          </a:p>
+          <a:p>
+            <a:r>
+              <a:t>Nothing else changes: 0 of the 8 cells flip sign.</a:t>
+            </a:r>
+          </a:p>
+          <a:p/>
+          <a:p>
+            <a:r>
               <a:t>Also worth saying out loud: every AP on the previous slides is measured on a balanced or</a:t>
             </a:r>
           </a:p>
@@ -3098,6 +3293,58 @@
           <a:p>
             <a:r>
               <a:t>base. Mitigation, not restoration.</a:t>
+            </a:r>
+          </a:p>
+          <a:p/>
+          <a:p>
+            <a:r>
+              <a:t>Price the dial where you would run it, which is the second half of each callout. On average</a:t>
+            </a:r>
+          </a:p>
+          <a:p>
+            <a:r>
+              <a:t>ranking this reads like "two points of represented AP for six points of transfer AP". Inside</a:t>
+            </a:r>
+          </a:p>
+          <a:p>
+            <a:r>
+              <a:t>the 5% alarm budget it is closer to twenty-one points of represented pAUC for fifteen: the</a:t>
+            </a:r>
+          </a:p>
+          <a:p>
+            <a:r>
+              <a:t>benefit amplifies 2.4x, the cost 6.2x. That does not make KL useless — it makes the choice</a:t>
+            </a:r>
+          </a:p>
+          <a:p>
+            <a:r>
+              <a:t>sharper, and more clearly a choice.</a:t>
+            </a:r>
+          </a:p>
+          <a:p/>
+          <a:p>
+            <a:r>
+              <a:t>It also sharpens the preregistered verdict rather than restating it. RQ2's -0.02 margin is</a:t>
+            </a:r>
+          </a:p>
+          <a:p>
+            <a:r>
+              <a:t>missed by about 1.7x read on AP, and by about 10.7x read in the operating region on this</a:t>
+            </a:r>
+          </a:p>
+          <a:p>
+            <a:r>
+              <a:t>panel. That registered failure was not narrow. Say it as a qualification of the magnitude,</a:t>
+            </a:r>
+          </a:p>
+          <a:p>
+            <a:r>
+              <a:t>not as a re-run of the registered study's own interval — these are point estimates on the</a:t>
+            </a:r>
+          </a:p>
+          <a:p>
+            <a:r>
+              <a:t>four general checkpoints, not on its ten-checkpoint panel.</a:t>
             </a:r>
           </a:p>
           <a:p/>
@@ -6383,7 +6630,7 @@
                 </a:solidFill>
                 <a:latin typeface="Calibri"/>
               </a:rPr>
-              <a:t>JAZZX AI   ·   RESEARCH REPORT   ·   JULY 2026</a:t>
+              <a:t>JAZZX AI   ·   RESEARCH REPORT   ·   AUGUST 2026</a:t>
             </a:r>
           </a:p>
         </p:txBody>
@@ -12205,7 +12452,7 @@
                 </a:solidFill>
                 <a:latin typeface="Calibri"/>
               </a:rPr>
-              <a:t>2,275 expert-annotated rows across finance / health / law. Ranking is not monotone in model size. The paired test leans against a tie on health (+0.017) — but four unadjusted comparisons, clearing zero by +0.0026: a direction, not a resolved ranking. Finance and law: ties.</a:t>
+              <a:t>2,275 expert-annotated rows across finance / health / law. Ranking is not monotone in model size. The paired test leans against a tie on health (+0.017) — but four unadjusted comparisons, clearing zero by +0.0026: a direction, not a resolved ranking. Finance and law are differences too small to sign — not demonstrated ties.</a:t>
             </a:r>
           </a:p>
         </p:txBody>
@@ -15329,7 +15576,7 @@
         <p:spPr>
           <a:xfrm>
             <a:off x="658368" y="4078224"/>
-            <a:ext cx="10874959" cy="859536"/>
+            <a:ext cx="10874959" cy="969264"/>
           </a:xfrm>
           <a:prstGeom prst="rect">
             <a:avLst/>
@@ -15380,7 +15627,7 @@
                 </a:solidFill>
                 <a:latin typeface="Calibri"/>
               </a:rPr>
-              <a:t>THE SPECIALIZATION TAX SCALES WITH THE BASE</a:t>
+              <a:t>THE TAX TRACKS THE DISTANCE TO THE ENDPOINT</a:t>
             </a:r>
           </a:p>
           <a:p>
@@ -15402,7 +15649,7 @@
                 </a:solidFill>
                 <a:latin typeface="Calibri"/>
               </a:rPr>
-              <a:t>Ordered by base strength, SFT's represented gain decays monotonically while its transfer cost grows. Tuning Qwen3-32B buys +0.037 represented and costs -0.117 transfer — and moves its ExpGuard recall -0.020, the wrong way. For a guardrail, whose job is the traffic nobody anticipated, that is a bad trade at any size.</a:t>
+              <a:t>Ordered by base strength the represented gain decays monotonically — but the transfer cost does not: Qwen3-4B pays −0.150 from a .885 base, more than Qwen3-8B (−0.101 from .905) or Qwen3-32B (−0.117 from .953). What is regular is the endpoint — every tuned checkpoint lands in .78–.85 transfer whatever its base. Tuning Qwen3-32B buys +0.037 represented and moves its ExpGuard recall -0.020, the wrong way. For a guardrail, whose job is the traffic nobody anticipated, that is a bad trade at any size.</a:t>
             </a:r>
           </a:p>
         </p:txBody>
@@ -15734,7 +15981,7 @@
                 </a:solidFill>
                 <a:latin typeface="Calibri"/>
               </a:rPr>
-              <a:t>  Equal-source, equal-checkpoint mean paired difference against the hosted reference, 95% CI [+0.013, +0.157] — excludes zero. In AP, +0.039 [+0.015, +0.072]. Post-hoc descriptive summary, not a pre-specified test — but its weighting does not depend on which cell wins.</a:t>
+              <a:t>  Equal-source, equal-checkpoint mean paired difference against the hosted reference, 95% CI [+0.013, +0.157] — excludes zero, holding the source set fixed. In AP, +0.039 [+0.015, +0.072]. Post-hoc descriptive summary, not a pre-specified test — but its weighting does not depend on which cell wins.</a:t>
             </a:r>
           </a:p>
           <a:p>
@@ -15962,7 +16209,7 @@
         <p:spPr>
           <a:xfrm>
             <a:off x="658368" y="4133088"/>
-            <a:ext cx="10874959" cy="841248"/>
+            <a:ext cx="10874959" cy="1207008"/>
           </a:xfrm>
           <a:prstGeom prst="rect">
             <a:avLst/>
@@ -16035,7 +16282,7 @@
                 </a:solidFill>
                 <a:latin typeface="Calibri"/>
               </a:rPr>
-              <a:t>Per-source n is 67–451, so the intervals are wide and no per-cell ordering is a ranking. Retrospective and estimation-only: these rows and this panel were inspected during development. And id_test is held out by row, not by content — 1.6–5.0% of each represented split sits within Jaccard 0.70 of a training row.</a:t>
+              <a:t>The interval is conditional on these three corpora. Drawing sources with replacement instead widens it to [-0.019, +0.220], which includes zero — so this is a claim about the panel's behaviour on those sources, not about represented sources in general. Per-source n is 67–451, so no per-cell ordering is a ranking. Retrospective and estimation-only: these rows and this panel were inspected during development. And id_test is held out by row, not by content — 1.6–5.0% of each represented split sits within Jaccard 0.70 of a training row.</a:t>
             </a:r>
           </a:p>
         </p:txBody>
@@ -17807,7 +18054,7 @@
                 </a:solidFill>
                 <a:latin typeface="Calibri"/>
               </a:rPr>
-              <a:t>  A delta against other models hides the transfer cost; a recall compared at unequal alarm rates hides its sign.</a:t>
+              <a:t>  A delta against other models hides the transfer cost; a recall compared at unequal alarm rates hides its sign. Price it in the 5% region: −0.174 pAUC, not −0.059 AP.</a:t>
             </a:r>
           </a:p>
           <a:p>
@@ -17847,7 +18094,7 @@
                 </a:solidFill>
                 <a:latin typeface="Calibri"/>
               </a:rPr>
-              <a:t>  It buys transfer at a real represented cost that failed our preregistered margin.</a:t>
+              <a:t>  It buys transfer at a real represented cost that failed our preregistered margin — in the 5% region, +0.149 for −0.214 pAUC.</a:t>
             </a:r>
           </a:p>
           <a:p>
@@ -17980,7 +18227,7 @@
         </p:nvSpPr>
         <p:spPr>
           <a:xfrm>
-            <a:off x="5596128" y="4864608"/>
+            <a:off x="5596128" y="5084064"/>
             <a:ext cx="5937199" cy="1042415"/>
           </a:xfrm>
           <a:prstGeom prst="rect">
@@ -21039,7 +21286,7 @@
                 </a:solidFill>
                 <a:latin typeface="Calibri"/>
               </a:rPr>
-              <a:t>It pools effects that point in opposite directions: +0.0400 for SmolLM2-1.7B against −0.1499 for Qwen3-4B. Read the per-checkpoint column, not the bottom row.</a:t>
+              <a:t>It pools effects that point in opposite directions: +0.0400 for SmolLM2-1.7B against −0.1499 for Qwen3-4B. Read the per-checkpoint column, not the bottom row — and read SmolLM2's gain as average ranking only (slide 7).</a:t>
             </a:r>
           </a:p>
         </p:txBody>
@@ -21980,7 +22227,7 @@
                 </a:solidFill>
                 <a:latin typeface="Calibri"/>
               </a:rPr>
-              <a:t>  Four SmolLM2 seeds plus one Qwen2.5 seed — the two checkpoints with the least transfer skill to lose.</a:t>
+              <a:t>  Four SmolLM2 seeds plus one Qwen2.5 seed — the two checkpoints with the least transfer skill to lose. On average ranking only (slide 7).</a:t>
             </a:r>
           </a:p>
           <a:p>
@@ -22033,7 +22280,7 @@
         </p:nvSpPr>
         <p:spPr>
           <a:xfrm>
-            <a:off x="6748272" y="4992624"/>
+            <a:off x="6748272" y="5065776"/>
             <a:ext cx="4785055" cy="786384"/>
           </a:xfrm>
           <a:prstGeom prst="rect">
@@ -22661,7 +22908,7 @@
                 </a:solidFill>
                 <a:latin typeface="Calibri"/>
               </a:rPr>
-              <a:t>Our headline metric understates all of this.</a:t>
+              <a:t>Our headline metric understates both halves.</a:t>
             </a:r>
             <a:r>
               <a:rPr sz="1100" b="0" i="0">
@@ -22670,7 +22917,7 @@
                 </a:solidFill>
                 <a:latin typeface="Calibri"/>
               </a:rPr>
-              <a:t>  macro-AP averages over the whole ranking. Re-read only inside the 5% budget, no cell flips sign but the transfer cost goes -0.059 → -0.174 pAUC (3.0×).</a:t>
+              <a:t>  Re-read inside the 5% budget, 0 cells flip sign — but represented goes +0.323 → +0.686 pAUC (2.1×) and transfer −0.059 → −0.174 (3.0×).</a:t>
             </a:r>
           </a:p>
         </p:txBody>
@@ -23979,8 +24226,8 @@
         </p:blipFill>
         <p:spPr>
           <a:xfrm>
-            <a:off x="2647635" y="1591056"/>
-            <a:ext cx="6896425" cy="2962656"/>
+            <a:off x="2988199" y="1591056"/>
+            <a:ext cx="6215297" cy="2670048"/>
           </a:xfrm>
           <a:prstGeom prst="rect">
             <a:avLst/>
@@ -23995,8 +24242,8 @@
         </p:nvSpPr>
         <p:spPr>
           <a:xfrm>
-            <a:off x="658368" y="4681728"/>
-            <a:ext cx="5300319" cy="1060704"/>
+            <a:off x="658368" y="4407408"/>
+            <a:ext cx="5300319" cy="1335024"/>
           </a:xfrm>
           <a:prstGeom prst="rect">
             <a:avLst/>
@@ -24069,7 +24316,7 @@
                 </a:solidFill>
                 <a:latin typeface="Calibri"/>
               </a:rPr>
-              <a:t>At β=0.5, transfer macro-AP rises +0.061 on average versus plain SFT — no second model in memory, no base retraining, no extra inference pass.</a:t>
+              <a:t>At β=0.5, transfer macro-AP rises +0.061 on average versus plain SFT — no second model in memory, no base retraining, no extra inference pass. Inside the 5% alarm budget, +0.149 pAUC (2.4×).</a:t>
             </a:r>
           </a:p>
         </p:txBody>
@@ -24082,8 +24329,8 @@
         </p:nvSpPr>
         <p:spPr>
           <a:xfrm>
-            <a:off x="6233007" y="4681728"/>
-            <a:ext cx="5300319" cy="1060704"/>
+            <a:off x="6233007" y="4407408"/>
+            <a:ext cx="5300319" cy="1335024"/>
           </a:xfrm>
           <a:prstGeom prst="rect">
             <a:avLst/>
@@ -24156,7 +24403,7 @@
                 </a:solidFill>
                 <a:latin typeface="Calibri"/>
               </a:rPr>
-              <a:t>Represented macro-AP falls −0.035 here. In the analysis-preregistered ten-checkpoint study the same trade costs −0.034, whose lower bound (−0.062) fails the −0.02 non-inferiority margin: RQ2 criterion NOT met.</a:t>
+              <a:t>Represented macro-AP falls −0.035 here — −0.214 pAUC in the same 5% region (6.2×, so the cost half grows faster than the benefit half). In the analysis-preregistered ten-checkpoint study the trade costs −0.034, whose lower bound (−0.062) fails the −0.02 margin: RQ2 criterion NOT met.</a:t>
             </a:r>
           </a:p>
         </p:txBody>

--- a/papers/unified-report/slides/safety_guard_benchmark_deck.pptx
+++ b/papers/unified-report/slides/safety_guard_benchmark_deck.pptx
@@ -612,28 +612,105 @@
           </a:p>
           <a:p>
             <a:r>
-              <a:t>evidence tier for the specialization claim, so lean on it.</a:t>
+              <a:t>evidence tier for the specialization claim, so lean on it — but lean on it with all four</a:t>
+            </a:r>
+          </a:p>
+          <a:p>
+            <a:r>
+              <a:t>disqualifiers said out loud, not two. This is the highest-risk moment in the deck: the slide</a:t>
+            </a:r>
+          </a:p>
+          <a:p>
+            <a:r>
+              <a:t>says CRITERION MET, which is the report's own wording, and the report is careful that "the</a:t>
+            </a:r>
+          </a:p>
+          <a:p>
+            <a:r>
+              <a:t>criterion is met" is NOT "RQ1 is supported".</a:t>
             </a:r>
           </a:p>
           <a:p/>
           <a:p>
             <a:r>
-              <a:t>Two limits to state honestly if pressed. It is preregistered on the ANALYSIS, not blind</a:t>
-            </a:r>
-          </a:p>
-          <a:p>
-            <a:r>
-              <a:t>on the DATA — it re-scores the same 3,308 rows as Acts I-II. And the registry declares</a:t>
-            </a:r>
-          </a:p>
-          <a:p>
-            <a:r>
-              <a:t>itself dev_nonfinal, so it is not bound to a release lock. The uninspected-cohort half</a:t>
-            </a:r>
-          </a:p>
-          <a:p>
-            <a:r>
-              <a:t>of that discipline remains future work.</a:t>
+              <a:t>Four things went wrong with this protocol, and the report says any ONE of them disqualifies a</a:t>
+            </a:r>
+          </a:p>
+          <a:p>
+            <a:r>
+              <a:t>confirmatory reading. (1) The claim registry is dev_nonfinal and no lock binds it. (2) NO</a:t>
+            </a:r>
+          </a:p>
+          <a:p>
+            <a:r>
+              <a:t>checkpoint has a passing preflight, so the eligibility gate never actually ran. (3) A</a:t>
+            </a:r>
+          </a:p>
+          <a:p>
+            <a:r>
+              <a:t>degenerate cell was retained against that gate — the Llama-Guard null cell on the slide.</a:t>
+            </a:r>
+          </a:p>
+          <a:p>
+            <a:r>
+              <a:t>(4) The panel split reported here was written AFTER the outcomes were known, to repair an</a:t>
+            </a:r>
+          </a:p>
+          <a:p>
+            <a:r>
+              <a:t>analyzer that was computing the wrong estimand. Volunteer (2) and (4) in particular; they are</a:t>
+            </a:r>
+          </a:p>
+          <a:p>
+            <a:r>
+              <a:t>the two the deck used to leave unspoken, and they are the two a careful reader will find.</a:t>
+            </a:r>
+          </a:p>
+          <a:p/>
+          <a:p>
+            <a:r>
+              <a:t>Say the panel out loud too, because the kicker now names it and it is the thing the correction</a:t>
+            </a:r>
+          </a:p>
+          <a:p>
+            <a:r>
+              <a:t>in (4) was about. The four H statistics are computed over the REGISTERED PURPOSE-BUILT PANEL —</a:t>
+            </a:r>
+          </a:p>
+          <a:p>
+            <a:r>
+              <a:t>6 released guards spanning 5 families.</a:t>
+            </a:r>
+          </a:p>
+          <a:p>
+            <a:r>
+              <a:t>The 10-checkpoint, 6-family grid is the</a:t>
+            </a:r>
+          </a:p>
+          <a:p>
+            <a:r>
+              <a:t>full design; the general block is a separate estimand and the registered contrast between the</a:t>
+            </a:r>
+          </a:p>
+          <a:p>
+            <a:r>
+              <a:t>two is Gamma. An earlier revision pooled them into one six-family panel and published</a:t>
+            </a:r>
+          </a:p>
+          <a:p>
+            <a:r>
+              <a:t>H_gain +0.174 / H_conc +0.239 for a quantity that was not the registered one.</a:t>
+            </a:r>
+          </a:p>
+          <a:p/>
+          <a:p>
+            <a:r>
+              <a:t>It is also preregistered on the ANALYSIS, not blind on the DATA — it re-scores the same 3,308</a:t>
+            </a:r>
+          </a:p>
+          <a:p>
+            <a:r>
+              <a:t>rows as Acts I-II. The uninspected-cohort half of that discipline remains future work.</a:t>
             </a:r>
           </a:p>
           <a:p/>
@@ -800,6 +877,48 @@
               <a:t>non-promotable ablation, precisely so the operator is not a disguised fit to the test set.</a:t>
             </a:r>
           </a:p>
+          <a:p/>
+          <a:p>
+            <a:r>
+              <a:t>Say "promotable" and then say why, because the handicap reads as rigor rather than as a hedge.</a:t>
+            </a:r>
+          </a:p>
+          <a:p>
+            <a:r>
+              <a:t>The logit-average ablation reaches a worst-regime 0.891 — nominally better than composition's</a:t>
+            </a:r>
+          </a:p>
+          <a:p>
+            <a:r>
+              <a:t>0.883 — and it is excluded from the comparison purely because it was dev-visible. We are</a:t>
+            </a:r>
+          </a:p>
+          <a:p>
+            <a:r>
+              <a:t>reporting the best operator we are ENTITLED to promote, not the best number we produced.</a:t>
+            </a:r>
+          </a:p>
+          <a:p/>
+          <a:p>
+            <a:r>
+              <a:t>One more clause the slide now carries: composition lands nominally above the base on transfer</a:t>
+            </a:r>
+          </a:p>
+          <a:p>
+            <a:r>
+              <a:t>(0.883 vs 0.866), but +0.017 is inside the 0.015-0.029 reproduction envelope from the KL</a:t>
+            </a:r>
+          </a:p>
+          <a:p>
+            <a:r>
+              <a:t>control's beta=0 arm, so that edge is UNRESOLVED rather than small. The +0.076 over SFT is</a:t>
+            </a:r>
+          </a:p>
+          <a:p>
+            <a:r>
+              <a:t>comfortably outside it and is the claim to defend.</a:t>
+            </a:r>
+          </a:p>
         </p:txBody>
       </p:sp>
       <p:sp>
@@ -2113,6 +2232,37 @@
               <a:t>point as a caveat — it is measured, and it is the report's matched-false-alarm-budget table.</a:t>
             </a:r>
           </a:p>
+          <a:p>
+            <a:r>
+              <a:t>Do carry the report's own qualifier with it, every time you say it: that is an ROC point</a:t>
+            </a:r>
+          </a:p>
+          <a:p>
+            <a:r>
+              <a:t>read at a common alarm budget, NOT a threshold a production system could place, because the</a:t>
+            </a:r>
+          </a:p>
+          <a:p>
+            <a:r>
+              <a:t>quantile is read off the same labelled negatives the recall is then measured on. Slide 7 has</a:t>
+            </a:r>
+          </a:p>
+          <a:p>
+            <a:r>
+              <a:t>the full form of the caveat.</a:t>
+            </a:r>
+          </a:p>
+          <a:p/>
+          <a:p>
+            <a:r>
+              <a:t>Also flag the fairness-probe line at the bottom before you move on. It costs five seconds and</a:t>
+            </a:r>
+          </a:p>
+          <a:p>
+            <a:r>
+              <a:t>it changes how the room hears the next twenty slides: this is a deck that reports what failed.</a:t>
+            </a:r>
+          </a:p>
         </p:txBody>
       </p:sp>
       <p:sp>
@@ -2329,7 +2479,22 @@
           </a:p>
           <a:p>
             <a:r>
-              <a:t>headline. If you only get one sentence, use that one.</a:t>
+              <a:t>headline. If you only get one sentence, use that one — and put the qualifier inside the same</a:t>
+            </a:r>
+          </a:p>
+          <a:p>
+            <a:r>
+              <a:t>sentence, because it is what makes the sentence survive contact with the report. It is an ROC</a:t>
+            </a:r>
+          </a:p>
+          <a:p>
+            <a:r>
+              <a:t>point read at a common alarm budget on labelled negatives, not a threshold a production system</a:t>
+            </a:r>
+          </a:p>
+          <a:p>
+            <a:r>
+              <a:t>could place. Cheap to compute, decisive as a comparison, and not shippable as a rule.</a:t>
             </a:r>
           </a:p>
           <a:p/>
@@ -2350,7 +2515,53 @@
           </a:p>
           <a:p>
             <a:r>
-              <a:t>Say plainly that the noise floor is a tooling problem before it is a science problem.</a:t>
+              <a:t>Say plainly that the noise floor is a tooling problem before it is a science problem — and that</a:t>
+            </a:r>
+          </a:p>
+          <a:p>
+            <a:r>
+              <a:t>it is the most interesting methodological byproduct here: an effect-size ceiling nobody set out</a:t>
+            </a:r>
+          </a:p>
+          <a:p>
+            <a:r>
+              <a:t>to measure, which then disqualified two of our own results (composition's +0.017 over base, KL</a:t>
+            </a:r>
+          </a:p>
+          <a:p>
+            <a:r>
+              <a:t>beta=1.0's +0.005 on SmolLM2).</a:t>
+            </a:r>
+          </a:p>
+          <a:p/>
+          <a:p>
+            <a:r>
+              <a:t>The reproducibility numbers on the fourth bullet are worth saying rather than gesturing at:</a:t>
+            </a:r>
+          </a:p>
+          <a:p>
+            <a:r>
+              <a:t>31 of 35 generated artifacts byte-check in any</a:t>
+            </a:r>
+          </a:p>
+          <a:p>
+            <a:r>
+              <a:t>environment, 4 need the pinned lock, 0 are</a:t>
+            </a:r>
+          </a:p>
+          <a:p>
+            <a:r>
+              <a:t>uncovered. Then name the one hole before anyone finds it: the specialization plane on slide 6</a:t>
+            </a:r>
+          </a:p>
+          <a:p>
+            <a:r>
+              <a:t>ships as a committed PDF with NO generator in the harness, so it is neither regenerated nor</a:t>
+            </a:r>
+          </a:p>
+          <a:p>
+            <a:r>
+              <a:t>compared. Naming that first is the deck's whole posture.</a:t>
             </a:r>
           </a:p>
           <a:p/>
@@ -2939,6 +3150,47 @@
           <a:p/>
           <a:p>
             <a:r>
+              <a:t>Say the qualifier in the same breath as the number, every time, because it is the one a reader</a:t>
+            </a:r>
+          </a:p>
+          <a:p>
+            <a:r>
+              <a:t>who has the report open will raise. This is a RETROSPECTIVE ROC POINT, NOT A DEPLOYABLE</a:t>
+            </a:r>
+          </a:p>
+          <a:p>
+            <a:r>
+              <a:t>THRESHOLD: the matching quantile is read off the same labelled negatives the recall is then</a:t>
+            </a:r>
+          </a:p>
+          <a:p>
+            <a:r>
+              <a:t>measured on, so a production system without labels could not place it. Read the row as "recall</a:t>
+            </a:r>
+          </a:p>
+          <a:p>
+            <a:r>
+              <a:t>at an empirical matched-FPR ROC point"; the report's operational-limits appendix says what a</a:t>
+            </a:r>
+          </a:p>
+          <a:p>
+            <a:r>
+              <a:t>deployable version would need. This does not soften the finding — the comparison at unequal</a:t>
+            </a:r>
+          </a:p>
+          <a:p>
+            <a:r>
+              <a:t>alarm rates was never a comparison of discriminative power in the first place — but it does</a:t>
+            </a:r>
+          </a:p>
+          <a:p>
+            <a:r>
+              <a:t>stop "no GPU, no retraining" being heard as "so you could ship it on Monday".</a:t>
+            </a:r>
+          </a:p>
+          <a:p/>
+          <a:p>
+            <a:r>
               <a:t>Two things to have ready. It needs no GPU and no pinned environment — matching false-alarm</a:t>
             </a:r>
           </a:p>
@@ -3380,7 +3632,22 @@
           </a:p>
           <a:p>
             <a:r>
-              <a:t>BASE, and KL β=1.0's +0.004 for SmolLM2. The big effects are safe: +0.32 represented, the</a:t>
+              <a:t>BASE, and KL β=1.0's +0.005 for SmolLM2. (That cell is +0.005 in the operating-region table,</a:t>
+            </a:r>
+          </a:p>
+          <a:p>
+            <a:r>
+              <a:t>which computes it from the underlying scores; the §3.7 prose rounds the two 3-dp AP columns</a:t>
+            </a:r>
+          </a:p>
+          <a:p>
+            <a:r>
+              <a:t>first and prints +0.004. Same cell, and either way it sits inside the envelope — quote the</a:t>
+            </a:r>
+          </a:p>
+          <a:p>
+            <a:r>
+              <a:t>table value if anyone has both open.) The big effects are safe: +0.32 represented, the</a:t>
             </a:r>
           </a:p>
           <a:p>
@@ -7473,7 +7740,7 @@
                 </a:solidFill>
                 <a:latin typeface="Calibri"/>
               </a:rPr>
-              <a:t>PREREGISTERED  ·  10 CHECKPOINTS, 6 MODEL FAMILIES</a:t>
+              <a:t>PREREGISTERED  ·  6 RELEASED GUARDS, 5 FAMILIES (WITHIN A 10-CHECKPOINT GRID)</a:t>
             </a:r>
           </a:p>
         </p:txBody>
@@ -8423,7 +8690,7 @@
                 </a:solidFill>
                 <a:latin typeface="Calibri"/>
               </a:rPr>
-              <a:t>Best worst-regime scorer.</a:t>
+              <a:t>Best worst-regime promotable scorer.</a:t>
             </a:r>
             <a:r>
               <a:rPr sz="1150" b="0" i="0">
@@ -8445,8 +8712,8 @@
         </p:nvSpPr>
         <p:spPr>
           <a:xfrm>
-            <a:off x="7132320" y="4846320"/>
-            <a:ext cx="4401007" cy="932688"/>
+            <a:off x="7132320" y="4700016"/>
+            <a:ext cx="4401007" cy="1316736"/>
           </a:xfrm>
           <a:prstGeom prst="rect">
             <a:avLst/>
@@ -8513,13 +8780,13 @@
               </a:spcAft>
             </a:pPr>
             <a:r>
-              <a:rPr sz="1150" b="0" i="0">
+              <a:rPr sz="1100" b="0" i="0">
                 <a:solidFill>
                   <a:srgbClr val="9DAFC7"/>
                 </a:solidFill>
                 <a:latin typeface="Calibri"/>
               </a:rPr>
-              <a:t>Against the untuned base the four deltas are heterogeneous: +0.067, +0.036, −0.003, −0.030. For the strongest base you'd have been better off never tuning.</a:t>
+              <a:t>Against the untuned base the four deltas are heterogeneous: +0.067, +0.036, −0.003, −0.030 — for the strongest base, better never to have tuned. And the +0.017 aggregate edge over base sits inside the 0.015–0.029 reproduction envelope: unresolved, not merely small.</a:t>
             </a:r>
           </a:p>
         </p:txBody>
@@ -8883,8 +9150,8 @@
         </p:nvSpPr>
         <p:spPr>
           <a:xfrm>
-            <a:off x="6784848" y="3218688"/>
-            <a:ext cx="4748479" cy="274320"/>
+            <a:off x="6784848" y="3127248"/>
+            <a:ext cx="4748479" cy="347472"/>
           </a:xfrm>
           <a:prstGeom prst="rect">
             <a:avLst/>
@@ -8905,7 +9172,7 @@
                 <a:spcPts val="0"/>
               </a:spcBef>
               <a:spcAft>
-                <a:spcPts val="0"/>
+                <a:spcPts val="100"/>
               </a:spcAft>
             </a:pPr>
             <a:r>
@@ -8916,6 +9183,28 @@
                 <a:latin typeface="Calibri"/>
               </a:rPr>
               <a:t>AND RANKING IS NOT CALIBRATION</a:t>
+            </a:r>
+          </a:p>
+          <a:p>
+            <a:pPr algn="l">
+              <a:lnSpc>
+                <a:spcPct val="116000"/>
+              </a:lnSpc>
+              <a:spcBef>
+                <a:spcPts val="0"/>
+              </a:spcBef>
+              <a:spcAft>
+                <a:spcPts val="0"/>
+              </a:spcAft>
+            </a:pPr>
+            <a:r>
+              <a:rPr sz="900" b="0" i="1">
+                <a:solidFill>
+                  <a:srgbClr val="6B7F9F"/>
+                </a:solidFill>
+                <a:latin typeface="Calibri"/>
+              </a:rPr>
+              <a:t>realized transfer operating points, after calibrating each guard to a 5% FPR target</a:t>
             </a:r>
           </a:p>
         </p:txBody>
@@ -8965,7 +9254,7 @@
                           </a:solidFill>
                           <a:latin typeface="Calibri"/>
                         </a:rPr>
-                        <a:t>Guard</a:t>
+                        <a:t>Guard  (transfer)</a:t>
                       </a:r>
                     </a:p>
                   </a:txBody>
@@ -10523,7 +10812,7 @@
         </p:nvSpPr>
         <p:spPr>
           <a:xfrm>
-            <a:off x="4846320" y="3072384"/>
+            <a:off x="4846320" y="3017520"/>
             <a:ext cx="6687007" cy="1828800"/>
           </a:xfrm>
           <a:prstGeom prst="rect">
@@ -10545,11 +10834,11 @@
                 <a:spcPts val="0"/>
               </a:spcBef>
               <a:spcAft>
-                <a:spcPts val="900"/>
-              </a:spcAft>
-            </a:pPr>
-            <a:r>
-              <a:rPr sz="1150" b="1" i="0">
+                <a:spcPts val="700"/>
+              </a:spcAft>
+            </a:pPr>
+            <a:r>
+              <a:rPr sz="1100" b="1" i="0">
                 <a:solidFill>
                   <a:srgbClr val="E0564F"/>
                 </a:solidFill>
@@ -10558,7 +10847,7 @@
               <a:t>—  </a:t>
             </a:r>
             <a:r>
-              <a:rPr sz="1150" b="1" i="0">
+              <a:rPr sz="1100" b="1" i="0">
                 <a:solidFill>
                   <a:srgbClr val="EEF2F8"/>
                 </a:solidFill>
@@ -10567,7 +10856,7 @@
               <a:t>G0/D1 is the payload.</a:t>
             </a:r>
             <a:r>
-              <a:rPr sz="1150" b="0" i="0">
+              <a:rPr sz="1100" b="0" i="0">
                 <a:solidFill>
                   <a:srgbClr val="9DAFC7"/>
                 </a:solidFill>
@@ -10585,11 +10874,11 @@
                 <a:spcPts val="0"/>
               </a:spcBef>
               <a:spcAft>
-                <a:spcPts val="900"/>
-              </a:spcAft>
-            </a:pPr>
-            <a:r>
-              <a:rPr sz="1150" b="1" i="0">
+                <a:spcPts val="700"/>
+              </a:spcAft>
+            </a:pPr>
+            <a:r>
+              <a:rPr sz="1100" b="1" i="0">
                 <a:solidFill>
                   <a:srgbClr val="E0564F"/>
                 </a:solidFill>
@@ -10598,7 +10887,7 @@
               <a:t>—  </a:t>
             </a:r>
             <a:r>
-              <a:rPr sz="1150" b="1" i="0">
+              <a:rPr sz="1100" b="1" i="0">
                 <a:solidFill>
                   <a:srgbClr val="EEF2F8"/>
                 </a:solidFill>
@@ -10607,7 +10896,7 @@
               <a:t>Two labels, not one merged verdict.</a:t>
             </a:r>
             <a:r>
-              <a:rPr sz="1150" b="0" i="0">
+              <a:rPr sz="1100" b="0" i="0">
                 <a:solidFill>
                   <a:srgbClr val="9DAFC7"/>
                 </a:solidFill>
@@ -10625,11 +10914,11 @@
                 <a:spcPts val="0"/>
               </a:spcBef>
               <a:spcAft>
-                <a:spcPts val="900"/>
-              </a:spcAft>
-            </a:pPr>
-            <a:r>
-              <a:rPr sz="1150" b="1" i="0">
+                <a:spcPts val="700"/>
+              </a:spcAft>
+            </a:pPr>
+            <a:r>
+              <a:rPr sz="1100" b="1" i="0">
                 <a:solidFill>
                   <a:srgbClr val="E0564F"/>
                 </a:solidFill>
@@ -10638,7 +10927,7 @@
               <a:t>—  </a:t>
             </a:r>
             <a:r>
-              <a:rPr sz="1150" b="1" i="0">
+              <a:rPr sz="1100" b="1" i="0">
                 <a:solidFill>
                   <a:srgbClr val="EEF2F8"/>
                 </a:solidFill>
@@ -10647,13 +10936,53 @@
               <a:t>Nested, not crossed, in v1.</a:t>
             </a:r>
             <a:r>
-              <a:rPr sz="1150" b="0" i="0">
+              <a:rPr sz="1100" b="0" i="0">
                 <a:solidFill>
                   <a:srgbClr val="9DAFC7"/>
                 </a:solidFill>
                 <a:latin typeface="Calibri"/>
               </a:rPr>
               <a:t>  G1/D0 came out empty — a stated limitation, so orthogonality is shown on three quadrants, not four.</a:t>
+            </a:r>
+          </a:p>
+          <a:p>
+            <a:pPr algn="l">
+              <a:lnSpc>
+                <a:spcPct val="120000"/>
+              </a:lnSpc>
+              <a:spcBef>
+                <a:spcPts val="0"/>
+              </a:spcBef>
+              <a:spcAft>
+                <a:spcPts val="700"/>
+              </a:spcAft>
+            </a:pPr>
+            <a:r>
+              <a:rPr sz="1100" b="1" i="0">
+                <a:solidFill>
+                  <a:srgbClr val="E0564F"/>
+                </a:solidFill>
+                <a:latin typeface="Calibri"/>
+              </a:rPr>
+              <a:t>—  </a:t>
+            </a:r>
+            <a:r>
+              <a:rPr sz="1100" b="1" i="0">
+                <a:solidFill>
+                  <a:srgbClr val="EEF2F8"/>
+                </a:solidFill>
+                <a:latin typeface="Calibri"/>
+              </a:rPr>
+              <a:t>Read AP·D against 0.555, not against 0.</a:t>
+            </a:r>
+            <a:r>
+              <a:rPr sz="1100" b="0" i="0">
+                <a:solidFill>
+                  <a:srgbClr val="9DAFC7"/>
+                </a:solidFill>
+                <a:latin typeface="Calibri"/>
+              </a:rPr>
+              <a:t>  81 of the 146 public-test rows are D-positive, so chance already scores 0.555. The zero-shot band is 0.67–0.85 — 0.12–0.30 above chance.</a:t>
             </a:r>
           </a:p>
         </p:txBody>
@@ -10666,8 +10995,8 @@
         </p:nvSpPr>
         <p:spPr>
           <a:xfrm>
-            <a:off x="4846320" y="4956048"/>
-            <a:ext cx="6687007" cy="804672"/>
+            <a:off x="4846320" y="5102352"/>
+            <a:ext cx="6687007" cy="786384"/>
           </a:xfrm>
           <a:prstGeom prst="rect">
             <a:avLst/>
@@ -14067,7 +14396,7 @@
                           </a:solidFill>
                           <a:latin typeface="Calibri"/>
                         </a:rPr>
-                        <a:t>Qwen3-32B SFT</a:t>
+                        <a:t>Qwen3-32B SFT (in-env)</a:t>
                       </a:r>
                     </a:p>
                   </a:txBody>
@@ -14658,7 +14987,7 @@
                 </a:solidFill>
                 <a:latin typeface="Calibri"/>
               </a:rPr>
-              <a:t>TWO ROUTES THAT DO NOT WORK</a:t>
+              <a:t>TWO ROUTES THAT DO NOT WORK  ·  TUNING, AND SCALE</a:t>
             </a:r>
           </a:p>
         </p:txBody>
@@ -14703,7 +15032,7 @@
                 </a:solidFill>
                 <a:latin typeface="Cambria"/>
               </a:rPr>
-              <a:t>Tuning does not close it, and neither does scale</a:t>
+              <a:t>What is regular is the endpoint, not the tax</a:t>
             </a:r>
           </a:p>
         </p:txBody>
@@ -14748,7 +15077,7 @@
                 </a:solidFill>
                 <a:latin typeface="Calibri"/>
               </a:rPr>
-              <a:t>Both tested on the same rows, at the same matched false-alarm budget</a:t>
+              <a:t>Both tested on the same rows, at the same matched false-alarm budget  ·  every tuned row is SFT (in-env): same recipe and manifest, a distinct execution</a:t>
             </a:r>
           </a:p>
         </p:txBody>
@@ -15627,7 +15956,7 @@
                 </a:solidFill>
                 <a:latin typeface="Calibri"/>
               </a:rPr>
-              <a:t>THE TAX TRACKS THE DISTANCE TO THE ENDPOINT</a:t>
+              <a:t>ORDERED BY BASE STRENGTH, ONLY ONE HALF OF THE TRADE IS MONOTONE</a:t>
             </a:r>
           </a:p>
           <a:p>
@@ -16890,7 +17219,7 @@
                 </a:solidFill>
                 <a:latin typeface="Calibri"/>
               </a:rPr>
-              <a:t>A coded fair-lending violation ranked below every benign mortgage inquiry in the split — zero-shot, before any tuning at all.</a:t>
+              <a:t>On SmolLM3-3B's ordering, a coded redlining-by-proxy violation ranked below every benign mortgage inquiry in the split — and all four guards ranked it below the median. Zero-shot, before any tuning.</a:t>
             </a:r>
           </a:p>
         </p:txBody>
@@ -17086,6 +17415,60 @@
                 <a:latin typeface="Calibri"/>
               </a:rPr>
               <a:t>Should you run a small guard at all?</a:t>
+            </a:r>
+          </a:p>
+        </p:txBody>
+      </p:sp>
+      <p:sp>
+        <p:nvSpPr>
+          <p:cNvPr id="15" name="TextBox 14"/>
+          <p:cNvSpPr txBox="1"/>
+          <p:nvPr/>
+        </p:nvSpPr>
+        <p:spPr>
+          <a:xfrm>
+            <a:off x="658368" y="5559552"/>
+            <a:ext cx="10874959" cy="274320"/>
+          </a:xfrm>
+          <a:prstGeom prst="rect">
+            <a:avLst/>
+          </a:prstGeom>
+          <a:noFill/>
+        </p:spPr>
+        <p:txBody>
+          <a:bodyPr wrap="square" anchor="t" lIns="0" rIns="0" tIns="0" bIns="0">
+            <a:spAutoFit/>
+          </a:bodyPr>
+          <a:lstStyle/>
+          <a:p>
+            <a:pPr algn="l">
+              <a:lnSpc>
+                <a:spcPct val="116000"/>
+              </a:lnSpc>
+              <a:spcBef>
+                <a:spcPts val="0"/>
+              </a:spcBef>
+              <a:spcAft>
+                <a:spcPts val="0"/>
+              </a:spcAft>
+            </a:pPr>
+            <a:r>
+              <a:rPr sz="1100" b="1" i="0">
+                <a:solidFill>
+                  <a:srgbClr val="F08A7F"/>
+                </a:solidFill>
+                <a:latin typeface="Calibri"/>
+              </a:rPr>
+              <a:t>And one we did not want:  </a:t>
+            </a:r>
+            <a:r>
+              <a:rPr sz="1100" b="0" i="1">
+                <a:solidFill>
+                  <a:srgbClr val="9DAFC7"/>
+                </a:solidFill>
+                <a:latin typeface="Calibri"/>
+              </a:rPr>
+              <a:t>we built a fairness probe to audit the guards, and it does not survive its own audit (slide 15). The negatives are in here too.</a:t>
             </a:r>
           </a:p>
         </p:txBody>
@@ -17986,7 +18369,7 @@
                 <a:spcPts val="0"/>
               </a:spcBef>
               <a:spcAft>
-                <a:spcPts val="800"/>
+                <a:spcPts val="700"/>
               </a:spcAft>
             </a:pPr>
             <a:r>
@@ -18026,7 +18409,7 @@
                 <a:spcPts val="0"/>
               </a:spcBef>
               <a:spcAft>
-                <a:spcPts val="800"/>
+                <a:spcPts val="700"/>
               </a:spcAft>
             </a:pPr>
             <a:r>
@@ -18054,7 +18437,7 @@
                 </a:solidFill>
                 <a:latin typeface="Calibri"/>
               </a:rPr>
-              <a:t>  A delta against other models hides the transfer cost; a recall compared at unequal alarm rates hides its sign. Price it in the 5% region: −0.174 pAUC, not −0.059 AP.</a:t>
+              <a:t>  A delta against other models hides the transfer cost; a recall compared at unequal alarm rates hides its sign. Price it in the 5% region: −0.174 pAUC, not −0.059 AP. Matched-budget is an ROC point, not a threshold you can place — compare with it, do not ship it.</a:t>
             </a:r>
           </a:p>
           <a:p>
@@ -18066,7 +18449,7 @@
                 <a:spcPts val="0"/>
               </a:spcBef>
               <a:spcAft>
-                <a:spcPts val="800"/>
+                <a:spcPts val="700"/>
               </a:spcAft>
             </a:pPr>
             <a:r>
@@ -18106,7 +18489,7 @@
                 <a:spcPts val="0"/>
               </a:spcBef>
               <a:spcAft>
-                <a:spcPts val="800"/>
+                <a:spcPts val="700"/>
               </a:spcAft>
             </a:pPr>
             <a:r>
@@ -18146,7 +18529,7 @@
                 <a:spcPts val="0"/>
               </a:spcBef>
               <a:spcAft>
-                <a:spcPts val="800"/>
+                <a:spcPts val="700"/>
               </a:spcAft>
             </a:pPr>
             <a:r>
@@ -18186,7 +18569,7 @@
                 <a:spcPts val="0"/>
               </a:spcBef>
               <a:spcAft>
-                <a:spcPts val="800"/>
+                <a:spcPts val="700"/>
               </a:spcAft>
             </a:pPr>
             <a:r>
@@ -18227,8 +18610,8 @@
         </p:nvSpPr>
         <p:spPr>
           <a:xfrm>
-            <a:off x="5596128" y="5084064"/>
-            <a:ext cx="5937199" cy="1042415"/>
+            <a:off x="5596128" y="5212080"/>
+            <a:ext cx="5937199" cy="987552"/>
           </a:xfrm>
           <a:prstGeom prst="rect">
             <a:avLst/>
@@ -18560,7 +18943,7 @@
                 <a:spcPts val="0"/>
               </a:spcBef>
               <a:spcAft>
-                <a:spcPts val="900"/>
+                <a:spcPts val="800"/>
               </a:spcAft>
             </a:pPr>
             <a:r>
@@ -18600,7 +18983,7 @@
                 <a:spcPts val="0"/>
               </a:spcBef>
               <a:spcAft>
-                <a:spcPts val="900"/>
+                <a:spcPts val="800"/>
               </a:spcAft>
             </a:pPr>
             <a:r>
@@ -18628,7 +19011,7 @@
                 </a:solidFill>
                 <a:latin typeface="Calibri"/>
               </a:rPr>
-              <a:t>  Cheap, almost never done, and it reverses a headline: transfer recall 0.517 → 0.217 at an equal false-alarm budget. Ranking arithmetic on committed scores — no GPU, no retraining.</a:t>
+              <a:t>  Cheap, almost never done, and it reverses a headline: transfer recall 0.517 → 0.217 at an equal false-alarm budget — an ROC point at a common budget, not a deployable threshold. Ranking arithmetic on committed scores — no GPU, no retraining.</a:t>
             </a:r>
           </a:p>
           <a:p>
@@ -18640,7 +19023,7 @@
                 <a:spcPts val="0"/>
               </a:spcBef>
               <a:spcAft>
-                <a:spcPts val="900"/>
+                <a:spcPts val="800"/>
               </a:spcAft>
             </a:pPr>
             <a:r>
@@ -18668,7 +19051,7 @@
                 </a:solidFill>
                 <a:latin typeface="Calibri"/>
               </a:rPr>
-              <a:t>  The preregistered study fails its own second criterion. The fairness probe we built fails its own audit. An accidental repeat gave us a measured reproduction noise floor that bounds our own small effects.</a:t>
+              <a:t>  The preregistered study fails its own second criterion. The fairness probe we built fails its own audit. And an accidental repeat of Act I gave us a measured reproduction noise floor — 0.015 mean, 0.029 worst — which we then turned on our own small effects.</a:t>
             </a:r>
           </a:p>
           <a:p>
@@ -18680,7 +19063,7 @@
                 <a:spcPts val="0"/>
               </a:spcBef>
               <a:spcAft>
-                <a:spcPts val="900"/>
+                <a:spcPts val="800"/>
               </a:spcAft>
             </a:pPr>
             <a:r>
@@ -18708,7 +19091,7 @@
                 </a:solidFill>
                 <a:latin typeface="Calibri"/>
               </a:rPr>
-              <a:t>  v1_hmda2022 — 994 dual-labeled rows, CC BY 4.0 — plus text-free per-row scores and one command that regenerates the covered tables and prints the coverage it did NOT achieve.</a:t>
+              <a:t>  v1_hmda2022 — 994 dual-labeled rows, CC BY 4.0 — plus text-free per-row scores and one command that regenerates the covered tables and prints the coverage it did NOT achieve: 31 of 35 generated artifacts byte-checked in any environment, 4 needing the pinned lock, 0 uncovered.</a:t>
             </a:r>
           </a:p>
         </p:txBody>
@@ -18936,7 +19319,7 @@
                 </a:solidFill>
                 <a:latin typeface="Calibri"/>
               </a:rPr>
-              <a:t>  SME adjudication, the empty G1/D0 quadrant, and the 39 unscored protected pairs.</a:t>
+              <a:t>  SME adjudication, the empty G1/D0 quadrant, and the 36 protected pairs outside public-test.</a:t>
             </a:r>
           </a:p>
           <a:p>
@@ -19644,7 +20027,7 @@
                 </a:solidFill>
                 <a:latin typeface="Calibri"/>
               </a:rPr>
-              <a:t>The same four bases rank differently on every arm — the top-ranked mortgage guard is not the top-ranked finance/health/law guard.</a:t>
+              <a:t>The same four bases rank differently on every arm — the top-ranked mortgage guard is not the top-ranked finance/health/law guard. Read AP·D against the split's 0.555 chance floor: the band is 0.12–0.30 above chance.</a:t>
             </a:r>
           </a:p>
         </p:txBody>
@@ -22660,7 +23043,7 @@
         </p:nvSpPr>
         <p:spPr>
           <a:xfrm>
-            <a:off x="8284464" y="1609344"/>
+            <a:off x="8284464" y="1554480"/>
             <a:ext cx="3248863" cy="1481328"/>
           </a:xfrm>
           <a:prstGeom prst="rect">
@@ -22747,7 +23130,7 @@
         </p:nvSpPr>
         <p:spPr>
           <a:xfrm>
-            <a:off x="8284464" y="3291840"/>
+            <a:off x="8284464" y="3108960"/>
             <a:ext cx="3248863" cy="2286000"/>
           </a:xfrm>
           <a:prstGeom prst="rect">
@@ -22769,11 +23152,11 @@
                 <a:spcPts val="0"/>
               </a:spcBef>
               <a:spcAft>
-                <a:spcPts val="800"/>
-              </a:spcAft>
-            </a:pPr>
-            <a:r>
-              <a:rPr sz="1100" b="1" i="0">
+                <a:spcPts val="700"/>
+              </a:spcAft>
+            </a:pPr>
+            <a:r>
+              <a:rPr sz="1050" b="1" i="0">
                 <a:solidFill>
                   <a:srgbClr val="E0564F"/>
                 </a:solidFill>
@@ -22782,7 +23165,7 @@
               <a:t>—  </a:t>
             </a:r>
             <a:r>
-              <a:rPr sz="1100" b="1" i="0">
+              <a:rPr sz="1050" b="1" i="0">
                 <a:solidFill>
                   <a:srgbClr val="EEF2F8"/>
                 </a:solidFill>
@@ -22791,13 +23174,13 @@
               <a:t>At an equal alarm budget, the gain reverses.</a:t>
             </a:r>
             <a:r>
-              <a:rPr sz="1100" b="0" i="0">
+              <a:rPr sz="1050" b="0" i="0">
                 <a:solidFill>
                   <a:srgbClr val="9DAFC7"/>
                 </a:solidFill>
                 <a:latin typeface="Calibri"/>
               </a:rPr>
-              <a:t>  The +6.4 pt rise is realized at 15.5% macro-FPR against the base's 8.1%. Match the budget and transfer recall goes 51.7% → 21.7%, HarmBench 78.0% → 20.3% — worse on all four.</a:t>
+              <a:t>  The +6.4 pt rise is realized at 15.5% macro-FPR against the base's 8.1%. Match the budget and transfer recall goes 51.7% → 21.7%, HarmBench 78.0% → 20.3% — worse on all four. An ROC point at a common budget, not a threshold you could place in production.</a:t>
             </a:r>
           </a:p>
           <a:p>
@@ -22809,11 +23192,11 @@
                 <a:spcPts val="0"/>
               </a:spcBef>
               <a:spcAft>
-                <a:spcPts val="800"/>
-              </a:spcAft>
-            </a:pPr>
-            <a:r>
-              <a:rPr sz="1100" b="1" i="0">
+                <a:spcPts val="700"/>
+              </a:spcAft>
+            </a:pPr>
+            <a:r>
+              <a:rPr sz="1050" b="1" i="0">
                 <a:solidFill>
                   <a:srgbClr val="E0564F"/>
                 </a:solidFill>
@@ -22822,7 +23205,7 @@
               <a:t>—  </a:t>
             </a:r>
             <a:r>
-              <a:rPr sz="1100" b="1" i="0">
+              <a:rPr sz="1050" b="1" i="0">
                 <a:solidFill>
                   <a:srgbClr val="EEF2F8"/>
                 </a:solidFill>
@@ -22831,7 +23214,7 @@
               <a:t>Off-distribution is not the explanation.</a:t>
             </a:r>
             <a:r>
-              <a:rPr sz="1100" b="0" i="0">
+              <a:rPr sz="1050" b="0" i="0">
                 <a:solidFill>
                   <a:srgbClr val="9DAFC7"/>
                 </a:solidFill>
@@ -22849,11 +23232,11 @@
                 <a:spcPts val="0"/>
               </a:spcBef>
               <a:spcAft>
-                <a:spcPts val="800"/>
-              </a:spcAft>
-            </a:pPr>
-            <a:r>
-              <a:rPr sz="1100" b="1" i="0">
+                <a:spcPts val="700"/>
+              </a:spcAft>
+            </a:pPr>
+            <a:r>
+              <a:rPr sz="1050" b="1" i="0">
                 <a:solidFill>
                   <a:srgbClr val="E0564F"/>
                 </a:solidFill>
@@ -22862,7 +23245,7 @@
               <a:t>—  </a:t>
             </a:r>
             <a:r>
-              <a:rPr sz="1100" b="1" i="0">
+              <a:rPr sz="1050" b="1" i="0">
                 <a:solidFill>
                   <a:srgbClr val="EEF2F8"/>
                 </a:solidFill>
@@ -22871,7 +23254,7 @@
               <a:t>The threshold did not transfer.</a:t>
             </a:r>
             <a:r>
-              <a:rPr sz="1100" b="0" i="0">
+              <a:rPr sz="1050" b="0" i="0">
                 <a:solidFill>
                   <a:srgbClr val="9DAFC7"/>
                 </a:solidFill>
@@ -22889,11 +23272,11 @@
                 <a:spcPts val="0"/>
               </a:spcBef>
               <a:spcAft>
-                <a:spcPts val="800"/>
-              </a:spcAft>
-            </a:pPr>
-            <a:r>
-              <a:rPr sz="1100" b="1" i="0">
+                <a:spcPts val="700"/>
+              </a:spcAft>
+            </a:pPr>
+            <a:r>
+              <a:rPr sz="1050" b="1" i="0">
                 <a:solidFill>
                   <a:srgbClr val="E0564F"/>
                 </a:solidFill>
@@ -22902,7 +23285,7 @@
               <a:t>—  </a:t>
             </a:r>
             <a:r>
-              <a:rPr sz="1100" b="1" i="0">
+              <a:rPr sz="1050" b="1" i="0">
                 <a:solidFill>
                   <a:srgbClr val="EEF2F8"/>
                 </a:solidFill>
@@ -22911,7 +23294,7 @@
               <a:t>Our headline metric understates both halves.</a:t>
             </a:r>
             <a:r>
-              <a:rPr sz="1100" b="0" i="0">
+              <a:rPr sz="1050" b="0" i="0">
                 <a:solidFill>
                   <a:srgbClr val="9DAFC7"/>
                 </a:solidFill>
